--- a/docs/DHW2_Wagner_Kryeziu_Johnson.pptx
+++ b/docs/DHW2_Wagner_Kryeziu_Johnson.pptx
@@ -4,9 +4,18 @@
   <p:sldMasterIdLst>
     <p:sldMasterId id="2147483648" r:id="rId1"/>
   </p:sldMasterIdLst>
+  <p:notesMasterIdLst>
+    <p:notesMasterId r:id="rId10"/>
+  </p:notesMasterIdLst>
   <p:sldIdLst>
     <p:sldId id="256" r:id="rId2"/>
     <p:sldId id="257" r:id="rId3"/>
+    <p:sldId id="258" r:id="rId4"/>
+    <p:sldId id="259" r:id="rId5"/>
+    <p:sldId id="260" r:id="rId6"/>
+    <p:sldId id="261" r:id="rId7"/>
+    <p:sldId id="262" r:id="rId8"/>
+    <p:sldId id="263" r:id="rId9"/>
   </p:sldIdLst>
   <p:sldSz cx="12192000" cy="6858000"/>
   <p:notesSz cx="6858000" cy="9144000"/>
@@ -111,6 +120,462 @@
     </p:ext>
   </p:extLst>
 </p:presentation>
+</file>
+
+<file path=ppt/notesMasters/notesMaster1.xml><?xml version="1.0" encoding="utf-8"?>
+<p:notesMaster xmlns:a="http://schemas.openxmlformats.org/drawingml/2006/main" xmlns:r="http://schemas.openxmlformats.org/officeDocument/2006/relationships" xmlns:p="http://schemas.openxmlformats.org/presentationml/2006/main">
+  <p:cSld>
+    <p:bg>
+      <p:bgRef idx="1001">
+        <a:schemeClr val="bg1"/>
+      </p:bgRef>
+    </p:bg>
+    <p:spTree>
+      <p:nvGrpSpPr>
+        <p:cNvPr id="1" name=""/>
+        <p:cNvGrpSpPr/>
+        <p:nvPr/>
+      </p:nvGrpSpPr>
+      <p:grpSpPr>
+        <a:xfrm>
+          <a:off x="0" y="0"/>
+          <a:ext cx="0" cy="0"/>
+          <a:chOff x="0" y="0"/>
+          <a:chExt cx="0" cy="0"/>
+        </a:xfrm>
+      </p:grpSpPr>
+      <p:sp>
+        <p:nvSpPr>
+          <p:cNvPr id="2" name="Kopfzeilenplatzhalter 1"/>
+          <p:cNvSpPr>
+            <a:spLocks noGrp="1"/>
+          </p:cNvSpPr>
+          <p:nvPr>
+            <p:ph type="hdr" sz="quarter"/>
+          </p:nvPr>
+        </p:nvSpPr>
+        <p:spPr>
+          <a:xfrm>
+            <a:off x="0" y="0"/>
+            <a:ext cx="2971800" cy="458788"/>
+          </a:xfrm>
+          <a:prstGeom prst="rect">
+            <a:avLst/>
+          </a:prstGeom>
+        </p:spPr>
+        <p:txBody>
+          <a:bodyPr vert="horz" lIns="91440" tIns="45720" rIns="91440" bIns="45720" rtlCol="0"/>
+          <a:lstStyle>
+            <a:lvl1pPr algn="l">
+              <a:defRPr sz="1200"/>
+            </a:lvl1pPr>
+          </a:lstStyle>
+          <a:p>
+            <a:endParaRPr lang="de-DE"/>
+          </a:p>
+        </p:txBody>
+      </p:sp>
+      <p:sp>
+        <p:nvSpPr>
+          <p:cNvPr id="3" name="Datumsplatzhalter 2"/>
+          <p:cNvSpPr>
+            <a:spLocks noGrp="1"/>
+          </p:cNvSpPr>
+          <p:nvPr>
+            <p:ph type="dt" idx="1"/>
+          </p:nvPr>
+        </p:nvSpPr>
+        <p:spPr>
+          <a:xfrm>
+            <a:off x="3884613" y="0"/>
+            <a:ext cx="2971800" cy="458788"/>
+          </a:xfrm>
+          <a:prstGeom prst="rect">
+            <a:avLst/>
+          </a:prstGeom>
+        </p:spPr>
+        <p:txBody>
+          <a:bodyPr vert="horz" lIns="91440" tIns="45720" rIns="91440" bIns="45720" rtlCol="0"/>
+          <a:lstStyle>
+            <a:lvl1pPr algn="r">
+              <a:defRPr sz="1200"/>
+            </a:lvl1pPr>
+          </a:lstStyle>
+          <a:p>
+            <a:fld id="{A540988C-BBB2-3A42-8898-F774E2AA35B7}" type="datetimeFigureOut">
+              <a:rPr lang="de-DE" smtClean="0"/>
+              <a:t>14.05.26</a:t>
+            </a:fld>
+            <a:endParaRPr lang="de-DE"/>
+          </a:p>
+        </p:txBody>
+      </p:sp>
+      <p:sp>
+        <p:nvSpPr>
+          <p:cNvPr id="4" name="Folienbildplatzhalter 3"/>
+          <p:cNvSpPr>
+            <a:spLocks noGrp="1" noRot="1" noChangeAspect="1"/>
+          </p:cNvSpPr>
+          <p:nvPr>
+            <p:ph type="sldImg" idx="2"/>
+          </p:nvPr>
+        </p:nvSpPr>
+        <p:spPr>
+          <a:xfrm>
+            <a:off x="685800" y="1143000"/>
+            <a:ext cx="5486400" cy="3086100"/>
+          </a:xfrm>
+          <a:prstGeom prst="rect">
+            <a:avLst/>
+          </a:prstGeom>
+          <a:noFill/>
+          <a:ln w="12700">
+            <a:solidFill>
+              <a:prstClr val="black"/>
+            </a:solidFill>
+          </a:ln>
+        </p:spPr>
+        <p:txBody>
+          <a:bodyPr vert="horz" lIns="91440" tIns="45720" rIns="91440" bIns="45720" rtlCol="0" anchor="ctr"/>
+          <a:lstStyle/>
+          <a:p>
+            <a:endParaRPr lang="de-DE"/>
+          </a:p>
+        </p:txBody>
+      </p:sp>
+      <p:sp>
+        <p:nvSpPr>
+          <p:cNvPr id="5" name="Notizenplatzhalter 4"/>
+          <p:cNvSpPr>
+            <a:spLocks noGrp="1"/>
+          </p:cNvSpPr>
+          <p:nvPr>
+            <p:ph type="body" sz="quarter" idx="3"/>
+          </p:nvPr>
+        </p:nvSpPr>
+        <p:spPr>
+          <a:xfrm>
+            <a:off x="685800" y="4400550"/>
+            <a:ext cx="5486400" cy="3600450"/>
+          </a:xfrm>
+          <a:prstGeom prst="rect">
+            <a:avLst/>
+          </a:prstGeom>
+        </p:spPr>
+        <p:txBody>
+          <a:bodyPr vert="horz" lIns="91440" tIns="45720" rIns="91440" bIns="45720" rtlCol="0"/>
+          <a:lstStyle/>
+          <a:p>
+            <a:pPr lvl="0"/>
+            <a:r>
+              <a:rPr lang="de-DE"/>
+              <a:t>Mastertextformat bearbeiten</a:t>
+            </a:r>
+          </a:p>
+          <a:p>
+            <a:pPr lvl="1"/>
+            <a:r>
+              <a:rPr lang="de-DE"/>
+              <a:t>Zweite Ebene</a:t>
+            </a:r>
+          </a:p>
+          <a:p>
+            <a:pPr lvl="2"/>
+            <a:r>
+              <a:rPr lang="de-DE"/>
+              <a:t>Dritte Ebene</a:t>
+            </a:r>
+          </a:p>
+          <a:p>
+            <a:pPr lvl="3"/>
+            <a:r>
+              <a:rPr lang="de-DE"/>
+              <a:t>Vierte Ebene</a:t>
+            </a:r>
+          </a:p>
+          <a:p>
+            <a:pPr lvl="4"/>
+            <a:r>
+              <a:rPr lang="de-DE"/>
+              <a:t>Fünfte Ebene</a:t>
+            </a:r>
+          </a:p>
+        </p:txBody>
+      </p:sp>
+      <p:sp>
+        <p:nvSpPr>
+          <p:cNvPr id="6" name="Fußzeilenplatzhalter 5"/>
+          <p:cNvSpPr>
+            <a:spLocks noGrp="1"/>
+          </p:cNvSpPr>
+          <p:nvPr>
+            <p:ph type="ftr" sz="quarter" idx="4"/>
+          </p:nvPr>
+        </p:nvSpPr>
+        <p:spPr>
+          <a:xfrm>
+            <a:off x="0" y="8685213"/>
+            <a:ext cx="2971800" cy="458787"/>
+          </a:xfrm>
+          <a:prstGeom prst="rect">
+            <a:avLst/>
+          </a:prstGeom>
+        </p:spPr>
+        <p:txBody>
+          <a:bodyPr vert="horz" lIns="91440" tIns="45720" rIns="91440" bIns="45720" rtlCol="0" anchor="b"/>
+          <a:lstStyle>
+            <a:lvl1pPr algn="l">
+              <a:defRPr sz="1200"/>
+            </a:lvl1pPr>
+          </a:lstStyle>
+          <a:p>
+            <a:endParaRPr lang="de-DE"/>
+          </a:p>
+        </p:txBody>
+      </p:sp>
+      <p:sp>
+        <p:nvSpPr>
+          <p:cNvPr id="7" name="Foliennummernplatzhalter 6"/>
+          <p:cNvSpPr>
+            <a:spLocks noGrp="1"/>
+          </p:cNvSpPr>
+          <p:nvPr>
+            <p:ph type="sldNum" sz="quarter" idx="5"/>
+          </p:nvPr>
+        </p:nvSpPr>
+        <p:spPr>
+          <a:xfrm>
+            <a:off x="3884613" y="8685213"/>
+            <a:ext cx="2971800" cy="458787"/>
+          </a:xfrm>
+          <a:prstGeom prst="rect">
+            <a:avLst/>
+          </a:prstGeom>
+        </p:spPr>
+        <p:txBody>
+          <a:bodyPr vert="horz" lIns="91440" tIns="45720" rIns="91440" bIns="45720" rtlCol="0" anchor="b"/>
+          <a:lstStyle>
+            <a:lvl1pPr algn="r">
+              <a:defRPr sz="1200"/>
+            </a:lvl1pPr>
+          </a:lstStyle>
+          <a:p>
+            <a:fld id="{D0AE7357-186D-1741-AC65-6D5045F5A14B}" type="slidenum">
+              <a:rPr lang="de-DE" smtClean="0"/>
+              <a:t>‹Nr.›</a:t>
+            </a:fld>
+            <a:endParaRPr lang="de-DE"/>
+          </a:p>
+        </p:txBody>
+      </p:sp>
+    </p:spTree>
+    <p:extLst>
+      <p:ext uri="{BB962C8B-B14F-4D97-AF65-F5344CB8AC3E}">
+        <p14:creationId xmlns:p14="http://schemas.microsoft.com/office/powerpoint/2010/main" val="1151876249"/>
+      </p:ext>
+    </p:extLst>
+  </p:cSld>
+  <p:clrMap bg1="lt1" tx1="dk1" bg2="lt2" tx2="dk2" accent1="accent1" accent2="accent2" accent3="accent3" accent4="accent4" accent5="accent5" accent6="accent6" hlink="hlink" folHlink="folHlink"/>
+  <p:notesStyle>
+    <a:lvl1pPr marL="0" algn="l" defTabSz="914400" rtl="0" eaLnBrk="1" latinLnBrk="0" hangingPunct="1">
+      <a:defRPr sz="1200" kern="1200">
+        <a:solidFill>
+          <a:schemeClr val="tx1"/>
+        </a:solidFill>
+        <a:latin typeface="+mn-lt"/>
+        <a:ea typeface="+mn-ea"/>
+        <a:cs typeface="+mn-cs"/>
+      </a:defRPr>
+    </a:lvl1pPr>
+    <a:lvl2pPr marL="457200" algn="l" defTabSz="914400" rtl="0" eaLnBrk="1" latinLnBrk="0" hangingPunct="1">
+      <a:defRPr sz="1200" kern="1200">
+        <a:solidFill>
+          <a:schemeClr val="tx1"/>
+        </a:solidFill>
+        <a:latin typeface="+mn-lt"/>
+        <a:ea typeface="+mn-ea"/>
+        <a:cs typeface="+mn-cs"/>
+      </a:defRPr>
+    </a:lvl2pPr>
+    <a:lvl3pPr marL="914400" algn="l" defTabSz="914400" rtl="0" eaLnBrk="1" latinLnBrk="0" hangingPunct="1">
+      <a:defRPr sz="1200" kern="1200">
+        <a:solidFill>
+          <a:schemeClr val="tx1"/>
+        </a:solidFill>
+        <a:latin typeface="+mn-lt"/>
+        <a:ea typeface="+mn-ea"/>
+        <a:cs typeface="+mn-cs"/>
+      </a:defRPr>
+    </a:lvl3pPr>
+    <a:lvl4pPr marL="1371600" algn="l" defTabSz="914400" rtl="0" eaLnBrk="1" latinLnBrk="0" hangingPunct="1">
+      <a:defRPr sz="1200" kern="1200">
+        <a:solidFill>
+          <a:schemeClr val="tx1"/>
+        </a:solidFill>
+        <a:latin typeface="+mn-lt"/>
+        <a:ea typeface="+mn-ea"/>
+        <a:cs typeface="+mn-cs"/>
+      </a:defRPr>
+    </a:lvl4pPr>
+    <a:lvl5pPr marL="1828800" algn="l" defTabSz="914400" rtl="0" eaLnBrk="1" latinLnBrk="0" hangingPunct="1">
+      <a:defRPr sz="1200" kern="1200">
+        <a:solidFill>
+          <a:schemeClr val="tx1"/>
+        </a:solidFill>
+        <a:latin typeface="+mn-lt"/>
+        <a:ea typeface="+mn-ea"/>
+        <a:cs typeface="+mn-cs"/>
+      </a:defRPr>
+    </a:lvl5pPr>
+    <a:lvl6pPr marL="2286000" algn="l" defTabSz="914400" rtl="0" eaLnBrk="1" latinLnBrk="0" hangingPunct="1">
+      <a:defRPr sz="1200" kern="1200">
+        <a:solidFill>
+          <a:schemeClr val="tx1"/>
+        </a:solidFill>
+        <a:latin typeface="+mn-lt"/>
+        <a:ea typeface="+mn-ea"/>
+        <a:cs typeface="+mn-cs"/>
+      </a:defRPr>
+    </a:lvl6pPr>
+    <a:lvl7pPr marL="2743200" algn="l" defTabSz="914400" rtl="0" eaLnBrk="1" latinLnBrk="0" hangingPunct="1">
+      <a:defRPr sz="1200" kern="1200">
+        <a:solidFill>
+          <a:schemeClr val="tx1"/>
+        </a:solidFill>
+        <a:latin typeface="+mn-lt"/>
+        <a:ea typeface="+mn-ea"/>
+        <a:cs typeface="+mn-cs"/>
+      </a:defRPr>
+    </a:lvl7pPr>
+    <a:lvl8pPr marL="3200400" algn="l" defTabSz="914400" rtl="0" eaLnBrk="1" latinLnBrk="0" hangingPunct="1">
+      <a:defRPr sz="1200" kern="1200">
+        <a:solidFill>
+          <a:schemeClr val="tx1"/>
+        </a:solidFill>
+        <a:latin typeface="+mn-lt"/>
+        <a:ea typeface="+mn-ea"/>
+        <a:cs typeface="+mn-cs"/>
+      </a:defRPr>
+    </a:lvl8pPr>
+    <a:lvl9pPr marL="3657600" algn="l" defTabSz="914400" rtl="0" eaLnBrk="1" latinLnBrk="0" hangingPunct="1">
+      <a:defRPr sz="1200" kern="1200">
+        <a:solidFill>
+          <a:schemeClr val="tx1"/>
+        </a:solidFill>
+        <a:latin typeface="+mn-lt"/>
+        <a:ea typeface="+mn-ea"/>
+        <a:cs typeface="+mn-cs"/>
+      </a:defRPr>
+    </a:lvl9pPr>
+  </p:notesStyle>
+</p:notesMaster>
+</file>
+
+<file path=ppt/notesSlides/notesSlide1.xml><?xml version="1.0" encoding="utf-8"?>
+<p:notes xmlns:a="http://schemas.openxmlformats.org/drawingml/2006/main" xmlns:r="http://schemas.openxmlformats.org/officeDocument/2006/relationships" xmlns:p="http://schemas.openxmlformats.org/presentationml/2006/main">
+  <p:cSld>
+    <p:spTree>
+      <p:nvGrpSpPr>
+        <p:cNvPr id="1" name=""/>
+        <p:cNvGrpSpPr/>
+        <p:nvPr/>
+      </p:nvGrpSpPr>
+      <p:grpSpPr>
+        <a:xfrm>
+          <a:off x="0" y="0"/>
+          <a:ext cx="0" cy="0"/>
+          <a:chOff x="0" y="0"/>
+          <a:chExt cx="0" cy="0"/>
+        </a:xfrm>
+      </p:grpSpPr>
+      <p:sp>
+        <p:nvSpPr>
+          <p:cNvPr id="2" name="Folienbildplatzhalter 1"/>
+          <p:cNvSpPr>
+            <a:spLocks noGrp="1" noRot="1" noChangeAspect="1"/>
+          </p:cNvSpPr>
+          <p:nvPr>
+            <p:ph type="sldImg"/>
+          </p:nvPr>
+        </p:nvSpPr>
+        <p:spPr/>
+      </p:sp>
+      <p:sp>
+        <p:nvSpPr>
+          <p:cNvPr id="3" name="Notizenplatzhalter 2"/>
+          <p:cNvSpPr>
+            <a:spLocks noGrp="1"/>
+          </p:cNvSpPr>
+          <p:nvPr>
+            <p:ph type="body" idx="1"/>
+          </p:nvPr>
+        </p:nvSpPr>
+        <p:spPr/>
+        <p:txBody>
+          <a:bodyPr/>
+          <a:lstStyle/>
+          <a:p>
+            <a:r>
+              <a:rPr lang="de-DE" dirty="0" err="1"/>
+              <a:t>with</a:t>
+            </a:r>
+            <a:r>
+              <a:rPr lang="de-DE" dirty="0"/>
+              <a:t> Input, </a:t>
+            </a:r>
+            <a:r>
+              <a:rPr lang="de-DE" dirty="0" err="1"/>
+              <a:t>Generated</a:t>
+            </a:r>
+            <a:r>
+              <a:rPr lang="de-DE" dirty="0"/>
+              <a:t> SQL, and </a:t>
+            </a:r>
+            <a:r>
+              <a:rPr lang="de-DE" dirty="0" err="1"/>
+              <a:t>Result</a:t>
+            </a:r>
+            <a:r>
+              <a:rPr lang="de-DE" dirty="0"/>
+              <a:t> </a:t>
+            </a:r>
+          </a:p>
+        </p:txBody>
+      </p:sp>
+      <p:sp>
+        <p:nvSpPr>
+          <p:cNvPr id="4" name="Foliennummernplatzhalter 3"/>
+          <p:cNvSpPr>
+            <a:spLocks noGrp="1"/>
+          </p:cNvSpPr>
+          <p:nvPr>
+            <p:ph type="sldNum" sz="quarter" idx="5"/>
+          </p:nvPr>
+        </p:nvSpPr>
+        <p:spPr/>
+        <p:txBody>
+          <a:bodyPr/>
+          <a:lstStyle/>
+          <a:p>
+            <a:fld id="{D0AE7357-186D-1741-AC65-6D5045F5A14B}" type="slidenum">
+              <a:rPr lang="de-DE" smtClean="0"/>
+              <a:t>4</a:t>
+            </a:fld>
+            <a:endParaRPr lang="de-DE"/>
+          </a:p>
+        </p:txBody>
+      </p:sp>
+    </p:spTree>
+    <p:extLst>
+      <p:ext uri="{BB962C8B-B14F-4D97-AF65-F5344CB8AC3E}">
+        <p14:creationId xmlns:p14="http://schemas.microsoft.com/office/powerpoint/2010/main" val="463867710"/>
+      </p:ext>
+    </p:extLst>
+  </p:cSld>
+  <p:clrMapOvr>
+    <a:masterClrMapping/>
+  </p:clrMapOvr>
+</p:notes>
 </file>
 
 <file path=ppt/slideLayouts/slideLayout1.xml><?xml version="1.0" encoding="utf-8"?>
@@ -3431,32 +3896,603 @@
           <a:bodyPr/>
           <a:lstStyle/>
           <a:p>
-            <a:endParaRPr lang="de-DE"/>
-          </a:p>
-        </p:txBody>
-      </p:sp>
-      <p:sp>
-        <p:nvSpPr>
-          <p:cNvPr id="3" name="Inhaltsplatzhalter 2">
-            <a:extLst>
-              <a:ext uri="{FF2B5EF4-FFF2-40B4-BE49-F238E27FC236}">
-                <a16:creationId xmlns:a16="http://schemas.microsoft.com/office/drawing/2014/main" id="{1753C8F7-9C4B-2B7E-9A40-060BA2F62133}"/>
-              </a:ext>
-            </a:extLst>
-          </p:cNvPr>
-          <p:cNvSpPr>
-            <a:spLocks noGrp="1"/>
-          </p:cNvSpPr>
+            <a:r>
+              <a:rPr lang="de-DE" dirty="0"/>
+              <a:t>Dataset Choice &amp; Rationale </a:t>
+            </a:r>
+          </a:p>
+        </p:txBody>
+      </p:sp>
+      <p:graphicFrame>
+        <p:nvGraphicFramePr>
+          <p:cNvPr id="4" name="Inhaltsplatzhalter 3">
+            <a:extLst>
+              <a:ext uri="{FF2B5EF4-FFF2-40B4-BE49-F238E27FC236}">
+                <a16:creationId xmlns:a16="http://schemas.microsoft.com/office/drawing/2014/main" id="{C1F74A9D-0266-366D-717F-903D76FDBB26}"/>
+              </a:ext>
+            </a:extLst>
+          </p:cNvPr>
+          <p:cNvGraphicFramePr>
+            <a:graphicFrameLocks noGrp="1"/>
+          </p:cNvGraphicFramePr>
           <p:nvPr>
             <p:ph idx="1"/>
-          </p:nvPr>
-        </p:nvSpPr>
-        <p:spPr/>
-        <p:txBody>
-          <a:bodyPr/>
-          <a:lstStyle/>
-          <a:p>
-            <a:endParaRPr lang="de-DE"/>
+            <p:extLst>
+              <p:ext uri="{D42A27DB-BD31-4B8C-83A1-F6EECF244321}">
+                <p14:modId xmlns:p14="http://schemas.microsoft.com/office/powerpoint/2010/main" val="3456328483"/>
+              </p:ext>
+            </p:extLst>
+          </p:nvPr>
+        </p:nvGraphicFramePr>
+        <p:xfrm>
+          <a:off x="838200" y="1690688"/>
+          <a:ext cx="10515600" cy="2194560"/>
+        </p:xfrm>
+        <a:graphic>
+          <a:graphicData uri="http://schemas.openxmlformats.org/drawingml/2006/table">
+            <a:tbl>
+              <a:tblPr>
+                <a:tableStyleId>{B301B821-A1FF-4177-AEE7-76D212191A09}</a:tableStyleId>
+              </a:tblPr>
+              <a:tblGrid>
+                <a:gridCol w="3505200">
+                  <a:extLst>
+                    <a:ext uri="{9D8B030D-6E8A-4147-A177-3AD203B41FA5}">
+                      <a16:colId xmlns:a16="http://schemas.microsoft.com/office/drawing/2014/main" val="558615560"/>
+                    </a:ext>
+                  </a:extLst>
+                </a:gridCol>
+                <a:gridCol w="3505200">
+                  <a:extLst>
+                    <a:ext uri="{9D8B030D-6E8A-4147-A177-3AD203B41FA5}">
+                      <a16:colId xmlns:a16="http://schemas.microsoft.com/office/drawing/2014/main" val="3560744013"/>
+                    </a:ext>
+                  </a:extLst>
+                </a:gridCol>
+                <a:gridCol w="3505200">
+                  <a:extLst>
+                    <a:ext uri="{9D8B030D-6E8A-4147-A177-3AD203B41FA5}">
+                      <a16:colId xmlns:a16="http://schemas.microsoft.com/office/drawing/2014/main" val="548822258"/>
+                    </a:ext>
+                  </a:extLst>
+                </a:gridCol>
+              </a:tblGrid>
+              <a:tr h="0">
+                <a:tc>
+                  <a:txBody>
+                    <a:bodyPr/>
+                    <a:lstStyle/>
+                    <a:p>
+                      <a:pPr>
+                        <a:buNone/>
+                      </a:pPr>
+                      <a:r>
+                        <a:rPr lang="de-CH"/>
+                        <a:t>Difficulty</a:t>
+                      </a:r>
+                    </a:p>
+                  </a:txBody>
+                  <a:tcPr anchor="ctr"/>
+                </a:tc>
+                <a:tc>
+                  <a:txBody>
+                    <a:bodyPr/>
+                    <a:lstStyle/>
+                    <a:p>
+                      <a:pPr>
+                        <a:buNone/>
+                      </a:pPr>
+                      <a:r>
+                        <a:rPr lang="de-CH"/>
+                        <a:t>Count</a:t>
+                      </a:r>
+                    </a:p>
+                  </a:txBody>
+                  <a:tcPr anchor="ctr"/>
+                </a:tc>
+                <a:tc>
+                  <a:txBody>
+                    <a:bodyPr/>
+                    <a:lstStyle/>
+                    <a:p>
+                      <a:pPr>
+                        <a:buNone/>
+                      </a:pPr>
+                      <a:r>
+                        <a:rPr lang="de-CH"/>
+                        <a:t>Question IDs</a:t>
+                      </a:r>
+                    </a:p>
+                  </a:txBody>
+                  <a:tcPr anchor="ctr"/>
+                </a:tc>
+                <a:extLst>
+                  <a:ext uri="{0D108BD9-81ED-4DB2-BD59-A6C34878D82A}">
+                    <a16:rowId xmlns:a16="http://schemas.microsoft.com/office/drawing/2014/main" val="902151298"/>
+                  </a:ext>
+                </a:extLst>
+              </a:tr>
+              <a:tr h="0">
+                <a:tc>
+                  <a:txBody>
+                    <a:bodyPr/>
+                    <a:lstStyle/>
+                    <a:p>
+                      <a:pPr>
+                        <a:buNone/>
+                      </a:pPr>
+                      <a:r>
+                        <a:rPr lang="de-CH"/>
+                        <a:t>easy</a:t>
+                      </a:r>
+                    </a:p>
+                  </a:txBody>
+                  <a:tcPr anchor="ctr"/>
+                </a:tc>
+                <a:tc>
+                  <a:txBody>
+                    <a:bodyPr/>
+                    <a:lstStyle/>
+                    <a:p>
+                      <a:pPr>
+                        <a:buNone/>
+                      </a:pPr>
+                      <a:r>
+                        <a:rPr lang="de-CH"/>
+                        <a:t>3</a:t>
+                      </a:r>
+                    </a:p>
+                  </a:txBody>
+                  <a:tcPr anchor="ctr"/>
+                </a:tc>
+                <a:tc>
+                  <a:txBody>
+                    <a:bodyPr/>
+                    <a:lstStyle/>
+                    <a:p>
+                      <a:pPr>
+                        <a:buNone/>
+                      </a:pPr>
+                      <a:r>
+                        <a:rPr lang="de-CH"/>
+                        <a:t>779, 268, 297</a:t>
+                      </a:r>
+                    </a:p>
+                  </a:txBody>
+                  <a:tcPr anchor="ctr"/>
+                </a:tc>
+                <a:extLst>
+                  <a:ext uri="{0D108BD9-81ED-4DB2-BD59-A6C34878D82A}">
+                    <a16:rowId xmlns:a16="http://schemas.microsoft.com/office/drawing/2014/main" val="1551696128"/>
+                  </a:ext>
+                </a:extLst>
+              </a:tr>
+              <a:tr h="0">
+                <a:tc>
+                  <a:txBody>
+                    <a:bodyPr/>
+                    <a:lstStyle/>
+                    <a:p>
+                      <a:pPr>
+                        <a:buNone/>
+                      </a:pPr>
+                      <a:r>
+                        <a:rPr lang="de-CH"/>
+                        <a:t>medium</a:t>
+                      </a:r>
+                    </a:p>
+                  </a:txBody>
+                  <a:tcPr anchor="ctr"/>
+                </a:tc>
+                <a:tc>
+                  <a:txBody>
+                    <a:bodyPr/>
+                    <a:lstStyle/>
+                    <a:p>
+                      <a:pPr>
+                        <a:buNone/>
+                      </a:pPr>
+                      <a:r>
+                        <a:rPr lang="de-CH"/>
+                        <a:t>6</a:t>
+                      </a:r>
+                    </a:p>
+                  </a:txBody>
+                  <a:tcPr anchor="ctr"/>
+                </a:tc>
+                <a:tc>
+                  <a:txBody>
+                    <a:bodyPr/>
+                    <a:lstStyle/>
+                    <a:p>
+                      <a:pPr>
+                        <a:buNone/>
+                      </a:pPr>
+                      <a:r>
+                        <a:rPr lang="de-CH"/>
+                        <a:t>89, 506, 708, 569, 861, 605</a:t>
+                      </a:r>
+                    </a:p>
+                  </a:txBody>
+                  <a:tcPr anchor="ctr"/>
+                </a:tc>
+                <a:extLst>
+                  <a:ext uri="{0D108BD9-81ED-4DB2-BD59-A6C34878D82A}">
+                    <a16:rowId xmlns:a16="http://schemas.microsoft.com/office/drawing/2014/main" val="4165042848"/>
+                  </a:ext>
+                </a:extLst>
+              </a:tr>
+              <a:tr h="0">
+                <a:tc>
+                  <a:txBody>
+                    <a:bodyPr/>
+                    <a:lstStyle/>
+                    <a:p>
+                      <a:pPr>
+                        <a:buNone/>
+                      </a:pPr>
+                      <a:r>
+                        <a:rPr lang="de-CH"/>
+                        <a:t>hard</a:t>
+                      </a:r>
+                    </a:p>
+                  </a:txBody>
+                  <a:tcPr anchor="ctr"/>
+                </a:tc>
+                <a:tc>
+                  <a:txBody>
+                    <a:bodyPr/>
+                    <a:lstStyle/>
+                    <a:p>
+                      <a:pPr>
+                        <a:buNone/>
+                      </a:pPr>
+                      <a:r>
+                        <a:rPr lang="de-CH"/>
+                        <a:t>5</a:t>
+                      </a:r>
+                    </a:p>
+                  </a:txBody>
+                  <a:tcPr anchor="ctr"/>
+                </a:tc>
+                <a:tc>
+                  <a:txBody>
+                    <a:bodyPr/>
+                    <a:lstStyle/>
+                    <a:p>
+                      <a:pPr>
+                        <a:buNone/>
+                      </a:pPr>
+                      <a:r>
+                        <a:rPr lang="de-CH"/>
+                        <a:t>94, 155, 259, 426, 534</a:t>
+                      </a:r>
+                    </a:p>
+                  </a:txBody>
+                  <a:tcPr anchor="ctr"/>
+                </a:tc>
+                <a:extLst>
+                  <a:ext uri="{0D108BD9-81ED-4DB2-BD59-A6C34878D82A}">
+                    <a16:rowId xmlns:a16="http://schemas.microsoft.com/office/drawing/2014/main" val="634393235"/>
+                  </a:ext>
+                </a:extLst>
+              </a:tr>
+              <a:tr h="0">
+                <a:tc>
+                  <a:txBody>
+                    <a:bodyPr/>
+                    <a:lstStyle/>
+                    <a:p>
+                      <a:pPr>
+                        <a:buNone/>
+                      </a:pPr>
+                      <a:r>
+                        <a:rPr lang="de-CH"/>
+                        <a:t>extra</a:t>
+                      </a:r>
+                    </a:p>
+                  </a:txBody>
+                  <a:tcPr anchor="ctr"/>
+                </a:tc>
+                <a:tc>
+                  <a:txBody>
+                    <a:bodyPr/>
+                    <a:lstStyle/>
+                    <a:p>
+                      <a:pPr>
+                        <a:buNone/>
+                      </a:pPr>
+                      <a:r>
+                        <a:rPr lang="de-CH"/>
+                        <a:t>4</a:t>
+                      </a:r>
+                    </a:p>
+                  </a:txBody>
+                  <a:tcPr anchor="ctr"/>
+                </a:tc>
+                <a:tc>
+                  <a:txBody>
+                    <a:bodyPr/>
+                    <a:lstStyle/>
+                    <a:p>
+                      <a:pPr>
+                        <a:buNone/>
+                      </a:pPr>
+                      <a:r>
+                        <a:rPr lang="de-CH" dirty="0"/>
+                        <a:t>120, 284, 551, 591</a:t>
+                      </a:r>
+                    </a:p>
+                  </a:txBody>
+                  <a:tcPr anchor="ctr"/>
+                </a:tc>
+                <a:extLst>
+                  <a:ext uri="{0D108BD9-81ED-4DB2-BD59-A6C34878D82A}">
+                    <a16:rowId xmlns:a16="http://schemas.microsoft.com/office/drawing/2014/main" val="2942172329"/>
+                  </a:ext>
+                </a:extLst>
+              </a:tr>
+              <a:tr h="0">
+                <a:tc>
+                  <a:txBody>
+                    <a:bodyPr/>
+                    <a:lstStyle/>
+                    <a:p>
+                      <a:pPr>
+                        <a:buNone/>
+                      </a:pPr>
+                      <a:r>
+                        <a:rPr lang="de-CH" b="1"/>
+                        <a:t>Total</a:t>
+                      </a:r>
+                      <a:endParaRPr lang="de-CH"/>
+                    </a:p>
+                  </a:txBody>
+                  <a:tcPr anchor="ctr"/>
+                </a:tc>
+                <a:tc>
+                  <a:txBody>
+                    <a:bodyPr/>
+                    <a:lstStyle/>
+                    <a:p>
+                      <a:pPr>
+                        <a:buNone/>
+                      </a:pPr>
+                      <a:r>
+                        <a:rPr lang="de-CH" b="1" dirty="0"/>
+                        <a:t>18</a:t>
+                      </a:r>
+                      <a:endParaRPr lang="de-CH" dirty="0"/>
+                    </a:p>
+                  </a:txBody>
+                  <a:tcPr anchor="ctr"/>
+                </a:tc>
+                <a:tc>
+                  <a:txBody>
+                    <a:bodyPr/>
+                    <a:lstStyle/>
+                    <a:p>
+                      <a:pPr>
+                        <a:buNone/>
+                      </a:pPr>
+                      <a:r>
+                        <a:rPr lang="de-CH" dirty="0"/>
+                        <a:t>9 easy/</a:t>
+                      </a:r>
+                      <a:r>
+                        <a:rPr lang="de-CH" dirty="0" err="1"/>
+                        <a:t>med</a:t>
+                      </a:r>
+                      <a:r>
+                        <a:rPr lang="de-CH" dirty="0"/>
+                        <a:t> + 9 </a:t>
+                      </a:r>
+                      <a:r>
+                        <a:rPr lang="de-CH" dirty="0" err="1"/>
+                        <a:t>hard</a:t>
+                      </a:r>
+                      <a:r>
+                        <a:rPr lang="de-CH" dirty="0"/>
+                        <a:t>/extra = 50/50</a:t>
+                      </a:r>
+                    </a:p>
+                  </a:txBody>
+                  <a:tcPr anchor="ctr"/>
+                </a:tc>
+                <a:extLst>
+                  <a:ext uri="{0D108BD9-81ED-4DB2-BD59-A6C34878D82A}">
+                    <a16:rowId xmlns:a16="http://schemas.microsoft.com/office/drawing/2014/main" val="129655336"/>
+                  </a:ext>
+                </a:extLst>
+              </a:tr>
+            </a:tbl>
+          </a:graphicData>
+        </a:graphic>
+      </p:graphicFrame>
+      <p:sp>
+        <p:nvSpPr>
+          <p:cNvPr id="5" name="Textfeld 4">
+            <a:extLst>
+              <a:ext uri="{FF2B5EF4-FFF2-40B4-BE49-F238E27FC236}">
+                <a16:creationId xmlns:a16="http://schemas.microsoft.com/office/drawing/2014/main" id="{EA866D39-B20D-A32F-B5CC-151FEADA5123}"/>
+              </a:ext>
+            </a:extLst>
+          </p:cNvPr>
+          <p:cNvSpPr txBox="1"/>
+          <p:nvPr/>
+        </p:nvSpPr>
+        <p:spPr>
+          <a:xfrm>
+            <a:off x="820396" y="4366901"/>
+            <a:ext cx="5212645" cy="1477328"/>
+          </a:xfrm>
+          <a:prstGeom prst="rect">
+            <a:avLst/>
+          </a:prstGeom>
+          <a:noFill/>
+        </p:spPr>
+        <p:txBody>
+          <a:bodyPr wrap="none" rtlCol="0">
+            <a:spAutoFit/>
+          </a:bodyPr>
+          <a:lstStyle/>
+          <a:p>
+            <a:r>
+              <a:rPr lang="de-CH" b="1" dirty="0"/>
+              <a:t>Why </a:t>
+            </a:r>
+            <a:r>
+              <a:rPr lang="de-CH" b="1" dirty="0" err="1"/>
+              <a:t>FootballDB</a:t>
+            </a:r>
+            <a:r>
+              <a:rPr lang="de-CH" b="1" dirty="0"/>
+              <a:t>?</a:t>
+            </a:r>
+          </a:p>
+          <a:p>
+            <a:pPr marL="285750" indent="-285750">
+              <a:buFont typeface="Arial" panose="020B0604020202020204" pitchFamily="34" charset="0"/>
+              <a:buChar char="•"/>
+            </a:pPr>
+            <a:r>
+              <a:rPr lang="de-CH" dirty="0" err="1"/>
+              <a:t>Universally</a:t>
+            </a:r>
+            <a:r>
+              <a:rPr lang="de-CH" dirty="0"/>
+              <a:t> </a:t>
+            </a:r>
+            <a:r>
+              <a:rPr lang="de-CH" dirty="0" err="1"/>
+              <a:t>familiar</a:t>
+            </a:r>
+            <a:r>
+              <a:rPr lang="de-CH" dirty="0"/>
+              <a:t> </a:t>
+            </a:r>
+            <a:r>
+              <a:rPr lang="de-CH" dirty="0" err="1"/>
+              <a:t>domain</a:t>
+            </a:r>
+            <a:endParaRPr lang="de-CH" dirty="0"/>
+          </a:p>
+          <a:p>
+            <a:pPr marL="285750" indent="-285750">
+              <a:buFont typeface="Arial" panose="020B0604020202020204" pitchFamily="34" charset="0"/>
+              <a:buChar char="•"/>
+            </a:pPr>
+            <a:r>
+              <a:rPr lang="de-CH" dirty="0"/>
+              <a:t>Query </a:t>
+            </a:r>
+            <a:r>
+              <a:rPr lang="de-CH" dirty="0" err="1"/>
+              <a:t>results</a:t>
+            </a:r>
+            <a:r>
+              <a:rPr lang="de-CH" dirty="0"/>
+              <a:t> </a:t>
+            </a:r>
+            <a:r>
+              <a:rPr lang="de-CH" dirty="0" err="1"/>
+              <a:t>can</a:t>
+            </a:r>
+            <a:r>
+              <a:rPr lang="de-CH" dirty="0"/>
+              <a:t> </a:t>
+            </a:r>
+            <a:r>
+              <a:rPr lang="de-CH" dirty="0" err="1"/>
+              <a:t>be</a:t>
+            </a:r>
+            <a:r>
+              <a:rPr lang="de-CH" dirty="0"/>
+              <a:t> </a:t>
+            </a:r>
+            <a:r>
+              <a:rPr lang="de-CH" dirty="0" err="1"/>
+              <a:t>validated</a:t>
+            </a:r>
+            <a:r>
+              <a:rPr lang="de-CH" dirty="0"/>
+              <a:t> </a:t>
+            </a:r>
+            <a:r>
+              <a:rPr lang="de-CH" dirty="0" err="1"/>
+              <a:t>intuitively</a:t>
+            </a:r>
+            <a:endParaRPr lang="de-CH" dirty="0"/>
+          </a:p>
+          <a:p>
+            <a:pPr marL="285750" indent="-285750">
+              <a:buFont typeface="Arial" panose="020B0604020202020204" pitchFamily="34" charset="0"/>
+              <a:buChar char="•"/>
+            </a:pPr>
+            <a:r>
+              <a:rPr lang="de-CH" dirty="0" err="1"/>
+              <a:t>No</a:t>
+            </a:r>
+            <a:r>
+              <a:rPr lang="de-CH" dirty="0"/>
+              <a:t> </a:t>
+            </a:r>
+            <a:r>
+              <a:rPr lang="de-CH" dirty="0" err="1"/>
+              <a:t>need</a:t>
+            </a:r>
+            <a:r>
+              <a:rPr lang="de-CH" dirty="0"/>
+              <a:t> </a:t>
+            </a:r>
+            <a:r>
+              <a:rPr lang="de-CH" dirty="0" err="1"/>
+              <a:t>to</a:t>
+            </a:r>
+            <a:r>
+              <a:rPr lang="de-CH" dirty="0"/>
+              <a:t> </a:t>
+            </a:r>
+            <a:r>
+              <a:rPr lang="de-CH" dirty="0" err="1"/>
+              <a:t>study</a:t>
+            </a:r>
+            <a:r>
+              <a:rPr lang="de-CH" dirty="0"/>
+              <a:t> </a:t>
+            </a:r>
+            <a:r>
+              <a:rPr lang="de-CH" dirty="0" err="1"/>
+              <a:t>the</a:t>
+            </a:r>
+            <a:r>
+              <a:rPr lang="de-CH" dirty="0"/>
+              <a:t> </a:t>
+            </a:r>
+            <a:r>
+              <a:rPr lang="de-CH" dirty="0" err="1"/>
+              <a:t>database</a:t>
+            </a:r>
+            <a:r>
+              <a:rPr lang="de-CH" dirty="0"/>
+              <a:t> </a:t>
+            </a:r>
+            <a:r>
+              <a:rPr lang="de-CH" dirty="0" err="1"/>
+              <a:t>schema</a:t>
+            </a:r>
+            <a:r>
+              <a:rPr lang="de-CH" dirty="0"/>
+              <a:t> in </a:t>
+            </a:r>
+            <a:r>
+              <a:rPr lang="de-CH" dirty="0" err="1"/>
+              <a:t>depth</a:t>
+            </a:r>
+            <a:endParaRPr lang="de-CH" dirty="0"/>
+          </a:p>
+          <a:p>
+            <a:endParaRPr lang="de-DE" dirty="0"/>
           </a:p>
         </p:txBody>
       </p:sp>
@@ -3464,6 +4500,777 @@
     <p:extLst>
       <p:ext uri="{BB962C8B-B14F-4D97-AF65-F5344CB8AC3E}">
         <p14:creationId xmlns:p14="http://schemas.microsoft.com/office/powerpoint/2010/main" val="392760509"/>
+      </p:ext>
+    </p:extLst>
+  </p:cSld>
+  <p:clrMapOvr>
+    <a:masterClrMapping/>
+  </p:clrMapOvr>
+</p:sld>
+</file>
+
+<file path=ppt/slides/slide3.xml><?xml version="1.0" encoding="utf-8"?>
+<p:sld xmlns:a="http://schemas.openxmlformats.org/drawingml/2006/main" xmlns:r="http://schemas.openxmlformats.org/officeDocument/2006/relationships" xmlns:p="http://schemas.openxmlformats.org/presentationml/2006/main">
+  <p:cSld>
+    <p:spTree>
+      <p:nvGrpSpPr>
+        <p:cNvPr id="1" name=""/>
+        <p:cNvGrpSpPr/>
+        <p:nvPr/>
+      </p:nvGrpSpPr>
+      <p:grpSpPr>
+        <a:xfrm>
+          <a:off x="0" y="0"/>
+          <a:ext cx="0" cy="0"/>
+          <a:chOff x="0" y="0"/>
+          <a:chExt cx="0" cy="0"/>
+        </a:xfrm>
+      </p:grpSpPr>
+      <p:sp>
+        <p:nvSpPr>
+          <p:cNvPr id="2" name="Titel 1">
+            <a:extLst>
+              <a:ext uri="{FF2B5EF4-FFF2-40B4-BE49-F238E27FC236}">
+                <a16:creationId xmlns:a16="http://schemas.microsoft.com/office/drawing/2014/main" id="{3D2D1651-74E0-9B0C-D371-B369361480E2}"/>
+              </a:ext>
+            </a:extLst>
+          </p:cNvPr>
+          <p:cNvSpPr>
+            <a:spLocks noGrp="1"/>
+          </p:cNvSpPr>
+          <p:nvPr>
+            <p:ph type="title"/>
+          </p:nvPr>
+        </p:nvSpPr>
+        <p:spPr/>
+        <p:txBody>
+          <a:bodyPr/>
+          <a:lstStyle/>
+          <a:p>
+            <a:r>
+              <a:rPr lang="de-DE" dirty="0"/>
+              <a:t> System Architecture / Setup </a:t>
+            </a:r>
+          </a:p>
+        </p:txBody>
+      </p:sp>
+      <p:sp>
+        <p:nvSpPr>
+          <p:cNvPr id="3" name="Inhaltsplatzhalter 2">
+            <a:extLst>
+              <a:ext uri="{FF2B5EF4-FFF2-40B4-BE49-F238E27FC236}">
+                <a16:creationId xmlns:a16="http://schemas.microsoft.com/office/drawing/2014/main" id="{538F12A3-D4B0-192E-EFDC-D76052B96CA2}"/>
+              </a:ext>
+            </a:extLst>
+          </p:cNvPr>
+          <p:cNvSpPr>
+            <a:spLocks noGrp="1"/>
+          </p:cNvSpPr>
+          <p:nvPr>
+            <p:ph idx="1"/>
+          </p:nvPr>
+        </p:nvSpPr>
+        <p:spPr>
+          <a:xfrm>
+            <a:off x="838200" y="1825625"/>
+            <a:ext cx="5943600" cy="4351338"/>
+          </a:xfrm>
+        </p:spPr>
+        <p:txBody>
+          <a:bodyPr>
+            <a:normAutofit fontScale="77500" lnSpcReduction="20000"/>
+          </a:bodyPr>
+          <a:lstStyle/>
+          <a:p>
+            <a:pPr marL="0" indent="0">
+              <a:buNone/>
+            </a:pPr>
+            <a:r>
+              <a:rPr lang="de-CH" sz="2100" b="1" dirty="0"/>
+              <a:t>LLM:</a:t>
+            </a:r>
+            <a:endParaRPr lang="de-CH" sz="2100" dirty="0"/>
+          </a:p>
+          <a:p>
+            <a:r>
+              <a:rPr lang="de-CH" sz="2100" dirty="0"/>
+              <a:t>Provider: </a:t>
+            </a:r>
+            <a:r>
+              <a:rPr lang="de-CH" sz="2100" dirty="0" err="1"/>
+              <a:t>Ollama</a:t>
+            </a:r>
+            <a:r>
+              <a:rPr lang="de-CH" sz="2100" dirty="0"/>
+              <a:t> (</a:t>
+            </a:r>
+            <a:r>
+              <a:rPr lang="de-CH" sz="2100" dirty="0" err="1"/>
+              <a:t>local</a:t>
+            </a:r>
+            <a:r>
+              <a:rPr lang="de-CH" sz="2100" dirty="0"/>
+              <a:t>) mit llama3.2:1b oder OpenAI gpt-4o-mini</a:t>
+            </a:r>
+          </a:p>
+          <a:p>
+            <a:r>
+              <a:rPr lang="de-CH" sz="2100" dirty="0"/>
+              <a:t>Konfigurierbar via .</a:t>
+            </a:r>
+            <a:r>
+              <a:rPr lang="de-CH" sz="2100" dirty="0" err="1"/>
+              <a:t>env</a:t>
+            </a:r>
+            <a:r>
+              <a:rPr lang="de-CH" sz="2100" dirty="0"/>
+              <a:t> (LLM_PROVIDER, OLLAMA_MODEL, OPENAI_MODEL)</a:t>
+            </a:r>
+          </a:p>
+          <a:p>
+            <a:endParaRPr lang="de-CH" sz="2100" dirty="0"/>
+          </a:p>
+          <a:p>
+            <a:pPr marL="0" indent="0">
+              <a:buNone/>
+            </a:pPr>
+            <a:r>
+              <a:rPr lang="de-CH" sz="2100" b="1" dirty="0"/>
+              <a:t>Database</a:t>
+            </a:r>
+            <a:endParaRPr lang="de-CH" sz="2100" dirty="0"/>
+          </a:p>
+          <a:p>
+            <a:r>
+              <a:rPr lang="de-CH" sz="2100" dirty="0"/>
+              <a:t>PostgreSQL, Schema exp_v3, gehostet auf ZHAW-Server</a:t>
+            </a:r>
+          </a:p>
+          <a:p>
+            <a:r>
+              <a:rPr lang="de-CH" sz="2100" dirty="0"/>
+              <a:t>Verbindung via </a:t>
+            </a:r>
+            <a:r>
+              <a:rPr lang="de-CH" sz="2100" dirty="0" err="1"/>
+              <a:t>LangChain</a:t>
+            </a:r>
+            <a:r>
+              <a:rPr lang="de-CH" sz="2100" dirty="0"/>
+              <a:t> </a:t>
+            </a:r>
+            <a:r>
+              <a:rPr lang="de-CH" sz="2100" dirty="0" err="1"/>
+              <a:t>SQLDatabase</a:t>
+            </a:r>
+            <a:endParaRPr lang="de-CH" sz="2100" dirty="0"/>
+          </a:p>
+          <a:p>
+            <a:pPr marL="0" indent="0">
+              <a:buNone/>
+            </a:pPr>
+            <a:endParaRPr lang="de-CH" sz="2100" b="1" dirty="0"/>
+          </a:p>
+          <a:p>
+            <a:pPr marL="0" indent="0">
+              <a:buNone/>
+            </a:pPr>
+            <a:r>
+              <a:rPr lang="de-CH" sz="2100" b="1" dirty="0"/>
+              <a:t>Evaluation </a:t>
+            </a:r>
+            <a:r>
+              <a:rPr lang="de-CH" sz="2100" b="1" dirty="0" err="1"/>
+              <a:t>Metric</a:t>
+            </a:r>
+            <a:endParaRPr lang="de-CH" sz="2100" dirty="0"/>
+          </a:p>
+          <a:p>
+            <a:r>
+              <a:rPr lang="de-CH" sz="2100" dirty="0" err="1"/>
+              <a:t>Execution</a:t>
+            </a:r>
+            <a:r>
+              <a:rPr lang="de-CH" sz="2100" dirty="0"/>
+              <a:t> </a:t>
+            </a:r>
+            <a:r>
+              <a:rPr lang="de-CH" sz="2100" dirty="0" err="1"/>
+              <a:t>Accuracy</a:t>
+            </a:r>
+            <a:r>
+              <a:rPr lang="de-CH" sz="2100" dirty="0"/>
+              <a:t>: </a:t>
+            </a:r>
+            <a:r>
+              <a:rPr lang="de-CH" sz="2100" dirty="0" err="1"/>
+              <a:t>Predicted</a:t>
+            </a:r>
+            <a:r>
+              <a:rPr lang="de-CH" sz="2100" dirty="0"/>
+              <a:t> </a:t>
+            </a:r>
+            <a:r>
+              <a:rPr lang="de-CH" sz="2100" dirty="0" err="1"/>
+              <a:t>result</a:t>
+            </a:r>
+            <a:r>
+              <a:rPr lang="de-CH" sz="2100" dirty="0"/>
+              <a:t> == Gold </a:t>
+            </a:r>
+            <a:r>
+              <a:rPr lang="de-CH" sz="2100" dirty="0" err="1"/>
+              <a:t>result</a:t>
+            </a:r>
+            <a:r>
+              <a:rPr lang="de-CH" sz="2100" dirty="0"/>
+              <a:t> (</a:t>
+            </a:r>
+            <a:r>
+              <a:rPr lang="de-CH" sz="2100" dirty="0" err="1"/>
+              <a:t>exact</a:t>
+            </a:r>
+            <a:r>
+              <a:rPr lang="de-CH" sz="2100" dirty="0"/>
+              <a:t> match)</a:t>
+            </a:r>
+          </a:p>
+          <a:p>
+            <a:r>
+              <a:rPr lang="de-CH" sz="2100" dirty="0"/>
+              <a:t>Test Set: 18 Fragen (Easy 3 / Medium 6 / Hard 5 / Extra 4)</a:t>
+            </a:r>
+          </a:p>
+          <a:p>
+            <a:pPr marL="0" indent="0">
+              <a:buNone/>
+            </a:pPr>
+            <a:br>
+              <a:rPr lang="de-CH" sz="1800" dirty="0"/>
+            </a:br>
+            <a:endParaRPr lang="de-CH" sz="1800" dirty="0"/>
+          </a:p>
+          <a:p>
+            <a:endParaRPr lang="de-DE" dirty="0"/>
+          </a:p>
+        </p:txBody>
+      </p:sp>
+      <p:pic>
+        <p:nvPicPr>
+          <p:cNvPr id="9" name="Grafik 8">
+            <a:extLst>
+              <a:ext uri="{FF2B5EF4-FFF2-40B4-BE49-F238E27FC236}">
+                <a16:creationId xmlns:a16="http://schemas.microsoft.com/office/drawing/2014/main" id="{23A03BDE-D80C-E062-846F-FAB338547BC5}"/>
+              </a:ext>
+            </a:extLst>
+          </p:cNvPr>
+          <p:cNvPicPr>
+            <a:picLocks noChangeAspect="1"/>
+          </p:cNvPicPr>
+          <p:nvPr/>
+        </p:nvPicPr>
+        <p:blipFill>
+          <a:blip>
+            <a:extLst>
+              <a:ext uri="{96DAC541-7B7A-43D3-8B79-37D633B846F1}">
+                <asvg:svgBlip xmlns:asvg="http://schemas.microsoft.com/office/drawing/2016/SVG/main" r:embed="rId2"/>
+              </a:ext>
+            </a:extLst>
+          </a:blip>
+          <a:stretch>
+            <a:fillRect/>
+          </a:stretch>
+        </p:blipFill>
+        <p:spPr>
+          <a:xfrm>
+            <a:off x="6248400" y="1446327"/>
+            <a:ext cx="6133230" cy="5411673"/>
+          </a:xfrm>
+          <a:prstGeom prst="rect">
+            <a:avLst/>
+          </a:prstGeom>
+        </p:spPr>
+      </p:pic>
+    </p:spTree>
+    <p:extLst>
+      <p:ext uri="{BB962C8B-B14F-4D97-AF65-F5344CB8AC3E}">
+        <p14:creationId xmlns:p14="http://schemas.microsoft.com/office/powerpoint/2010/main" val="970026428"/>
+      </p:ext>
+    </p:extLst>
+  </p:cSld>
+  <p:clrMapOvr>
+    <a:masterClrMapping/>
+  </p:clrMapOvr>
+</p:sld>
+</file>
+
+<file path=ppt/slides/slide4.xml><?xml version="1.0" encoding="utf-8"?>
+<p:sld xmlns:a="http://schemas.openxmlformats.org/drawingml/2006/main" xmlns:r="http://schemas.openxmlformats.org/officeDocument/2006/relationships" xmlns:p="http://schemas.openxmlformats.org/presentationml/2006/main">
+  <p:cSld>
+    <p:spTree>
+      <p:nvGrpSpPr>
+        <p:cNvPr id="1" name=""/>
+        <p:cNvGrpSpPr/>
+        <p:nvPr/>
+      </p:nvGrpSpPr>
+      <p:grpSpPr>
+        <a:xfrm>
+          <a:off x="0" y="0"/>
+          <a:ext cx="0" cy="0"/>
+          <a:chOff x="0" y="0"/>
+          <a:chExt cx="0" cy="0"/>
+        </a:xfrm>
+      </p:grpSpPr>
+      <p:sp>
+        <p:nvSpPr>
+          <p:cNvPr id="2" name="Titel 1">
+            <a:extLst>
+              <a:ext uri="{FF2B5EF4-FFF2-40B4-BE49-F238E27FC236}">
+                <a16:creationId xmlns:a16="http://schemas.microsoft.com/office/drawing/2014/main" id="{7DAF28D5-FA89-E037-4CF4-5DE820187C1B}"/>
+              </a:ext>
+            </a:extLst>
+          </p:cNvPr>
+          <p:cNvSpPr>
+            <a:spLocks noGrp="1"/>
+          </p:cNvSpPr>
+          <p:nvPr>
+            <p:ph type="title"/>
+          </p:nvPr>
+        </p:nvSpPr>
+        <p:spPr>
+          <a:xfrm>
+            <a:off x="838200" y="365126"/>
+            <a:ext cx="10515600" cy="856924"/>
+          </a:xfrm>
+        </p:spPr>
+        <p:txBody>
+          <a:bodyPr/>
+          <a:lstStyle/>
+          <a:p>
+            <a:r>
+              <a:rPr lang="de-DE" dirty="0"/>
+              <a:t> Query </a:t>
+            </a:r>
+            <a:r>
+              <a:rPr lang="de-DE" dirty="0" err="1"/>
+              <a:t>Examples</a:t>
+            </a:r>
+            <a:r>
+              <a:rPr lang="de-DE" dirty="0"/>
+              <a:t> </a:t>
+            </a:r>
+          </a:p>
+        </p:txBody>
+      </p:sp>
+      <p:pic>
+        <p:nvPicPr>
+          <p:cNvPr id="9" name="Inhaltsplatzhalter 8">
+            <a:extLst>
+              <a:ext uri="{FF2B5EF4-FFF2-40B4-BE49-F238E27FC236}">
+                <a16:creationId xmlns:a16="http://schemas.microsoft.com/office/drawing/2014/main" id="{3A69168E-09A6-3D56-CE85-43FE76E1D822}"/>
+              </a:ext>
+            </a:extLst>
+          </p:cNvPr>
+          <p:cNvPicPr>
+            <a:picLocks noGrp="1" noChangeAspect="1"/>
+          </p:cNvPicPr>
+          <p:nvPr>
+            <p:ph idx="1"/>
+          </p:nvPr>
+        </p:nvPicPr>
+        <p:blipFill>
+          <a:blip>
+            <a:extLst>
+              <a:ext uri="{96DAC541-7B7A-43D3-8B79-37D633B846F1}">
+                <asvg:svgBlip xmlns:asvg="http://schemas.microsoft.com/office/drawing/2016/SVG/main" r:embed="rId3"/>
+              </a:ext>
+            </a:extLst>
+          </a:blip>
+          <a:stretch>
+            <a:fillRect/>
+          </a:stretch>
+        </p:blipFill>
+        <p:spPr>
+          <a:xfrm>
+            <a:off x="3019663" y="1248209"/>
+            <a:ext cx="6152674" cy="5609791"/>
+          </a:xfrm>
+          <a:prstGeom prst="rect">
+            <a:avLst/>
+          </a:prstGeom>
+        </p:spPr>
+      </p:pic>
+    </p:spTree>
+    <p:extLst>
+      <p:ext uri="{BB962C8B-B14F-4D97-AF65-F5344CB8AC3E}">
+        <p14:creationId xmlns:p14="http://schemas.microsoft.com/office/powerpoint/2010/main" val="745947351"/>
+      </p:ext>
+    </p:extLst>
+  </p:cSld>
+  <p:clrMapOvr>
+    <a:masterClrMapping/>
+  </p:clrMapOvr>
+</p:sld>
+</file>
+
+<file path=ppt/slides/slide5.xml><?xml version="1.0" encoding="utf-8"?>
+<p:sld xmlns:a="http://schemas.openxmlformats.org/drawingml/2006/main" xmlns:r="http://schemas.openxmlformats.org/officeDocument/2006/relationships" xmlns:p="http://schemas.openxmlformats.org/presentationml/2006/main">
+  <p:cSld>
+    <p:spTree>
+      <p:nvGrpSpPr>
+        <p:cNvPr id="1" name=""/>
+        <p:cNvGrpSpPr/>
+        <p:nvPr/>
+      </p:nvGrpSpPr>
+      <p:grpSpPr>
+        <a:xfrm>
+          <a:off x="0" y="0"/>
+          <a:ext cx="0" cy="0"/>
+          <a:chOff x="0" y="0"/>
+          <a:chExt cx="0" cy="0"/>
+        </a:xfrm>
+      </p:grpSpPr>
+      <p:pic>
+        <p:nvPicPr>
+          <p:cNvPr id="5" name="Inhaltsplatzhalter 4">
+            <a:extLst>
+              <a:ext uri="{FF2B5EF4-FFF2-40B4-BE49-F238E27FC236}">
+                <a16:creationId xmlns:a16="http://schemas.microsoft.com/office/drawing/2014/main" id="{E48C804D-1D92-8743-183B-2C02ED152CF8}"/>
+              </a:ext>
+            </a:extLst>
+          </p:cNvPr>
+          <p:cNvPicPr>
+            <a:picLocks noGrp="1" noChangeAspect="1"/>
+          </p:cNvPicPr>
+          <p:nvPr>
+            <p:ph idx="1"/>
+          </p:nvPr>
+        </p:nvPicPr>
+        <p:blipFill>
+          <a:blip>
+            <a:extLst>
+              <a:ext uri="{96DAC541-7B7A-43D3-8B79-37D633B846F1}">
+                <asvg:svgBlip xmlns:asvg="http://schemas.microsoft.com/office/drawing/2016/SVG/main" r:embed="rId2"/>
+              </a:ext>
+            </a:extLst>
+          </a:blip>
+          <a:stretch>
+            <a:fillRect/>
+          </a:stretch>
+        </p:blipFill>
+        <p:spPr>
+          <a:xfrm>
+            <a:off x="555476" y="326345"/>
+            <a:ext cx="9075634" cy="6263967"/>
+          </a:xfrm>
+          <a:prstGeom prst="rect">
+            <a:avLst/>
+          </a:prstGeom>
+        </p:spPr>
+      </p:pic>
+    </p:spTree>
+    <p:extLst>
+      <p:ext uri="{BB962C8B-B14F-4D97-AF65-F5344CB8AC3E}">
+        <p14:creationId xmlns:p14="http://schemas.microsoft.com/office/powerpoint/2010/main" val="3332087830"/>
+      </p:ext>
+    </p:extLst>
+  </p:cSld>
+  <p:clrMapOvr>
+    <a:masterClrMapping/>
+  </p:clrMapOvr>
+</p:sld>
+</file>
+
+<file path=ppt/slides/slide6.xml><?xml version="1.0" encoding="utf-8"?>
+<p:sld xmlns:a="http://schemas.openxmlformats.org/drawingml/2006/main" xmlns:r="http://schemas.openxmlformats.org/officeDocument/2006/relationships" xmlns:p="http://schemas.openxmlformats.org/presentationml/2006/main">
+  <p:cSld>
+    <p:spTree>
+      <p:nvGrpSpPr>
+        <p:cNvPr id="1" name=""/>
+        <p:cNvGrpSpPr/>
+        <p:nvPr/>
+      </p:nvGrpSpPr>
+      <p:grpSpPr>
+        <a:xfrm>
+          <a:off x="0" y="0"/>
+          <a:ext cx="0" cy="0"/>
+          <a:chOff x="0" y="0"/>
+          <a:chExt cx="0" cy="0"/>
+        </a:xfrm>
+      </p:grpSpPr>
+      <p:sp>
+        <p:nvSpPr>
+          <p:cNvPr id="2" name="Titel 1">
+            <a:extLst>
+              <a:ext uri="{FF2B5EF4-FFF2-40B4-BE49-F238E27FC236}">
+                <a16:creationId xmlns:a16="http://schemas.microsoft.com/office/drawing/2014/main" id="{EFDDCF48-2DDB-2872-CC98-A72A2E6EEA94}"/>
+              </a:ext>
+            </a:extLst>
+          </p:cNvPr>
+          <p:cNvSpPr>
+            <a:spLocks noGrp="1"/>
+          </p:cNvSpPr>
+          <p:nvPr>
+            <p:ph type="title"/>
+          </p:nvPr>
+        </p:nvSpPr>
+        <p:spPr/>
+        <p:txBody>
+          <a:bodyPr/>
+          <a:lstStyle/>
+          <a:p>
+            <a:r>
+              <a:rPr lang="de-DE" dirty="0"/>
+              <a:t> Analysis </a:t>
+            </a:r>
+            <a:r>
+              <a:rPr lang="de-DE" dirty="0" err="1"/>
+              <a:t>of</a:t>
+            </a:r>
+            <a:r>
+              <a:rPr lang="de-DE" dirty="0"/>
+              <a:t> Errors / Model </a:t>
+            </a:r>
+            <a:r>
+              <a:rPr lang="de-DE" dirty="0" err="1"/>
+              <a:t>Limitations</a:t>
+            </a:r>
+            <a:r>
+              <a:rPr lang="de-DE" dirty="0"/>
+              <a:t> </a:t>
+            </a:r>
+          </a:p>
+        </p:txBody>
+      </p:sp>
+      <p:sp>
+        <p:nvSpPr>
+          <p:cNvPr id="3" name="Inhaltsplatzhalter 2">
+            <a:extLst>
+              <a:ext uri="{FF2B5EF4-FFF2-40B4-BE49-F238E27FC236}">
+                <a16:creationId xmlns:a16="http://schemas.microsoft.com/office/drawing/2014/main" id="{AB35FEAA-D7AE-AD4D-00B7-CABF44CE8239}"/>
+              </a:ext>
+            </a:extLst>
+          </p:cNvPr>
+          <p:cNvSpPr>
+            <a:spLocks noGrp="1"/>
+          </p:cNvSpPr>
+          <p:nvPr>
+            <p:ph idx="1"/>
+          </p:nvPr>
+        </p:nvSpPr>
+        <p:spPr/>
+        <p:txBody>
+          <a:bodyPr/>
+          <a:lstStyle/>
+          <a:p>
+            <a:endParaRPr lang="de-DE"/>
+          </a:p>
+        </p:txBody>
+      </p:sp>
+    </p:spTree>
+    <p:extLst>
+      <p:ext uri="{BB962C8B-B14F-4D97-AF65-F5344CB8AC3E}">
+        <p14:creationId xmlns:p14="http://schemas.microsoft.com/office/powerpoint/2010/main" val="2363088039"/>
+      </p:ext>
+    </p:extLst>
+  </p:cSld>
+  <p:clrMapOvr>
+    <a:masterClrMapping/>
+  </p:clrMapOvr>
+</p:sld>
+</file>
+
+<file path=ppt/slides/slide7.xml><?xml version="1.0" encoding="utf-8"?>
+<p:sld xmlns:a="http://schemas.openxmlformats.org/drawingml/2006/main" xmlns:r="http://schemas.openxmlformats.org/officeDocument/2006/relationships" xmlns:p="http://schemas.openxmlformats.org/presentationml/2006/main">
+  <p:cSld>
+    <p:spTree>
+      <p:nvGrpSpPr>
+        <p:cNvPr id="1" name=""/>
+        <p:cNvGrpSpPr/>
+        <p:nvPr/>
+      </p:nvGrpSpPr>
+      <p:grpSpPr>
+        <a:xfrm>
+          <a:off x="0" y="0"/>
+          <a:ext cx="0" cy="0"/>
+          <a:chOff x="0" y="0"/>
+          <a:chExt cx="0" cy="0"/>
+        </a:xfrm>
+      </p:grpSpPr>
+      <p:sp>
+        <p:nvSpPr>
+          <p:cNvPr id="2" name="Titel 1">
+            <a:extLst>
+              <a:ext uri="{FF2B5EF4-FFF2-40B4-BE49-F238E27FC236}">
+                <a16:creationId xmlns:a16="http://schemas.microsoft.com/office/drawing/2014/main" id="{9A6F853A-945E-324C-3AA1-2C91E86CC254}"/>
+              </a:ext>
+            </a:extLst>
+          </p:cNvPr>
+          <p:cNvSpPr>
+            <a:spLocks noGrp="1"/>
+          </p:cNvSpPr>
+          <p:nvPr>
+            <p:ph type="title"/>
+          </p:nvPr>
+        </p:nvSpPr>
+        <p:spPr/>
+        <p:txBody>
+          <a:bodyPr/>
+          <a:lstStyle/>
+          <a:p>
+            <a:r>
+              <a:rPr lang="de-DE" dirty="0"/>
+              <a:t> Optional </a:t>
+            </a:r>
+            <a:r>
+              <a:rPr lang="de-DE" dirty="0" err="1"/>
+              <a:t>Techniques</a:t>
+            </a:r>
+            <a:r>
+              <a:rPr lang="de-DE" dirty="0"/>
+              <a:t> </a:t>
+            </a:r>
+            <a:r>
+              <a:rPr lang="de-DE" dirty="0" err="1"/>
+              <a:t>Implemented</a:t>
+            </a:r>
+            <a:r>
+              <a:rPr lang="de-DE" dirty="0"/>
+              <a:t> </a:t>
+            </a:r>
+          </a:p>
+        </p:txBody>
+      </p:sp>
+      <p:sp>
+        <p:nvSpPr>
+          <p:cNvPr id="3" name="Inhaltsplatzhalter 2">
+            <a:extLst>
+              <a:ext uri="{FF2B5EF4-FFF2-40B4-BE49-F238E27FC236}">
+                <a16:creationId xmlns:a16="http://schemas.microsoft.com/office/drawing/2014/main" id="{1900F020-647E-5CD3-842E-1D8364BA4E85}"/>
+              </a:ext>
+            </a:extLst>
+          </p:cNvPr>
+          <p:cNvSpPr>
+            <a:spLocks noGrp="1"/>
+          </p:cNvSpPr>
+          <p:nvPr>
+            <p:ph idx="1"/>
+          </p:nvPr>
+        </p:nvSpPr>
+        <p:spPr/>
+        <p:txBody>
+          <a:bodyPr/>
+          <a:lstStyle/>
+          <a:p>
+            <a:r>
+              <a:rPr lang="de-DE" dirty="0"/>
+              <a:t>sqlcoder:7b</a:t>
+            </a:r>
+          </a:p>
+          <a:p>
+            <a:r>
+              <a:rPr lang="de-DE"/>
+              <a:t>qwen2.5-coder:14b</a:t>
+            </a:r>
+          </a:p>
+        </p:txBody>
+      </p:sp>
+    </p:spTree>
+    <p:extLst>
+      <p:ext uri="{BB962C8B-B14F-4D97-AF65-F5344CB8AC3E}">
+        <p14:creationId xmlns:p14="http://schemas.microsoft.com/office/powerpoint/2010/main" val="2888603889"/>
+      </p:ext>
+    </p:extLst>
+  </p:cSld>
+  <p:clrMapOvr>
+    <a:masterClrMapping/>
+  </p:clrMapOvr>
+</p:sld>
+</file>
+
+<file path=ppt/slides/slide8.xml><?xml version="1.0" encoding="utf-8"?>
+<p:sld xmlns:a="http://schemas.openxmlformats.org/drawingml/2006/main" xmlns:r="http://schemas.openxmlformats.org/officeDocument/2006/relationships" xmlns:p="http://schemas.openxmlformats.org/presentationml/2006/main">
+  <p:cSld>
+    <p:spTree>
+      <p:nvGrpSpPr>
+        <p:cNvPr id="1" name=""/>
+        <p:cNvGrpSpPr/>
+        <p:nvPr/>
+      </p:nvGrpSpPr>
+      <p:grpSpPr>
+        <a:xfrm>
+          <a:off x="0" y="0"/>
+          <a:ext cx="0" cy="0"/>
+          <a:chOff x="0" y="0"/>
+          <a:chExt cx="0" cy="0"/>
+        </a:xfrm>
+      </p:grpSpPr>
+      <p:sp>
+        <p:nvSpPr>
+          <p:cNvPr id="2" name="Titel 1">
+            <a:extLst>
+              <a:ext uri="{FF2B5EF4-FFF2-40B4-BE49-F238E27FC236}">
+                <a16:creationId xmlns:a16="http://schemas.microsoft.com/office/drawing/2014/main" id="{D8191700-7A1A-EE6D-EAAF-9424295F016E}"/>
+              </a:ext>
+            </a:extLst>
+          </p:cNvPr>
+          <p:cNvSpPr>
+            <a:spLocks noGrp="1"/>
+          </p:cNvSpPr>
+          <p:nvPr>
+            <p:ph type="title"/>
+          </p:nvPr>
+        </p:nvSpPr>
+        <p:spPr/>
+        <p:txBody>
+          <a:bodyPr/>
+          <a:lstStyle/>
+          <a:p>
+            <a:r>
+              <a:rPr lang="de-DE" dirty="0" err="1"/>
+              <a:t>Conclusion</a:t>
+            </a:r>
+            <a:r>
+              <a:rPr lang="de-DE" dirty="0"/>
+              <a:t> and Future </a:t>
+            </a:r>
+            <a:r>
+              <a:rPr lang="de-DE" dirty="0" err="1"/>
+              <a:t>Wor</a:t>
+            </a:r>
+            <a:endParaRPr lang="de-DE" dirty="0"/>
+          </a:p>
+        </p:txBody>
+      </p:sp>
+      <p:sp>
+        <p:nvSpPr>
+          <p:cNvPr id="3" name="Inhaltsplatzhalter 2">
+            <a:extLst>
+              <a:ext uri="{FF2B5EF4-FFF2-40B4-BE49-F238E27FC236}">
+                <a16:creationId xmlns:a16="http://schemas.microsoft.com/office/drawing/2014/main" id="{90A94E92-9C9B-1DA6-0E75-4BBF6EC3AB1A}"/>
+              </a:ext>
+            </a:extLst>
+          </p:cNvPr>
+          <p:cNvSpPr>
+            <a:spLocks noGrp="1"/>
+          </p:cNvSpPr>
+          <p:nvPr>
+            <p:ph idx="1"/>
+          </p:nvPr>
+        </p:nvSpPr>
+        <p:spPr/>
+        <p:txBody>
+          <a:bodyPr/>
+          <a:lstStyle/>
+          <a:p>
+            <a:endParaRPr lang="de-DE"/>
+          </a:p>
+        </p:txBody>
+      </p:sp>
+    </p:spTree>
+    <p:extLst>
+      <p:ext uri="{BB962C8B-B14F-4D97-AF65-F5344CB8AC3E}">
+        <p14:creationId xmlns:p14="http://schemas.microsoft.com/office/powerpoint/2010/main" val="4086725841"/>
       </p:ext>
     </p:extLst>
   </p:cSld>
@@ -3786,4 +5593,319 @@
     </a:ext>
   </a:extLst>
 </a:theme>
+</file>
+
+<file path=ppt/theme/theme2.xml><?xml version="1.0" encoding="utf-8"?>
+<a:theme xmlns:a="http://schemas.openxmlformats.org/drawingml/2006/main" name="Office">
+  <a:themeElements>
+    <a:clrScheme name="Office">
+      <a:dk1>
+        <a:sysClr val="windowText" lastClr="000000"/>
+      </a:dk1>
+      <a:lt1>
+        <a:sysClr val="window" lastClr="FFFFFF"/>
+      </a:lt1>
+      <a:dk2>
+        <a:srgbClr val="0E2841"/>
+      </a:dk2>
+      <a:lt2>
+        <a:srgbClr val="E8E8E8"/>
+      </a:lt2>
+      <a:accent1>
+        <a:srgbClr val="156082"/>
+      </a:accent1>
+      <a:accent2>
+        <a:srgbClr val="E97132"/>
+      </a:accent2>
+      <a:accent3>
+        <a:srgbClr val="196B24"/>
+      </a:accent3>
+      <a:accent4>
+        <a:srgbClr val="0F9ED5"/>
+      </a:accent4>
+      <a:accent5>
+        <a:srgbClr val="A02B93"/>
+      </a:accent5>
+      <a:accent6>
+        <a:srgbClr val="4EA72E"/>
+      </a:accent6>
+      <a:hlink>
+        <a:srgbClr val="467886"/>
+      </a:hlink>
+      <a:folHlink>
+        <a:srgbClr val="96607D"/>
+      </a:folHlink>
+    </a:clrScheme>
+    <a:fontScheme name="Office">
+      <a:majorFont>
+        <a:latin typeface="Aptos Display" panose="02110004020202020204"/>
+        <a:ea typeface=""/>
+        <a:cs typeface=""/>
+        <a:font script="Jpan" typeface="游ゴシック Light"/>
+        <a:font script="Hang" typeface="맑은 고딕"/>
+        <a:font script="Hans" typeface="等线 Light"/>
+        <a:font script="Hant" typeface="新細明體"/>
+        <a:font script="Arab" typeface="Times New Roman"/>
+        <a:font script="Hebr" typeface="Times New Roman"/>
+        <a:font script="Thai" typeface="Angsana New"/>
+        <a:font script="Ethi" typeface="Nyala"/>
+        <a:font script="Beng" typeface="Vrinda"/>
+        <a:font script="Gujr" typeface="Shruti"/>
+        <a:font script="Khmr" typeface="MoolBoran"/>
+        <a:font script="Knda" typeface="Tunga"/>
+        <a:font script="Guru" typeface="Raavi"/>
+        <a:font script="Cans" typeface="Euphemia"/>
+        <a:font script="Cher" typeface="Plantagenet Cherokee"/>
+        <a:font script="Yiii" typeface="Microsoft Yi Baiti"/>
+        <a:font script="Tibt" typeface="Microsoft Himalaya"/>
+        <a:font script="Thaa" typeface="MV Boli"/>
+        <a:font script="Deva" typeface="Mangal"/>
+        <a:font script="Telu" typeface="Gautami"/>
+        <a:font script="Taml" typeface="Latha"/>
+        <a:font script="Syrc" typeface="Estrangelo Edessa"/>
+        <a:font script="Orya" typeface="Kalinga"/>
+        <a:font script="Mlym" typeface="Kartika"/>
+        <a:font script="Laoo" typeface="DokChampa"/>
+        <a:font script="Sinh" typeface="Iskoola Pota"/>
+        <a:font script="Mong" typeface="Mongolian Baiti"/>
+        <a:font script="Viet" typeface="Times New Roman"/>
+        <a:font script="Uigh" typeface="Microsoft Uighur"/>
+        <a:font script="Geor" typeface="Sylfaen"/>
+        <a:font script="Armn" typeface="Arial"/>
+        <a:font script="Bugi" typeface="Leelawadee UI"/>
+        <a:font script="Bopo" typeface="Microsoft JhengHei"/>
+        <a:font script="Java" typeface="Javanese Text"/>
+        <a:font script="Lisu" typeface="Segoe UI"/>
+        <a:font script="Mymr" typeface="Myanmar Text"/>
+        <a:font script="Nkoo" typeface="Ebrima"/>
+        <a:font script="Olck" typeface="Nirmala UI"/>
+        <a:font script="Osma" typeface="Ebrima"/>
+        <a:font script="Phag" typeface="Phagspa"/>
+        <a:font script="Syrn" typeface="Estrangelo Edessa"/>
+        <a:font script="Syrj" typeface="Estrangelo Edessa"/>
+        <a:font script="Syre" typeface="Estrangelo Edessa"/>
+        <a:font script="Sora" typeface="Nirmala UI"/>
+        <a:font script="Tale" typeface="Microsoft Tai Le"/>
+        <a:font script="Talu" typeface="Microsoft New Tai Lue"/>
+        <a:font script="Tfng" typeface="Ebrima"/>
+      </a:majorFont>
+      <a:minorFont>
+        <a:latin typeface="Aptos" panose="02110004020202020204"/>
+        <a:ea typeface=""/>
+        <a:cs typeface=""/>
+        <a:font script="Jpan" typeface="游ゴシック"/>
+        <a:font script="Hang" typeface="맑은 고딕"/>
+        <a:font script="Hans" typeface="等线"/>
+        <a:font script="Hant" typeface="新細明體"/>
+        <a:font script="Arab" typeface="Arial"/>
+        <a:font script="Hebr" typeface="Arial"/>
+        <a:font script="Thai" typeface="Cordia New"/>
+        <a:font script="Ethi" typeface="Nyala"/>
+        <a:font script="Beng" typeface="Vrinda"/>
+        <a:font script="Gujr" typeface="Shruti"/>
+        <a:font script="Khmr" typeface="DaunPenh"/>
+        <a:font script="Knda" typeface="Tunga"/>
+        <a:font script="Guru" typeface="Raavi"/>
+        <a:font script="Cans" typeface="Euphemia"/>
+        <a:font script="Cher" typeface="Plantagenet Cherokee"/>
+        <a:font script="Yiii" typeface="Microsoft Yi Baiti"/>
+        <a:font script="Tibt" typeface="Microsoft Himalaya"/>
+        <a:font script="Thaa" typeface="MV Boli"/>
+        <a:font script="Deva" typeface="Mangal"/>
+        <a:font script="Telu" typeface="Gautami"/>
+        <a:font script="Taml" typeface="Latha"/>
+        <a:font script="Syrc" typeface="Estrangelo Edessa"/>
+        <a:font script="Orya" typeface="Kalinga"/>
+        <a:font script="Mlym" typeface="Kartika"/>
+        <a:font script="Laoo" typeface="DokChampa"/>
+        <a:font script="Sinh" typeface="Iskoola Pota"/>
+        <a:font script="Mong" typeface="Mongolian Baiti"/>
+        <a:font script="Viet" typeface="Arial"/>
+        <a:font script="Uigh" typeface="Microsoft Uighur"/>
+        <a:font script="Geor" typeface="Sylfaen"/>
+        <a:font script="Armn" typeface="Arial"/>
+        <a:font script="Bugi" typeface="Leelawadee UI"/>
+        <a:font script="Bopo" typeface="Microsoft JhengHei"/>
+        <a:font script="Java" typeface="Javanese Text"/>
+        <a:font script="Lisu" typeface="Segoe UI"/>
+        <a:font script="Mymr" typeface="Myanmar Text"/>
+        <a:font script="Nkoo" typeface="Ebrima"/>
+        <a:font script="Olck" typeface="Nirmala UI"/>
+        <a:font script="Osma" typeface="Ebrima"/>
+        <a:font script="Phag" typeface="Phagspa"/>
+        <a:font script="Syrn" typeface="Estrangelo Edessa"/>
+        <a:font script="Syrj" typeface="Estrangelo Edessa"/>
+        <a:font script="Syre" typeface="Estrangelo Edessa"/>
+        <a:font script="Sora" typeface="Nirmala UI"/>
+        <a:font script="Tale" typeface="Microsoft Tai Le"/>
+        <a:font script="Talu" typeface="Microsoft New Tai Lue"/>
+        <a:font script="Tfng" typeface="Ebrima"/>
+      </a:minorFont>
+    </a:fontScheme>
+    <a:fmtScheme name="Office">
+      <a:fillStyleLst>
+        <a:solidFill>
+          <a:schemeClr val="phClr"/>
+        </a:solidFill>
+        <a:gradFill rotWithShape="1">
+          <a:gsLst>
+            <a:gs pos="0">
+              <a:schemeClr val="phClr">
+                <a:lumMod val="110000"/>
+                <a:satMod val="105000"/>
+                <a:tint val="67000"/>
+              </a:schemeClr>
+            </a:gs>
+            <a:gs pos="50000">
+              <a:schemeClr val="phClr">
+                <a:lumMod val="105000"/>
+                <a:satMod val="103000"/>
+                <a:tint val="73000"/>
+              </a:schemeClr>
+            </a:gs>
+            <a:gs pos="100000">
+              <a:schemeClr val="phClr">
+                <a:lumMod val="105000"/>
+                <a:satMod val="109000"/>
+                <a:tint val="81000"/>
+              </a:schemeClr>
+            </a:gs>
+          </a:gsLst>
+          <a:lin ang="5400000" scaled="0"/>
+        </a:gradFill>
+        <a:gradFill rotWithShape="1">
+          <a:gsLst>
+            <a:gs pos="0">
+              <a:schemeClr val="phClr">
+                <a:satMod val="103000"/>
+                <a:lumMod val="102000"/>
+                <a:tint val="94000"/>
+              </a:schemeClr>
+            </a:gs>
+            <a:gs pos="50000">
+              <a:schemeClr val="phClr">
+                <a:satMod val="110000"/>
+                <a:lumMod val="100000"/>
+                <a:shade val="100000"/>
+              </a:schemeClr>
+            </a:gs>
+            <a:gs pos="100000">
+              <a:schemeClr val="phClr">
+                <a:lumMod val="99000"/>
+                <a:satMod val="120000"/>
+                <a:shade val="78000"/>
+              </a:schemeClr>
+            </a:gs>
+          </a:gsLst>
+          <a:lin ang="5400000" scaled="0"/>
+        </a:gradFill>
+      </a:fillStyleLst>
+      <a:lnStyleLst>
+        <a:ln w="12700" cap="flat" cmpd="sng" algn="ctr">
+          <a:solidFill>
+            <a:schemeClr val="phClr"/>
+          </a:solidFill>
+          <a:prstDash val="solid"/>
+          <a:miter lim="800000"/>
+        </a:ln>
+        <a:ln w="19050" cap="flat" cmpd="sng" algn="ctr">
+          <a:solidFill>
+            <a:schemeClr val="phClr"/>
+          </a:solidFill>
+          <a:prstDash val="solid"/>
+          <a:miter lim="800000"/>
+        </a:ln>
+        <a:ln w="25400" cap="flat" cmpd="sng" algn="ctr">
+          <a:solidFill>
+            <a:schemeClr val="phClr"/>
+          </a:solidFill>
+          <a:prstDash val="solid"/>
+          <a:miter lim="800000"/>
+        </a:ln>
+      </a:lnStyleLst>
+      <a:effectStyleLst>
+        <a:effectStyle>
+          <a:effectLst/>
+        </a:effectStyle>
+        <a:effectStyle>
+          <a:effectLst/>
+        </a:effectStyle>
+        <a:effectStyle>
+          <a:effectLst>
+            <a:outerShdw blurRad="57150" dist="19050" dir="5400000" algn="ctr" rotWithShape="0">
+              <a:srgbClr val="000000">
+                <a:alpha val="63000"/>
+              </a:srgbClr>
+            </a:outerShdw>
+          </a:effectLst>
+        </a:effectStyle>
+      </a:effectStyleLst>
+      <a:bgFillStyleLst>
+        <a:solidFill>
+          <a:schemeClr val="phClr"/>
+        </a:solidFill>
+        <a:solidFill>
+          <a:schemeClr val="phClr">
+            <a:tint val="95000"/>
+            <a:satMod val="170000"/>
+          </a:schemeClr>
+        </a:solidFill>
+        <a:gradFill rotWithShape="1">
+          <a:gsLst>
+            <a:gs pos="0">
+              <a:schemeClr val="phClr">
+                <a:tint val="93000"/>
+                <a:satMod val="150000"/>
+                <a:shade val="98000"/>
+                <a:lumMod val="102000"/>
+              </a:schemeClr>
+            </a:gs>
+            <a:gs pos="50000">
+              <a:schemeClr val="phClr">
+                <a:tint val="98000"/>
+                <a:satMod val="130000"/>
+                <a:shade val="90000"/>
+                <a:lumMod val="103000"/>
+              </a:schemeClr>
+            </a:gs>
+            <a:gs pos="100000">
+              <a:schemeClr val="phClr">
+                <a:shade val="63000"/>
+                <a:satMod val="120000"/>
+              </a:schemeClr>
+            </a:gs>
+          </a:gsLst>
+          <a:lin ang="5400000" scaled="0"/>
+        </a:gradFill>
+      </a:bgFillStyleLst>
+    </a:fmtScheme>
+  </a:themeElements>
+  <a:objectDefaults>
+    <a:lnDef>
+      <a:spPr/>
+      <a:bodyPr/>
+      <a:lstStyle/>
+      <a:style>
+        <a:lnRef idx="2">
+          <a:schemeClr val="accent1"/>
+        </a:lnRef>
+        <a:fillRef idx="0">
+          <a:schemeClr val="accent1"/>
+        </a:fillRef>
+        <a:effectRef idx="1">
+          <a:schemeClr val="accent1"/>
+        </a:effectRef>
+        <a:fontRef idx="minor">
+          <a:schemeClr val="tx1"/>
+        </a:fontRef>
+      </a:style>
+    </a:lnDef>
+  </a:objectDefaults>
+  <a:extraClrSchemeLst/>
+  <a:extLst>
+    <a:ext uri="{05A4C25C-085E-4340-85A3-A5531E510DB2}">
+      <thm15:themeFamily xmlns:thm15="http://schemas.microsoft.com/office/thememl/2012/main" name="Office Theme" id="{2E142A2C-CD16-42D6-873A-C26D2A0506FA}" vid="{1BDDFF52-6CD6-40A5-AB3C-68EB2F1E4D0A}"/>
+    </a:ext>
+  </a:extLst>
+</a:theme>
 </file>
--- a/docs/DHW2_Wagner_Kryeziu_Johnson.pptx
+++ b/docs/DHW2_Wagner_Kryeziu_Johnson.pptx
@@ -5097,84 +5097,44 @@
           <a:chExt cx="0" cy="0"/>
         </a:xfrm>
       </p:grpSpPr>
-      <p:sp>
-        <p:nvSpPr>
-          <p:cNvPr id="2" name="Titel 1">
-            <a:extLst>
-              <a:ext uri="{FF2B5EF4-FFF2-40B4-BE49-F238E27FC236}">
-                <a16:creationId xmlns:a16="http://schemas.microsoft.com/office/drawing/2014/main" id="{9A6F853A-945E-324C-3AA1-2C91E86CC254}"/>
-              </a:ext>
-            </a:extLst>
-          </p:cNvPr>
-          <p:cNvSpPr>
-            <a:spLocks noGrp="1"/>
-          </p:cNvSpPr>
-          <p:nvPr>
-            <p:ph type="title"/>
-          </p:nvPr>
-        </p:nvSpPr>
-        <p:spPr/>
-        <p:txBody>
-          <a:bodyPr/>
-          <a:lstStyle/>
-          <a:p>
-            <a:r>
-              <a:rPr lang="de-DE" dirty="0"/>
-              <a:t> Optional </a:t>
-            </a:r>
-            <a:r>
-              <a:rPr lang="de-DE" dirty="0" err="1"/>
-              <a:t>Techniques</a:t>
-            </a:r>
-            <a:r>
-              <a:rPr lang="de-DE" dirty="0"/>
-              <a:t> </a:t>
-            </a:r>
-            <a:r>
-              <a:rPr lang="de-DE" dirty="0" err="1"/>
-              <a:t>Implemented</a:t>
-            </a:r>
-            <a:r>
-              <a:rPr lang="de-DE" dirty="0"/>
-              <a:t> </a:t>
-            </a:r>
-          </a:p>
-        </p:txBody>
-      </p:sp>
-      <p:sp>
-        <p:nvSpPr>
-          <p:cNvPr id="3" name="Inhaltsplatzhalter 2">
-            <a:extLst>
-              <a:ext uri="{FF2B5EF4-FFF2-40B4-BE49-F238E27FC236}">
-                <a16:creationId xmlns:a16="http://schemas.microsoft.com/office/drawing/2014/main" id="{1900F020-647E-5CD3-842E-1D8364BA4E85}"/>
-              </a:ext>
-            </a:extLst>
-          </p:cNvPr>
-          <p:cNvSpPr>
-            <a:spLocks noGrp="1"/>
-          </p:cNvSpPr>
+      <p:pic>
+        <p:nvPicPr>
+          <p:cNvPr id="5" name="Inhaltsplatzhalter 4">
+            <a:extLst>
+              <a:ext uri="{FF2B5EF4-FFF2-40B4-BE49-F238E27FC236}">
+                <a16:creationId xmlns:a16="http://schemas.microsoft.com/office/drawing/2014/main" id="{09C091D1-3E00-6659-7EB0-35A25B7CD0E8}"/>
+              </a:ext>
+            </a:extLst>
+          </p:cNvPr>
+          <p:cNvPicPr>
+            <a:picLocks noGrp="1" noChangeAspect="1"/>
+          </p:cNvPicPr>
           <p:nvPr>
             <p:ph idx="1"/>
           </p:nvPr>
-        </p:nvSpPr>
-        <p:spPr/>
-        <p:txBody>
-          <a:bodyPr/>
-          <a:lstStyle/>
-          <a:p>
-            <a:r>
-              <a:rPr lang="de-DE" dirty="0"/>
-              <a:t>sqlcoder:7b</a:t>
-            </a:r>
-          </a:p>
-          <a:p>
-            <a:r>
-              <a:rPr lang="de-DE"/>
-              <a:t>qwen2.5-coder:14b</a:t>
-            </a:r>
-          </a:p>
-        </p:txBody>
-      </p:sp>
+        </p:nvPicPr>
+        <p:blipFill>
+          <a:blip>
+            <a:extLst>
+              <a:ext uri="{96DAC541-7B7A-43D3-8B79-37D633B846F1}">
+                <asvg:svgBlip xmlns:asvg="http://schemas.microsoft.com/office/drawing/2016/SVG/main" r:embed="rId2"/>
+              </a:ext>
+            </a:extLst>
+          </a:blip>
+          <a:stretch>
+            <a:fillRect/>
+          </a:stretch>
+        </p:blipFill>
+        <p:spPr>
+          <a:xfrm>
+            <a:off x="417809" y="261520"/>
+            <a:ext cx="7041769" cy="6213326"/>
+          </a:xfrm>
+          <a:prstGeom prst="rect">
+            <a:avLst/>
+          </a:prstGeom>
+        </p:spPr>
+      </p:pic>
     </p:spTree>
     <p:extLst>
       <p:ext uri="{BB962C8B-B14F-4D97-AF65-F5344CB8AC3E}">
@@ -5232,11 +5192,11 @@
             </a:r>
             <a:r>
               <a:rPr lang="de-DE" dirty="0"/>
-              <a:t> and Future </a:t>
-            </a:r>
-            <a:r>
-              <a:rPr lang="de-DE" dirty="0" err="1"/>
-              <a:t>Wor</a:t>
+              <a:t> and </a:t>
+            </a:r>
+            <a:r>
+              <a:rPr lang="de-DE"/>
+              <a:t>Future Work</a:t>
             </a:r>
             <a:endParaRPr lang="de-DE" dirty="0"/>
           </a:p>

--- a/docs/DHW2_Wagner_Kryeziu_Johnson.pptx
+++ b/docs/DHW2_Wagner_Kryeziu_Johnson.pptx
@@ -5,7 +5,7 @@
     <p:sldMasterId id="2147483648" r:id="rId1"/>
   </p:sldMasterIdLst>
   <p:notesMasterIdLst>
-    <p:notesMasterId r:id="rId10"/>
+    <p:notesMasterId r:id="rId11"/>
   </p:notesMasterIdLst>
   <p:sldIdLst>
     <p:sldId id="256" r:id="rId2"/>
@@ -15,7 +15,8 @@
     <p:sldId id="260" r:id="rId6"/>
     <p:sldId id="261" r:id="rId7"/>
     <p:sldId id="262" r:id="rId8"/>
-    <p:sldId id="263" r:id="rId9"/>
+    <p:sldId id="264" r:id="rId9"/>
+    <p:sldId id="263" r:id="rId10"/>
   </p:sldIdLst>
   <p:sldSz cx="12192000" cy="6858000"/>
   <p:notesSz cx="6858000" cy="9144000"/>
@@ -4954,14 +4955,15 @@
               </a:ext>
             </a:extLst>
           </a:blip>
+          <a:srcRect b="33950"/>
           <a:stretch>
             <a:fillRect/>
           </a:stretch>
         </p:blipFill>
         <p:spPr>
           <a:xfrm>
-            <a:off x="555476" y="326345"/>
-            <a:ext cx="9075634" cy="6263967"/>
+            <a:off x="555475" y="362440"/>
+            <a:ext cx="10381229" cy="4732561"/>
           </a:xfrm>
           <a:prstGeom prst="rect">
             <a:avLst/>
@@ -5063,7 +5065,288 @@
           <a:bodyPr/>
           <a:lstStyle/>
           <a:p>
-            <a:endParaRPr lang="de-DE"/>
+            <a:r>
+              <a:rPr lang="de-CH" dirty="0"/>
+              <a:t>The 1B </a:t>
+            </a:r>
+            <a:r>
+              <a:rPr lang="de-CH" dirty="0" err="1"/>
+              <a:t>model</a:t>
+            </a:r>
+            <a:r>
+              <a:rPr lang="de-CH" dirty="0"/>
+              <a:t> </a:t>
+            </a:r>
+            <a:r>
+              <a:rPr lang="de-CH" dirty="0" err="1"/>
+              <a:t>fails</a:t>
+            </a:r>
+            <a:r>
+              <a:rPr lang="de-CH" dirty="0"/>
+              <a:t> </a:t>
+            </a:r>
+            <a:r>
+              <a:rPr lang="de-CH" dirty="0" err="1"/>
+              <a:t>almost</a:t>
+            </a:r>
+            <a:r>
+              <a:rPr lang="de-CH" dirty="0"/>
+              <a:t> </a:t>
+            </a:r>
+            <a:r>
+              <a:rPr lang="de-CH" dirty="0" err="1"/>
+              <a:t>entirely</a:t>
+            </a:r>
+            <a:r>
+              <a:rPr lang="de-CH" dirty="0"/>
+              <a:t> at </a:t>
+            </a:r>
+            <a:r>
+              <a:rPr lang="de-CH" dirty="0" err="1"/>
+              <a:t>the</a:t>
+            </a:r>
+            <a:r>
+              <a:rPr lang="de-CH" dirty="0"/>
+              <a:t> </a:t>
+            </a:r>
+            <a:r>
+              <a:rPr lang="de-CH" dirty="0" err="1"/>
+              <a:t>schema</a:t>
+            </a:r>
+            <a:r>
+              <a:rPr lang="de-CH" dirty="0"/>
+              <a:t> </a:t>
+            </a:r>
+            <a:r>
+              <a:rPr lang="de-CH" dirty="0" err="1"/>
+              <a:t>levelWrong</a:t>
+            </a:r>
+            <a:r>
+              <a:rPr lang="de-CH" dirty="0"/>
+              <a:t> </a:t>
+            </a:r>
+            <a:r>
+              <a:rPr lang="de-CH" dirty="0" err="1"/>
+              <a:t>joins</a:t>
+            </a:r>
+            <a:r>
+              <a:rPr lang="de-CH" dirty="0"/>
+              <a:t> and </a:t>
+            </a:r>
+            <a:r>
+              <a:rPr lang="de-CH" dirty="0" err="1"/>
+              <a:t>hallucinated</a:t>
+            </a:r>
+            <a:r>
+              <a:rPr lang="de-CH" dirty="0"/>
+              <a:t> </a:t>
+            </a:r>
+            <a:r>
+              <a:rPr lang="de-CH" dirty="0" err="1"/>
+              <a:t>columns</a:t>
+            </a:r>
+            <a:r>
+              <a:rPr lang="de-CH" dirty="0"/>
+              <a:t> </a:t>
+            </a:r>
+            <a:r>
+              <a:rPr lang="de-CH" dirty="0" err="1"/>
+              <a:t>account</a:t>
+            </a:r>
+            <a:r>
+              <a:rPr lang="de-CH" dirty="0"/>
+              <a:t> </a:t>
+            </a:r>
+            <a:r>
+              <a:rPr lang="de-CH" dirty="0" err="1"/>
+              <a:t>for</a:t>
+            </a:r>
+            <a:r>
+              <a:rPr lang="de-CH" dirty="0"/>
+              <a:t> 11 </a:t>
+            </a:r>
+            <a:r>
+              <a:rPr lang="de-CH" dirty="0" err="1"/>
+              <a:t>of</a:t>
+            </a:r>
+            <a:r>
+              <a:rPr lang="de-CH" dirty="0"/>
+              <a:t> </a:t>
+            </a:r>
+            <a:r>
+              <a:rPr lang="de-CH" dirty="0" err="1"/>
+              <a:t>the</a:t>
+            </a:r>
+            <a:r>
+              <a:rPr lang="de-CH" dirty="0"/>
+              <a:t> 14 </a:t>
+            </a:r>
+            <a:r>
+              <a:rPr lang="de-CH" dirty="0" err="1"/>
+              <a:t>failures</a:t>
+            </a:r>
+            <a:endParaRPr lang="de-CH" dirty="0"/>
+          </a:p>
+          <a:p>
+            <a:pPr lvl="1"/>
+            <a:r>
+              <a:rPr lang="de-CH" dirty="0" err="1"/>
+              <a:t>Accuracy</a:t>
+            </a:r>
+            <a:r>
+              <a:rPr lang="de-CH" dirty="0"/>
+              <a:t> </a:t>
+            </a:r>
+            <a:r>
+              <a:rPr lang="de-CH" dirty="0" err="1"/>
+              <a:t>drops</a:t>
+            </a:r>
+            <a:r>
+              <a:rPr lang="de-CH" dirty="0"/>
+              <a:t> </a:t>
+            </a:r>
+            <a:r>
+              <a:rPr lang="de-CH" dirty="0" err="1"/>
+              <a:t>sharply</a:t>
+            </a:r>
+            <a:r>
+              <a:rPr lang="de-CH" dirty="0"/>
+              <a:t> </a:t>
+            </a:r>
+            <a:r>
+              <a:rPr lang="de-CH" dirty="0" err="1"/>
+              <a:t>with</a:t>
+            </a:r>
+            <a:r>
+              <a:rPr lang="de-CH" dirty="0"/>
+              <a:t> </a:t>
+            </a:r>
+            <a:r>
+              <a:rPr lang="de-CH" dirty="0" err="1"/>
+              <a:t>increasing</a:t>
+            </a:r>
+            <a:r>
+              <a:rPr lang="de-CH" dirty="0"/>
+              <a:t> </a:t>
+            </a:r>
+            <a:r>
+              <a:rPr lang="de-CH" dirty="0" err="1"/>
+              <a:t>difficultyEasy</a:t>
+            </a:r>
+            <a:r>
+              <a:rPr lang="de-CH" dirty="0"/>
+              <a:t>: 67%</a:t>
+            </a:r>
+          </a:p>
+          <a:p>
+            <a:pPr lvl="1"/>
+            <a:r>
+              <a:rPr lang="de-CH" dirty="0"/>
+              <a:t>Extra: 0%</a:t>
+            </a:r>
+          </a:p>
+          <a:p>
+            <a:r>
+              <a:rPr lang="de-CH" dirty="0"/>
+              <a:t>2 </a:t>
+            </a:r>
+            <a:r>
+              <a:rPr lang="de-CH" dirty="0" err="1"/>
+              <a:t>of</a:t>
+            </a:r>
+            <a:r>
+              <a:rPr lang="de-CH" dirty="0"/>
+              <a:t> </a:t>
+            </a:r>
+            <a:r>
+              <a:rPr lang="de-CH" dirty="0" err="1"/>
+              <a:t>the</a:t>
+            </a:r>
+            <a:r>
+              <a:rPr lang="de-CH" dirty="0"/>
+              <a:t> 4 “</a:t>
+            </a:r>
+            <a:r>
+              <a:rPr lang="de-CH" dirty="0" err="1"/>
+              <a:t>correct</a:t>
+            </a:r>
+            <a:r>
+              <a:rPr lang="de-CH" dirty="0"/>
+              <a:t>” </a:t>
+            </a:r>
+            <a:r>
+              <a:rPr lang="de-CH" dirty="0" err="1"/>
+              <a:t>answers</a:t>
+            </a:r>
+            <a:r>
+              <a:rPr lang="de-CH" dirty="0"/>
+              <a:t> </a:t>
+            </a:r>
+            <a:r>
+              <a:rPr lang="de-CH" dirty="0" err="1"/>
+              <a:t>were</a:t>
+            </a:r>
+            <a:r>
+              <a:rPr lang="de-CH" dirty="0"/>
+              <a:t> </a:t>
+            </a:r>
+            <a:r>
+              <a:rPr lang="de-CH" dirty="0" err="1"/>
+              <a:t>only</a:t>
+            </a:r>
+            <a:r>
+              <a:rPr lang="de-CH" dirty="0"/>
+              <a:t> lucky </a:t>
+            </a:r>
+            <a:r>
+              <a:rPr lang="de-CH" dirty="0" err="1"/>
+              <a:t>guessesEffective</a:t>
+            </a:r>
+            <a:r>
+              <a:rPr lang="de-CH" dirty="0"/>
+              <a:t> real </a:t>
+            </a:r>
+            <a:r>
+              <a:rPr lang="de-CH" dirty="0" err="1"/>
+              <a:t>accuracy</a:t>
+            </a:r>
+            <a:r>
+              <a:rPr lang="de-CH" dirty="0"/>
+              <a:t> </a:t>
+            </a:r>
+            <a:r>
+              <a:rPr lang="de-CH" dirty="0" err="1"/>
+              <a:t>is</a:t>
+            </a:r>
+            <a:r>
+              <a:rPr lang="de-CH" dirty="0"/>
+              <a:t> </a:t>
+            </a:r>
+            <a:r>
+              <a:rPr lang="de-CH" dirty="0" err="1"/>
+              <a:t>therefore</a:t>
+            </a:r>
+            <a:r>
+              <a:rPr lang="de-CH" dirty="0"/>
+              <a:t> </a:t>
+            </a:r>
+            <a:r>
+              <a:rPr lang="de-CH" dirty="0" err="1"/>
+              <a:t>closer</a:t>
+            </a:r>
+            <a:r>
+              <a:rPr lang="de-CH" dirty="0"/>
+              <a:t> </a:t>
+            </a:r>
+            <a:r>
+              <a:rPr lang="de-CH" dirty="0" err="1"/>
+              <a:t>to</a:t>
+            </a:r>
+            <a:r>
+              <a:rPr lang="de-CH" dirty="0"/>
+              <a:t> ~11%</a:t>
+            </a:r>
+            <a:endParaRPr lang="de-DE" dirty="0"/>
           </a:p>
         </p:txBody>
       </p:sp>
@@ -5170,7 +5453,7 @@
           <p:cNvPr id="2" name="Titel 1">
             <a:extLst>
               <a:ext uri="{FF2B5EF4-FFF2-40B4-BE49-F238E27FC236}">
-                <a16:creationId xmlns:a16="http://schemas.microsoft.com/office/drawing/2014/main" id="{D8191700-7A1A-EE6D-EAAF-9424295F016E}"/>
+                <a16:creationId xmlns:a16="http://schemas.microsoft.com/office/drawing/2014/main" id="{13D88D8D-742D-C8A4-7308-30A65371334F}"/>
               </a:ext>
             </a:extLst>
           </p:cNvPr>
@@ -5181,12 +5464,141 @@
             <p:ph type="title"/>
           </p:nvPr>
         </p:nvSpPr>
-        <p:spPr/>
+        <p:spPr>
+          <a:xfrm>
+            <a:off x="838200" y="81206"/>
+            <a:ext cx="10515600" cy="1325563"/>
+          </a:xfrm>
+        </p:spPr>
         <p:txBody>
           <a:bodyPr/>
           <a:lstStyle/>
           <a:p>
             <a:r>
+              <a:rPr lang="de-CH" dirty="0" err="1"/>
+              <a:t>Testing</a:t>
+            </a:r>
+            <a:r>
+              <a:rPr lang="de-CH" dirty="0"/>
+              <a:t> </a:t>
+            </a:r>
+            <a:r>
+              <a:rPr lang="de-CH" dirty="0" err="1"/>
+              <a:t>overfitting</a:t>
+            </a:r>
+            <a:r>
+              <a:rPr lang="de-CH" dirty="0"/>
+              <a:t> on </a:t>
+            </a:r>
+            <a:r>
+              <a:rPr lang="de-CH" dirty="0" err="1"/>
+              <a:t>new</a:t>
+            </a:r>
+            <a:r>
+              <a:rPr lang="de-CH" dirty="0"/>
+              <a:t> </a:t>
+            </a:r>
+            <a:r>
+              <a:rPr lang="de-CH" dirty="0" err="1"/>
+              <a:t>test</a:t>
+            </a:r>
+            <a:r>
+              <a:rPr lang="de-CH" dirty="0"/>
+              <a:t> </a:t>
+            </a:r>
+            <a:r>
+              <a:rPr lang="de-CH" dirty="0" err="1"/>
+              <a:t>set</a:t>
+            </a:r>
+            <a:endParaRPr lang="de-DE" dirty="0"/>
+          </a:p>
+        </p:txBody>
+      </p:sp>
+      <p:pic>
+        <p:nvPicPr>
+          <p:cNvPr id="5" name="Inhaltsplatzhalter 4">
+            <a:extLst>
+              <a:ext uri="{FF2B5EF4-FFF2-40B4-BE49-F238E27FC236}">
+                <a16:creationId xmlns:a16="http://schemas.microsoft.com/office/drawing/2014/main" id="{FD7C27D7-D5D1-FDDB-6955-382DE9364D68}"/>
+              </a:ext>
+            </a:extLst>
+          </p:cNvPr>
+          <p:cNvPicPr>
+            <a:picLocks noGrp="1" noChangeAspect="1"/>
+          </p:cNvPicPr>
+          <p:nvPr>
+            <p:ph idx="1"/>
+          </p:nvPr>
+        </p:nvPicPr>
+        <p:blipFill>
+          <a:blip r:embed="rId2"/>
+          <a:srcRect t="7201" b="28304"/>
+          <a:stretch>
+            <a:fillRect/>
+          </a:stretch>
+        </p:blipFill>
+        <p:spPr>
+          <a:xfrm>
+            <a:off x="685800" y="1225061"/>
+            <a:ext cx="10251685" cy="4407877"/>
+          </a:xfrm>
+          <a:prstGeom prst="rect">
+            <a:avLst/>
+          </a:prstGeom>
+        </p:spPr>
+      </p:pic>
+    </p:spTree>
+    <p:extLst>
+      <p:ext uri="{BB962C8B-B14F-4D97-AF65-F5344CB8AC3E}">
+        <p14:creationId xmlns:p14="http://schemas.microsoft.com/office/powerpoint/2010/main" val="1858057628"/>
+      </p:ext>
+    </p:extLst>
+  </p:cSld>
+  <p:clrMapOvr>
+    <a:masterClrMapping/>
+  </p:clrMapOvr>
+</p:sld>
+</file>
+
+<file path=ppt/slides/slide9.xml><?xml version="1.0" encoding="utf-8"?>
+<p:sld xmlns:a="http://schemas.openxmlformats.org/drawingml/2006/main" xmlns:r="http://schemas.openxmlformats.org/officeDocument/2006/relationships" xmlns:p="http://schemas.openxmlformats.org/presentationml/2006/main">
+  <p:cSld>
+    <p:spTree>
+      <p:nvGrpSpPr>
+        <p:cNvPr id="1" name=""/>
+        <p:cNvGrpSpPr/>
+        <p:nvPr/>
+      </p:nvGrpSpPr>
+      <p:grpSpPr>
+        <a:xfrm>
+          <a:off x="0" y="0"/>
+          <a:ext cx="0" cy="0"/>
+          <a:chOff x="0" y="0"/>
+          <a:chExt cx="0" cy="0"/>
+        </a:xfrm>
+      </p:grpSpPr>
+      <p:sp>
+        <p:nvSpPr>
+          <p:cNvPr id="2" name="Titel 1">
+            <a:extLst>
+              <a:ext uri="{FF2B5EF4-FFF2-40B4-BE49-F238E27FC236}">
+                <a16:creationId xmlns:a16="http://schemas.microsoft.com/office/drawing/2014/main" id="{D8191700-7A1A-EE6D-EAAF-9424295F016E}"/>
+              </a:ext>
+            </a:extLst>
+          </p:cNvPr>
+          <p:cNvSpPr>
+            <a:spLocks noGrp="1"/>
+          </p:cNvSpPr>
+          <p:nvPr>
+            <p:ph type="title"/>
+          </p:nvPr>
+        </p:nvSpPr>
+        <p:spPr/>
+        <p:txBody>
+          <a:bodyPr/>
+          <a:lstStyle/>
+          <a:p>
+            <a:r>
               <a:rPr lang="de-DE" dirty="0" err="1"/>
               <a:t>Conclusion</a:t>
             </a:r>
@@ -5223,7 +5635,631 @@
           <a:bodyPr/>
           <a:lstStyle/>
           <a:p>
-            <a:endParaRPr lang="de-DE"/>
+            <a:r>
+              <a:rPr lang="de-DE" dirty="0" err="1"/>
+              <a:t>We</a:t>
+            </a:r>
+            <a:r>
+              <a:rPr lang="de-DE" dirty="0"/>
+              <a:t> </a:t>
+            </a:r>
+            <a:r>
+              <a:rPr lang="de-DE" dirty="0" err="1"/>
+              <a:t>managed</a:t>
+            </a:r>
+            <a:r>
+              <a:rPr lang="de-DE" dirty="0"/>
+              <a:t> </a:t>
+            </a:r>
+            <a:r>
+              <a:rPr lang="de-DE" dirty="0" err="1"/>
+              <a:t>to</a:t>
+            </a:r>
+            <a:r>
+              <a:rPr lang="de-DE" dirty="0"/>
+              <a:t> </a:t>
+            </a:r>
+            <a:r>
+              <a:rPr lang="de-DE" dirty="0" err="1"/>
+              <a:t>adjust</a:t>
+            </a:r>
+            <a:r>
+              <a:rPr lang="de-DE" dirty="0"/>
+              <a:t> </a:t>
+            </a:r>
+            <a:r>
+              <a:rPr lang="de-DE" dirty="0" err="1"/>
+              <a:t>our</a:t>
+            </a:r>
+            <a:r>
+              <a:rPr lang="de-DE" dirty="0"/>
+              <a:t> </a:t>
+            </a:r>
+            <a:r>
+              <a:rPr lang="de-DE" dirty="0" err="1"/>
+              <a:t>model</a:t>
+            </a:r>
+            <a:r>
+              <a:rPr lang="de-DE" dirty="0"/>
+              <a:t> </a:t>
+            </a:r>
+            <a:r>
+              <a:rPr lang="de-DE" dirty="0" err="1"/>
+              <a:t>to</a:t>
+            </a:r>
+            <a:r>
+              <a:rPr lang="de-DE" dirty="0"/>
+              <a:t> </a:t>
+            </a:r>
+            <a:r>
+              <a:rPr lang="de-DE" dirty="0" err="1"/>
+              <a:t>reach</a:t>
+            </a:r>
+            <a:r>
+              <a:rPr lang="de-DE" dirty="0"/>
+              <a:t> a </a:t>
+            </a:r>
+            <a:r>
+              <a:rPr lang="de-DE" dirty="0" err="1"/>
+              <a:t>successrate</a:t>
+            </a:r>
+            <a:r>
+              <a:rPr lang="de-DE" dirty="0"/>
+              <a:t> </a:t>
+            </a:r>
+            <a:r>
+              <a:rPr lang="de-DE" dirty="0" err="1"/>
+              <a:t>of</a:t>
+            </a:r>
+            <a:r>
+              <a:rPr lang="de-DE" dirty="0"/>
+              <a:t> 94% (17/18) </a:t>
+            </a:r>
+            <a:r>
+              <a:rPr lang="de-DE" dirty="0" err="1"/>
+              <a:t>with</a:t>
+            </a:r>
+            <a:r>
+              <a:rPr lang="de-DE" dirty="0"/>
+              <a:t> a </a:t>
+            </a:r>
+            <a:r>
+              <a:rPr lang="de-DE" dirty="0" err="1"/>
+              <a:t>start</a:t>
+            </a:r>
+            <a:r>
+              <a:rPr lang="de-DE" dirty="0"/>
+              <a:t> </a:t>
+            </a:r>
+            <a:r>
+              <a:rPr lang="de-DE" dirty="0" err="1"/>
+              <a:t>of</a:t>
+            </a:r>
+            <a:r>
+              <a:rPr lang="de-DE" dirty="0"/>
+              <a:t> 22% (4/18). The </a:t>
+            </a:r>
+            <a:r>
+              <a:rPr lang="de-DE" dirty="0" err="1"/>
+              <a:t>strongest</a:t>
+            </a:r>
+            <a:r>
+              <a:rPr lang="de-DE" dirty="0"/>
+              <a:t> </a:t>
+            </a:r>
+            <a:r>
+              <a:rPr lang="de-DE" dirty="0" err="1"/>
+              <a:t>impact</a:t>
+            </a:r>
+            <a:r>
+              <a:rPr lang="de-DE" dirty="0"/>
+              <a:t> was </a:t>
+            </a:r>
+            <a:r>
+              <a:rPr lang="de-DE" dirty="0" err="1"/>
+              <a:t>from</a:t>
+            </a:r>
+            <a:r>
+              <a:rPr lang="de-DE" dirty="0"/>
+              <a:t> </a:t>
+            </a:r>
+            <a:r>
+              <a:rPr lang="de-DE" dirty="0" err="1"/>
+              <a:t>describing</a:t>
+            </a:r>
+            <a:r>
+              <a:rPr lang="de-DE" dirty="0"/>
+              <a:t> </a:t>
+            </a:r>
+            <a:r>
+              <a:rPr lang="de-DE" dirty="0" err="1"/>
+              <a:t>the</a:t>
+            </a:r>
+            <a:r>
+              <a:rPr lang="de-DE" dirty="0"/>
+              <a:t> </a:t>
+            </a:r>
+            <a:r>
+              <a:rPr lang="de-DE" dirty="0" err="1"/>
+              <a:t>tables</a:t>
+            </a:r>
+            <a:r>
+              <a:rPr lang="de-DE" dirty="0"/>
+              <a:t> </a:t>
+            </a:r>
+            <a:r>
+              <a:rPr lang="de-DE" dirty="0" err="1"/>
+              <a:t>to</a:t>
+            </a:r>
+            <a:r>
+              <a:rPr lang="de-DE" dirty="0"/>
+              <a:t> </a:t>
+            </a:r>
+            <a:r>
+              <a:rPr lang="de-DE" dirty="0" err="1"/>
+              <a:t>the</a:t>
+            </a:r>
+            <a:r>
+              <a:rPr lang="de-DE" dirty="0"/>
+              <a:t> </a:t>
+            </a:r>
+            <a:r>
+              <a:rPr lang="de-DE" dirty="0" err="1"/>
+              <a:t>model</a:t>
+            </a:r>
+            <a:r>
+              <a:rPr lang="de-DE" dirty="0"/>
+              <a:t> and </a:t>
+            </a:r>
+            <a:r>
+              <a:rPr lang="de-DE" dirty="0" err="1"/>
+              <a:t>adjusting</a:t>
+            </a:r>
+            <a:r>
+              <a:rPr lang="de-DE" dirty="0"/>
+              <a:t> </a:t>
+            </a:r>
+            <a:r>
+              <a:rPr lang="de-DE" dirty="0" err="1"/>
+              <a:t>the</a:t>
+            </a:r>
+            <a:r>
+              <a:rPr lang="de-DE" dirty="0"/>
+              <a:t> </a:t>
+            </a:r>
+            <a:r>
+              <a:rPr lang="de-DE" dirty="0" err="1"/>
+              <a:t>model</a:t>
+            </a:r>
+            <a:r>
+              <a:rPr lang="de-DE" dirty="0"/>
+              <a:t> </a:t>
+            </a:r>
+            <a:r>
+              <a:rPr lang="de-DE" dirty="0" err="1"/>
+              <a:t>from</a:t>
+            </a:r>
+            <a:r>
+              <a:rPr lang="de-DE" dirty="0"/>
+              <a:t> </a:t>
+            </a:r>
+            <a:r>
+              <a:rPr lang="de-DE" dirty="0" err="1"/>
+              <a:t>llama</a:t>
+            </a:r>
+            <a:r>
+              <a:rPr lang="de-DE" dirty="0"/>
+              <a:t> </a:t>
+            </a:r>
+            <a:r>
+              <a:rPr lang="de-DE" dirty="0" err="1"/>
+              <a:t>to</a:t>
+            </a:r>
+            <a:r>
+              <a:rPr lang="de-DE" dirty="0"/>
+              <a:t> </a:t>
+            </a:r>
+            <a:r>
+              <a:rPr lang="de-DE" dirty="0" err="1"/>
+              <a:t>qwen</a:t>
+            </a:r>
+            <a:r>
+              <a:rPr lang="de-DE" dirty="0"/>
+              <a:t>. </a:t>
+            </a:r>
+            <a:r>
+              <a:rPr lang="de-DE" dirty="0" err="1"/>
+              <a:t>We</a:t>
+            </a:r>
+            <a:r>
+              <a:rPr lang="de-DE" dirty="0"/>
+              <a:t> </a:t>
+            </a:r>
+            <a:r>
+              <a:rPr lang="de-DE" dirty="0" err="1"/>
+              <a:t>wanted</a:t>
+            </a:r>
+            <a:r>
+              <a:rPr lang="de-DE" dirty="0"/>
+              <a:t> </a:t>
+            </a:r>
+            <a:r>
+              <a:rPr lang="de-DE" dirty="0" err="1"/>
+              <a:t>to</a:t>
+            </a:r>
+            <a:r>
+              <a:rPr lang="de-DE" dirty="0"/>
+              <a:t> </a:t>
+            </a:r>
+            <a:r>
+              <a:rPr lang="de-DE" dirty="0" err="1"/>
+              <a:t>prove</a:t>
+            </a:r>
+            <a:r>
+              <a:rPr lang="de-DE" dirty="0"/>
+              <a:t> </a:t>
+            </a:r>
+            <a:r>
+              <a:rPr lang="de-DE" dirty="0" err="1"/>
+              <a:t>that</a:t>
+            </a:r>
+            <a:r>
+              <a:rPr lang="de-DE" dirty="0"/>
+              <a:t> </a:t>
+            </a:r>
+            <a:r>
+              <a:rPr lang="de-DE" dirty="0" err="1"/>
+              <a:t>our</a:t>
+            </a:r>
+            <a:r>
+              <a:rPr lang="de-DE" dirty="0"/>
+              <a:t> </a:t>
+            </a:r>
+            <a:r>
+              <a:rPr lang="de-DE" dirty="0" err="1"/>
+              <a:t>model</a:t>
+            </a:r>
+            <a:r>
+              <a:rPr lang="de-DE" dirty="0"/>
+              <a:t> </a:t>
+            </a:r>
+            <a:r>
+              <a:rPr lang="de-DE" dirty="0" err="1"/>
+              <a:t>is</a:t>
+            </a:r>
+            <a:r>
+              <a:rPr lang="de-DE" dirty="0"/>
+              <a:t> not </a:t>
+            </a:r>
+            <a:r>
+              <a:rPr lang="de-DE" dirty="0" err="1"/>
+              <a:t>completly</a:t>
+            </a:r>
+            <a:r>
+              <a:rPr lang="de-DE" dirty="0"/>
+              <a:t> </a:t>
+            </a:r>
+            <a:r>
+              <a:rPr lang="de-DE" dirty="0" err="1"/>
+              <a:t>overfitting</a:t>
+            </a:r>
+            <a:r>
+              <a:rPr lang="de-DE" dirty="0"/>
+              <a:t> </a:t>
+            </a:r>
+            <a:r>
+              <a:rPr lang="de-DE" dirty="0" err="1"/>
+              <a:t>to</a:t>
+            </a:r>
+            <a:r>
+              <a:rPr lang="de-DE" dirty="0"/>
+              <a:t> </a:t>
+            </a:r>
+            <a:r>
+              <a:rPr lang="de-DE" dirty="0" err="1"/>
+              <a:t>the</a:t>
+            </a:r>
+            <a:r>
+              <a:rPr lang="de-DE" dirty="0"/>
+              <a:t> </a:t>
+            </a:r>
+            <a:r>
+              <a:rPr lang="de-DE" dirty="0" err="1"/>
+              <a:t>questions</a:t>
+            </a:r>
+            <a:r>
+              <a:rPr lang="de-DE" dirty="0"/>
+              <a:t> </a:t>
+            </a:r>
+            <a:r>
+              <a:rPr lang="de-DE" dirty="0" err="1"/>
+              <a:t>we</a:t>
+            </a:r>
+            <a:r>
+              <a:rPr lang="de-DE" dirty="0"/>
+              <a:t> </a:t>
+            </a:r>
+            <a:r>
+              <a:rPr lang="de-DE" dirty="0" err="1"/>
+              <a:t>optimezed</a:t>
+            </a:r>
+            <a:r>
+              <a:rPr lang="de-DE" dirty="0"/>
+              <a:t> </a:t>
+            </a:r>
+            <a:r>
+              <a:rPr lang="de-DE" dirty="0" err="1"/>
+              <a:t>it</a:t>
+            </a:r>
+            <a:r>
+              <a:rPr lang="de-DE" dirty="0"/>
+              <a:t> on and </a:t>
+            </a:r>
+            <a:r>
+              <a:rPr lang="de-DE" dirty="0" err="1"/>
+              <a:t>it</a:t>
+            </a:r>
+            <a:r>
+              <a:rPr lang="de-DE" dirty="0"/>
+              <a:t> </a:t>
+            </a:r>
+            <a:r>
+              <a:rPr lang="de-DE" dirty="0" err="1"/>
+              <a:t>reached</a:t>
+            </a:r>
+            <a:r>
+              <a:rPr lang="de-DE" dirty="0"/>
+              <a:t> 50% (9/18) </a:t>
+            </a:r>
+            <a:r>
+              <a:rPr lang="de-DE" dirty="0" err="1"/>
+              <a:t>which</a:t>
+            </a:r>
+            <a:r>
+              <a:rPr lang="de-DE" dirty="0"/>
+              <a:t> </a:t>
+            </a:r>
+            <a:r>
+              <a:rPr lang="de-DE" dirty="0" err="1"/>
+              <a:t>means</a:t>
+            </a:r>
+            <a:r>
+              <a:rPr lang="de-DE" dirty="0"/>
+              <a:t> </a:t>
+            </a:r>
+            <a:r>
+              <a:rPr lang="de-DE" dirty="0" err="1"/>
+              <a:t>it</a:t>
+            </a:r>
+            <a:r>
+              <a:rPr lang="de-DE" dirty="0"/>
+              <a:t> </a:t>
+            </a:r>
+            <a:r>
+              <a:rPr lang="de-DE" dirty="0" err="1"/>
+              <a:t>is</a:t>
+            </a:r>
+            <a:r>
+              <a:rPr lang="de-DE" dirty="0"/>
+              <a:t> not </a:t>
+            </a:r>
+            <a:r>
+              <a:rPr lang="de-DE" dirty="0" err="1"/>
+              <a:t>generalizing</a:t>
+            </a:r>
+            <a:r>
+              <a:rPr lang="de-DE" dirty="0"/>
+              <a:t> </a:t>
+            </a:r>
+            <a:r>
+              <a:rPr lang="de-DE" dirty="0" err="1"/>
+              <a:t>that</a:t>
+            </a:r>
+            <a:r>
+              <a:rPr lang="de-DE" dirty="0"/>
+              <a:t> </a:t>
+            </a:r>
+            <a:r>
+              <a:rPr lang="de-DE" dirty="0" err="1"/>
+              <a:t>well</a:t>
+            </a:r>
+            <a:r>
+              <a:rPr lang="de-DE" dirty="0"/>
+              <a:t>.</a:t>
+            </a:r>
+          </a:p>
+          <a:p>
+            <a:endParaRPr lang="de-DE" dirty="0"/>
+          </a:p>
+          <a:p>
+            <a:r>
+              <a:rPr lang="de-DE" dirty="0"/>
+              <a:t>In </a:t>
+            </a:r>
+            <a:r>
+              <a:rPr lang="de-DE" dirty="0" err="1"/>
+              <a:t>the</a:t>
+            </a:r>
+            <a:r>
+              <a:rPr lang="de-DE" dirty="0"/>
+              <a:t> </a:t>
+            </a:r>
+            <a:r>
+              <a:rPr lang="de-DE" dirty="0" err="1"/>
+              <a:t>future</a:t>
+            </a:r>
+            <a:r>
+              <a:rPr lang="de-DE" dirty="0"/>
+              <a:t> </a:t>
+            </a:r>
+            <a:r>
+              <a:rPr lang="de-DE" dirty="0" err="1"/>
+              <a:t>we</a:t>
+            </a:r>
+            <a:r>
+              <a:rPr lang="de-DE" dirty="0"/>
+              <a:t> </a:t>
+            </a:r>
+            <a:r>
+              <a:rPr lang="de-DE" dirty="0" err="1"/>
+              <a:t>would</a:t>
+            </a:r>
+            <a:r>
+              <a:rPr lang="de-DE" dirty="0"/>
+              <a:t> like </a:t>
+            </a:r>
+            <a:r>
+              <a:rPr lang="de-DE" dirty="0" err="1"/>
+              <a:t>to</a:t>
+            </a:r>
+            <a:r>
+              <a:rPr lang="de-DE" dirty="0"/>
+              <a:t> </a:t>
+            </a:r>
+            <a:r>
+              <a:rPr lang="de-DE" dirty="0" err="1"/>
+              <a:t>optimize</a:t>
+            </a:r>
+            <a:r>
+              <a:rPr lang="de-DE" dirty="0"/>
+              <a:t> on </a:t>
+            </a:r>
+            <a:r>
+              <a:rPr lang="de-DE" dirty="0" err="1"/>
+              <a:t>parameters</a:t>
+            </a:r>
+            <a:r>
+              <a:rPr lang="de-DE" dirty="0"/>
+              <a:t> </a:t>
+            </a:r>
+            <a:r>
+              <a:rPr lang="de-DE" dirty="0" err="1"/>
+              <a:t>that</a:t>
+            </a:r>
+            <a:r>
+              <a:rPr lang="de-DE" dirty="0"/>
+              <a:t> </a:t>
+            </a:r>
+            <a:r>
+              <a:rPr lang="de-DE" dirty="0" err="1"/>
+              <a:t>are</a:t>
+            </a:r>
+            <a:r>
+              <a:rPr lang="de-DE" dirty="0"/>
+              <a:t> </a:t>
+            </a:r>
+            <a:r>
+              <a:rPr lang="de-DE" dirty="0" err="1"/>
+              <a:t>generalizing</a:t>
+            </a:r>
+            <a:r>
+              <a:rPr lang="de-DE" dirty="0"/>
+              <a:t>, </a:t>
+            </a:r>
+            <a:r>
+              <a:rPr lang="de-DE" dirty="0" err="1"/>
+              <a:t>meaning</a:t>
+            </a:r>
+            <a:r>
+              <a:rPr lang="de-DE" dirty="0"/>
+              <a:t> </a:t>
+            </a:r>
+            <a:r>
+              <a:rPr lang="de-DE" dirty="0" err="1"/>
+              <a:t>to</a:t>
+            </a:r>
+            <a:r>
+              <a:rPr lang="de-DE" dirty="0"/>
+              <a:t> </a:t>
+            </a:r>
+            <a:r>
+              <a:rPr lang="de-DE" dirty="0" err="1"/>
+              <a:t>evaluate</a:t>
+            </a:r>
+            <a:r>
+              <a:rPr lang="de-DE" dirty="0"/>
+              <a:t> different </a:t>
+            </a:r>
+            <a:r>
+              <a:rPr lang="de-DE" dirty="0" err="1"/>
+              <a:t>test</a:t>
+            </a:r>
+            <a:r>
+              <a:rPr lang="de-DE" dirty="0"/>
+              <a:t> </a:t>
+            </a:r>
+            <a:r>
+              <a:rPr lang="de-DE" dirty="0" err="1"/>
+              <a:t>sets</a:t>
+            </a:r>
+            <a:r>
+              <a:rPr lang="de-DE" dirty="0"/>
+              <a:t> at </a:t>
+            </a:r>
+            <a:r>
+              <a:rPr lang="de-DE" dirty="0" err="1"/>
+              <a:t>the</a:t>
+            </a:r>
+            <a:r>
+              <a:rPr lang="de-DE" dirty="0"/>
+              <a:t> same time </a:t>
+            </a:r>
+            <a:r>
+              <a:rPr lang="de-DE" dirty="0" err="1"/>
+              <a:t>to</a:t>
+            </a:r>
+            <a:r>
+              <a:rPr lang="de-DE" dirty="0"/>
+              <a:t> check </a:t>
+            </a:r>
+            <a:r>
+              <a:rPr lang="de-DE" dirty="0" err="1"/>
+              <a:t>if</a:t>
+            </a:r>
+            <a:r>
+              <a:rPr lang="de-DE" dirty="0"/>
+              <a:t> </a:t>
+            </a:r>
+            <a:r>
+              <a:rPr lang="de-DE" dirty="0" err="1"/>
+              <a:t>we</a:t>
+            </a:r>
+            <a:r>
+              <a:rPr lang="de-DE" dirty="0"/>
+              <a:t> </a:t>
+            </a:r>
+            <a:r>
+              <a:rPr lang="de-DE" dirty="0" err="1"/>
+              <a:t>reached</a:t>
+            </a:r>
+            <a:r>
+              <a:rPr lang="de-DE" dirty="0"/>
+              <a:t> </a:t>
+            </a:r>
+            <a:r>
+              <a:rPr lang="de-DE" dirty="0" err="1"/>
+              <a:t>better</a:t>
+            </a:r>
+            <a:r>
+              <a:rPr lang="de-DE" dirty="0"/>
+              <a:t> </a:t>
+            </a:r>
+            <a:r>
+              <a:rPr lang="de-DE" dirty="0" err="1"/>
+              <a:t>scores</a:t>
+            </a:r>
+            <a:r>
+              <a:rPr lang="de-DE" dirty="0"/>
+              <a:t> in </a:t>
+            </a:r>
+            <a:r>
+              <a:rPr lang="de-DE" dirty="0" err="1"/>
+              <a:t>general</a:t>
+            </a:r>
+            <a:r>
+              <a:rPr lang="de-DE" dirty="0"/>
+              <a:t>.</a:t>
+            </a:r>
           </a:p>
         </p:txBody>
       </p:sp>

--- a/docs/DHW2_Wagner_Kryeziu_Johnson.pptx
+++ b/docs/DHW2_Wagner_Kryeziu_Johnson.pptx
@@ -473,6 +473,90 @@
 </file>
 
 <file path=ppt/notesSlides/notesSlide1.xml><?xml version="1.0" encoding="utf-8"?>
+<p:notes xmlns:a="http://schemas.openxmlformats.org/drawingml/2006/main" xmlns:r="http://schemas.openxmlformats.org/officeDocument/2006/relationships" xmlns:p="http://schemas.openxmlformats.org/presentationml/2006/main">
+  <p:cSld>
+    <p:spTree>
+      <p:nvGrpSpPr>
+        <p:cNvPr id="1" name=""/>
+        <p:cNvGrpSpPr/>
+        <p:nvPr/>
+      </p:nvGrpSpPr>
+      <p:grpSpPr>
+        <a:xfrm>
+          <a:off x="0" y="0"/>
+          <a:ext cx="0" cy="0"/>
+          <a:chOff x="0" y="0"/>
+          <a:chExt cx="0" cy="0"/>
+        </a:xfrm>
+      </p:grpSpPr>
+      <p:sp>
+        <p:nvSpPr>
+          <p:cNvPr id="2" name="Folienbildplatzhalter 1"/>
+          <p:cNvSpPr>
+            <a:spLocks noGrp="1" noRot="1" noChangeAspect="1"/>
+          </p:cNvSpPr>
+          <p:nvPr>
+            <p:ph type="sldImg"/>
+          </p:nvPr>
+        </p:nvSpPr>
+        <p:spPr/>
+      </p:sp>
+      <p:sp>
+        <p:nvSpPr>
+          <p:cNvPr id="3" name="Notizenplatzhalter 2"/>
+          <p:cNvSpPr>
+            <a:spLocks noGrp="1"/>
+          </p:cNvSpPr>
+          <p:nvPr>
+            <p:ph type="body" idx="1"/>
+          </p:nvPr>
+        </p:nvSpPr>
+        <p:spPr/>
+        <p:txBody>
+          <a:bodyPr/>
+          <a:lstStyle/>
+          <a:p>
+            <a:endParaRPr lang="de-DE" dirty="0"/>
+          </a:p>
+        </p:txBody>
+      </p:sp>
+      <p:sp>
+        <p:nvSpPr>
+          <p:cNvPr id="4" name="Foliennummernplatzhalter 3"/>
+          <p:cNvSpPr>
+            <a:spLocks noGrp="1"/>
+          </p:cNvSpPr>
+          <p:nvPr>
+            <p:ph type="sldNum" sz="quarter" idx="5"/>
+          </p:nvPr>
+        </p:nvSpPr>
+        <p:spPr/>
+        <p:txBody>
+          <a:bodyPr/>
+          <a:lstStyle/>
+          <a:p>
+            <a:fld id="{D0AE7357-186D-1741-AC65-6D5045F5A14B}" type="slidenum">
+              <a:rPr lang="de-DE" smtClean="0"/>
+              <a:t>3</a:t>
+            </a:fld>
+            <a:endParaRPr lang="de-DE"/>
+          </a:p>
+        </p:txBody>
+      </p:sp>
+    </p:spTree>
+    <p:extLst>
+      <p:ext uri="{BB962C8B-B14F-4D97-AF65-F5344CB8AC3E}">
+        <p14:creationId xmlns:p14="http://schemas.microsoft.com/office/powerpoint/2010/main" val="542115409"/>
+      </p:ext>
+    </p:extLst>
+  </p:cSld>
+  <p:clrMapOvr>
+    <a:masterClrMapping/>
+  </p:clrMapOvr>
+</p:notes>
+</file>
+
+<file path=ppt/notesSlides/notesSlide2.xml><?xml version="1.0" encoding="utf-8"?>
 <p:notes xmlns:a="http://schemas.openxmlformats.org/drawingml/2006/main" xmlns:r="http://schemas.openxmlformats.org/officeDocument/2006/relationships" xmlns:p="http://schemas.openxmlformats.org/presentationml/2006/main">
   <p:cSld>
     <p:spTree>
@@ -3779,6 +3863,14 @@
 <file path=ppt/slides/slide1.xml><?xml version="1.0" encoding="utf-8"?>
 <p:sld xmlns:a="http://schemas.openxmlformats.org/drawingml/2006/main" xmlns:r="http://schemas.openxmlformats.org/officeDocument/2006/relationships" xmlns:p="http://schemas.openxmlformats.org/presentationml/2006/main">
   <p:cSld>
+    <p:bg>
+      <p:bgPr>
+        <a:solidFill>
+          <a:srgbClr val="000000"/>
+        </a:solidFill>
+        <a:effectLst/>
+      </p:bgPr>
+    </p:bg>
     <p:spTree>
       <p:nvGrpSpPr>
         <p:cNvPr id="1" name=""/>
@@ -3795,6 +3887,102 @@
       </p:grpSpPr>
       <p:sp>
         <p:nvSpPr>
+          <p:cNvPr id="10" name="Rectangle 9">
+            <a:extLst>
+              <a:ext uri="{FF2B5EF4-FFF2-40B4-BE49-F238E27FC236}">
+                <a16:creationId xmlns:a16="http://schemas.microsoft.com/office/drawing/2014/main" id="{71B2258F-86CA-4D4D-8270-BC05FCDEBFB3}"/>
+              </a:ext>
+              <a:ext uri="{C183D7F6-B498-43B3-948B-1728B52AA6E4}">
+                <adec:decorative xmlns:adec="http://schemas.microsoft.com/office/drawing/2017/decorative" val="1"/>
+              </a:ext>
+            </a:extLst>
+          </p:cNvPr>
+          <p:cNvSpPr>
+            <a:spLocks noGrp="1" noRot="1" noChangeAspect="1" noMove="1" noResize="1" noEditPoints="1" noAdjustHandles="1" noChangeArrowheads="1" noChangeShapeType="1" noTextEdit="1"/>
+          </p:cNvSpPr>
+          <p:nvPr>
+            <p:extLst>
+              <p:ext uri="{386F3935-93C4-4BCD-93E2-E3B085C9AB24}">
+                <p16:designElem xmlns:p16="http://schemas.microsoft.com/office/powerpoint/2015/main" val="1"/>
+              </p:ext>
+            </p:extLst>
+          </p:nvPr>
+        </p:nvSpPr>
+        <p:spPr>
+          <a:xfrm>
+            <a:off x="0" y="0"/>
+            <a:ext cx="12192000" cy="6857999"/>
+          </a:xfrm>
+          <a:prstGeom prst="rect">
+            <a:avLst/>
+          </a:prstGeom>
+          <a:solidFill>
+            <a:srgbClr val="000000"/>
+          </a:solidFill>
+          <a:ln>
+            <a:noFill/>
+          </a:ln>
+        </p:spPr>
+        <p:style>
+          <a:lnRef idx="2">
+            <a:schemeClr val="accent1">
+              <a:shade val="50000"/>
+            </a:schemeClr>
+          </a:lnRef>
+          <a:fillRef idx="1">
+            <a:schemeClr val="accent1"/>
+          </a:fillRef>
+          <a:effectRef idx="0">
+            <a:schemeClr val="accent1"/>
+          </a:effectRef>
+          <a:fontRef idx="minor">
+            <a:schemeClr val="lt1"/>
+          </a:fontRef>
+        </p:style>
+        <p:txBody>
+          <a:bodyPr rtlCol="0" anchor="ctr"/>
+          <a:lstStyle/>
+          <a:p>
+            <a:pPr algn="ctr"/>
+            <a:endParaRPr lang="en-US"/>
+          </a:p>
+        </p:txBody>
+      </p:sp>
+      <p:pic>
+        <p:nvPicPr>
+          <p:cNvPr id="5" name="Grafik 4">
+            <a:extLst>
+              <a:ext uri="{FF2B5EF4-FFF2-40B4-BE49-F238E27FC236}">
+                <a16:creationId xmlns:a16="http://schemas.microsoft.com/office/drawing/2014/main" id="{E5D04CC0-71F4-60DD-5100-B281B6726F6E}"/>
+              </a:ext>
+            </a:extLst>
+          </p:cNvPr>
+          <p:cNvPicPr>
+            <a:picLocks noChangeAspect="1"/>
+          </p:cNvPicPr>
+          <p:nvPr/>
+        </p:nvPicPr>
+        <p:blipFill>
+          <a:blip r:embed="rId2">
+            <a:alphaModFix amt="50000"/>
+          </a:blip>
+          <a:srcRect t="881"/>
+          <a:stretch>
+            <a:fillRect/>
+          </a:stretch>
+        </p:blipFill>
+        <p:spPr>
+          <a:xfrm>
+            <a:off x="20" y="1"/>
+            <a:ext cx="12191980" cy="6857999"/>
+          </a:xfrm>
+          <a:prstGeom prst="rect">
+            <a:avLst/>
+          </a:prstGeom>
+        </p:spPr>
+      </p:pic>
+      <p:sp>
+        <p:nvSpPr>
           <p:cNvPr id="2" name="Titel 1">
             <a:extLst>
               <a:ext uri="{FF2B5EF4-FFF2-40B4-BE49-F238E27FC236}">
@@ -3809,13 +3997,24 @@
             <p:ph type="ctrTitle"/>
           </p:nvPr>
         </p:nvSpPr>
-        <p:spPr/>
-        <p:txBody>
-          <a:bodyPr/>
+        <p:spPr>
+          <a:xfrm>
+            <a:off x="1524000" y="1122362"/>
+            <a:ext cx="9144000" cy="2900518"/>
+          </a:xfrm>
+        </p:spPr>
+        <p:txBody>
+          <a:bodyPr>
+            <a:normAutofit/>
+          </a:bodyPr>
           <a:lstStyle/>
           <a:p>
             <a:r>
-              <a:rPr lang="de-DE" dirty="0"/>
+              <a:rPr lang="de-DE">
+                <a:solidFill>
+                  <a:srgbClr val="FFFFFF"/>
+                </a:solidFill>
+              </a:rPr>
               <a:t>DWH2 Final Projekt</a:t>
             </a:r>
           </a:p>
@@ -3837,12 +4036,72 @@
             <p:ph type="subTitle" idx="1"/>
           </p:nvPr>
         </p:nvSpPr>
-        <p:spPr/>
-        <p:txBody>
-          <a:bodyPr/>
+        <p:spPr>
+          <a:xfrm>
+            <a:off x="1524000" y="4159404"/>
+            <a:ext cx="9144000" cy="1098395"/>
+          </a:xfrm>
+        </p:spPr>
+        <p:txBody>
+          <a:bodyPr>
+            <a:normAutofit/>
+          </a:bodyPr>
           <a:lstStyle/>
           <a:p>
-            <a:endParaRPr lang="de-DE"/>
+            <a:r>
+              <a:rPr lang="de-DE" sz="1700" dirty="0" err="1"/>
+              <a:t>Github</a:t>
+            </a:r>
+            <a:r>
+              <a:rPr lang="de-DE" sz="1700" dirty="0"/>
+              <a:t>: </a:t>
+            </a:r>
+            <a:r>
+              <a:rPr lang="de-DE" sz="1700" dirty="0">
+                <a:hlinkClick r:id="rId3">
+                  <a:extLst>
+                    <a:ext uri="{A12FA001-AC4F-418D-AE19-62706E023703}">
+                      <ahyp:hlinkClr xmlns:ahyp="http://schemas.microsoft.com/office/drawing/2018/hyperlinkcolor" val="tx"/>
+                    </a:ext>
+                  </a:extLst>
+                </a:hlinkClick>
+              </a:rPr>
+              <a:t>https://github.com/bjoern555/dwh2-text-to-sql</a:t>
+            </a:r>
+            <a:br>
+              <a:rPr lang="de-DE" sz="1700" dirty="0">
+                <a:solidFill>
+                  <a:srgbClr val="FFFFFF"/>
+                </a:solidFill>
+              </a:rPr>
+            </a:br>
+            <a:br>
+              <a:rPr lang="de-DE" sz="1700" dirty="0">
+                <a:solidFill>
+                  <a:srgbClr val="FFFFFF"/>
+                </a:solidFill>
+              </a:rPr>
+            </a:br>
+            <a:r>
+              <a:rPr lang="de-DE" sz="1700" dirty="0">
+                <a:solidFill>
+                  <a:srgbClr val="FFFFFF"/>
+                </a:solidFill>
+              </a:rPr>
+              <a:t>Michal Johnson, Leona Kryeziu, Björn Wagner</a:t>
+            </a:r>
+            <a:br>
+              <a:rPr lang="de-DE" sz="1700" dirty="0">
+                <a:solidFill>
+                  <a:srgbClr val="FFFFFF"/>
+                </a:solidFill>
+              </a:rPr>
+            </a:br>
+            <a:endParaRPr lang="de-DE" sz="1700" dirty="0">
+              <a:solidFill>
+                <a:srgbClr val="FFFFFF"/>
+              </a:solidFill>
+            </a:endParaRPr>
           </a:p>
         </p:txBody>
       </p:sp>
@@ -3854,7 +4113,7 @@
     </p:extLst>
   </p:cSld>
   <p:clrMapOvr>
-    <a:masterClrMapping/>
+    <a:overrideClrMapping bg1="dk1" tx1="lt1" bg2="dk2" tx2="lt2" accent1="accent1" accent2="accent2" accent3="accent3" accent4="accent4" accent5="accent5" accent6="accent6" hlink="hlink" folHlink="folHlink"/>
   </p:clrMapOvr>
 </p:sld>
 </file>
@@ -4579,7 +4838,7 @@
         </p:spPr>
         <p:txBody>
           <a:bodyPr>
-            <a:normAutofit fontScale="77500" lnSpcReduction="20000"/>
+            <a:normAutofit fontScale="62500" lnSpcReduction="20000"/>
           </a:bodyPr>
           <a:lstStyle/>
           <a:p>
@@ -4587,158 +4846,158 @@
               <a:buNone/>
             </a:pPr>
             <a:r>
-              <a:rPr lang="de-CH" sz="2100" b="1" dirty="0"/>
+              <a:rPr lang="de-CH" sz="2600" b="1" dirty="0"/>
               <a:t>LLM:</a:t>
             </a:r>
-            <a:endParaRPr lang="de-CH" sz="2100" dirty="0"/>
-          </a:p>
-          <a:p>
-            <a:r>
-              <a:rPr lang="de-CH" sz="2100" dirty="0"/>
+            <a:endParaRPr lang="de-CH" sz="2600" dirty="0"/>
+          </a:p>
+          <a:p>
+            <a:r>
+              <a:rPr lang="de-CH" sz="2600" dirty="0"/>
               <a:t>Provider: </a:t>
             </a:r>
             <a:r>
-              <a:rPr lang="de-CH" sz="2100" dirty="0" err="1"/>
+              <a:rPr lang="de-CH" sz="2600" dirty="0" err="1"/>
               <a:t>Ollama</a:t>
             </a:r>
             <a:r>
-              <a:rPr lang="de-CH" sz="2100" dirty="0"/>
+              <a:rPr lang="de-CH" sz="2600" dirty="0"/>
               <a:t> (</a:t>
             </a:r>
             <a:r>
-              <a:rPr lang="de-CH" sz="2100" dirty="0" err="1"/>
+              <a:rPr lang="de-CH" sz="2600" dirty="0" err="1"/>
               <a:t>local</a:t>
             </a:r>
             <a:r>
-              <a:rPr lang="de-CH" sz="2100" dirty="0"/>
+              <a:rPr lang="de-CH" sz="2600" dirty="0"/>
               <a:t>) mit llama3.2:1b oder OpenAI gpt-4o-mini</a:t>
             </a:r>
           </a:p>
           <a:p>
             <a:r>
-              <a:rPr lang="de-CH" sz="2100" dirty="0"/>
+              <a:rPr lang="de-CH" sz="2600" dirty="0"/>
               <a:t>Konfigurierbar via .</a:t>
             </a:r>
             <a:r>
-              <a:rPr lang="de-CH" sz="2100" dirty="0" err="1"/>
+              <a:rPr lang="de-CH" sz="2600" dirty="0" err="1"/>
               <a:t>env</a:t>
             </a:r>
             <a:r>
-              <a:rPr lang="de-CH" sz="2100" dirty="0"/>
+              <a:rPr lang="de-CH" sz="2600" dirty="0"/>
               <a:t> (LLM_PROVIDER, OLLAMA_MODEL, OPENAI_MODEL)</a:t>
             </a:r>
           </a:p>
           <a:p>
-            <a:endParaRPr lang="de-CH" sz="2100" dirty="0"/>
+            <a:endParaRPr lang="de-CH" sz="2600" dirty="0"/>
           </a:p>
           <a:p>
             <a:pPr marL="0" indent="0">
               <a:buNone/>
             </a:pPr>
             <a:r>
-              <a:rPr lang="de-CH" sz="2100" b="1" dirty="0"/>
+              <a:rPr lang="de-CH" sz="2600" b="1" dirty="0"/>
               <a:t>Database</a:t>
             </a:r>
-            <a:endParaRPr lang="de-CH" sz="2100" dirty="0"/>
-          </a:p>
-          <a:p>
-            <a:r>
-              <a:rPr lang="de-CH" sz="2100" dirty="0"/>
+            <a:endParaRPr lang="de-CH" sz="2600" dirty="0"/>
+          </a:p>
+          <a:p>
+            <a:r>
+              <a:rPr lang="de-CH" sz="2600" dirty="0"/>
               <a:t>PostgreSQL, Schema exp_v3, gehostet auf ZHAW-Server</a:t>
             </a:r>
           </a:p>
           <a:p>
             <a:r>
-              <a:rPr lang="de-CH" sz="2100" dirty="0"/>
+              <a:rPr lang="de-CH" sz="2600" dirty="0"/>
               <a:t>Verbindung via </a:t>
             </a:r>
             <a:r>
-              <a:rPr lang="de-CH" sz="2100" dirty="0" err="1"/>
+              <a:rPr lang="de-CH" sz="2600" dirty="0" err="1"/>
               <a:t>LangChain</a:t>
             </a:r>
             <a:r>
-              <a:rPr lang="de-CH" sz="2100" dirty="0"/>
+              <a:rPr lang="de-CH" sz="2600" dirty="0"/>
               <a:t> </a:t>
             </a:r>
             <a:r>
-              <a:rPr lang="de-CH" sz="2100" dirty="0" err="1"/>
+              <a:rPr lang="de-CH" sz="2600" dirty="0" err="1"/>
               <a:t>SQLDatabase</a:t>
             </a:r>
-            <a:endParaRPr lang="de-CH" sz="2100" dirty="0"/>
+            <a:endParaRPr lang="de-CH" sz="2600" dirty="0"/>
           </a:p>
           <a:p>
             <a:pPr marL="0" indent="0">
               <a:buNone/>
             </a:pPr>
-            <a:endParaRPr lang="de-CH" sz="2100" b="1" dirty="0"/>
+            <a:endParaRPr lang="de-CH" sz="2600" b="1" dirty="0"/>
           </a:p>
           <a:p>
             <a:pPr marL="0" indent="0">
               <a:buNone/>
             </a:pPr>
             <a:r>
-              <a:rPr lang="de-CH" sz="2100" b="1" dirty="0"/>
+              <a:rPr lang="de-CH" sz="2600" b="1" dirty="0"/>
               <a:t>Evaluation </a:t>
             </a:r>
             <a:r>
-              <a:rPr lang="de-CH" sz="2100" b="1" dirty="0" err="1"/>
+              <a:rPr lang="de-CH" sz="2600" b="1" dirty="0" err="1"/>
               <a:t>Metric</a:t>
             </a:r>
-            <a:endParaRPr lang="de-CH" sz="2100" dirty="0"/>
-          </a:p>
-          <a:p>
-            <a:r>
-              <a:rPr lang="de-CH" sz="2100" dirty="0" err="1"/>
+            <a:endParaRPr lang="de-CH" sz="2600" dirty="0"/>
+          </a:p>
+          <a:p>
+            <a:r>
+              <a:rPr lang="de-CH" sz="2600" dirty="0" err="1"/>
               <a:t>Execution</a:t>
             </a:r>
             <a:r>
-              <a:rPr lang="de-CH" sz="2100" dirty="0"/>
-              <a:t> </a:t>
-            </a:r>
-            <a:r>
-              <a:rPr lang="de-CH" sz="2100" dirty="0" err="1"/>
+              <a:rPr lang="de-CH" sz="2600" dirty="0"/>
+              <a:t> </a:t>
+            </a:r>
+            <a:r>
+              <a:rPr lang="de-CH" sz="2600" dirty="0" err="1"/>
               <a:t>Accuracy</a:t>
             </a:r>
             <a:r>
-              <a:rPr lang="de-CH" sz="2100" dirty="0"/>
+              <a:rPr lang="de-CH" sz="2600" dirty="0"/>
               <a:t>: </a:t>
             </a:r>
             <a:r>
-              <a:rPr lang="de-CH" sz="2100" dirty="0" err="1"/>
+              <a:rPr lang="de-CH" sz="2600" dirty="0" err="1"/>
               <a:t>Predicted</a:t>
             </a:r>
             <a:r>
-              <a:rPr lang="de-CH" sz="2100" dirty="0"/>
-              <a:t> </a:t>
-            </a:r>
-            <a:r>
-              <a:rPr lang="de-CH" sz="2100" dirty="0" err="1"/>
+              <a:rPr lang="de-CH" sz="2600" dirty="0"/>
+              <a:t> </a:t>
+            </a:r>
+            <a:r>
+              <a:rPr lang="de-CH" sz="2600" dirty="0" err="1"/>
               <a:t>result</a:t>
             </a:r>
             <a:r>
-              <a:rPr lang="de-CH" sz="2100" dirty="0"/>
+              <a:rPr lang="de-CH" sz="2600" dirty="0"/>
               <a:t> == Gold </a:t>
             </a:r>
             <a:r>
-              <a:rPr lang="de-CH" sz="2100" dirty="0" err="1"/>
+              <a:rPr lang="de-CH" sz="2600" dirty="0" err="1"/>
               <a:t>result</a:t>
             </a:r>
             <a:r>
-              <a:rPr lang="de-CH" sz="2100" dirty="0"/>
+              <a:rPr lang="de-CH" sz="2600" dirty="0"/>
               <a:t> (</a:t>
             </a:r>
             <a:r>
-              <a:rPr lang="de-CH" sz="2100" dirty="0" err="1"/>
+              <a:rPr lang="de-CH" sz="2600" dirty="0" err="1"/>
               <a:t>exact</a:t>
             </a:r>
             <a:r>
-              <a:rPr lang="de-CH" sz="2100" dirty="0"/>
+              <a:rPr lang="de-CH" sz="2600" dirty="0"/>
               <a:t> match)</a:t>
             </a:r>
           </a:p>
           <a:p>
             <a:r>
-              <a:rPr lang="de-CH" sz="2100" dirty="0"/>
+              <a:rPr lang="de-CH" sz="2600" dirty="0"/>
               <a:t>Test Set: 18 Fragen (Easy 3 / Medium 6 / Hard 5 / Extra 4)</a:t>
             </a:r>
           </a:p>
@@ -4747,9 +5006,9 @@
               <a:buNone/>
             </a:pPr>
             <a:br>
-              <a:rPr lang="de-CH" sz="1800" dirty="0"/>
+              <a:rPr lang="de-CH" sz="2600" dirty="0"/>
             </a:br>
-            <a:endParaRPr lang="de-CH" sz="1800" dirty="0"/>
+            <a:endParaRPr lang="de-CH" sz="2600" dirty="0"/>
           </a:p>
           <a:p>
             <a:endParaRPr lang="de-DE" dirty="0"/>
@@ -4774,7 +5033,7 @@
           <a:blip>
             <a:extLst>
               <a:ext uri="{96DAC541-7B7A-43D3-8B79-37D633B846F1}">
-                <asvg:svgBlip xmlns:asvg="http://schemas.microsoft.com/office/drawing/2016/SVG/main" r:embed="rId2"/>
+                <asvg:svgBlip xmlns:asvg="http://schemas.microsoft.com/office/drawing/2016/SVG/main" r:embed="rId3"/>
               </a:ext>
             </a:extLst>
           </a:blip>

--- a/docs/DHW2_Wagner_Kryeziu_Johnson.pptx
+++ b/docs/DHW2_Wagner_Kryeziu_Johnson.pptx
@@ -123,6 +123,3138 @@
 </p:presentation>
 </file>
 
+<file path=ppt/diagrams/colors1.xml><?xml version="1.0" encoding="utf-8"?>
+<dgm:colorsDef xmlns:dgm="http://schemas.openxmlformats.org/drawingml/2006/diagram" xmlns:a="http://schemas.openxmlformats.org/drawingml/2006/main" uniqueId="urn:microsoft.com/office/officeart/2005/8/colors/accent1_2">
+  <dgm:title val=""/>
+  <dgm:desc val=""/>
+  <dgm:catLst>
+    <dgm:cat type="accent1" pri="11200"/>
+  </dgm:catLst>
+  <dgm:styleLbl name="node0">
+    <dgm:fillClrLst meth="repeat">
+      <a:schemeClr val="accent1"/>
+    </dgm:fillClrLst>
+    <dgm:linClrLst meth="repeat">
+      <a:schemeClr val="lt1"/>
+    </dgm:linClrLst>
+    <dgm:effectClrLst/>
+    <dgm:txLinClrLst/>
+    <dgm:txFillClrLst/>
+    <dgm:txEffectClrLst/>
+  </dgm:styleLbl>
+  <dgm:styleLbl name="alignNode1">
+    <dgm:fillClrLst meth="repeat">
+      <a:schemeClr val="accent1"/>
+    </dgm:fillClrLst>
+    <dgm:linClrLst meth="repeat">
+      <a:schemeClr val="accent1"/>
+    </dgm:linClrLst>
+    <dgm:effectClrLst/>
+    <dgm:txLinClrLst/>
+    <dgm:txFillClrLst/>
+    <dgm:txEffectClrLst/>
+  </dgm:styleLbl>
+  <dgm:styleLbl name="node1">
+    <dgm:fillClrLst meth="repeat">
+      <a:schemeClr val="accent1"/>
+    </dgm:fillClrLst>
+    <dgm:linClrLst meth="repeat">
+      <a:schemeClr val="lt1"/>
+    </dgm:linClrLst>
+    <dgm:effectClrLst/>
+    <dgm:txLinClrLst/>
+    <dgm:txFillClrLst/>
+    <dgm:txEffectClrLst/>
+  </dgm:styleLbl>
+  <dgm:styleLbl name="lnNode1">
+    <dgm:fillClrLst meth="repeat">
+      <a:schemeClr val="accent1"/>
+    </dgm:fillClrLst>
+    <dgm:linClrLst meth="repeat">
+      <a:schemeClr val="lt1"/>
+    </dgm:linClrLst>
+    <dgm:effectClrLst/>
+    <dgm:txLinClrLst/>
+    <dgm:txFillClrLst/>
+    <dgm:txEffectClrLst/>
+  </dgm:styleLbl>
+  <dgm:styleLbl name="vennNode1">
+    <dgm:fillClrLst meth="repeat">
+      <a:schemeClr val="accent1">
+        <a:alpha val="50000"/>
+      </a:schemeClr>
+    </dgm:fillClrLst>
+    <dgm:linClrLst meth="repeat">
+      <a:schemeClr val="lt1"/>
+    </dgm:linClrLst>
+    <dgm:effectClrLst/>
+    <dgm:txLinClrLst/>
+    <dgm:txFillClrLst/>
+    <dgm:txEffectClrLst/>
+  </dgm:styleLbl>
+  <dgm:styleLbl name="node2">
+    <dgm:fillClrLst meth="repeat">
+      <a:schemeClr val="accent1"/>
+    </dgm:fillClrLst>
+    <dgm:linClrLst meth="repeat">
+      <a:schemeClr val="lt1"/>
+    </dgm:linClrLst>
+    <dgm:effectClrLst/>
+    <dgm:txLinClrLst/>
+    <dgm:txFillClrLst/>
+    <dgm:txEffectClrLst/>
+  </dgm:styleLbl>
+  <dgm:styleLbl name="node3">
+    <dgm:fillClrLst meth="repeat">
+      <a:schemeClr val="accent1"/>
+    </dgm:fillClrLst>
+    <dgm:linClrLst meth="repeat">
+      <a:schemeClr val="lt1"/>
+    </dgm:linClrLst>
+    <dgm:effectClrLst/>
+    <dgm:txLinClrLst/>
+    <dgm:txFillClrLst/>
+    <dgm:txEffectClrLst/>
+  </dgm:styleLbl>
+  <dgm:styleLbl name="node4">
+    <dgm:fillClrLst meth="repeat">
+      <a:schemeClr val="accent1"/>
+    </dgm:fillClrLst>
+    <dgm:linClrLst meth="repeat">
+      <a:schemeClr val="lt1"/>
+    </dgm:linClrLst>
+    <dgm:effectClrLst/>
+    <dgm:txLinClrLst/>
+    <dgm:txFillClrLst/>
+    <dgm:txEffectClrLst/>
+  </dgm:styleLbl>
+  <dgm:styleLbl name="fgImgPlace1">
+    <dgm:fillClrLst meth="repeat">
+      <a:schemeClr val="accent1">
+        <a:tint val="50000"/>
+      </a:schemeClr>
+    </dgm:fillClrLst>
+    <dgm:linClrLst meth="repeat">
+      <a:schemeClr val="lt1"/>
+    </dgm:linClrLst>
+    <dgm:effectClrLst/>
+    <dgm:txLinClrLst/>
+    <dgm:txFillClrLst meth="repeat">
+      <a:schemeClr val="lt1"/>
+    </dgm:txFillClrLst>
+    <dgm:txEffectClrLst/>
+  </dgm:styleLbl>
+  <dgm:styleLbl name="alignImgPlace1">
+    <dgm:fillClrLst meth="repeat">
+      <a:schemeClr val="accent1">
+        <a:tint val="50000"/>
+      </a:schemeClr>
+    </dgm:fillClrLst>
+    <dgm:linClrLst meth="repeat">
+      <a:schemeClr val="lt1"/>
+    </dgm:linClrLst>
+    <dgm:effectClrLst/>
+    <dgm:txLinClrLst/>
+    <dgm:txFillClrLst meth="repeat">
+      <a:schemeClr val="lt1"/>
+    </dgm:txFillClrLst>
+    <dgm:txEffectClrLst/>
+  </dgm:styleLbl>
+  <dgm:styleLbl name="bgImgPlace1">
+    <dgm:fillClrLst meth="repeat">
+      <a:schemeClr val="accent1">
+        <a:tint val="50000"/>
+      </a:schemeClr>
+    </dgm:fillClrLst>
+    <dgm:linClrLst meth="repeat">
+      <a:schemeClr val="lt1"/>
+    </dgm:linClrLst>
+    <dgm:effectClrLst/>
+    <dgm:txLinClrLst/>
+    <dgm:txFillClrLst meth="repeat">
+      <a:schemeClr val="lt1"/>
+    </dgm:txFillClrLst>
+    <dgm:txEffectClrLst/>
+  </dgm:styleLbl>
+  <dgm:styleLbl name="sibTrans2D1">
+    <dgm:fillClrLst meth="repeat">
+      <a:schemeClr val="accent1">
+        <a:tint val="60000"/>
+      </a:schemeClr>
+    </dgm:fillClrLst>
+    <dgm:linClrLst meth="repeat">
+      <a:schemeClr val="accent1">
+        <a:tint val="60000"/>
+      </a:schemeClr>
+    </dgm:linClrLst>
+    <dgm:effectClrLst/>
+    <dgm:txLinClrLst/>
+    <dgm:txFillClrLst/>
+    <dgm:txEffectClrLst/>
+  </dgm:styleLbl>
+  <dgm:styleLbl name="fgSibTrans2D1">
+    <dgm:fillClrLst meth="repeat">
+      <a:schemeClr val="accent1">
+        <a:tint val="60000"/>
+      </a:schemeClr>
+    </dgm:fillClrLst>
+    <dgm:linClrLst meth="repeat">
+      <a:schemeClr val="accent1">
+        <a:tint val="60000"/>
+      </a:schemeClr>
+    </dgm:linClrLst>
+    <dgm:effectClrLst/>
+    <dgm:txLinClrLst/>
+    <dgm:txFillClrLst/>
+    <dgm:txEffectClrLst/>
+  </dgm:styleLbl>
+  <dgm:styleLbl name="bgSibTrans2D1">
+    <dgm:fillClrLst meth="repeat">
+      <a:schemeClr val="accent1">
+        <a:tint val="60000"/>
+      </a:schemeClr>
+    </dgm:fillClrLst>
+    <dgm:linClrLst meth="repeat">
+      <a:schemeClr val="accent1">
+        <a:tint val="60000"/>
+      </a:schemeClr>
+    </dgm:linClrLst>
+    <dgm:effectClrLst/>
+    <dgm:txLinClrLst/>
+    <dgm:txFillClrLst/>
+    <dgm:txEffectClrLst/>
+  </dgm:styleLbl>
+  <dgm:styleLbl name="sibTrans1D1">
+    <dgm:fillClrLst meth="repeat">
+      <a:schemeClr val="accent1"/>
+    </dgm:fillClrLst>
+    <dgm:linClrLst meth="repeat">
+      <a:schemeClr val="accent1"/>
+    </dgm:linClrLst>
+    <dgm:effectClrLst/>
+    <dgm:txLinClrLst/>
+    <dgm:txFillClrLst meth="repeat">
+      <a:schemeClr val="tx1"/>
+    </dgm:txFillClrLst>
+    <dgm:txEffectClrLst/>
+  </dgm:styleLbl>
+  <dgm:styleLbl name="callout">
+    <dgm:fillClrLst meth="repeat">
+      <a:schemeClr val="accent1"/>
+    </dgm:fillClrLst>
+    <dgm:linClrLst meth="repeat">
+      <a:schemeClr val="accent1">
+        <a:tint val="50000"/>
+      </a:schemeClr>
+    </dgm:linClrLst>
+    <dgm:effectClrLst/>
+    <dgm:txLinClrLst/>
+    <dgm:txFillClrLst meth="repeat">
+      <a:schemeClr val="tx1"/>
+    </dgm:txFillClrLst>
+    <dgm:txEffectClrLst/>
+  </dgm:styleLbl>
+  <dgm:styleLbl name="asst0">
+    <dgm:fillClrLst meth="repeat">
+      <a:schemeClr val="accent1"/>
+    </dgm:fillClrLst>
+    <dgm:linClrLst meth="repeat">
+      <a:schemeClr val="lt1"/>
+    </dgm:linClrLst>
+    <dgm:effectClrLst/>
+    <dgm:txLinClrLst/>
+    <dgm:txFillClrLst/>
+    <dgm:txEffectClrLst/>
+  </dgm:styleLbl>
+  <dgm:styleLbl name="asst1">
+    <dgm:fillClrLst meth="repeat">
+      <a:schemeClr val="accent1"/>
+    </dgm:fillClrLst>
+    <dgm:linClrLst meth="repeat">
+      <a:schemeClr val="lt1"/>
+    </dgm:linClrLst>
+    <dgm:effectClrLst/>
+    <dgm:txLinClrLst/>
+    <dgm:txFillClrLst/>
+    <dgm:txEffectClrLst/>
+  </dgm:styleLbl>
+  <dgm:styleLbl name="asst2">
+    <dgm:fillClrLst meth="repeat">
+      <a:schemeClr val="accent1"/>
+    </dgm:fillClrLst>
+    <dgm:linClrLst meth="repeat">
+      <a:schemeClr val="lt1"/>
+    </dgm:linClrLst>
+    <dgm:effectClrLst/>
+    <dgm:txLinClrLst/>
+    <dgm:txFillClrLst/>
+    <dgm:txEffectClrLst/>
+  </dgm:styleLbl>
+  <dgm:styleLbl name="asst3">
+    <dgm:fillClrLst meth="repeat">
+      <a:schemeClr val="accent1"/>
+    </dgm:fillClrLst>
+    <dgm:linClrLst meth="repeat">
+      <a:schemeClr val="lt1"/>
+    </dgm:linClrLst>
+    <dgm:effectClrLst/>
+    <dgm:txLinClrLst/>
+    <dgm:txFillClrLst/>
+    <dgm:txEffectClrLst/>
+  </dgm:styleLbl>
+  <dgm:styleLbl name="asst4">
+    <dgm:fillClrLst meth="repeat">
+      <a:schemeClr val="accent1"/>
+    </dgm:fillClrLst>
+    <dgm:linClrLst meth="repeat">
+      <a:schemeClr val="lt1"/>
+    </dgm:linClrLst>
+    <dgm:effectClrLst/>
+    <dgm:txLinClrLst/>
+    <dgm:txFillClrLst/>
+    <dgm:txEffectClrLst/>
+  </dgm:styleLbl>
+  <dgm:styleLbl name="parChTrans2D1">
+    <dgm:fillClrLst meth="repeat">
+      <a:schemeClr val="accent1">
+        <a:tint val="60000"/>
+      </a:schemeClr>
+    </dgm:fillClrLst>
+    <dgm:linClrLst meth="repeat">
+      <a:schemeClr val="accent1">
+        <a:tint val="60000"/>
+      </a:schemeClr>
+    </dgm:linClrLst>
+    <dgm:effectClrLst/>
+    <dgm:txLinClrLst/>
+    <dgm:txFillClrLst meth="repeat">
+      <a:schemeClr val="lt1"/>
+    </dgm:txFillClrLst>
+    <dgm:txEffectClrLst/>
+  </dgm:styleLbl>
+  <dgm:styleLbl name="parChTrans2D2">
+    <dgm:fillClrLst meth="repeat">
+      <a:schemeClr val="accent1"/>
+    </dgm:fillClrLst>
+    <dgm:linClrLst meth="repeat">
+      <a:schemeClr val="accent1"/>
+    </dgm:linClrLst>
+    <dgm:effectClrLst/>
+    <dgm:txLinClrLst/>
+    <dgm:txFillClrLst meth="repeat">
+      <a:schemeClr val="lt1"/>
+    </dgm:txFillClrLst>
+    <dgm:txEffectClrLst/>
+  </dgm:styleLbl>
+  <dgm:styleLbl name="parChTrans2D3">
+    <dgm:fillClrLst meth="repeat">
+      <a:schemeClr val="accent1"/>
+    </dgm:fillClrLst>
+    <dgm:linClrLst meth="repeat">
+      <a:schemeClr val="accent1"/>
+    </dgm:linClrLst>
+    <dgm:effectClrLst/>
+    <dgm:txLinClrLst/>
+    <dgm:txFillClrLst meth="repeat">
+      <a:schemeClr val="lt1"/>
+    </dgm:txFillClrLst>
+    <dgm:txEffectClrLst/>
+  </dgm:styleLbl>
+  <dgm:styleLbl name="parChTrans2D4">
+    <dgm:fillClrLst meth="repeat">
+      <a:schemeClr val="accent1"/>
+    </dgm:fillClrLst>
+    <dgm:linClrLst meth="repeat">
+      <a:schemeClr val="accent1"/>
+    </dgm:linClrLst>
+    <dgm:effectClrLst/>
+    <dgm:txLinClrLst/>
+    <dgm:txFillClrLst meth="repeat">
+      <a:schemeClr val="lt1"/>
+    </dgm:txFillClrLst>
+    <dgm:txEffectClrLst/>
+  </dgm:styleLbl>
+  <dgm:styleLbl name="parChTrans1D1">
+    <dgm:fillClrLst meth="repeat">
+      <a:schemeClr val="accent1"/>
+    </dgm:fillClrLst>
+    <dgm:linClrLst meth="repeat">
+      <a:schemeClr val="accent1">
+        <a:shade val="60000"/>
+      </a:schemeClr>
+    </dgm:linClrLst>
+    <dgm:effectClrLst/>
+    <dgm:txLinClrLst/>
+    <dgm:txFillClrLst meth="repeat">
+      <a:schemeClr val="tx1"/>
+    </dgm:txFillClrLst>
+    <dgm:txEffectClrLst/>
+  </dgm:styleLbl>
+  <dgm:styleLbl name="parChTrans1D2">
+    <dgm:fillClrLst meth="repeat">
+      <a:schemeClr val="accent1"/>
+    </dgm:fillClrLst>
+    <dgm:linClrLst meth="repeat">
+      <a:schemeClr val="accent1">
+        <a:shade val="60000"/>
+      </a:schemeClr>
+    </dgm:linClrLst>
+    <dgm:effectClrLst/>
+    <dgm:txLinClrLst/>
+    <dgm:txFillClrLst meth="repeat">
+      <a:schemeClr val="tx1"/>
+    </dgm:txFillClrLst>
+    <dgm:txEffectClrLst/>
+  </dgm:styleLbl>
+  <dgm:styleLbl name="parChTrans1D3">
+    <dgm:fillClrLst meth="repeat">
+      <a:schemeClr val="accent1"/>
+    </dgm:fillClrLst>
+    <dgm:linClrLst meth="repeat">
+      <a:schemeClr val="accent1">
+        <a:shade val="80000"/>
+      </a:schemeClr>
+    </dgm:linClrLst>
+    <dgm:effectClrLst/>
+    <dgm:txLinClrLst/>
+    <dgm:txFillClrLst meth="repeat">
+      <a:schemeClr val="tx1"/>
+    </dgm:txFillClrLst>
+    <dgm:txEffectClrLst/>
+  </dgm:styleLbl>
+  <dgm:styleLbl name="parChTrans1D4">
+    <dgm:fillClrLst meth="repeat">
+      <a:schemeClr val="accent1"/>
+    </dgm:fillClrLst>
+    <dgm:linClrLst meth="repeat">
+      <a:schemeClr val="accent1">
+        <a:shade val="80000"/>
+      </a:schemeClr>
+    </dgm:linClrLst>
+    <dgm:effectClrLst/>
+    <dgm:txLinClrLst/>
+    <dgm:txFillClrLst meth="repeat">
+      <a:schemeClr val="tx1"/>
+    </dgm:txFillClrLst>
+    <dgm:txEffectClrLst/>
+  </dgm:styleLbl>
+  <dgm:styleLbl name="fgAcc1">
+    <dgm:fillClrLst meth="repeat">
+      <a:schemeClr val="lt1">
+        <a:alpha val="90000"/>
+      </a:schemeClr>
+    </dgm:fillClrLst>
+    <dgm:linClrLst meth="repeat">
+      <a:schemeClr val="accent1"/>
+    </dgm:linClrLst>
+    <dgm:effectClrLst/>
+    <dgm:txLinClrLst/>
+    <dgm:txFillClrLst meth="repeat">
+      <a:schemeClr val="dk1"/>
+    </dgm:txFillClrLst>
+    <dgm:txEffectClrLst/>
+  </dgm:styleLbl>
+  <dgm:styleLbl name="conFgAcc1">
+    <dgm:fillClrLst meth="repeat">
+      <a:schemeClr val="lt1">
+        <a:alpha val="90000"/>
+      </a:schemeClr>
+    </dgm:fillClrLst>
+    <dgm:linClrLst meth="repeat">
+      <a:schemeClr val="accent1"/>
+    </dgm:linClrLst>
+    <dgm:effectClrLst/>
+    <dgm:txLinClrLst/>
+    <dgm:txFillClrLst meth="repeat">
+      <a:schemeClr val="dk1"/>
+    </dgm:txFillClrLst>
+    <dgm:txEffectClrLst/>
+  </dgm:styleLbl>
+  <dgm:styleLbl name="alignAcc1">
+    <dgm:fillClrLst meth="repeat">
+      <a:schemeClr val="lt1">
+        <a:alpha val="90000"/>
+      </a:schemeClr>
+    </dgm:fillClrLst>
+    <dgm:linClrLst meth="repeat">
+      <a:schemeClr val="accent1"/>
+    </dgm:linClrLst>
+    <dgm:effectClrLst/>
+    <dgm:txLinClrLst/>
+    <dgm:txFillClrLst meth="repeat">
+      <a:schemeClr val="dk1"/>
+    </dgm:txFillClrLst>
+    <dgm:txEffectClrLst/>
+  </dgm:styleLbl>
+  <dgm:styleLbl name="trAlignAcc1">
+    <dgm:fillClrLst meth="repeat">
+      <a:schemeClr val="lt1">
+        <a:alpha val="40000"/>
+      </a:schemeClr>
+    </dgm:fillClrLst>
+    <dgm:linClrLst meth="repeat">
+      <a:schemeClr val="accent1"/>
+    </dgm:linClrLst>
+    <dgm:effectClrLst/>
+    <dgm:txLinClrLst/>
+    <dgm:txFillClrLst meth="repeat">
+      <a:schemeClr val="dk1"/>
+    </dgm:txFillClrLst>
+    <dgm:txEffectClrLst/>
+  </dgm:styleLbl>
+  <dgm:styleLbl name="bgAcc1">
+    <dgm:fillClrLst meth="repeat">
+      <a:schemeClr val="lt1">
+        <a:alpha val="90000"/>
+      </a:schemeClr>
+    </dgm:fillClrLst>
+    <dgm:linClrLst meth="repeat">
+      <a:schemeClr val="accent1"/>
+    </dgm:linClrLst>
+    <dgm:effectClrLst/>
+    <dgm:txLinClrLst/>
+    <dgm:txFillClrLst meth="repeat">
+      <a:schemeClr val="dk1"/>
+    </dgm:txFillClrLst>
+    <dgm:txEffectClrLst/>
+  </dgm:styleLbl>
+  <dgm:styleLbl name="solidFgAcc1">
+    <dgm:fillClrLst meth="repeat">
+      <a:schemeClr val="lt1"/>
+    </dgm:fillClrLst>
+    <dgm:linClrLst meth="repeat">
+      <a:schemeClr val="accent1"/>
+    </dgm:linClrLst>
+    <dgm:effectClrLst/>
+    <dgm:txLinClrLst/>
+    <dgm:txFillClrLst meth="repeat">
+      <a:schemeClr val="dk1"/>
+    </dgm:txFillClrLst>
+    <dgm:txEffectClrLst/>
+  </dgm:styleLbl>
+  <dgm:styleLbl name="solidAlignAcc1">
+    <dgm:fillClrLst meth="repeat">
+      <a:schemeClr val="lt1"/>
+    </dgm:fillClrLst>
+    <dgm:linClrLst meth="repeat">
+      <a:schemeClr val="accent1"/>
+    </dgm:linClrLst>
+    <dgm:effectClrLst/>
+    <dgm:txLinClrLst/>
+    <dgm:txFillClrLst meth="repeat">
+      <a:schemeClr val="dk1"/>
+    </dgm:txFillClrLst>
+    <dgm:txEffectClrLst/>
+  </dgm:styleLbl>
+  <dgm:styleLbl name="solidBgAcc1">
+    <dgm:fillClrLst meth="repeat">
+      <a:schemeClr val="lt1"/>
+    </dgm:fillClrLst>
+    <dgm:linClrLst meth="repeat">
+      <a:schemeClr val="accent1"/>
+    </dgm:linClrLst>
+    <dgm:effectClrLst/>
+    <dgm:txLinClrLst/>
+    <dgm:txFillClrLst meth="repeat">
+      <a:schemeClr val="dk1"/>
+    </dgm:txFillClrLst>
+    <dgm:txEffectClrLst/>
+  </dgm:styleLbl>
+  <dgm:styleLbl name="fgAccFollowNode1">
+    <dgm:fillClrLst meth="repeat">
+      <a:schemeClr val="accent1">
+        <a:alpha val="90000"/>
+        <a:tint val="40000"/>
+      </a:schemeClr>
+    </dgm:fillClrLst>
+    <dgm:linClrLst meth="repeat">
+      <a:schemeClr val="accent1">
+        <a:alpha val="90000"/>
+        <a:tint val="40000"/>
+      </a:schemeClr>
+    </dgm:linClrLst>
+    <dgm:effectClrLst/>
+    <dgm:txLinClrLst/>
+    <dgm:txFillClrLst meth="repeat">
+      <a:schemeClr val="dk1"/>
+    </dgm:txFillClrLst>
+    <dgm:txEffectClrLst/>
+  </dgm:styleLbl>
+  <dgm:styleLbl name="alignAccFollowNode1">
+    <dgm:fillClrLst meth="repeat">
+      <a:schemeClr val="accent1">
+        <a:alpha val="90000"/>
+        <a:tint val="40000"/>
+      </a:schemeClr>
+    </dgm:fillClrLst>
+    <dgm:linClrLst meth="repeat">
+      <a:schemeClr val="accent1">
+        <a:alpha val="90000"/>
+        <a:tint val="40000"/>
+      </a:schemeClr>
+    </dgm:linClrLst>
+    <dgm:effectClrLst/>
+    <dgm:txLinClrLst/>
+    <dgm:txFillClrLst meth="repeat">
+      <a:schemeClr val="dk1"/>
+    </dgm:txFillClrLst>
+    <dgm:txEffectClrLst/>
+  </dgm:styleLbl>
+  <dgm:styleLbl name="bgAccFollowNode1">
+    <dgm:fillClrLst meth="repeat">
+      <a:schemeClr val="accent1">
+        <a:alpha val="90000"/>
+        <a:tint val="40000"/>
+      </a:schemeClr>
+    </dgm:fillClrLst>
+    <dgm:linClrLst meth="repeat">
+      <a:schemeClr val="accent1">
+        <a:alpha val="90000"/>
+        <a:tint val="40000"/>
+      </a:schemeClr>
+    </dgm:linClrLst>
+    <dgm:effectClrLst/>
+    <dgm:txLinClrLst/>
+    <dgm:txFillClrLst meth="repeat">
+      <a:schemeClr val="dk1"/>
+    </dgm:txFillClrLst>
+    <dgm:txEffectClrLst/>
+  </dgm:styleLbl>
+  <dgm:styleLbl name="fgAcc0">
+    <dgm:fillClrLst meth="repeat">
+      <a:schemeClr val="lt1">
+        <a:alpha val="90000"/>
+      </a:schemeClr>
+    </dgm:fillClrLst>
+    <dgm:linClrLst meth="repeat">
+      <a:schemeClr val="accent1"/>
+    </dgm:linClrLst>
+    <dgm:effectClrLst/>
+    <dgm:txLinClrLst/>
+    <dgm:txFillClrLst meth="repeat">
+      <a:schemeClr val="dk1"/>
+    </dgm:txFillClrLst>
+    <dgm:txEffectClrLst/>
+  </dgm:styleLbl>
+  <dgm:styleLbl name="fgAcc2">
+    <dgm:fillClrLst meth="repeat">
+      <a:schemeClr val="lt1">
+        <a:alpha val="90000"/>
+      </a:schemeClr>
+    </dgm:fillClrLst>
+    <dgm:linClrLst meth="repeat">
+      <a:schemeClr val="accent1"/>
+    </dgm:linClrLst>
+    <dgm:effectClrLst/>
+    <dgm:txLinClrLst/>
+    <dgm:txFillClrLst meth="repeat">
+      <a:schemeClr val="dk1"/>
+    </dgm:txFillClrLst>
+    <dgm:txEffectClrLst/>
+  </dgm:styleLbl>
+  <dgm:styleLbl name="fgAcc3">
+    <dgm:fillClrLst meth="repeat">
+      <a:schemeClr val="lt1">
+        <a:alpha val="90000"/>
+      </a:schemeClr>
+    </dgm:fillClrLst>
+    <dgm:linClrLst meth="repeat">
+      <a:schemeClr val="accent1"/>
+    </dgm:linClrLst>
+    <dgm:effectClrLst/>
+    <dgm:txLinClrLst/>
+    <dgm:txFillClrLst meth="repeat">
+      <a:schemeClr val="dk1"/>
+    </dgm:txFillClrLst>
+    <dgm:txEffectClrLst/>
+  </dgm:styleLbl>
+  <dgm:styleLbl name="fgAcc4">
+    <dgm:fillClrLst meth="repeat">
+      <a:schemeClr val="lt1">
+        <a:alpha val="90000"/>
+      </a:schemeClr>
+    </dgm:fillClrLst>
+    <dgm:linClrLst meth="repeat">
+      <a:schemeClr val="accent1"/>
+    </dgm:linClrLst>
+    <dgm:effectClrLst/>
+    <dgm:txLinClrLst/>
+    <dgm:txFillClrLst meth="repeat">
+      <a:schemeClr val="dk1"/>
+    </dgm:txFillClrLst>
+    <dgm:txEffectClrLst/>
+  </dgm:styleLbl>
+  <dgm:styleLbl name="bgShp">
+    <dgm:fillClrLst meth="repeat">
+      <a:schemeClr val="accent1">
+        <a:tint val="40000"/>
+      </a:schemeClr>
+    </dgm:fillClrLst>
+    <dgm:linClrLst meth="repeat">
+      <a:schemeClr val="accent1"/>
+    </dgm:linClrLst>
+    <dgm:effectClrLst/>
+    <dgm:txLinClrLst/>
+    <dgm:txFillClrLst meth="repeat">
+      <a:schemeClr val="dk1"/>
+    </dgm:txFillClrLst>
+    <dgm:txEffectClrLst/>
+  </dgm:styleLbl>
+  <dgm:styleLbl name="dkBgShp">
+    <dgm:fillClrLst meth="repeat">
+      <a:schemeClr val="accent1">
+        <a:shade val="80000"/>
+      </a:schemeClr>
+    </dgm:fillClrLst>
+    <dgm:linClrLst meth="repeat">
+      <a:schemeClr val="accent1"/>
+    </dgm:linClrLst>
+    <dgm:effectClrLst/>
+    <dgm:txLinClrLst/>
+    <dgm:txFillClrLst meth="repeat">
+      <a:schemeClr val="lt1"/>
+    </dgm:txFillClrLst>
+    <dgm:txEffectClrLst/>
+  </dgm:styleLbl>
+  <dgm:styleLbl name="trBgShp">
+    <dgm:fillClrLst meth="repeat">
+      <a:schemeClr val="accent1">
+        <a:tint val="50000"/>
+        <a:alpha val="40000"/>
+      </a:schemeClr>
+    </dgm:fillClrLst>
+    <dgm:linClrLst meth="repeat">
+      <a:schemeClr val="accent1"/>
+    </dgm:linClrLst>
+    <dgm:effectClrLst/>
+    <dgm:txLinClrLst/>
+    <dgm:txFillClrLst meth="repeat">
+      <a:schemeClr val="lt1"/>
+    </dgm:txFillClrLst>
+    <dgm:txEffectClrLst/>
+  </dgm:styleLbl>
+  <dgm:styleLbl name="fgShp">
+    <dgm:fillClrLst meth="repeat">
+      <a:schemeClr val="accent1">
+        <a:tint val="60000"/>
+      </a:schemeClr>
+    </dgm:fillClrLst>
+    <dgm:linClrLst meth="repeat">
+      <a:schemeClr val="lt1"/>
+    </dgm:linClrLst>
+    <dgm:effectClrLst/>
+    <dgm:txLinClrLst/>
+    <dgm:txFillClrLst meth="repeat">
+      <a:schemeClr val="dk1"/>
+    </dgm:txFillClrLst>
+    <dgm:txEffectClrLst/>
+  </dgm:styleLbl>
+  <dgm:styleLbl name="revTx">
+    <dgm:fillClrLst meth="repeat">
+      <a:schemeClr val="lt1">
+        <a:alpha val="0"/>
+      </a:schemeClr>
+    </dgm:fillClrLst>
+    <dgm:linClrLst meth="repeat">
+      <a:schemeClr val="dk1">
+        <a:alpha val="0"/>
+      </a:schemeClr>
+    </dgm:linClrLst>
+    <dgm:effectClrLst/>
+    <dgm:txLinClrLst/>
+    <dgm:txFillClrLst meth="repeat">
+      <a:schemeClr val="tx1"/>
+    </dgm:txFillClrLst>
+    <dgm:txEffectClrLst/>
+  </dgm:styleLbl>
+</dgm:colorsDef>
+</file>
+
+<file path=ppt/diagrams/data1.xml><?xml version="1.0" encoding="utf-8"?>
+<dgm:dataModel xmlns:dgm="http://schemas.openxmlformats.org/drawingml/2006/diagram" xmlns:a="http://schemas.openxmlformats.org/drawingml/2006/main">
+  <dgm:ptLst>
+    <dgm:pt modelId="{B3533454-88E3-435E-A7F4-AA362E8A3B12}" type="doc">
+      <dgm:prSet loTypeId="urn:microsoft.com/office/officeart/2005/8/layout/vList2" loCatId="list" qsTypeId="urn:microsoft.com/office/officeart/2005/8/quickstyle/simple1" qsCatId="simple" csTypeId="urn:microsoft.com/office/officeart/2005/8/colors/accent1_2" csCatId="accent1"/>
+      <dgm:spPr/>
+      <dgm:t>
+        <a:bodyPr/>
+        <a:lstStyle/>
+        <a:p>
+          <a:endParaRPr lang="en-US"/>
+        </a:p>
+      </dgm:t>
+    </dgm:pt>
+    <dgm:pt modelId="{EBC12662-E32F-468D-A6ED-E37E896CA00A}">
+      <dgm:prSet/>
+      <dgm:spPr/>
+      <dgm:t>
+        <a:bodyPr/>
+        <a:lstStyle/>
+        <a:p>
+          <a:r>
+            <a:rPr lang="de-DE"/>
+            <a:t>We managed to adjust our model to reach a successrate of 94% (17/18) with a start of 22% (4/18)</a:t>
+          </a:r>
+          <a:endParaRPr lang="en-US"/>
+        </a:p>
+      </dgm:t>
+    </dgm:pt>
+    <dgm:pt modelId="{6441A912-B8AE-4D62-B119-76A22690D285}" type="parTrans" cxnId="{C806BDCB-6985-4AC9-8636-EC5483EB895D}">
+      <dgm:prSet/>
+      <dgm:spPr/>
+      <dgm:t>
+        <a:bodyPr/>
+        <a:lstStyle/>
+        <a:p>
+          <a:endParaRPr lang="en-US"/>
+        </a:p>
+      </dgm:t>
+    </dgm:pt>
+    <dgm:pt modelId="{5D588B93-55BC-489A-B3EB-71D3A76E91D4}" type="sibTrans" cxnId="{C806BDCB-6985-4AC9-8636-EC5483EB895D}">
+      <dgm:prSet/>
+      <dgm:spPr/>
+      <dgm:t>
+        <a:bodyPr/>
+        <a:lstStyle/>
+        <a:p>
+          <a:endParaRPr lang="en-US"/>
+        </a:p>
+      </dgm:t>
+    </dgm:pt>
+    <dgm:pt modelId="{1C736EFF-F7B1-4480-9FE7-4833AD69F6B2}">
+      <dgm:prSet/>
+      <dgm:spPr/>
+      <dgm:t>
+        <a:bodyPr/>
+        <a:lstStyle/>
+        <a:p>
+          <a:r>
+            <a:rPr lang="de-DE" dirty="0"/>
+            <a:t>The </a:t>
+          </a:r>
+          <a:r>
+            <a:rPr lang="de-DE" dirty="0" err="1"/>
+            <a:t>strongest</a:t>
+          </a:r>
+          <a:r>
+            <a:rPr lang="de-DE" dirty="0"/>
+            <a:t> </a:t>
+          </a:r>
+          <a:r>
+            <a:rPr lang="de-DE" dirty="0" err="1"/>
+            <a:t>impact</a:t>
+          </a:r>
+          <a:r>
+            <a:rPr lang="de-DE" dirty="0"/>
+            <a:t> was </a:t>
+          </a:r>
+          <a:r>
+            <a:rPr lang="de-DE" dirty="0" err="1"/>
+            <a:t>from</a:t>
+          </a:r>
+          <a:r>
+            <a:rPr lang="de-DE" dirty="0"/>
+            <a:t> </a:t>
+          </a:r>
+          <a:r>
+            <a:rPr lang="de-DE" dirty="0" err="1"/>
+            <a:t>describing</a:t>
+          </a:r>
+          <a:r>
+            <a:rPr lang="de-DE" dirty="0"/>
+            <a:t> </a:t>
+          </a:r>
+          <a:r>
+            <a:rPr lang="de-DE" dirty="0" err="1"/>
+            <a:t>the</a:t>
+          </a:r>
+          <a:r>
+            <a:rPr lang="de-DE" dirty="0"/>
+            <a:t> </a:t>
+          </a:r>
+          <a:r>
+            <a:rPr lang="de-DE" dirty="0" err="1"/>
+            <a:t>tables</a:t>
+          </a:r>
+          <a:r>
+            <a:rPr lang="de-DE" dirty="0"/>
+            <a:t> </a:t>
+          </a:r>
+          <a:r>
+            <a:rPr lang="de-DE" dirty="0" err="1"/>
+            <a:t>to</a:t>
+          </a:r>
+          <a:r>
+            <a:rPr lang="de-DE" dirty="0"/>
+            <a:t> </a:t>
+          </a:r>
+          <a:r>
+            <a:rPr lang="de-DE" dirty="0" err="1"/>
+            <a:t>the</a:t>
+          </a:r>
+          <a:r>
+            <a:rPr lang="de-DE" dirty="0"/>
+            <a:t> </a:t>
+          </a:r>
+          <a:r>
+            <a:rPr lang="de-DE" dirty="0" err="1"/>
+            <a:t>model</a:t>
+          </a:r>
+          <a:r>
+            <a:rPr lang="de-DE" dirty="0"/>
+            <a:t> and </a:t>
+          </a:r>
+          <a:r>
+            <a:rPr lang="de-DE" dirty="0" err="1"/>
+            <a:t>adjusting</a:t>
+          </a:r>
+          <a:r>
+            <a:rPr lang="de-DE" dirty="0"/>
+            <a:t> </a:t>
+          </a:r>
+          <a:r>
+            <a:rPr lang="de-DE" dirty="0" err="1"/>
+            <a:t>the</a:t>
+          </a:r>
+          <a:r>
+            <a:rPr lang="de-DE" dirty="0"/>
+            <a:t> </a:t>
+          </a:r>
+          <a:r>
+            <a:rPr lang="de-DE" dirty="0" err="1"/>
+            <a:t>model</a:t>
+          </a:r>
+          <a:r>
+            <a:rPr lang="de-DE" dirty="0"/>
+            <a:t> </a:t>
+          </a:r>
+          <a:r>
+            <a:rPr lang="de-DE" dirty="0" err="1"/>
+            <a:t>from</a:t>
+          </a:r>
+          <a:r>
+            <a:rPr lang="de-DE" dirty="0"/>
+            <a:t> </a:t>
+          </a:r>
+          <a:r>
+            <a:rPr lang="de-DE" dirty="0" err="1"/>
+            <a:t>llama</a:t>
+          </a:r>
+          <a:r>
+            <a:rPr lang="de-DE" dirty="0"/>
+            <a:t> </a:t>
+          </a:r>
+          <a:r>
+            <a:rPr lang="de-DE" dirty="0" err="1"/>
+            <a:t>to</a:t>
+          </a:r>
+          <a:r>
+            <a:rPr lang="de-DE" dirty="0"/>
+            <a:t> </a:t>
+          </a:r>
+          <a:r>
+            <a:rPr lang="de-DE" dirty="0" err="1"/>
+            <a:t>qwen</a:t>
+          </a:r>
+          <a:endParaRPr lang="en-US" dirty="0"/>
+        </a:p>
+      </dgm:t>
+    </dgm:pt>
+    <dgm:pt modelId="{0A67B242-8BBD-4AB6-B67E-32281DCDB89B}" type="parTrans" cxnId="{2B8B44E6-75BA-4E12-828C-8D767B9805FE}">
+      <dgm:prSet/>
+      <dgm:spPr/>
+      <dgm:t>
+        <a:bodyPr/>
+        <a:lstStyle/>
+        <a:p>
+          <a:endParaRPr lang="en-US"/>
+        </a:p>
+      </dgm:t>
+    </dgm:pt>
+    <dgm:pt modelId="{A98F62DB-E2B9-4682-B568-11FDA23D9D10}" type="sibTrans" cxnId="{2B8B44E6-75BA-4E12-828C-8D767B9805FE}">
+      <dgm:prSet/>
+      <dgm:spPr/>
+      <dgm:t>
+        <a:bodyPr/>
+        <a:lstStyle/>
+        <a:p>
+          <a:endParaRPr lang="en-US"/>
+        </a:p>
+      </dgm:t>
+    </dgm:pt>
+    <dgm:pt modelId="{E8524C30-42AC-4ACE-A5A4-3E07D037F938}">
+      <dgm:prSet/>
+      <dgm:spPr/>
+      <dgm:t>
+        <a:bodyPr/>
+        <a:lstStyle/>
+        <a:p>
+          <a:r>
+            <a:rPr lang="de-DE"/>
+            <a:t>We wanted to prove that our model is not completly overfitting to the questions we optimezed it on and it reached 50% (9/18) which means it is not generalizing that well</a:t>
+          </a:r>
+          <a:endParaRPr lang="en-US"/>
+        </a:p>
+      </dgm:t>
+    </dgm:pt>
+    <dgm:pt modelId="{D3000381-2D0C-48B1-9961-28AD6253FF94}" type="parTrans" cxnId="{EF39DBBA-7996-422A-8478-53206672FE9A}">
+      <dgm:prSet/>
+      <dgm:spPr/>
+      <dgm:t>
+        <a:bodyPr/>
+        <a:lstStyle/>
+        <a:p>
+          <a:endParaRPr lang="en-US"/>
+        </a:p>
+      </dgm:t>
+    </dgm:pt>
+    <dgm:pt modelId="{DDE9B276-5342-46FA-A360-2220D186F5BD}" type="sibTrans" cxnId="{EF39DBBA-7996-422A-8478-53206672FE9A}">
+      <dgm:prSet/>
+      <dgm:spPr/>
+      <dgm:t>
+        <a:bodyPr/>
+        <a:lstStyle/>
+        <a:p>
+          <a:endParaRPr lang="en-US"/>
+        </a:p>
+      </dgm:t>
+    </dgm:pt>
+    <dgm:pt modelId="{AAABDF2D-5572-4DA0-B4B8-C017285213FD}">
+      <dgm:prSet/>
+      <dgm:spPr/>
+      <dgm:t>
+        <a:bodyPr/>
+        <a:lstStyle/>
+        <a:p>
+          <a:r>
+            <a:rPr lang="de-DE" dirty="0"/>
+            <a:t>In </a:t>
+          </a:r>
+          <a:r>
+            <a:rPr lang="de-DE" dirty="0" err="1"/>
+            <a:t>the</a:t>
+          </a:r>
+          <a:r>
+            <a:rPr lang="de-DE" dirty="0"/>
+            <a:t> </a:t>
+          </a:r>
+          <a:r>
+            <a:rPr lang="de-DE" dirty="0" err="1"/>
+            <a:t>future</a:t>
+          </a:r>
+          <a:r>
+            <a:rPr lang="de-DE" dirty="0"/>
+            <a:t> </a:t>
+          </a:r>
+          <a:r>
+            <a:rPr lang="de-DE" dirty="0" err="1"/>
+            <a:t>we</a:t>
+          </a:r>
+          <a:r>
+            <a:rPr lang="de-DE" dirty="0"/>
+            <a:t> </a:t>
+          </a:r>
+          <a:r>
+            <a:rPr lang="de-DE" dirty="0" err="1"/>
+            <a:t>would</a:t>
+          </a:r>
+          <a:r>
+            <a:rPr lang="de-DE" dirty="0"/>
+            <a:t> like </a:t>
+          </a:r>
+          <a:r>
+            <a:rPr lang="de-DE" dirty="0" err="1"/>
+            <a:t>to</a:t>
+          </a:r>
+          <a:r>
+            <a:rPr lang="de-DE" dirty="0"/>
+            <a:t> </a:t>
+          </a:r>
+          <a:r>
+            <a:rPr lang="de-DE" dirty="0" err="1"/>
+            <a:t>optimize</a:t>
+          </a:r>
+          <a:r>
+            <a:rPr lang="de-DE" dirty="0"/>
+            <a:t> on </a:t>
+          </a:r>
+          <a:r>
+            <a:rPr lang="de-DE" dirty="0" err="1"/>
+            <a:t>parameters</a:t>
+          </a:r>
+          <a:r>
+            <a:rPr lang="de-DE" dirty="0"/>
+            <a:t> </a:t>
+          </a:r>
+          <a:r>
+            <a:rPr lang="de-DE" dirty="0" err="1"/>
+            <a:t>that</a:t>
+          </a:r>
+          <a:r>
+            <a:rPr lang="de-DE" dirty="0"/>
+            <a:t> </a:t>
+          </a:r>
+          <a:r>
+            <a:rPr lang="de-DE" dirty="0" err="1"/>
+            <a:t>are</a:t>
+          </a:r>
+          <a:r>
+            <a:rPr lang="de-DE" dirty="0"/>
+            <a:t> </a:t>
+          </a:r>
+          <a:r>
+            <a:rPr lang="de-DE" dirty="0" err="1"/>
+            <a:t>generalizing</a:t>
+          </a:r>
+          <a:r>
+            <a:rPr lang="de-DE" dirty="0"/>
+            <a:t>, </a:t>
+          </a:r>
+          <a:r>
+            <a:rPr lang="de-DE" dirty="0" err="1"/>
+            <a:t>meaning</a:t>
+          </a:r>
+          <a:r>
+            <a:rPr lang="de-DE" dirty="0"/>
+            <a:t> </a:t>
+          </a:r>
+          <a:r>
+            <a:rPr lang="de-DE" dirty="0" err="1"/>
+            <a:t>to</a:t>
+          </a:r>
+          <a:r>
+            <a:rPr lang="de-DE" dirty="0"/>
+            <a:t> </a:t>
+          </a:r>
+          <a:r>
+            <a:rPr lang="de-DE" dirty="0" err="1"/>
+            <a:t>evaluate</a:t>
+          </a:r>
+          <a:r>
+            <a:rPr lang="de-DE" dirty="0"/>
+            <a:t> different </a:t>
+          </a:r>
+          <a:r>
+            <a:rPr lang="de-DE" dirty="0" err="1"/>
+            <a:t>test</a:t>
+          </a:r>
+          <a:r>
+            <a:rPr lang="de-DE" dirty="0"/>
+            <a:t> </a:t>
+          </a:r>
+          <a:r>
+            <a:rPr lang="de-DE" dirty="0" err="1"/>
+            <a:t>sets</a:t>
+          </a:r>
+          <a:r>
+            <a:rPr lang="de-DE" dirty="0"/>
+            <a:t> at </a:t>
+          </a:r>
+          <a:r>
+            <a:rPr lang="de-DE" dirty="0" err="1"/>
+            <a:t>the</a:t>
+          </a:r>
+          <a:r>
+            <a:rPr lang="de-DE" dirty="0"/>
+            <a:t> same time </a:t>
+          </a:r>
+          <a:r>
+            <a:rPr lang="de-DE" dirty="0" err="1"/>
+            <a:t>to</a:t>
+          </a:r>
+          <a:r>
+            <a:rPr lang="de-DE" dirty="0"/>
+            <a:t> check </a:t>
+          </a:r>
+          <a:r>
+            <a:rPr lang="de-DE" dirty="0" err="1"/>
+            <a:t>if</a:t>
+          </a:r>
+          <a:r>
+            <a:rPr lang="de-DE" dirty="0"/>
+            <a:t> </a:t>
+          </a:r>
+          <a:r>
+            <a:rPr lang="de-DE" dirty="0" err="1"/>
+            <a:t>we</a:t>
+          </a:r>
+          <a:r>
+            <a:rPr lang="de-DE" dirty="0"/>
+            <a:t> </a:t>
+          </a:r>
+          <a:r>
+            <a:rPr lang="de-DE" dirty="0" err="1"/>
+            <a:t>reached</a:t>
+          </a:r>
+          <a:r>
+            <a:rPr lang="de-DE" dirty="0"/>
+            <a:t> </a:t>
+          </a:r>
+          <a:r>
+            <a:rPr lang="de-DE" dirty="0" err="1"/>
+            <a:t>better</a:t>
+          </a:r>
+          <a:r>
+            <a:rPr lang="de-DE" dirty="0"/>
+            <a:t> </a:t>
+          </a:r>
+          <a:r>
+            <a:rPr lang="de-DE" dirty="0" err="1"/>
+            <a:t>scores</a:t>
+          </a:r>
+          <a:r>
+            <a:rPr lang="de-DE" dirty="0"/>
+            <a:t> in </a:t>
+          </a:r>
+          <a:r>
+            <a:rPr lang="de-DE" dirty="0" err="1"/>
+            <a:t>general</a:t>
+          </a:r>
+          <a:endParaRPr lang="en-US" dirty="0"/>
+        </a:p>
+      </dgm:t>
+    </dgm:pt>
+    <dgm:pt modelId="{AADC3671-29B6-444B-9F05-AFCD29CD090C}" type="parTrans" cxnId="{6D32D669-244B-47F5-A76C-8D42C253C41A}">
+      <dgm:prSet/>
+      <dgm:spPr/>
+      <dgm:t>
+        <a:bodyPr/>
+        <a:lstStyle/>
+        <a:p>
+          <a:endParaRPr lang="en-US"/>
+        </a:p>
+      </dgm:t>
+    </dgm:pt>
+    <dgm:pt modelId="{DBF888C9-4357-403F-9E86-548AE3D826BE}" type="sibTrans" cxnId="{6D32D669-244B-47F5-A76C-8D42C253C41A}">
+      <dgm:prSet/>
+      <dgm:spPr/>
+      <dgm:t>
+        <a:bodyPr/>
+        <a:lstStyle/>
+        <a:p>
+          <a:endParaRPr lang="en-US"/>
+        </a:p>
+      </dgm:t>
+    </dgm:pt>
+    <dgm:pt modelId="{4E454690-5819-A044-A22E-8711A5F4DD57}" type="pres">
+      <dgm:prSet presAssocID="{B3533454-88E3-435E-A7F4-AA362E8A3B12}" presName="linear" presStyleCnt="0">
+        <dgm:presLayoutVars>
+          <dgm:animLvl val="lvl"/>
+          <dgm:resizeHandles val="exact"/>
+        </dgm:presLayoutVars>
+      </dgm:prSet>
+      <dgm:spPr/>
+    </dgm:pt>
+    <dgm:pt modelId="{5C423DD3-D902-2A4A-B9D4-52B7C2C78095}" type="pres">
+      <dgm:prSet presAssocID="{EBC12662-E32F-468D-A6ED-E37E896CA00A}" presName="parentText" presStyleLbl="node1" presStyleIdx="0" presStyleCnt="4">
+        <dgm:presLayoutVars>
+          <dgm:chMax val="0"/>
+          <dgm:bulletEnabled val="1"/>
+        </dgm:presLayoutVars>
+      </dgm:prSet>
+      <dgm:spPr/>
+    </dgm:pt>
+    <dgm:pt modelId="{D7146106-827F-4D44-BEC1-37A10CC63CC1}" type="pres">
+      <dgm:prSet presAssocID="{5D588B93-55BC-489A-B3EB-71D3A76E91D4}" presName="spacer" presStyleCnt="0"/>
+      <dgm:spPr/>
+    </dgm:pt>
+    <dgm:pt modelId="{4E3E7EB8-E9A8-9142-BBFC-BD66F567CC7E}" type="pres">
+      <dgm:prSet presAssocID="{1C736EFF-F7B1-4480-9FE7-4833AD69F6B2}" presName="parentText" presStyleLbl="node1" presStyleIdx="1" presStyleCnt="4">
+        <dgm:presLayoutVars>
+          <dgm:chMax val="0"/>
+          <dgm:bulletEnabled val="1"/>
+        </dgm:presLayoutVars>
+      </dgm:prSet>
+      <dgm:spPr/>
+    </dgm:pt>
+    <dgm:pt modelId="{34CC068D-029D-F64B-A746-54FD125B2535}" type="pres">
+      <dgm:prSet presAssocID="{A98F62DB-E2B9-4682-B568-11FDA23D9D10}" presName="spacer" presStyleCnt="0"/>
+      <dgm:spPr/>
+    </dgm:pt>
+    <dgm:pt modelId="{FCF26537-BF41-714D-98E3-A66393AE860D}" type="pres">
+      <dgm:prSet presAssocID="{E8524C30-42AC-4ACE-A5A4-3E07D037F938}" presName="parentText" presStyleLbl="node1" presStyleIdx="2" presStyleCnt="4">
+        <dgm:presLayoutVars>
+          <dgm:chMax val="0"/>
+          <dgm:bulletEnabled val="1"/>
+        </dgm:presLayoutVars>
+      </dgm:prSet>
+      <dgm:spPr/>
+    </dgm:pt>
+    <dgm:pt modelId="{632C1B21-02D7-1F40-A3D8-7F58108EF9AD}" type="pres">
+      <dgm:prSet presAssocID="{DDE9B276-5342-46FA-A360-2220D186F5BD}" presName="spacer" presStyleCnt="0"/>
+      <dgm:spPr/>
+    </dgm:pt>
+    <dgm:pt modelId="{65658E7B-E377-6C45-A5C9-23E64219D2CB}" type="pres">
+      <dgm:prSet presAssocID="{AAABDF2D-5572-4DA0-B4B8-C017285213FD}" presName="parentText" presStyleLbl="node1" presStyleIdx="3" presStyleCnt="4">
+        <dgm:presLayoutVars>
+          <dgm:chMax val="0"/>
+          <dgm:bulletEnabled val="1"/>
+        </dgm:presLayoutVars>
+      </dgm:prSet>
+      <dgm:spPr/>
+    </dgm:pt>
+  </dgm:ptLst>
+  <dgm:cxnLst>
+    <dgm:cxn modelId="{4069F50D-0428-F343-8D5D-4A97060AF173}" type="presOf" srcId="{EBC12662-E32F-468D-A6ED-E37E896CA00A}" destId="{5C423DD3-D902-2A4A-B9D4-52B7C2C78095}" srcOrd="0" destOrd="0" presId="urn:microsoft.com/office/officeart/2005/8/layout/vList2"/>
+    <dgm:cxn modelId="{F24FD35C-DCB2-814C-BC37-7072812C5973}" type="presOf" srcId="{E8524C30-42AC-4ACE-A5A4-3E07D037F938}" destId="{FCF26537-BF41-714D-98E3-A66393AE860D}" srcOrd="0" destOrd="0" presId="urn:microsoft.com/office/officeart/2005/8/layout/vList2"/>
+    <dgm:cxn modelId="{76BC0968-3B6E-EA40-8F07-A6E48D3EA32F}" type="presOf" srcId="{B3533454-88E3-435E-A7F4-AA362E8A3B12}" destId="{4E454690-5819-A044-A22E-8711A5F4DD57}" srcOrd="0" destOrd="0" presId="urn:microsoft.com/office/officeart/2005/8/layout/vList2"/>
+    <dgm:cxn modelId="{6D32D669-244B-47F5-A76C-8D42C253C41A}" srcId="{B3533454-88E3-435E-A7F4-AA362E8A3B12}" destId="{AAABDF2D-5572-4DA0-B4B8-C017285213FD}" srcOrd="3" destOrd="0" parTransId="{AADC3671-29B6-444B-9F05-AFCD29CD090C}" sibTransId="{DBF888C9-4357-403F-9E86-548AE3D826BE}"/>
+    <dgm:cxn modelId="{831E2471-B667-DD45-89C8-49D851BC1674}" type="presOf" srcId="{1C736EFF-F7B1-4480-9FE7-4833AD69F6B2}" destId="{4E3E7EB8-E9A8-9142-BBFC-BD66F567CC7E}" srcOrd="0" destOrd="0" presId="urn:microsoft.com/office/officeart/2005/8/layout/vList2"/>
+    <dgm:cxn modelId="{EF39DBBA-7996-422A-8478-53206672FE9A}" srcId="{B3533454-88E3-435E-A7F4-AA362E8A3B12}" destId="{E8524C30-42AC-4ACE-A5A4-3E07D037F938}" srcOrd="2" destOrd="0" parTransId="{D3000381-2D0C-48B1-9961-28AD6253FF94}" sibTransId="{DDE9B276-5342-46FA-A360-2220D186F5BD}"/>
+    <dgm:cxn modelId="{C806BDCB-6985-4AC9-8636-EC5483EB895D}" srcId="{B3533454-88E3-435E-A7F4-AA362E8A3B12}" destId="{EBC12662-E32F-468D-A6ED-E37E896CA00A}" srcOrd="0" destOrd="0" parTransId="{6441A912-B8AE-4D62-B119-76A22690D285}" sibTransId="{5D588B93-55BC-489A-B3EB-71D3A76E91D4}"/>
+    <dgm:cxn modelId="{2B8B44E6-75BA-4E12-828C-8D767B9805FE}" srcId="{B3533454-88E3-435E-A7F4-AA362E8A3B12}" destId="{1C736EFF-F7B1-4480-9FE7-4833AD69F6B2}" srcOrd="1" destOrd="0" parTransId="{0A67B242-8BBD-4AB6-B67E-32281DCDB89B}" sibTransId="{A98F62DB-E2B9-4682-B568-11FDA23D9D10}"/>
+    <dgm:cxn modelId="{9CFF01FE-9FC6-104B-AC16-43CB55CFCB8A}" type="presOf" srcId="{AAABDF2D-5572-4DA0-B4B8-C017285213FD}" destId="{65658E7B-E377-6C45-A5C9-23E64219D2CB}" srcOrd="0" destOrd="0" presId="urn:microsoft.com/office/officeart/2005/8/layout/vList2"/>
+    <dgm:cxn modelId="{38F77335-09E6-224F-A9CE-9E06D3C127A8}" type="presParOf" srcId="{4E454690-5819-A044-A22E-8711A5F4DD57}" destId="{5C423DD3-D902-2A4A-B9D4-52B7C2C78095}" srcOrd="0" destOrd="0" presId="urn:microsoft.com/office/officeart/2005/8/layout/vList2"/>
+    <dgm:cxn modelId="{1D4B05F3-1D59-6F40-8DA2-3BA1260FFCDB}" type="presParOf" srcId="{4E454690-5819-A044-A22E-8711A5F4DD57}" destId="{D7146106-827F-4D44-BEC1-37A10CC63CC1}" srcOrd="1" destOrd="0" presId="urn:microsoft.com/office/officeart/2005/8/layout/vList2"/>
+    <dgm:cxn modelId="{ED31BE9E-8D7C-324D-9C82-992CD0483C11}" type="presParOf" srcId="{4E454690-5819-A044-A22E-8711A5F4DD57}" destId="{4E3E7EB8-E9A8-9142-BBFC-BD66F567CC7E}" srcOrd="2" destOrd="0" presId="urn:microsoft.com/office/officeart/2005/8/layout/vList2"/>
+    <dgm:cxn modelId="{D7D1DDE0-E0A5-EB4F-BAE0-28E5B9F59A90}" type="presParOf" srcId="{4E454690-5819-A044-A22E-8711A5F4DD57}" destId="{34CC068D-029D-F64B-A746-54FD125B2535}" srcOrd="3" destOrd="0" presId="urn:microsoft.com/office/officeart/2005/8/layout/vList2"/>
+    <dgm:cxn modelId="{4BB2193B-AA95-5947-907E-974C42934762}" type="presParOf" srcId="{4E454690-5819-A044-A22E-8711A5F4DD57}" destId="{FCF26537-BF41-714D-98E3-A66393AE860D}" srcOrd="4" destOrd="0" presId="urn:microsoft.com/office/officeart/2005/8/layout/vList2"/>
+    <dgm:cxn modelId="{9EF828BF-70B8-D149-9EDF-FE7AFF2C56A7}" type="presParOf" srcId="{4E454690-5819-A044-A22E-8711A5F4DD57}" destId="{632C1B21-02D7-1F40-A3D8-7F58108EF9AD}" srcOrd="5" destOrd="0" presId="urn:microsoft.com/office/officeart/2005/8/layout/vList2"/>
+    <dgm:cxn modelId="{80933E73-8C51-D14A-AF99-12FAE774D327}" type="presParOf" srcId="{4E454690-5819-A044-A22E-8711A5F4DD57}" destId="{65658E7B-E377-6C45-A5C9-23E64219D2CB}" srcOrd="6" destOrd="0" presId="urn:microsoft.com/office/officeart/2005/8/layout/vList2"/>
+  </dgm:cxnLst>
+  <dgm:bg/>
+  <dgm:whole/>
+  <dgm:extLst>
+    <a:ext uri="http://schemas.microsoft.com/office/drawing/2008/diagram">
+      <dsp:dataModelExt xmlns:dsp="http://schemas.microsoft.com/office/drawing/2008/diagram" relId="rId6" minVer="http://schemas.openxmlformats.org/drawingml/2006/diagram"/>
+    </a:ext>
+  </dgm:extLst>
+</dgm:dataModel>
+</file>
+
+<file path=ppt/diagrams/drawing1.xml><?xml version="1.0" encoding="utf-8"?>
+<dsp:drawing xmlns:dgm="http://schemas.openxmlformats.org/drawingml/2006/diagram" xmlns:dsp="http://schemas.microsoft.com/office/drawing/2008/diagram" xmlns:a="http://schemas.openxmlformats.org/drawingml/2006/main">
+  <dsp:spTree>
+    <dsp:nvGrpSpPr>
+      <dsp:cNvPr id="0" name=""/>
+      <dsp:cNvGrpSpPr/>
+    </dsp:nvGrpSpPr>
+    <dsp:grpSpPr/>
+    <dsp:sp modelId="{5C423DD3-D902-2A4A-B9D4-52B7C2C78095}">
+      <dsp:nvSpPr>
+        <dsp:cNvPr id="0" name=""/>
+        <dsp:cNvSpPr/>
+      </dsp:nvSpPr>
+      <dsp:spPr>
+        <a:xfrm>
+          <a:off x="0" y="498069"/>
+          <a:ext cx="10111155" cy="795600"/>
+        </a:xfrm>
+        <a:prstGeom prst="roundRect">
+          <a:avLst/>
+        </a:prstGeom>
+        <a:solidFill>
+          <a:schemeClr val="accent1">
+            <a:hueOff val="0"/>
+            <a:satOff val="0"/>
+            <a:lumOff val="0"/>
+            <a:alphaOff val="0"/>
+          </a:schemeClr>
+        </a:solidFill>
+        <a:ln w="19050" cap="flat" cmpd="sng" algn="ctr">
+          <a:solidFill>
+            <a:schemeClr val="lt1">
+              <a:hueOff val="0"/>
+              <a:satOff val="0"/>
+              <a:lumOff val="0"/>
+              <a:alphaOff val="0"/>
+            </a:schemeClr>
+          </a:solidFill>
+          <a:prstDash val="solid"/>
+          <a:miter lim="800000"/>
+        </a:ln>
+        <a:effectLst/>
+      </dsp:spPr>
+      <dsp:style>
+        <a:lnRef idx="2">
+          <a:scrgbClr r="0" g="0" b="0"/>
+        </a:lnRef>
+        <a:fillRef idx="1">
+          <a:scrgbClr r="0" g="0" b="0"/>
+        </a:fillRef>
+        <a:effectRef idx="0">
+          <a:scrgbClr r="0" g="0" b="0"/>
+        </a:effectRef>
+        <a:fontRef idx="minor">
+          <a:schemeClr val="lt1"/>
+        </a:fontRef>
+      </dsp:style>
+      <dsp:txBody>
+        <a:bodyPr spcFirstLastPara="0" vert="horz" wrap="square" lIns="76200" tIns="76200" rIns="76200" bIns="76200" numCol="1" spcCol="1270" anchor="ctr" anchorCtr="0">
+          <a:noAutofit/>
+        </a:bodyPr>
+        <a:lstStyle/>
+        <a:p>
+          <a:pPr marL="0" lvl="0" indent="0" algn="l" defTabSz="889000">
+            <a:lnSpc>
+              <a:spcPct val="90000"/>
+            </a:lnSpc>
+            <a:spcBef>
+              <a:spcPct val="0"/>
+            </a:spcBef>
+            <a:spcAft>
+              <a:spcPct val="35000"/>
+            </a:spcAft>
+            <a:buNone/>
+          </a:pPr>
+          <a:r>
+            <a:rPr lang="de-DE" sz="2000" kern="1200"/>
+            <a:t>We managed to adjust our model to reach a successrate of 94% (17/18) with a start of 22% (4/18)</a:t>
+          </a:r>
+          <a:endParaRPr lang="en-US" sz="2000" kern="1200"/>
+        </a:p>
+      </dsp:txBody>
+      <dsp:txXfrm>
+        <a:off x="38838" y="536907"/>
+        <a:ext cx="10033479" cy="717924"/>
+      </dsp:txXfrm>
+    </dsp:sp>
+    <dsp:sp modelId="{4E3E7EB8-E9A8-9142-BBFC-BD66F567CC7E}">
+      <dsp:nvSpPr>
+        <dsp:cNvPr id="0" name=""/>
+        <dsp:cNvSpPr/>
+      </dsp:nvSpPr>
+      <dsp:spPr>
+        <a:xfrm>
+          <a:off x="0" y="1351269"/>
+          <a:ext cx="10111155" cy="795600"/>
+        </a:xfrm>
+        <a:prstGeom prst="roundRect">
+          <a:avLst/>
+        </a:prstGeom>
+        <a:solidFill>
+          <a:schemeClr val="accent1">
+            <a:hueOff val="0"/>
+            <a:satOff val="0"/>
+            <a:lumOff val="0"/>
+            <a:alphaOff val="0"/>
+          </a:schemeClr>
+        </a:solidFill>
+        <a:ln w="19050" cap="flat" cmpd="sng" algn="ctr">
+          <a:solidFill>
+            <a:schemeClr val="lt1">
+              <a:hueOff val="0"/>
+              <a:satOff val="0"/>
+              <a:lumOff val="0"/>
+              <a:alphaOff val="0"/>
+            </a:schemeClr>
+          </a:solidFill>
+          <a:prstDash val="solid"/>
+          <a:miter lim="800000"/>
+        </a:ln>
+        <a:effectLst/>
+      </dsp:spPr>
+      <dsp:style>
+        <a:lnRef idx="2">
+          <a:scrgbClr r="0" g="0" b="0"/>
+        </a:lnRef>
+        <a:fillRef idx="1">
+          <a:scrgbClr r="0" g="0" b="0"/>
+        </a:fillRef>
+        <a:effectRef idx="0">
+          <a:scrgbClr r="0" g="0" b="0"/>
+        </a:effectRef>
+        <a:fontRef idx="minor">
+          <a:schemeClr val="lt1"/>
+        </a:fontRef>
+      </dsp:style>
+      <dsp:txBody>
+        <a:bodyPr spcFirstLastPara="0" vert="horz" wrap="square" lIns="76200" tIns="76200" rIns="76200" bIns="76200" numCol="1" spcCol="1270" anchor="ctr" anchorCtr="0">
+          <a:noAutofit/>
+        </a:bodyPr>
+        <a:lstStyle/>
+        <a:p>
+          <a:pPr marL="0" lvl="0" indent="0" algn="l" defTabSz="889000">
+            <a:lnSpc>
+              <a:spcPct val="90000"/>
+            </a:lnSpc>
+            <a:spcBef>
+              <a:spcPct val="0"/>
+            </a:spcBef>
+            <a:spcAft>
+              <a:spcPct val="35000"/>
+            </a:spcAft>
+            <a:buNone/>
+          </a:pPr>
+          <a:r>
+            <a:rPr lang="de-DE" sz="2000" kern="1200" dirty="0"/>
+            <a:t>The </a:t>
+          </a:r>
+          <a:r>
+            <a:rPr lang="de-DE" sz="2000" kern="1200" dirty="0" err="1"/>
+            <a:t>strongest</a:t>
+          </a:r>
+          <a:r>
+            <a:rPr lang="de-DE" sz="2000" kern="1200" dirty="0"/>
+            <a:t> </a:t>
+          </a:r>
+          <a:r>
+            <a:rPr lang="de-DE" sz="2000" kern="1200" dirty="0" err="1"/>
+            <a:t>impact</a:t>
+          </a:r>
+          <a:r>
+            <a:rPr lang="de-DE" sz="2000" kern="1200" dirty="0"/>
+            <a:t> was </a:t>
+          </a:r>
+          <a:r>
+            <a:rPr lang="de-DE" sz="2000" kern="1200" dirty="0" err="1"/>
+            <a:t>from</a:t>
+          </a:r>
+          <a:r>
+            <a:rPr lang="de-DE" sz="2000" kern="1200" dirty="0"/>
+            <a:t> </a:t>
+          </a:r>
+          <a:r>
+            <a:rPr lang="de-DE" sz="2000" kern="1200" dirty="0" err="1"/>
+            <a:t>describing</a:t>
+          </a:r>
+          <a:r>
+            <a:rPr lang="de-DE" sz="2000" kern="1200" dirty="0"/>
+            <a:t> </a:t>
+          </a:r>
+          <a:r>
+            <a:rPr lang="de-DE" sz="2000" kern="1200" dirty="0" err="1"/>
+            <a:t>the</a:t>
+          </a:r>
+          <a:r>
+            <a:rPr lang="de-DE" sz="2000" kern="1200" dirty="0"/>
+            <a:t> </a:t>
+          </a:r>
+          <a:r>
+            <a:rPr lang="de-DE" sz="2000" kern="1200" dirty="0" err="1"/>
+            <a:t>tables</a:t>
+          </a:r>
+          <a:r>
+            <a:rPr lang="de-DE" sz="2000" kern="1200" dirty="0"/>
+            <a:t> </a:t>
+          </a:r>
+          <a:r>
+            <a:rPr lang="de-DE" sz="2000" kern="1200" dirty="0" err="1"/>
+            <a:t>to</a:t>
+          </a:r>
+          <a:r>
+            <a:rPr lang="de-DE" sz="2000" kern="1200" dirty="0"/>
+            <a:t> </a:t>
+          </a:r>
+          <a:r>
+            <a:rPr lang="de-DE" sz="2000" kern="1200" dirty="0" err="1"/>
+            <a:t>the</a:t>
+          </a:r>
+          <a:r>
+            <a:rPr lang="de-DE" sz="2000" kern="1200" dirty="0"/>
+            <a:t> </a:t>
+          </a:r>
+          <a:r>
+            <a:rPr lang="de-DE" sz="2000" kern="1200" dirty="0" err="1"/>
+            <a:t>model</a:t>
+          </a:r>
+          <a:r>
+            <a:rPr lang="de-DE" sz="2000" kern="1200" dirty="0"/>
+            <a:t> and </a:t>
+          </a:r>
+          <a:r>
+            <a:rPr lang="de-DE" sz="2000" kern="1200" dirty="0" err="1"/>
+            <a:t>adjusting</a:t>
+          </a:r>
+          <a:r>
+            <a:rPr lang="de-DE" sz="2000" kern="1200" dirty="0"/>
+            <a:t> </a:t>
+          </a:r>
+          <a:r>
+            <a:rPr lang="de-DE" sz="2000" kern="1200" dirty="0" err="1"/>
+            <a:t>the</a:t>
+          </a:r>
+          <a:r>
+            <a:rPr lang="de-DE" sz="2000" kern="1200" dirty="0"/>
+            <a:t> </a:t>
+          </a:r>
+          <a:r>
+            <a:rPr lang="de-DE" sz="2000" kern="1200" dirty="0" err="1"/>
+            <a:t>model</a:t>
+          </a:r>
+          <a:r>
+            <a:rPr lang="de-DE" sz="2000" kern="1200" dirty="0"/>
+            <a:t> </a:t>
+          </a:r>
+          <a:r>
+            <a:rPr lang="de-DE" sz="2000" kern="1200" dirty="0" err="1"/>
+            <a:t>from</a:t>
+          </a:r>
+          <a:r>
+            <a:rPr lang="de-DE" sz="2000" kern="1200" dirty="0"/>
+            <a:t> </a:t>
+          </a:r>
+          <a:r>
+            <a:rPr lang="de-DE" sz="2000" kern="1200" dirty="0" err="1"/>
+            <a:t>llama</a:t>
+          </a:r>
+          <a:r>
+            <a:rPr lang="de-DE" sz="2000" kern="1200" dirty="0"/>
+            <a:t> </a:t>
+          </a:r>
+          <a:r>
+            <a:rPr lang="de-DE" sz="2000" kern="1200" dirty="0" err="1"/>
+            <a:t>to</a:t>
+          </a:r>
+          <a:r>
+            <a:rPr lang="de-DE" sz="2000" kern="1200" dirty="0"/>
+            <a:t> </a:t>
+          </a:r>
+          <a:r>
+            <a:rPr lang="de-DE" sz="2000" kern="1200" dirty="0" err="1"/>
+            <a:t>qwen</a:t>
+          </a:r>
+          <a:endParaRPr lang="en-US" sz="2000" kern="1200" dirty="0"/>
+        </a:p>
+      </dsp:txBody>
+      <dsp:txXfrm>
+        <a:off x="38838" y="1390107"/>
+        <a:ext cx="10033479" cy="717924"/>
+      </dsp:txXfrm>
+    </dsp:sp>
+    <dsp:sp modelId="{FCF26537-BF41-714D-98E3-A66393AE860D}">
+      <dsp:nvSpPr>
+        <dsp:cNvPr id="0" name=""/>
+        <dsp:cNvSpPr/>
+      </dsp:nvSpPr>
+      <dsp:spPr>
+        <a:xfrm>
+          <a:off x="0" y="2204469"/>
+          <a:ext cx="10111155" cy="795600"/>
+        </a:xfrm>
+        <a:prstGeom prst="roundRect">
+          <a:avLst/>
+        </a:prstGeom>
+        <a:solidFill>
+          <a:schemeClr val="accent1">
+            <a:hueOff val="0"/>
+            <a:satOff val="0"/>
+            <a:lumOff val="0"/>
+            <a:alphaOff val="0"/>
+          </a:schemeClr>
+        </a:solidFill>
+        <a:ln w="19050" cap="flat" cmpd="sng" algn="ctr">
+          <a:solidFill>
+            <a:schemeClr val="lt1">
+              <a:hueOff val="0"/>
+              <a:satOff val="0"/>
+              <a:lumOff val="0"/>
+              <a:alphaOff val="0"/>
+            </a:schemeClr>
+          </a:solidFill>
+          <a:prstDash val="solid"/>
+          <a:miter lim="800000"/>
+        </a:ln>
+        <a:effectLst/>
+      </dsp:spPr>
+      <dsp:style>
+        <a:lnRef idx="2">
+          <a:scrgbClr r="0" g="0" b="0"/>
+        </a:lnRef>
+        <a:fillRef idx="1">
+          <a:scrgbClr r="0" g="0" b="0"/>
+        </a:fillRef>
+        <a:effectRef idx="0">
+          <a:scrgbClr r="0" g="0" b="0"/>
+        </a:effectRef>
+        <a:fontRef idx="minor">
+          <a:schemeClr val="lt1"/>
+        </a:fontRef>
+      </dsp:style>
+      <dsp:txBody>
+        <a:bodyPr spcFirstLastPara="0" vert="horz" wrap="square" lIns="76200" tIns="76200" rIns="76200" bIns="76200" numCol="1" spcCol="1270" anchor="ctr" anchorCtr="0">
+          <a:noAutofit/>
+        </a:bodyPr>
+        <a:lstStyle/>
+        <a:p>
+          <a:pPr marL="0" lvl="0" indent="0" algn="l" defTabSz="889000">
+            <a:lnSpc>
+              <a:spcPct val="90000"/>
+            </a:lnSpc>
+            <a:spcBef>
+              <a:spcPct val="0"/>
+            </a:spcBef>
+            <a:spcAft>
+              <a:spcPct val="35000"/>
+            </a:spcAft>
+            <a:buNone/>
+          </a:pPr>
+          <a:r>
+            <a:rPr lang="de-DE" sz="2000" kern="1200"/>
+            <a:t>We wanted to prove that our model is not completly overfitting to the questions we optimezed it on and it reached 50% (9/18) which means it is not generalizing that well</a:t>
+          </a:r>
+          <a:endParaRPr lang="en-US" sz="2000" kern="1200"/>
+        </a:p>
+      </dsp:txBody>
+      <dsp:txXfrm>
+        <a:off x="38838" y="2243307"/>
+        <a:ext cx="10033479" cy="717924"/>
+      </dsp:txXfrm>
+    </dsp:sp>
+    <dsp:sp modelId="{65658E7B-E377-6C45-A5C9-23E64219D2CB}">
+      <dsp:nvSpPr>
+        <dsp:cNvPr id="0" name=""/>
+        <dsp:cNvSpPr/>
+      </dsp:nvSpPr>
+      <dsp:spPr>
+        <a:xfrm>
+          <a:off x="0" y="3057669"/>
+          <a:ext cx="10111155" cy="795600"/>
+        </a:xfrm>
+        <a:prstGeom prst="roundRect">
+          <a:avLst/>
+        </a:prstGeom>
+        <a:solidFill>
+          <a:schemeClr val="accent1">
+            <a:hueOff val="0"/>
+            <a:satOff val="0"/>
+            <a:lumOff val="0"/>
+            <a:alphaOff val="0"/>
+          </a:schemeClr>
+        </a:solidFill>
+        <a:ln w="19050" cap="flat" cmpd="sng" algn="ctr">
+          <a:solidFill>
+            <a:schemeClr val="lt1">
+              <a:hueOff val="0"/>
+              <a:satOff val="0"/>
+              <a:lumOff val="0"/>
+              <a:alphaOff val="0"/>
+            </a:schemeClr>
+          </a:solidFill>
+          <a:prstDash val="solid"/>
+          <a:miter lim="800000"/>
+        </a:ln>
+        <a:effectLst/>
+      </dsp:spPr>
+      <dsp:style>
+        <a:lnRef idx="2">
+          <a:scrgbClr r="0" g="0" b="0"/>
+        </a:lnRef>
+        <a:fillRef idx="1">
+          <a:scrgbClr r="0" g="0" b="0"/>
+        </a:fillRef>
+        <a:effectRef idx="0">
+          <a:scrgbClr r="0" g="0" b="0"/>
+        </a:effectRef>
+        <a:fontRef idx="minor">
+          <a:schemeClr val="lt1"/>
+        </a:fontRef>
+      </dsp:style>
+      <dsp:txBody>
+        <a:bodyPr spcFirstLastPara="0" vert="horz" wrap="square" lIns="76200" tIns="76200" rIns="76200" bIns="76200" numCol="1" spcCol="1270" anchor="ctr" anchorCtr="0">
+          <a:noAutofit/>
+        </a:bodyPr>
+        <a:lstStyle/>
+        <a:p>
+          <a:pPr marL="0" lvl="0" indent="0" algn="l" defTabSz="889000">
+            <a:lnSpc>
+              <a:spcPct val="90000"/>
+            </a:lnSpc>
+            <a:spcBef>
+              <a:spcPct val="0"/>
+            </a:spcBef>
+            <a:spcAft>
+              <a:spcPct val="35000"/>
+            </a:spcAft>
+            <a:buNone/>
+          </a:pPr>
+          <a:r>
+            <a:rPr lang="de-DE" sz="2000" kern="1200" dirty="0"/>
+            <a:t>In </a:t>
+          </a:r>
+          <a:r>
+            <a:rPr lang="de-DE" sz="2000" kern="1200" dirty="0" err="1"/>
+            <a:t>the</a:t>
+          </a:r>
+          <a:r>
+            <a:rPr lang="de-DE" sz="2000" kern="1200" dirty="0"/>
+            <a:t> </a:t>
+          </a:r>
+          <a:r>
+            <a:rPr lang="de-DE" sz="2000" kern="1200" dirty="0" err="1"/>
+            <a:t>future</a:t>
+          </a:r>
+          <a:r>
+            <a:rPr lang="de-DE" sz="2000" kern="1200" dirty="0"/>
+            <a:t> </a:t>
+          </a:r>
+          <a:r>
+            <a:rPr lang="de-DE" sz="2000" kern="1200" dirty="0" err="1"/>
+            <a:t>we</a:t>
+          </a:r>
+          <a:r>
+            <a:rPr lang="de-DE" sz="2000" kern="1200" dirty="0"/>
+            <a:t> </a:t>
+          </a:r>
+          <a:r>
+            <a:rPr lang="de-DE" sz="2000" kern="1200" dirty="0" err="1"/>
+            <a:t>would</a:t>
+          </a:r>
+          <a:r>
+            <a:rPr lang="de-DE" sz="2000" kern="1200" dirty="0"/>
+            <a:t> like </a:t>
+          </a:r>
+          <a:r>
+            <a:rPr lang="de-DE" sz="2000" kern="1200" dirty="0" err="1"/>
+            <a:t>to</a:t>
+          </a:r>
+          <a:r>
+            <a:rPr lang="de-DE" sz="2000" kern="1200" dirty="0"/>
+            <a:t> </a:t>
+          </a:r>
+          <a:r>
+            <a:rPr lang="de-DE" sz="2000" kern="1200" dirty="0" err="1"/>
+            <a:t>optimize</a:t>
+          </a:r>
+          <a:r>
+            <a:rPr lang="de-DE" sz="2000" kern="1200" dirty="0"/>
+            <a:t> on </a:t>
+          </a:r>
+          <a:r>
+            <a:rPr lang="de-DE" sz="2000" kern="1200" dirty="0" err="1"/>
+            <a:t>parameters</a:t>
+          </a:r>
+          <a:r>
+            <a:rPr lang="de-DE" sz="2000" kern="1200" dirty="0"/>
+            <a:t> </a:t>
+          </a:r>
+          <a:r>
+            <a:rPr lang="de-DE" sz="2000" kern="1200" dirty="0" err="1"/>
+            <a:t>that</a:t>
+          </a:r>
+          <a:r>
+            <a:rPr lang="de-DE" sz="2000" kern="1200" dirty="0"/>
+            <a:t> </a:t>
+          </a:r>
+          <a:r>
+            <a:rPr lang="de-DE" sz="2000" kern="1200" dirty="0" err="1"/>
+            <a:t>are</a:t>
+          </a:r>
+          <a:r>
+            <a:rPr lang="de-DE" sz="2000" kern="1200" dirty="0"/>
+            <a:t> </a:t>
+          </a:r>
+          <a:r>
+            <a:rPr lang="de-DE" sz="2000" kern="1200" dirty="0" err="1"/>
+            <a:t>generalizing</a:t>
+          </a:r>
+          <a:r>
+            <a:rPr lang="de-DE" sz="2000" kern="1200" dirty="0"/>
+            <a:t>, </a:t>
+          </a:r>
+          <a:r>
+            <a:rPr lang="de-DE" sz="2000" kern="1200" dirty="0" err="1"/>
+            <a:t>meaning</a:t>
+          </a:r>
+          <a:r>
+            <a:rPr lang="de-DE" sz="2000" kern="1200" dirty="0"/>
+            <a:t> </a:t>
+          </a:r>
+          <a:r>
+            <a:rPr lang="de-DE" sz="2000" kern="1200" dirty="0" err="1"/>
+            <a:t>to</a:t>
+          </a:r>
+          <a:r>
+            <a:rPr lang="de-DE" sz="2000" kern="1200" dirty="0"/>
+            <a:t> </a:t>
+          </a:r>
+          <a:r>
+            <a:rPr lang="de-DE" sz="2000" kern="1200" dirty="0" err="1"/>
+            <a:t>evaluate</a:t>
+          </a:r>
+          <a:r>
+            <a:rPr lang="de-DE" sz="2000" kern="1200" dirty="0"/>
+            <a:t> different </a:t>
+          </a:r>
+          <a:r>
+            <a:rPr lang="de-DE" sz="2000" kern="1200" dirty="0" err="1"/>
+            <a:t>test</a:t>
+          </a:r>
+          <a:r>
+            <a:rPr lang="de-DE" sz="2000" kern="1200" dirty="0"/>
+            <a:t> </a:t>
+          </a:r>
+          <a:r>
+            <a:rPr lang="de-DE" sz="2000" kern="1200" dirty="0" err="1"/>
+            <a:t>sets</a:t>
+          </a:r>
+          <a:r>
+            <a:rPr lang="de-DE" sz="2000" kern="1200" dirty="0"/>
+            <a:t> at </a:t>
+          </a:r>
+          <a:r>
+            <a:rPr lang="de-DE" sz="2000" kern="1200" dirty="0" err="1"/>
+            <a:t>the</a:t>
+          </a:r>
+          <a:r>
+            <a:rPr lang="de-DE" sz="2000" kern="1200" dirty="0"/>
+            <a:t> same time </a:t>
+          </a:r>
+          <a:r>
+            <a:rPr lang="de-DE" sz="2000" kern="1200" dirty="0" err="1"/>
+            <a:t>to</a:t>
+          </a:r>
+          <a:r>
+            <a:rPr lang="de-DE" sz="2000" kern="1200" dirty="0"/>
+            <a:t> check </a:t>
+          </a:r>
+          <a:r>
+            <a:rPr lang="de-DE" sz="2000" kern="1200" dirty="0" err="1"/>
+            <a:t>if</a:t>
+          </a:r>
+          <a:r>
+            <a:rPr lang="de-DE" sz="2000" kern="1200" dirty="0"/>
+            <a:t> </a:t>
+          </a:r>
+          <a:r>
+            <a:rPr lang="de-DE" sz="2000" kern="1200" dirty="0" err="1"/>
+            <a:t>we</a:t>
+          </a:r>
+          <a:r>
+            <a:rPr lang="de-DE" sz="2000" kern="1200" dirty="0"/>
+            <a:t> </a:t>
+          </a:r>
+          <a:r>
+            <a:rPr lang="de-DE" sz="2000" kern="1200" dirty="0" err="1"/>
+            <a:t>reached</a:t>
+          </a:r>
+          <a:r>
+            <a:rPr lang="de-DE" sz="2000" kern="1200" dirty="0"/>
+            <a:t> </a:t>
+          </a:r>
+          <a:r>
+            <a:rPr lang="de-DE" sz="2000" kern="1200" dirty="0" err="1"/>
+            <a:t>better</a:t>
+          </a:r>
+          <a:r>
+            <a:rPr lang="de-DE" sz="2000" kern="1200" dirty="0"/>
+            <a:t> </a:t>
+          </a:r>
+          <a:r>
+            <a:rPr lang="de-DE" sz="2000" kern="1200" dirty="0" err="1"/>
+            <a:t>scores</a:t>
+          </a:r>
+          <a:r>
+            <a:rPr lang="de-DE" sz="2000" kern="1200" dirty="0"/>
+            <a:t> in </a:t>
+          </a:r>
+          <a:r>
+            <a:rPr lang="de-DE" sz="2000" kern="1200" dirty="0" err="1"/>
+            <a:t>general</a:t>
+          </a:r>
+          <a:endParaRPr lang="en-US" sz="2000" kern="1200" dirty="0"/>
+        </a:p>
+      </dsp:txBody>
+      <dsp:txXfrm>
+        <a:off x="38838" y="3096507"/>
+        <a:ext cx="10033479" cy="717924"/>
+      </dsp:txXfrm>
+    </dsp:sp>
+  </dsp:spTree>
+</dsp:drawing>
+</file>
+
+<file path=ppt/diagrams/layout1.xml><?xml version="1.0" encoding="utf-8"?>
+<dgm:layoutDef xmlns:dgm="http://schemas.openxmlformats.org/drawingml/2006/diagram" xmlns:a="http://schemas.openxmlformats.org/drawingml/2006/main" uniqueId="urn:microsoft.com/office/officeart/2005/8/layout/vList2">
+  <dgm:title val=""/>
+  <dgm:desc val=""/>
+  <dgm:catLst>
+    <dgm:cat type="list" pri="3000"/>
+    <dgm:cat type="convert" pri="1000"/>
+  </dgm:catLst>
+  <dgm:sampData>
+    <dgm:dataModel>
+      <dgm:ptLst>
+        <dgm:pt modelId="0" type="doc"/>
+        <dgm:pt modelId="1">
+          <dgm:prSet phldr="1"/>
+        </dgm:pt>
+        <dgm:pt modelId="11">
+          <dgm:prSet phldr="1"/>
+        </dgm:pt>
+        <dgm:pt modelId="2">
+          <dgm:prSet phldr="1"/>
+        </dgm:pt>
+        <dgm:pt modelId="21">
+          <dgm:prSet phldr="1"/>
+        </dgm:pt>
+      </dgm:ptLst>
+      <dgm:cxnLst>
+        <dgm:cxn modelId="4" srcId="0" destId="1" srcOrd="0" destOrd="0"/>
+        <dgm:cxn modelId="5" srcId="0" destId="2" srcOrd="1" destOrd="0"/>
+        <dgm:cxn modelId="12" srcId="1" destId="11" srcOrd="0" destOrd="0"/>
+        <dgm:cxn modelId="23" srcId="2" destId="21" srcOrd="0" destOrd="0"/>
+      </dgm:cxnLst>
+      <dgm:bg/>
+      <dgm:whole/>
+    </dgm:dataModel>
+  </dgm:sampData>
+  <dgm:styleData>
+    <dgm:dataModel>
+      <dgm:ptLst>
+        <dgm:pt modelId="0" type="doc"/>
+        <dgm:pt modelId="1"/>
+        <dgm:pt modelId="2"/>
+      </dgm:ptLst>
+      <dgm:cxnLst>
+        <dgm:cxn modelId="3" srcId="0" destId="1" srcOrd="0" destOrd="0"/>
+        <dgm:cxn modelId="4" srcId="0" destId="2" srcOrd="1" destOrd="0"/>
+      </dgm:cxnLst>
+      <dgm:bg/>
+      <dgm:whole/>
+    </dgm:dataModel>
+  </dgm:styleData>
+  <dgm:clrData>
+    <dgm:dataModel>
+      <dgm:ptLst>
+        <dgm:pt modelId="0" type="doc"/>
+        <dgm:pt modelId="1"/>
+        <dgm:pt modelId="2"/>
+        <dgm:pt modelId="3"/>
+        <dgm:pt modelId="4"/>
+      </dgm:ptLst>
+      <dgm:cxnLst>
+        <dgm:cxn modelId="5" srcId="0" destId="1" srcOrd="0" destOrd="0"/>
+        <dgm:cxn modelId="6" srcId="0" destId="2" srcOrd="1" destOrd="0"/>
+        <dgm:cxn modelId="7" srcId="0" destId="3" srcOrd="2" destOrd="0"/>
+        <dgm:cxn modelId="8" srcId="0" destId="4" srcOrd="3" destOrd="0"/>
+      </dgm:cxnLst>
+      <dgm:bg/>
+      <dgm:whole/>
+    </dgm:dataModel>
+  </dgm:clrData>
+  <dgm:layoutNode name="linear">
+    <dgm:varLst>
+      <dgm:animLvl val="lvl"/>
+      <dgm:resizeHandles val="exact"/>
+    </dgm:varLst>
+    <dgm:alg type="lin">
+      <dgm:param type="linDir" val="fromT"/>
+      <dgm:param type="vertAlign" val="mid"/>
+    </dgm:alg>
+    <dgm:shape xmlns:r="http://schemas.openxmlformats.org/officeDocument/2006/relationships" r:blip="">
+      <dgm:adjLst/>
+    </dgm:shape>
+    <dgm:presOf/>
+    <dgm:constrLst>
+      <dgm:constr type="w" for="ch" forName="parentText" refType="w"/>
+      <dgm:constr type="h" for="ch" forName="parentText" refType="primFontSz" refFor="ch" refForName="parentText" fact="0.52"/>
+      <dgm:constr type="w" for="ch" forName="childText" refType="w"/>
+      <dgm:constr type="h" for="ch" forName="childText" refType="primFontSz" refFor="ch" refForName="parentText" fact="0.46"/>
+      <dgm:constr type="h" for="ch" forName="parentText" op="equ"/>
+      <dgm:constr type="primFontSz" for="ch" forName="parentText" op="equ" val="65"/>
+      <dgm:constr type="primFontSz" for="ch" forName="childText" refType="primFontSz" refFor="ch" refForName="parentText" op="equ"/>
+      <dgm:constr type="h" for="ch" forName="spacer" refType="primFontSz" refFor="ch" refForName="parentText" fact="0.08"/>
+    </dgm:constrLst>
+    <dgm:ruleLst>
+      <dgm:rule type="primFontSz" for="ch" forName="parentText" val="5" fact="NaN" max="NaN"/>
+    </dgm:ruleLst>
+    <dgm:forEach name="Name0" axis="ch" ptType="node">
+      <dgm:layoutNode name="parentText" styleLbl="node1">
+        <dgm:varLst>
+          <dgm:chMax val="0"/>
+          <dgm:bulletEnabled val="1"/>
+        </dgm:varLst>
+        <dgm:alg type="tx">
+          <dgm:param type="parTxLTRAlign" val="l"/>
+          <dgm:param type="parTxRTLAlign" val="r"/>
+        </dgm:alg>
+        <dgm:shape xmlns:r="http://schemas.openxmlformats.org/officeDocument/2006/relationships" type="roundRect" r:blip="">
+          <dgm:adjLst/>
+        </dgm:shape>
+        <dgm:presOf axis="self"/>
+        <dgm:constrLst>
+          <dgm:constr type="tMarg" refType="primFontSz" fact="0.3"/>
+          <dgm:constr type="bMarg" refType="primFontSz" fact="0.3"/>
+          <dgm:constr type="lMarg" refType="primFontSz" fact="0.3"/>
+          <dgm:constr type="rMarg" refType="primFontSz" fact="0.3"/>
+        </dgm:constrLst>
+        <dgm:ruleLst>
+          <dgm:rule type="h" val="INF" fact="NaN" max="NaN"/>
+        </dgm:ruleLst>
+      </dgm:layoutNode>
+      <dgm:choose name="Name1">
+        <dgm:if name="Name2" axis="ch" ptType="node" func="cnt" op="gte" val="1">
+          <dgm:layoutNode name="childText" styleLbl="revTx">
+            <dgm:varLst>
+              <dgm:bulletEnabled val="1"/>
+            </dgm:varLst>
+            <dgm:alg type="tx">
+              <dgm:param type="stBulletLvl" val="1"/>
+              <dgm:param type="lnSpAfChP" val="20"/>
+            </dgm:alg>
+            <dgm:shape xmlns:r="http://schemas.openxmlformats.org/officeDocument/2006/relationships" type="rect" r:blip="">
+              <dgm:adjLst/>
+            </dgm:shape>
+            <dgm:presOf axis="des" ptType="node"/>
+            <dgm:constrLst>
+              <dgm:constr type="tMarg" refType="primFontSz" fact="0.1"/>
+              <dgm:constr type="bMarg" refType="primFontSz" fact="0.1"/>
+              <dgm:constr type="lMarg" refType="w" fact="0.09"/>
+            </dgm:constrLst>
+            <dgm:ruleLst>
+              <dgm:rule type="h" val="INF" fact="NaN" max="NaN"/>
+            </dgm:ruleLst>
+          </dgm:layoutNode>
+        </dgm:if>
+        <dgm:else name="Name3">
+          <dgm:choose name="Name4">
+            <dgm:if name="Name5" axis="par ch" ptType="doc node" func="cnt" op="gte" val="2">
+              <dgm:forEach name="Name6" axis="followSib" ptType="sibTrans" cnt="1">
+                <dgm:layoutNode name="spacer">
+                  <dgm:alg type="sp"/>
+                  <dgm:shape xmlns:r="http://schemas.openxmlformats.org/officeDocument/2006/relationships" r:blip="">
+                    <dgm:adjLst/>
+                  </dgm:shape>
+                  <dgm:presOf/>
+                  <dgm:constrLst/>
+                  <dgm:ruleLst/>
+                </dgm:layoutNode>
+              </dgm:forEach>
+            </dgm:if>
+            <dgm:else name="Name7"/>
+          </dgm:choose>
+        </dgm:else>
+      </dgm:choose>
+    </dgm:forEach>
+  </dgm:layoutNode>
+</dgm:layoutDef>
+</file>
+
+<file path=ppt/diagrams/quickStyle1.xml><?xml version="1.0" encoding="utf-8"?>
+<dgm:styleDef xmlns:dgm="http://schemas.openxmlformats.org/drawingml/2006/diagram" xmlns:a="http://schemas.openxmlformats.org/drawingml/2006/main" uniqueId="urn:microsoft.com/office/officeart/2005/8/quickstyle/simple1">
+  <dgm:title val=""/>
+  <dgm:desc val=""/>
+  <dgm:catLst>
+    <dgm:cat type="simple" pri="10100"/>
+  </dgm:catLst>
+  <dgm:scene3d>
+    <a:camera prst="orthographicFront"/>
+    <a:lightRig rig="threePt" dir="t"/>
+  </dgm:scene3d>
+  <dgm:styleLbl name="node0">
+    <dgm:scene3d>
+      <a:camera prst="orthographicFront"/>
+      <a:lightRig rig="threePt" dir="t"/>
+    </dgm:scene3d>
+    <dgm:sp3d/>
+    <dgm:txPr/>
+    <dgm:style>
+      <a:lnRef idx="2">
+        <a:scrgbClr r="0" g="0" b="0"/>
+      </a:lnRef>
+      <a:fillRef idx="1">
+        <a:scrgbClr r="0" g="0" b="0"/>
+      </a:fillRef>
+      <a:effectRef idx="0">
+        <a:scrgbClr r="0" g="0" b="0"/>
+      </a:effectRef>
+      <a:fontRef idx="minor">
+        <a:schemeClr val="lt1"/>
+      </a:fontRef>
+    </dgm:style>
+  </dgm:styleLbl>
+  <dgm:styleLbl name="lnNode1">
+    <dgm:scene3d>
+      <a:camera prst="orthographicFront"/>
+      <a:lightRig rig="threePt" dir="t"/>
+    </dgm:scene3d>
+    <dgm:sp3d/>
+    <dgm:txPr/>
+    <dgm:style>
+      <a:lnRef idx="2">
+        <a:scrgbClr r="0" g="0" b="0"/>
+      </a:lnRef>
+      <a:fillRef idx="1">
+        <a:scrgbClr r="0" g="0" b="0"/>
+      </a:fillRef>
+      <a:effectRef idx="0">
+        <a:scrgbClr r="0" g="0" b="0"/>
+      </a:effectRef>
+      <a:fontRef idx="minor">
+        <a:schemeClr val="lt1"/>
+      </a:fontRef>
+    </dgm:style>
+  </dgm:styleLbl>
+  <dgm:styleLbl name="vennNode1">
+    <dgm:scene3d>
+      <a:camera prst="orthographicFront"/>
+      <a:lightRig rig="threePt" dir="t"/>
+    </dgm:scene3d>
+    <dgm:sp3d/>
+    <dgm:txPr/>
+    <dgm:style>
+      <a:lnRef idx="2">
+        <a:scrgbClr r="0" g="0" b="0"/>
+      </a:lnRef>
+      <a:fillRef idx="1">
+        <a:scrgbClr r="0" g="0" b="0"/>
+      </a:fillRef>
+      <a:effectRef idx="0">
+        <a:scrgbClr r="0" g="0" b="0"/>
+      </a:effectRef>
+      <a:fontRef idx="minor">
+        <a:schemeClr val="tx1"/>
+      </a:fontRef>
+    </dgm:style>
+  </dgm:styleLbl>
+  <dgm:styleLbl name="alignNode1">
+    <dgm:scene3d>
+      <a:camera prst="orthographicFront"/>
+      <a:lightRig rig="threePt" dir="t"/>
+    </dgm:scene3d>
+    <dgm:sp3d/>
+    <dgm:txPr/>
+    <dgm:style>
+      <a:lnRef idx="2">
+        <a:scrgbClr r="0" g="0" b="0"/>
+      </a:lnRef>
+      <a:fillRef idx="1">
+        <a:scrgbClr r="0" g="0" b="0"/>
+      </a:fillRef>
+      <a:effectRef idx="0">
+        <a:scrgbClr r="0" g="0" b="0"/>
+      </a:effectRef>
+      <a:fontRef idx="minor">
+        <a:schemeClr val="lt1"/>
+      </a:fontRef>
+    </dgm:style>
+  </dgm:styleLbl>
+  <dgm:styleLbl name="node1">
+    <dgm:scene3d>
+      <a:camera prst="orthographicFront"/>
+      <a:lightRig rig="threePt" dir="t"/>
+    </dgm:scene3d>
+    <dgm:sp3d/>
+    <dgm:txPr/>
+    <dgm:style>
+      <a:lnRef idx="2">
+        <a:scrgbClr r="0" g="0" b="0"/>
+      </a:lnRef>
+      <a:fillRef idx="1">
+        <a:scrgbClr r="0" g="0" b="0"/>
+      </a:fillRef>
+      <a:effectRef idx="0">
+        <a:scrgbClr r="0" g="0" b="0"/>
+      </a:effectRef>
+      <a:fontRef idx="minor">
+        <a:schemeClr val="lt1"/>
+      </a:fontRef>
+    </dgm:style>
+  </dgm:styleLbl>
+  <dgm:styleLbl name="node2">
+    <dgm:scene3d>
+      <a:camera prst="orthographicFront"/>
+      <a:lightRig rig="threePt" dir="t"/>
+    </dgm:scene3d>
+    <dgm:sp3d/>
+    <dgm:txPr/>
+    <dgm:style>
+      <a:lnRef idx="2">
+        <a:scrgbClr r="0" g="0" b="0"/>
+      </a:lnRef>
+      <a:fillRef idx="1">
+        <a:scrgbClr r="0" g="0" b="0"/>
+      </a:fillRef>
+      <a:effectRef idx="0">
+        <a:scrgbClr r="0" g="0" b="0"/>
+      </a:effectRef>
+      <a:fontRef idx="minor">
+        <a:schemeClr val="lt1"/>
+      </a:fontRef>
+    </dgm:style>
+  </dgm:styleLbl>
+  <dgm:styleLbl name="node3">
+    <dgm:scene3d>
+      <a:camera prst="orthographicFront"/>
+      <a:lightRig rig="threePt" dir="t"/>
+    </dgm:scene3d>
+    <dgm:sp3d/>
+    <dgm:txPr/>
+    <dgm:style>
+      <a:lnRef idx="2">
+        <a:scrgbClr r="0" g="0" b="0"/>
+      </a:lnRef>
+      <a:fillRef idx="1">
+        <a:scrgbClr r="0" g="0" b="0"/>
+      </a:fillRef>
+      <a:effectRef idx="0">
+        <a:scrgbClr r="0" g="0" b="0"/>
+      </a:effectRef>
+      <a:fontRef idx="minor">
+        <a:schemeClr val="lt1"/>
+      </a:fontRef>
+    </dgm:style>
+  </dgm:styleLbl>
+  <dgm:styleLbl name="node4">
+    <dgm:scene3d>
+      <a:camera prst="orthographicFront"/>
+      <a:lightRig rig="threePt" dir="t"/>
+    </dgm:scene3d>
+    <dgm:sp3d/>
+    <dgm:txPr/>
+    <dgm:style>
+      <a:lnRef idx="2">
+        <a:scrgbClr r="0" g="0" b="0"/>
+      </a:lnRef>
+      <a:fillRef idx="1">
+        <a:scrgbClr r="0" g="0" b="0"/>
+      </a:fillRef>
+      <a:effectRef idx="0">
+        <a:scrgbClr r="0" g="0" b="0"/>
+      </a:effectRef>
+      <a:fontRef idx="minor">
+        <a:schemeClr val="lt1"/>
+      </a:fontRef>
+    </dgm:style>
+  </dgm:styleLbl>
+  <dgm:styleLbl name="fgImgPlace1">
+    <dgm:scene3d>
+      <a:camera prst="orthographicFront"/>
+      <a:lightRig rig="threePt" dir="t"/>
+    </dgm:scene3d>
+    <dgm:sp3d/>
+    <dgm:txPr/>
+    <dgm:style>
+      <a:lnRef idx="2">
+        <a:scrgbClr r="0" g="0" b="0"/>
+      </a:lnRef>
+      <a:fillRef idx="1">
+        <a:scrgbClr r="0" g="0" b="0"/>
+      </a:fillRef>
+      <a:effectRef idx="0">
+        <a:scrgbClr r="0" g="0" b="0"/>
+      </a:effectRef>
+      <a:fontRef idx="minor"/>
+    </dgm:style>
+  </dgm:styleLbl>
+  <dgm:styleLbl name="alignImgPlace1">
+    <dgm:scene3d>
+      <a:camera prst="orthographicFront"/>
+      <a:lightRig rig="threePt" dir="t"/>
+    </dgm:scene3d>
+    <dgm:sp3d/>
+    <dgm:txPr/>
+    <dgm:style>
+      <a:lnRef idx="2">
+        <a:scrgbClr r="0" g="0" b="0"/>
+      </a:lnRef>
+      <a:fillRef idx="1">
+        <a:scrgbClr r="0" g="0" b="0"/>
+      </a:fillRef>
+      <a:effectRef idx="0">
+        <a:scrgbClr r="0" g="0" b="0"/>
+      </a:effectRef>
+      <a:fontRef idx="minor"/>
+    </dgm:style>
+  </dgm:styleLbl>
+  <dgm:styleLbl name="bgImgPlace1">
+    <dgm:scene3d>
+      <a:camera prst="orthographicFront"/>
+      <a:lightRig rig="threePt" dir="t"/>
+    </dgm:scene3d>
+    <dgm:sp3d/>
+    <dgm:txPr/>
+    <dgm:style>
+      <a:lnRef idx="2">
+        <a:scrgbClr r="0" g="0" b="0"/>
+      </a:lnRef>
+      <a:fillRef idx="1">
+        <a:scrgbClr r="0" g="0" b="0"/>
+      </a:fillRef>
+      <a:effectRef idx="0">
+        <a:scrgbClr r="0" g="0" b="0"/>
+      </a:effectRef>
+      <a:fontRef idx="minor"/>
+    </dgm:style>
+  </dgm:styleLbl>
+  <dgm:styleLbl name="sibTrans2D1">
+    <dgm:scene3d>
+      <a:camera prst="orthographicFront"/>
+      <a:lightRig rig="threePt" dir="t"/>
+    </dgm:scene3d>
+    <dgm:sp3d/>
+    <dgm:txPr/>
+    <dgm:style>
+      <a:lnRef idx="0">
+        <a:scrgbClr r="0" g="0" b="0"/>
+      </a:lnRef>
+      <a:fillRef idx="1">
+        <a:scrgbClr r="0" g="0" b="0"/>
+      </a:fillRef>
+      <a:effectRef idx="0">
+        <a:scrgbClr r="0" g="0" b="0"/>
+      </a:effectRef>
+      <a:fontRef idx="minor">
+        <a:schemeClr val="lt1"/>
+      </a:fontRef>
+    </dgm:style>
+  </dgm:styleLbl>
+  <dgm:styleLbl name="fgSibTrans2D1">
+    <dgm:scene3d>
+      <a:camera prst="orthographicFront"/>
+      <a:lightRig rig="threePt" dir="t"/>
+    </dgm:scene3d>
+    <dgm:sp3d/>
+    <dgm:txPr/>
+    <dgm:style>
+      <a:lnRef idx="0">
+        <a:scrgbClr r="0" g="0" b="0"/>
+      </a:lnRef>
+      <a:fillRef idx="1">
+        <a:scrgbClr r="0" g="0" b="0"/>
+      </a:fillRef>
+      <a:effectRef idx="0">
+        <a:scrgbClr r="0" g="0" b="0"/>
+      </a:effectRef>
+      <a:fontRef idx="minor">
+        <a:schemeClr val="lt1"/>
+      </a:fontRef>
+    </dgm:style>
+  </dgm:styleLbl>
+  <dgm:styleLbl name="bgSibTrans2D1">
+    <dgm:scene3d>
+      <a:camera prst="orthographicFront"/>
+      <a:lightRig rig="threePt" dir="t"/>
+    </dgm:scene3d>
+    <dgm:sp3d/>
+    <dgm:txPr/>
+    <dgm:style>
+      <a:lnRef idx="0">
+        <a:scrgbClr r="0" g="0" b="0"/>
+      </a:lnRef>
+      <a:fillRef idx="1">
+        <a:scrgbClr r="0" g="0" b="0"/>
+      </a:fillRef>
+      <a:effectRef idx="0">
+        <a:scrgbClr r="0" g="0" b="0"/>
+      </a:effectRef>
+      <a:fontRef idx="minor">
+        <a:schemeClr val="lt1"/>
+      </a:fontRef>
+    </dgm:style>
+  </dgm:styleLbl>
+  <dgm:styleLbl name="sibTrans1D1">
+    <dgm:scene3d>
+      <a:camera prst="orthographicFront"/>
+      <a:lightRig rig="threePt" dir="t"/>
+    </dgm:scene3d>
+    <dgm:sp3d/>
+    <dgm:txPr/>
+    <dgm:style>
+      <a:lnRef idx="1">
+        <a:scrgbClr r="0" g="0" b="0"/>
+      </a:lnRef>
+      <a:fillRef idx="0">
+        <a:scrgbClr r="0" g="0" b="0"/>
+      </a:fillRef>
+      <a:effectRef idx="0">
+        <a:scrgbClr r="0" g="0" b="0"/>
+      </a:effectRef>
+      <a:fontRef idx="minor"/>
+    </dgm:style>
+  </dgm:styleLbl>
+  <dgm:styleLbl name="callout">
+    <dgm:scene3d>
+      <a:camera prst="orthographicFront"/>
+      <a:lightRig rig="threePt" dir="t"/>
+    </dgm:scene3d>
+    <dgm:sp3d/>
+    <dgm:txPr/>
+    <dgm:style>
+      <a:lnRef idx="2">
+        <a:scrgbClr r="0" g="0" b="0"/>
+      </a:lnRef>
+      <a:fillRef idx="1">
+        <a:scrgbClr r="0" g="0" b="0"/>
+      </a:fillRef>
+      <a:effectRef idx="0">
+        <a:scrgbClr r="0" g="0" b="0"/>
+      </a:effectRef>
+      <a:fontRef idx="minor"/>
+    </dgm:style>
+  </dgm:styleLbl>
+  <dgm:styleLbl name="asst0">
+    <dgm:scene3d>
+      <a:camera prst="orthographicFront"/>
+      <a:lightRig rig="threePt" dir="t"/>
+    </dgm:scene3d>
+    <dgm:sp3d/>
+    <dgm:txPr/>
+    <dgm:style>
+      <a:lnRef idx="2">
+        <a:scrgbClr r="0" g="0" b="0"/>
+      </a:lnRef>
+      <a:fillRef idx="1">
+        <a:scrgbClr r="0" g="0" b="0"/>
+      </a:fillRef>
+      <a:effectRef idx="0">
+        <a:scrgbClr r="0" g="0" b="0"/>
+      </a:effectRef>
+      <a:fontRef idx="minor">
+        <a:schemeClr val="lt1"/>
+      </a:fontRef>
+    </dgm:style>
+  </dgm:styleLbl>
+  <dgm:styleLbl name="asst1">
+    <dgm:scene3d>
+      <a:camera prst="orthographicFront"/>
+      <a:lightRig rig="threePt" dir="t"/>
+    </dgm:scene3d>
+    <dgm:sp3d/>
+    <dgm:txPr/>
+    <dgm:style>
+      <a:lnRef idx="2">
+        <a:scrgbClr r="0" g="0" b="0"/>
+      </a:lnRef>
+      <a:fillRef idx="1">
+        <a:scrgbClr r="0" g="0" b="0"/>
+      </a:fillRef>
+      <a:effectRef idx="0">
+        <a:scrgbClr r="0" g="0" b="0"/>
+      </a:effectRef>
+      <a:fontRef idx="minor">
+        <a:schemeClr val="lt1"/>
+      </a:fontRef>
+    </dgm:style>
+  </dgm:styleLbl>
+  <dgm:styleLbl name="asst2">
+    <dgm:scene3d>
+      <a:camera prst="orthographicFront"/>
+      <a:lightRig rig="threePt" dir="t"/>
+    </dgm:scene3d>
+    <dgm:sp3d/>
+    <dgm:txPr/>
+    <dgm:style>
+      <a:lnRef idx="2">
+        <a:scrgbClr r="0" g="0" b="0"/>
+      </a:lnRef>
+      <a:fillRef idx="1">
+        <a:scrgbClr r="0" g="0" b="0"/>
+      </a:fillRef>
+      <a:effectRef idx="0">
+        <a:scrgbClr r="0" g="0" b="0"/>
+      </a:effectRef>
+      <a:fontRef idx="minor">
+        <a:schemeClr val="lt1"/>
+      </a:fontRef>
+    </dgm:style>
+  </dgm:styleLbl>
+  <dgm:styleLbl name="asst3">
+    <dgm:scene3d>
+      <a:camera prst="orthographicFront"/>
+      <a:lightRig rig="threePt" dir="t"/>
+    </dgm:scene3d>
+    <dgm:sp3d/>
+    <dgm:txPr/>
+    <dgm:style>
+      <a:lnRef idx="2">
+        <a:scrgbClr r="0" g="0" b="0"/>
+      </a:lnRef>
+      <a:fillRef idx="1">
+        <a:scrgbClr r="0" g="0" b="0"/>
+      </a:fillRef>
+      <a:effectRef idx="0">
+        <a:scrgbClr r="0" g="0" b="0"/>
+      </a:effectRef>
+      <a:fontRef idx="minor">
+        <a:schemeClr val="lt1"/>
+      </a:fontRef>
+    </dgm:style>
+  </dgm:styleLbl>
+  <dgm:styleLbl name="asst4">
+    <dgm:scene3d>
+      <a:camera prst="orthographicFront"/>
+      <a:lightRig rig="threePt" dir="t"/>
+    </dgm:scene3d>
+    <dgm:sp3d/>
+    <dgm:txPr/>
+    <dgm:style>
+      <a:lnRef idx="2">
+        <a:scrgbClr r="0" g="0" b="0"/>
+      </a:lnRef>
+      <a:fillRef idx="1">
+        <a:scrgbClr r="0" g="0" b="0"/>
+      </a:fillRef>
+      <a:effectRef idx="0">
+        <a:scrgbClr r="0" g="0" b="0"/>
+      </a:effectRef>
+      <a:fontRef idx="minor">
+        <a:schemeClr val="lt1"/>
+      </a:fontRef>
+    </dgm:style>
+  </dgm:styleLbl>
+  <dgm:styleLbl name="parChTrans2D1">
+    <dgm:scene3d>
+      <a:camera prst="orthographicFront"/>
+      <a:lightRig rig="threePt" dir="t"/>
+    </dgm:scene3d>
+    <dgm:sp3d/>
+    <dgm:txPr/>
+    <dgm:style>
+      <a:lnRef idx="2">
+        <a:scrgbClr r="0" g="0" b="0"/>
+      </a:lnRef>
+      <a:fillRef idx="1">
+        <a:scrgbClr r="0" g="0" b="0"/>
+      </a:fillRef>
+      <a:effectRef idx="0">
+        <a:scrgbClr r="0" g="0" b="0"/>
+      </a:effectRef>
+      <a:fontRef idx="minor">
+        <a:schemeClr val="lt1"/>
+      </a:fontRef>
+    </dgm:style>
+  </dgm:styleLbl>
+  <dgm:styleLbl name="parChTrans2D2">
+    <dgm:scene3d>
+      <a:camera prst="orthographicFront"/>
+      <a:lightRig rig="threePt" dir="t"/>
+    </dgm:scene3d>
+    <dgm:sp3d/>
+    <dgm:txPr/>
+    <dgm:style>
+      <a:lnRef idx="2">
+        <a:scrgbClr r="0" g="0" b="0"/>
+      </a:lnRef>
+      <a:fillRef idx="1">
+        <a:scrgbClr r="0" g="0" b="0"/>
+      </a:fillRef>
+      <a:effectRef idx="0">
+        <a:scrgbClr r="0" g="0" b="0"/>
+      </a:effectRef>
+      <a:fontRef idx="minor">
+        <a:schemeClr val="lt1"/>
+      </a:fontRef>
+    </dgm:style>
+  </dgm:styleLbl>
+  <dgm:styleLbl name="parChTrans2D3">
+    <dgm:scene3d>
+      <a:camera prst="orthographicFront"/>
+      <a:lightRig rig="threePt" dir="t"/>
+    </dgm:scene3d>
+    <dgm:sp3d/>
+    <dgm:txPr/>
+    <dgm:style>
+      <a:lnRef idx="2">
+        <a:scrgbClr r="0" g="0" b="0"/>
+      </a:lnRef>
+      <a:fillRef idx="1">
+        <a:scrgbClr r="0" g="0" b="0"/>
+      </a:fillRef>
+      <a:effectRef idx="0">
+        <a:scrgbClr r="0" g="0" b="0"/>
+      </a:effectRef>
+      <a:fontRef idx="minor">
+        <a:schemeClr val="lt1"/>
+      </a:fontRef>
+    </dgm:style>
+  </dgm:styleLbl>
+  <dgm:styleLbl name="parChTrans2D4">
+    <dgm:scene3d>
+      <a:camera prst="orthographicFront"/>
+      <a:lightRig rig="threePt" dir="t"/>
+    </dgm:scene3d>
+    <dgm:sp3d/>
+    <dgm:txPr/>
+    <dgm:style>
+      <a:lnRef idx="2">
+        <a:scrgbClr r="0" g="0" b="0"/>
+      </a:lnRef>
+      <a:fillRef idx="1">
+        <a:scrgbClr r="0" g="0" b="0"/>
+      </a:fillRef>
+      <a:effectRef idx="0">
+        <a:scrgbClr r="0" g="0" b="0"/>
+      </a:effectRef>
+      <a:fontRef idx="minor">
+        <a:schemeClr val="lt1"/>
+      </a:fontRef>
+    </dgm:style>
+  </dgm:styleLbl>
+  <dgm:styleLbl name="parChTrans1D1">
+    <dgm:scene3d>
+      <a:camera prst="orthographicFront"/>
+      <a:lightRig rig="threePt" dir="t"/>
+    </dgm:scene3d>
+    <dgm:sp3d/>
+    <dgm:txPr/>
+    <dgm:style>
+      <a:lnRef idx="2">
+        <a:scrgbClr r="0" g="0" b="0"/>
+      </a:lnRef>
+      <a:fillRef idx="0">
+        <a:scrgbClr r="0" g="0" b="0"/>
+      </a:fillRef>
+      <a:effectRef idx="0">
+        <a:scrgbClr r="0" g="0" b="0"/>
+      </a:effectRef>
+      <a:fontRef idx="minor"/>
+    </dgm:style>
+  </dgm:styleLbl>
+  <dgm:styleLbl name="parChTrans1D2">
+    <dgm:scene3d>
+      <a:camera prst="orthographicFront"/>
+      <a:lightRig rig="threePt" dir="t"/>
+    </dgm:scene3d>
+    <dgm:sp3d/>
+    <dgm:txPr/>
+    <dgm:style>
+      <a:lnRef idx="2">
+        <a:scrgbClr r="0" g="0" b="0"/>
+      </a:lnRef>
+      <a:fillRef idx="0">
+        <a:scrgbClr r="0" g="0" b="0"/>
+      </a:fillRef>
+      <a:effectRef idx="0">
+        <a:scrgbClr r="0" g="0" b="0"/>
+      </a:effectRef>
+      <a:fontRef idx="minor"/>
+    </dgm:style>
+  </dgm:styleLbl>
+  <dgm:styleLbl name="parChTrans1D3">
+    <dgm:scene3d>
+      <a:camera prst="orthographicFront"/>
+      <a:lightRig rig="threePt" dir="t"/>
+    </dgm:scene3d>
+    <dgm:sp3d/>
+    <dgm:txPr/>
+    <dgm:style>
+      <a:lnRef idx="2">
+        <a:scrgbClr r="0" g="0" b="0"/>
+      </a:lnRef>
+      <a:fillRef idx="0">
+        <a:scrgbClr r="0" g="0" b="0"/>
+      </a:fillRef>
+      <a:effectRef idx="0">
+        <a:scrgbClr r="0" g="0" b="0"/>
+      </a:effectRef>
+      <a:fontRef idx="minor"/>
+    </dgm:style>
+  </dgm:styleLbl>
+  <dgm:styleLbl name="parChTrans1D4">
+    <dgm:scene3d>
+      <a:camera prst="orthographicFront"/>
+      <a:lightRig rig="threePt" dir="t"/>
+    </dgm:scene3d>
+    <dgm:sp3d/>
+    <dgm:txPr/>
+    <dgm:style>
+      <a:lnRef idx="2">
+        <a:scrgbClr r="0" g="0" b="0"/>
+      </a:lnRef>
+      <a:fillRef idx="0">
+        <a:scrgbClr r="0" g="0" b="0"/>
+      </a:fillRef>
+      <a:effectRef idx="0">
+        <a:scrgbClr r="0" g="0" b="0"/>
+      </a:effectRef>
+      <a:fontRef idx="minor"/>
+    </dgm:style>
+  </dgm:styleLbl>
+  <dgm:styleLbl name="fgAcc1">
+    <dgm:scene3d>
+      <a:camera prst="orthographicFront"/>
+      <a:lightRig rig="threePt" dir="t"/>
+    </dgm:scene3d>
+    <dgm:sp3d/>
+    <dgm:txPr/>
+    <dgm:style>
+      <a:lnRef idx="2">
+        <a:scrgbClr r="0" g="0" b="0"/>
+      </a:lnRef>
+      <a:fillRef idx="1">
+        <a:scrgbClr r="0" g="0" b="0"/>
+      </a:fillRef>
+      <a:effectRef idx="0">
+        <a:scrgbClr r="0" g="0" b="0"/>
+      </a:effectRef>
+      <a:fontRef idx="minor"/>
+    </dgm:style>
+  </dgm:styleLbl>
+  <dgm:styleLbl name="conFgAcc1">
+    <dgm:scene3d>
+      <a:camera prst="orthographicFront"/>
+      <a:lightRig rig="threePt" dir="t"/>
+    </dgm:scene3d>
+    <dgm:sp3d/>
+    <dgm:txPr/>
+    <dgm:style>
+      <a:lnRef idx="2">
+        <a:scrgbClr r="0" g="0" b="0"/>
+      </a:lnRef>
+      <a:fillRef idx="1">
+        <a:scrgbClr r="0" g="0" b="0"/>
+      </a:fillRef>
+      <a:effectRef idx="0">
+        <a:scrgbClr r="0" g="0" b="0"/>
+      </a:effectRef>
+      <a:fontRef idx="minor"/>
+    </dgm:style>
+  </dgm:styleLbl>
+  <dgm:styleLbl name="alignAcc1">
+    <dgm:scene3d>
+      <a:camera prst="orthographicFront"/>
+      <a:lightRig rig="threePt" dir="t"/>
+    </dgm:scene3d>
+    <dgm:sp3d/>
+    <dgm:txPr/>
+    <dgm:style>
+      <a:lnRef idx="2">
+        <a:scrgbClr r="0" g="0" b="0"/>
+      </a:lnRef>
+      <a:fillRef idx="1">
+        <a:scrgbClr r="0" g="0" b="0"/>
+      </a:fillRef>
+      <a:effectRef idx="0">
+        <a:scrgbClr r="0" g="0" b="0"/>
+      </a:effectRef>
+      <a:fontRef idx="minor"/>
+    </dgm:style>
+  </dgm:styleLbl>
+  <dgm:styleLbl name="trAlignAcc1">
+    <dgm:scene3d>
+      <a:camera prst="orthographicFront"/>
+      <a:lightRig rig="threePt" dir="t"/>
+    </dgm:scene3d>
+    <dgm:sp3d/>
+    <dgm:txPr/>
+    <dgm:style>
+      <a:lnRef idx="1">
+        <a:scrgbClr r="0" g="0" b="0"/>
+      </a:lnRef>
+      <a:fillRef idx="1">
+        <a:scrgbClr r="0" g="0" b="0"/>
+      </a:fillRef>
+      <a:effectRef idx="0">
+        <a:scrgbClr r="0" g="0" b="0"/>
+      </a:effectRef>
+      <a:fontRef idx="minor"/>
+    </dgm:style>
+  </dgm:styleLbl>
+  <dgm:styleLbl name="bgAcc1">
+    <dgm:scene3d>
+      <a:camera prst="orthographicFront"/>
+      <a:lightRig rig="threePt" dir="t"/>
+    </dgm:scene3d>
+    <dgm:sp3d/>
+    <dgm:txPr/>
+    <dgm:style>
+      <a:lnRef idx="2">
+        <a:scrgbClr r="0" g="0" b="0"/>
+      </a:lnRef>
+      <a:fillRef idx="1">
+        <a:scrgbClr r="0" g="0" b="0"/>
+      </a:fillRef>
+      <a:effectRef idx="0">
+        <a:scrgbClr r="0" g="0" b="0"/>
+      </a:effectRef>
+      <a:fontRef idx="minor"/>
+    </dgm:style>
+  </dgm:styleLbl>
+  <dgm:styleLbl name="solidFgAcc1">
+    <dgm:scene3d>
+      <a:camera prst="orthographicFront"/>
+      <a:lightRig rig="threePt" dir="t"/>
+    </dgm:scene3d>
+    <dgm:sp3d/>
+    <dgm:txPr/>
+    <dgm:style>
+      <a:lnRef idx="2">
+        <a:scrgbClr r="0" g="0" b="0"/>
+      </a:lnRef>
+      <a:fillRef idx="1">
+        <a:scrgbClr r="0" g="0" b="0"/>
+      </a:fillRef>
+      <a:effectRef idx="0">
+        <a:scrgbClr r="0" g="0" b="0"/>
+      </a:effectRef>
+      <a:fontRef idx="minor"/>
+    </dgm:style>
+  </dgm:styleLbl>
+  <dgm:styleLbl name="solidAlignAcc1">
+    <dgm:scene3d>
+      <a:camera prst="orthographicFront"/>
+      <a:lightRig rig="threePt" dir="t"/>
+    </dgm:scene3d>
+    <dgm:sp3d/>
+    <dgm:txPr/>
+    <dgm:style>
+      <a:lnRef idx="2">
+        <a:scrgbClr r="0" g="0" b="0"/>
+      </a:lnRef>
+      <a:fillRef idx="1">
+        <a:scrgbClr r="0" g="0" b="0"/>
+      </a:fillRef>
+      <a:effectRef idx="0">
+        <a:scrgbClr r="0" g="0" b="0"/>
+      </a:effectRef>
+      <a:fontRef idx="minor"/>
+    </dgm:style>
+  </dgm:styleLbl>
+  <dgm:styleLbl name="solidBgAcc1">
+    <dgm:scene3d>
+      <a:camera prst="orthographicFront"/>
+      <a:lightRig rig="threePt" dir="t"/>
+    </dgm:scene3d>
+    <dgm:sp3d/>
+    <dgm:txPr/>
+    <dgm:style>
+      <a:lnRef idx="2">
+        <a:scrgbClr r="0" g="0" b="0"/>
+      </a:lnRef>
+      <a:fillRef idx="1">
+        <a:scrgbClr r="0" g="0" b="0"/>
+      </a:fillRef>
+      <a:effectRef idx="0">
+        <a:scrgbClr r="0" g="0" b="0"/>
+      </a:effectRef>
+      <a:fontRef idx="minor"/>
+    </dgm:style>
+  </dgm:styleLbl>
+  <dgm:styleLbl name="fgAccFollowNode1">
+    <dgm:scene3d>
+      <a:camera prst="orthographicFront"/>
+      <a:lightRig rig="threePt" dir="t"/>
+    </dgm:scene3d>
+    <dgm:sp3d/>
+    <dgm:txPr/>
+    <dgm:style>
+      <a:lnRef idx="2">
+        <a:scrgbClr r="0" g="0" b="0"/>
+      </a:lnRef>
+      <a:fillRef idx="1">
+        <a:scrgbClr r="0" g="0" b="0"/>
+      </a:fillRef>
+      <a:effectRef idx="0">
+        <a:scrgbClr r="0" g="0" b="0"/>
+      </a:effectRef>
+      <a:fontRef idx="minor"/>
+    </dgm:style>
+  </dgm:styleLbl>
+  <dgm:styleLbl name="alignAccFollowNode1">
+    <dgm:scene3d>
+      <a:camera prst="orthographicFront"/>
+      <a:lightRig rig="threePt" dir="t"/>
+    </dgm:scene3d>
+    <dgm:sp3d/>
+    <dgm:txPr/>
+    <dgm:style>
+      <a:lnRef idx="2">
+        <a:scrgbClr r="0" g="0" b="0"/>
+      </a:lnRef>
+      <a:fillRef idx="1">
+        <a:scrgbClr r="0" g="0" b="0"/>
+      </a:fillRef>
+      <a:effectRef idx="0">
+        <a:scrgbClr r="0" g="0" b="0"/>
+      </a:effectRef>
+      <a:fontRef idx="minor"/>
+    </dgm:style>
+  </dgm:styleLbl>
+  <dgm:styleLbl name="bgAccFollowNode1">
+    <dgm:scene3d>
+      <a:camera prst="orthographicFront"/>
+      <a:lightRig rig="threePt" dir="t"/>
+    </dgm:scene3d>
+    <dgm:sp3d/>
+    <dgm:txPr/>
+    <dgm:style>
+      <a:lnRef idx="2">
+        <a:scrgbClr r="0" g="0" b="0"/>
+      </a:lnRef>
+      <a:fillRef idx="1">
+        <a:scrgbClr r="0" g="0" b="0"/>
+      </a:fillRef>
+      <a:effectRef idx="0">
+        <a:scrgbClr r="0" g="0" b="0"/>
+      </a:effectRef>
+      <a:fontRef idx="minor"/>
+    </dgm:style>
+  </dgm:styleLbl>
+  <dgm:styleLbl name="fgAcc0">
+    <dgm:scene3d>
+      <a:camera prst="orthographicFront"/>
+      <a:lightRig rig="threePt" dir="t"/>
+    </dgm:scene3d>
+    <dgm:sp3d/>
+    <dgm:txPr/>
+    <dgm:style>
+      <a:lnRef idx="2">
+        <a:scrgbClr r="0" g="0" b="0"/>
+      </a:lnRef>
+      <a:fillRef idx="1">
+        <a:scrgbClr r="0" g="0" b="0"/>
+      </a:fillRef>
+      <a:effectRef idx="0">
+        <a:scrgbClr r="0" g="0" b="0"/>
+      </a:effectRef>
+      <a:fontRef idx="minor"/>
+    </dgm:style>
+  </dgm:styleLbl>
+  <dgm:styleLbl name="fgAcc2">
+    <dgm:scene3d>
+      <a:camera prst="orthographicFront"/>
+      <a:lightRig rig="threePt" dir="t"/>
+    </dgm:scene3d>
+    <dgm:sp3d/>
+    <dgm:txPr/>
+    <dgm:style>
+      <a:lnRef idx="2">
+        <a:scrgbClr r="0" g="0" b="0"/>
+      </a:lnRef>
+      <a:fillRef idx="1">
+        <a:scrgbClr r="0" g="0" b="0"/>
+      </a:fillRef>
+      <a:effectRef idx="0">
+        <a:scrgbClr r="0" g="0" b="0"/>
+      </a:effectRef>
+      <a:fontRef idx="minor"/>
+    </dgm:style>
+  </dgm:styleLbl>
+  <dgm:styleLbl name="fgAcc3">
+    <dgm:scene3d>
+      <a:camera prst="orthographicFront"/>
+      <a:lightRig rig="threePt" dir="t"/>
+    </dgm:scene3d>
+    <dgm:sp3d/>
+    <dgm:txPr/>
+    <dgm:style>
+      <a:lnRef idx="2">
+        <a:scrgbClr r="0" g="0" b="0"/>
+      </a:lnRef>
+      <a:fillRef idx="1">
+        <a:scrgbClr r="0" g="0" b="0"/>
+      </a:fillRef>
+      <a:effectRef idx="0">
+        <a:scrgbClr r="0" g="0" b="0"/>
+      </a:effectRef>
+      <a:fontRef idx="minor"/>
+    </dgm:style>
+  </dgm:styleLbl>
+  <dgm:styleLbl name="fgAcc4">
+    <dgm:scene3d>
+      <a:camera prst="orthographicFront"/>
+      <a:lightRig rig="threePt" dir="t"/>
+    </dgm:scene3d>
+    <dgm:sp3d/>
+    <dgm:txPr/>
+    <dgm:style>
+      <a:lnRef idx="2">
+        <a:scrgbClr r="0" g="0" b="0"/>
+      </a:lnRef>
+      <a:fillRef idx="1">
+        <a:scrgbClr r="0" g="0" b="0"/>
+      </a:fillRef>
+      <a:effectRef idx="0">
+        <a:scrgbClr r="0" g="0" b="0"/>
+      </a:effectRef>
+      <a:fontRef idx="minor"/>
+    </dgm:style>
+  </dgm:styleLbl>
+  <dgm:styleLbl name="bgShp">
+    <dgm:scene3d>
+      <a:camera prst="orthographicFront"/>
+      <a:lightRig rig="threePt" dir="t"/>
+    </dgm:scene3d>
+    <dgm:sp3d/>
+    <dgm:txPr/>
+    <dgm:style>
+      <a:lnRef idx="0">
+        <a:scrgbClr r="0" g="0" b="0"/>
+      </a:lnRef>
+      <a:fillRef idx="1">
+        <a:scrgbClr r="0" g="0" b="0"/>
+      </a:fillRef>
+      <a:effectRef idx="0">
+        <a:scrgbClr r="0" g="0" b="0"/>
+      </a:effectRef>
+      <a:fontRef idx="minor"/>
+    </dgm:style>
+  </dgm:styleLbl>
+  <dgm:styleLbl name="dkBgShp">
+    <dgm:scene3d>
+      <a:camera prst="orthographicFront"/>
+      <a:lightRig rig="threePt" dir="t"/>
+    </dgm:scene3d>
+    <dgm:sp3d/>
+    <dgm:txPr/>
+    <dgm:style>
+      <a:lnRef idx="0">
+        <a:scrgbClr r="0" g="0" b="0"/>
+      </a:lnRef>
+      <a:fillRef idx="1">
+        <a:scrgbClr r="0" g="0" b="0"/>
+      </a:fillRef>
+      <a:effectRef idx="0">
+        <a:scrgbClr r="0" g="0" b="0"/>
+      </a:effectRef>
+      <a:fontRef idx="minor"/>
+    </dgm:style>
+  </dgm:styleLbl>
+  <dgm:styleLbl name="trBgShp">
+    <dgm:scene3d>
+      <a:camera prst="orthographicFront"/>
+      <a:lightRig rig="threePt" dir="t"/>
+    </dgm:scene3d>
+    <dgm:sp3d/>
+    <dgm:txPr/>
+    <dgm:style>
+      <a:lnRef idx="0">
+        <a:scrgbClr r="0" g="0" b="0"/>
+      </a:lnRef>
+      <a:fillRef idx="1">
+        <a:scrgbClr r="0" g="0" b="0"/>
+      </a:fillRef>
+      <a:effectRef idx="0">
+        <a:scrgbClr r="0" g="0" b="0"/>
+      </a:effectRef>
+      <a:fontRef idx="minor"/>
+    </dgm:style>
+  </dgm:styleLbl>
+  <dgm:styleLbl name="fgShp">
+    <dgm:scene3d>
+      <a:camera prst="orthographicFront"/>
+      <a:lightRig rig="threePt" dir="t"/>
+    </dgm:scene3d>
+    <dgm:sp3d/>
+    <dgm:txPr/>
+    <dgm:style>
+      <a:lnRef idx="2">
+        <a:scrgbClr r="0" g="0" b="0"/>
+      </a:lnRef>
+      <a:fillRef idx="1">
+        <a:scrgbClr r="0" g="0" b="0"/>
+      </a:fillRef>
+      <a:effectRef idx="0">
+        <a:scrgbClr r="0" g="0" b="0"/>
+      </a:effectRef>
+      <a:fontRef idx="minor"/>
+    </dgm:style>
+  </dgm:styleLbl>
+  <dgm:styleLbl name="revTx">
+    <dgm:scene3d>
+      <a:camera prst="orthographicFront"/>
+      <a:lightRig rig="threePt" dir="t"/>
+    </dgm:scene3d>
+    <dgm:sp3d/>
+    <dgm:txPr/>
+    <dgm:style>
+      <a:lnRef idx="0">
+        <a:scrgbClr r="0" g="0" b="0"/>
+      </a:lnRef>
+      <a:fillRef idx="0">
+        <a:scrgbClr r="0" g="0" b="0"/>
+      </a:fillRef>
+      <a:effectRef idx="0">
+        <a:scrgbClr r="0" g="0" b="0"/>
+      </a:effectRef>
+      <a:fontRef idx="minor"/>
+    </dgm:style>
+  </dgm:styleLbl>
+</dgm:styleDef>
+</file>
+
 <file path=ppt/notesMasters/notesMaster1.xml><?xml version="1.0" encoding="utf-8"?>
 <p:notesMaster xmlns:a="http://schemas.openxmlformats.org/drawingml/2006/main" xmlns:r="http://schemas.openxmlformats.org/officeDocument/2006/relationships" xmlns:p="http://schemas.openxmlformats.org/presentationml/2006/main">
   <p:cSld>
@@ -205,7 +3337,7 @@
           <a:p>
             <a:fld id="{A540988C-BBB2-3A42-8898-F774E2AA35B7}" type="datetimeFigureOut">
               <a:rPr lang="de-DE" smtClean="0"/>
-              <a:t>14.05.26</a:t>
+              <a:t>15.05.26</a:t>
             </a:fld>
             <a:endParaRPr lang="de-DE"/>
           </a:p>
@@ -363,7 +3495,7 @@
           <a:p>
             <a:fld id="{D0AE7357-186D-1741-AC65-6D5045F5A14B}" type="slidenum">
               <a:rPr lang="de-DE" smtClean="0"/>
-              <a:t>‹Nr.›</a:t>
+              <a:t>‹#›</a:t>
             </a:fld>
             <a:endParaRPr lang="de-DE"/>
           </a:p>
@@ -810,7 +3942,7 @@
           <a:p>
             <a:fld id="{5BD1D3F2-986D-2246-ACEA-731AA1390683}" type="datetimeFigureOut">
               <a:rPr lang="de-DE" smtClean="0"/>
-              <a:t>14.05.26</a:t>
+              <a:t>15.05.26</a:t>
             </a:fld>
             <a:endParaRPr lang="de-DE"/>
           </a:p>
@@ -864,7 +3996,7 @@
           <a:p>
             <a:fld id="{8F63751F-37BF-D74F-B69D-3AF8A8D5C55B}" type="slidenum">
               <a:rPr lang="de-DE" smtClean="0"/>
-              <a:t>‹Nr.›</a:t>
+              <a:t>‹#›</a:t>
             </a:fld>
             <a:endParaRPr lang="de-DE"/>
           </a:p>
@@ -1008,7 +4140,7 @@
           <a:p>
             <a:fld id="{5BD1D3F2-986D-2246-ACEA-731AA1390683}" type="datetimeFigureOut">
               <a:rPr lang="de-DE" smtClean="0"/>
-              <a:t>14.05.26</a:t>
+              <a:t>15.05.26</a:t>
             </a:fld>
             <a:endParaRPr lang="de-DE"/>
           </a:p>
@@ -1062,7 +4194,7 @@
           <a:p>
             <a:fld id="{8F63751F-37BF-D74F-B69D-3AF8A8D5C55B}" type="slidenum">
               <a:rPr lang="de-DE" smtClean="0"/>
-              <a:t>‹Nr.›</a:t>
+              <a:t>‹#›</a:t>
             </a:fld>
             <a:endParaRPr lang="de-DE"/>
           </a:p>
@@ -1216,7 +4348,7 @@
           <a:p>
             <a:fld id="{5BD1D3F2-986D-2246-ACEA-731AA1390683}" type="datetimeFigureOut">
               <a:rPr lang="de-DE" smtClean="0"/>
-              <a:t>14.05.26</a:t>
+              <a:t>15.05.26</a:t>
             </a:fld>
             <a:endParaRPr lang="de-DE"/>
           </a:p>
@@ -1270,7 +4402,7 @@
           <a:p>
             <a:fld id="{8F63751F-37BF-D74F-B69D-3AF8A8D5C55B}" type="slidenum">
               <a:rPr lang="de-DE" smtClean="0"/>
-              <a:t>‹Nr.›</a:t>
+              <a:t>‹#›</a:t>
             </a:fld>
             <a:endParaRPr lang="de-DE"/>
           </a:p>
@@ -1414,7 +4546,7 @@
           <a:p>
             <a:fld id="{5BD1D3F2-986D-2246-ACEA-731AA1390683}" type="datetimeFigureOut">
               <a:rPr lang="de-DE" smtClean="0"/>
-              <a:t>14.05.26</a:t>
+              <a:t>15.05.26</a:t>
             </a:fld>
             <a:endParaRPr lang="de-DE"/>
           </a:p>
@@ -1468,7 +4600,7 @@
           <a:p>
             <a:fld id="{8F63751F-37BF-D74F-B69D-3AF8A8D5C55B}" type="slidenum">
               <a:rPr lang="de-DE" smtClean="0"/>
-              <a:t>‹Nr.›</a:t>
+              <a:t>‹#›</a:t>
             </a:fld>
             <a:endParaRPr lang="de-DE"/>
           </a:p>
@@ -1689,7 +4821,7 @@
           <a:p>
             <a:fld id="{5BD1D3F2-986D-2246-ACEA-731AA1390683}" type="datetimeFigureOut">
               <a:rPr lang="de-DE" smtClean="0"/>
-              <a:t>14.05.26</a:t>
+              <a:t>15.05.26</a:t>
             </a:fld>
             <a:endParaRPr lang="de-DE"/>
           </a:p>
@@ -1743,7 +4875,7 @@
           <a:p>
             <a:fld id="{8F63751F-37BF-D74F-B69D-3AF8A8D5C55B}" type="slidenum">
               <a:rPr lang="de-DE" smtClean="0"/>
-              <a:t>‹Nr.›</a:t>
+              <a:t>‹#›</a:t>
             </a:fld>
             <a:endParaRPr lang="de-DE"/>
           </a:p>
@@ -1954,7 +5086,7 @@
           <a:p>
             <a:fld id="{5BD1D3F2-986D-2246-ACEA-731AA1390683}" type="datetimeFigureOut">
               <a:rPr lang="de-DE" smtClean="0"/>
-              <a:t>14.05.26</a:t>
+              <a:t>15.05.26</a:t>
             </a:fld>
             <a:endParaRPr lang="de-DE"/>
           </a:p>
@@ -2008,7 +5140,7 @@
           <a:p>
             <a:fld id="{8F63751F-37BF-D74F-B69D-3AF8A8D5C55B}" type="slidenum">
               <a:rPr lang="de-DE" smtClean="0"/>
-              <a:t>‹Nr.›</a:t>
+              <a:t>‹#›</a:t>
             </a:fld>
             <a:endParaRPr lang="de-DE"/>
           </a:p>
@@ -2366,7 +5498,7 @@
           <a:p>
             <a:fld id="{5BD1D3F2-986D-2246-ACEA-731AA1390683}" type="datetimeFigureOut">
               <a:rPr lang="de-DE" smtClean="0"/>
-              <a:t>14.05.26</a:t>
+              <a:t>15.05.26</a:t>
             </a:fld>
             <a:endParaRPr lang="de-DE"/>
           </a:p>
@@ -2420,7 +5552,7 @@
           <a:p>
             <a:fld id="{8F63751F-37BF-D74F-B69D-3AF8A8D5C55B}" type="slidenum">
               <a:rPr lang="de-DE" smtClean="0"/>
-              <a:t>‹Nr.›</a:t>
+              <a:t>‹#›</a:t>
             </a:fld>
             <a:endParaRPr lang="de-DE"/>
           </a:p>
@@ -2507,7 +5639,7 @@
           <a:p>
             <a:fld id="{5BD1D3F2-986D-2246-ACEA-731AA1390683}" type="datetimeFigureOut">
               <a:rPr lang="de-DE" smtClean="0"/>
-              <a:t>14.05.26</a:t>
+              <a:t>15.05.26</a:t>
             </a:fld>
             <a:endParaRPr lang="de-DE"/>
           </a:p>
@@ -2561,7 +5693,7 @@
           <a:p>
             <a:fld id="{8F63751F-37BF-D74F-B69D-3AF8A8D5C55B}" type="slidenum">
               <a:rPr lang="de-DE" smtClean="0"/>
-              <a:t>‹Nr.›</a:t>
+              <a:t>‹#›</a:t>
             </a:fld>
             <a:endParaRPr lang="de-DE"/>
           </a:p>
@@ -2620,7 +5752,7 @@
           <a:p>
             <a:fld id="{5BD1D3F2-986D-2246-ACEA-731AA1390683}" type="datetimeFigureOut">
               <a:rPr lang="de-DE" smtClean="0"/>
-              <a:t>14.05.26</a:t>
+              <a:t>15.05.26</a:t>
             </a:fld>
             <a:endParaRPr lang="de-DE"/>
           </a:p>
@@ -2674,7 +5806,7 @@
           <a:p>
             <a:fld id="{8F63751F-37BF-D74F-B69D-3AF8A8D5C55B}" type="slidenum">
               <a:rPr lang="de-DE" smtClean="0"/>
-              <a:t>‹Nr.›</a:t>
+              <a:t>‹#›</a:t>
             </a:fld>
             <a:endParaRPr lang="de-DE"/>
           </a:p>
@@ -2931,7 +6063,7 @@
           <a:p>
             <a:fld id="{5BD1D3F2-986D-2246-ACEA-731AA1390683}" type="datetimeFigureOut">
               <a:rPr lang="de-DE" smtClean="0"/>
-              <a:t>14.05.26</a:t>
+              <a:t>15.05.26</a:t>
             </a:fld>
             <a:endParaRPr lang="de-DE"/>
           </a:p>
@@ -2985,7 +6117,7 @@
           <a:p>
             <a:fld id="{8F63751F-37BF-D74F-B69D-3AF8A8D5C55B}" type="slidenum">
               <a:rPr lang="de-DE" smtClean="0"/>
-              <a:t>‹Nr.›</a:t>
+              <a:t>‹#›</a:t>
             </a:fld>
             <a:endParaRPr lang="de-DE"/>
           </a:p>
@@ -3219,7 +6351,7 @@
           <a:p>
             <a:fld id="{5BD1D3F2-986D-2246-ACEA-731AA1390683}" type="datetimeFigureOut">
               <a:rPr lang="de-DE" smtClean="0"/>
-              <a:t>14.05.26</a:t>
+              <a:t>15.05.26</a:t>
             </a:fld>
             <a:endParaRPr lang="de-DE"/>
           </a:p>
@@ -3273,7 +6405,7 @@
           <a:p>
             <a:fld id="{8F63751F-37BF-D74F-B69D-3AF8A8D5C55B}" type="slidenum">
               <a:rPr lang="de-DE" smtClean="0"/>
-              <a:t>‹Nr.›</a:t>
+              <a:t>‹#›</a:t>
             </a:fld>
             <a:endParaRPr lang="de-DE"/>
           </a:p>
@@ -3460,7 +6592,7 @@
           <a:p>
             <a:fld id="{5BD1D3F2-986D-2246-ACEA-731AA1390683}" type="datetimeFigureOut">
               <a:rPr lang="de-DE" smtClean="0"/>
-              <a:t>14.05.26</a:t>
+              <a:t>15.05.26</a:t>
             </a:fld>
             <a:endParaRPr lang="de-DE"/>
           </a:p>
@@ -3550,7 +6682,7 @@
           <a:p>
             <a:fld id="{8F63751F-37BF-D74F-B69D-3AF8A8D5C55B}" type="slidenum">
               <a:rPr lang="de-DE" smtClean="0"/>
-              <a:t>‹Nr.›</a:t>
+              <a:t>‹#›</a:t>
             </a:fld>
             <a:endParaRPr lang="de-DE"/>
           </a:p>
@@ -3973,7 +7105,7 @@
         </p:blipFill>
         <p:spPr>
           <a:xfrm>
-            <a:off x="20" y="1"/>
+            <a:off x="0" y="-1"/>
             <a:ext cx="12191980" cy="6857999"/>
           </a:xfrm>
           <a:prstGeom prst="rect">
@@ -4038,36 +7170,16 @@
         </p:nvSpPr>
         <p:spPr>
           <a:xfrm>
-            <a:off x="1524000" y="4159404"/>
+            <a:off x="1524000" y="4342043"/>
             <a:ext cx="9144000" cy="1098395"/>
           </a:xfrm>
         </p:spPr>
         <p:txBody>
           <a:bodyPr>
-            <a:normAutofit/>
+            <a:normAutofit lnSpcReduction="10000"/>
           </a:bodyPr>
           <a:lstStyle/>
           <a:p>
-            <a:r>
-              <a:rPr lang="de-DE" sz="1700" dirty="0" err="1"/>
-              <a:t>Github</a:t>
-            </a:r>
-            <a:r>
-              <a:rPr lang="de-DE" sz="1700" dirty="0"/>
-              <a:t>: </a:t>
-            </a:r>
-            <a:r>
-              <a:rPr lang="de-DE" sz="1700" dirty="0">
-                <a:hlinkClick r:id="rId3">
-                  <a:extLst>
-                    <a:ext uri="{A12FA001-AC4F-418D-AE19-62706E023703}">
-                      <ahyp:hlinkClr xmlns:ahyp="http://schemas.microsoft.com/office/drawing/2018/hyperlinkcolor" val="tx"/>
-                    </a:ext>
-                  </a:extLst>
-                </a:hlinkClick>
-              </a:rPr>
-              <a:t>https://github.com/bjoern555/dwh2-text-to-sql</a:t>
-            </a:r>
             <a:br>
               <a:rPr lang="de-DE" sz="1700" dirty="0">
                 <a:solidFill>
@@ -4075,20 +7187,13 @@
                 </a:solidFill>
               </a:rPr>
             </a:br>
-            <a:br>
+            <a:r>
               <a:rPr lang="de-DE" sz="1700" dirty="0">
                 <a:solidFill>
                   <a:srgbClr val="FFFFFF"/>
                 </a:solidFill>
               </a:rPr>
-            </a:br>
-            <a:r>
-              <a:rPr lang="de-DE" sz="1700" dirty="0">
-                <a:solidFill>
-                  <a:srgbClr val="FFFFFF"/>
-                </a:solidFill>
-              </a:rPr>
-              <a:t>Michal Johnson, Leona Kryeziu, Björn Wagner</a:t>
+              <a:t>- Johnson Michal, Kryeziu Leona, Wagner Björn -</a:t>
             </a:r>
             <a:br>
               <a:rPr lang="de-DE" sz="1700" dirty="0">
@@ -4103,8 +7208,87 @@
               </a:solidFill>
             </a:endParaRPr>
           </a:p>
+          <a:p>
+            <a:r>
+              <a:rPr lang="de-DE" sz="1700" dirty="0">
+                <a:hlinkClick r:id="rId3">
+                  <a:extLst>
+                    <a:ext uri="{A12FA001-AC4F-418D-AE19-62706E023703}">
+                      <ahyp:hlinkClr xmlns:ahyp="http://schemas.microsoft.com/office/drawing/2018/hyperlinkcolor" val="tx"/>
+                    </a:ext>
+                  </a:extLst>
+                </a:hlinkClick>
+              </a:rPr>
+              <a:t>https://github.com/bjoern555/dwh2-text-to-sql</a:t>
+            </a:r>
+            <a:endParaRPr lang="de-DE" sz="1700" dirty="0">
+              <a:solidFill>
+                <a:srgbClr val="FFFFFF"/>
+              </a:solidFill>
+            </a:endParaRPr>
+          </a:p>
         </p:txBody>
       </p:sp>
+      <p:pic>
+        <p:nvPicPr>
+          <p:cNvPr id="12" name="Picture 11">
+            <a:extLst>
+              <a:ext uri="{FF2B5EF4-FFF2-40B4-BE49-F238E27FC236}">
+                <a16:creationId xmlns:a16="http://schemas.microsoft.com/office/drawing/2014/main" id="{696AC864-0C12-848D-5F81-FA175F0200CF}"/>
+              </a:ext>
+            </a:extLst>
+          </p:cNvPr>
+          <p:cNvPicPr>
+            <a:picLocks noChangeAspect="1"/>
+          </p:cNvPicPr>
+          <p:nvPr/>
+        </p:nvPicPr>
+        <p:blipFill>
+          <a:blip r:embed="rId4"/>
+          <a:stretch>
+            <a:fillRect/>
+          </a:stretch>
+        </p:blipFill>
+        <p:spPr>
+          <a:xfrm>
+            <a:off x="3327325" y="4999567"/>
+            <a:ext cx="473077" cy="473077"/>
+          </a:xfrm>
+          <a:prstGeom prst="rect">
+            <a:avLst/>
+          </a:prstGeom>
+        </p:spPr>
+      </p:pic>
+      <p:pic>
+        <p:nvPicPr>
+          <p:cNvPr id="13" name="Picture 12">
+            <a:extLst>
+              <a:ext uri="{FF2B5EF4-FFF2-40B4-BE49-F238E27FC236}">
+                <a16:creationId xmlns:a16="http://schemas.microsoft.com/office/drawing/2014/main" id="{0DE1C58A-F154-1008-11B4-06C58776F45F}"/>
+              </a:ext>
+            </a:extLst>
+          </p:cNvPr>
+          <p:cNvPicPr>
+            <a:picLocks noChangeAspect="1"/>
+          </p:cNvPicPr>
+          <p:nvPr/>
+        </p:nvPicPr>
+        <p:blipFill>
+          <a:blip r:embed="rId4"/>
+          <a:stretch>
+            <a:fillRect/>
+          </a:stretch>
+        </p:blipFill>
+        <p:spPr>
+          <a:xfrm>
+            <a:off x="8391600" y="4999567"/>
+            <a:ext cx="473077" cy="473077"/>
+          </a:xfrm>
+          <a:prstGeom prst="rect">
+            <a:avLst/>
+          </a:prstGeom>
+        </p:spPr>
+      </p:pic>
     </p:spTree>
     <p:extLst>
       <p:ext uri="{BB962C8B-B14F-4D97-AF65-F5344CB8AC3E}">
@@ -4151,13 +7335,20 @@
             <p:ph type="title"/>
           </p:nvPr>
         </p:nvSpPr>
-        <p:spPr/>
+        <p:spPr>
+          <a:xfrm>
+            <a:off x="838200" y="365126"/>
+            <a:ext cx="10515600" cy="843910"/>
+          </a:xfrm>
+        </p:spPr>
         <p:txBody>
-          <a:bodyPr/>
+          <a:bodyPr>
+            <a:normAutofit/>
+          </a:bodyPr>
           <a:lstStyle/>
           <a:p>
             <a:r>
-              <a:rPr lang="de-DE" dirty="0"/>
+              <a:rPr lang="de-DE" sz="4000" dirty="0"/>
               <a:t>Dataset Choice &amp; Rationale </a:t>
             </a:r>
           </a:p>
@@ -4179,14 +7370,14 @@
             <p:ph idx="1"/>
             <p:extLst>
               <p:ext uri="{D42A27DB-BD31-4B8C-83A1-F6EECF244321}">
-                <p14:modId xmlns:p14="http://schemas.microsoft.com/office/powerpoint/2010/main" val="3456328483"/>
+                <p14:modId xmlns:p14="http://schemas.microsoft.com/office/powerpoint/2010/main" val="1312905444"/>
               </p:ext>
             </p:extLst>
           </p:nvPr>
         </p:nvGraphicFramePr>
         <p:xfrm>
-          <a:off x="838200" y="1690688"/>
-          <a:ext cx="10515600" cy="2194560"/>
+          <a:off x="838200" y="1406175"/>
+          <a:ext cx="10515600" cy="2498562"/>
         </p:xfrm>
         <a:graphic>
           <a:graphicData uri="http://schemas.openxmlformats.org/drawingml/2006/table">
@@ -4202,14 +7393,14 @@
                     </a:ext>
                   </a:extLst>
                 </a:gridCol>
-                <a:gridCol w="3505200">
+                <a:gridCol w="2032686">
                   <a:extLst>
                     <a:ext uri="{9D8B030D-6E8A-4147-A177-3AD203B41FA5}">
                       <a16:colId xmlns:a16="http://schemas.microsoft.com/office/drawing/2014/main" val="3560744013"/>
                     </a:ext>
                   </a:extLst>
                 </a:gridCol>
-                <a:gridCol w="3505200">
+                <a:gridCol w="4977714">
                   <a:extLst>
                     <a:ext uri="{9D8B030D-6E8A-4147-A177-3AD203B41FA5}">
                       <a16:colId xmlns:a16="http://schemas.microsoft.com/office/drawing/2014/main" val="548822258"/>
@@ -4217,7 +7408,7 @@
                   </a:extLst>
                 </a:gridCol>
               </a:tblGrid>
-              <a:tr h="0">
+              <a:tr h="416427">
                 <a:tc>
                   <a:txBody>
                     <a:bodyPr/>
@@ -4227,9 +7418,10 @@
                         <a:buNone/>
                       </a:pPr>
                       <a:r>
-                        <a:rPr lang="de-CH"/>
+                        <a:rPr lang="de-CH" sz="1800" b="1" dirty="0" err="1"/>
                         <a:t>Difficulty</a:t>
                       </a:r>
+                      <a:endParaRPr lang="de-CH" sz="1800" b="1" dirty="0"/>
                     </a:p>
                   </a:txBody>
                   <a:tcPr anchor="ctr"/>
@@ -4243,7 +7435,7 @@
                         <a:buNone/>
                       </a:pPr>
                       <a:r>
-                        <a:rPr lang="de-CH"/>
+                        <a:rPr lang="de-CH" sz="1800" b="1"/>
                         <a:t>Count</a:t>
                       </a:r>
                     </a:p>
@@ -4259,7 +7451,7 @@
                         <a:buNone/>
                       </a:pPr>
                       <a:r>
-                        <a:rPr lang="de-CH"/>
+                        <a:rPr lang="de-CH" sz="1800" b="1" dirty="0"/>
                         <a:t>Question IDs</a:t>
                       </a:r>
                     </a:p>
@@ -4272,7 +7464,7 @@
                   </a:ext>
                 </a:extLst>
               </a:tr>
-              <a:tr h="0">
+              <a:tr h="416427">
                 <a:tc>
                   <a:txBody>
                     <a:bodyPr/>
@@ -4282,8 +7474,8 @@
                         <a:buNone/>
                       </a:pPr>
                       <a:r>
-                        <a:rPr lang="de-CH"/>
-                        <a:t>easy</a:t>
+                        <a:rPr lang="de-CH" sz="1800" dirty="0"/>
+                        <a:t>Easy 🟢</a:t>
                       </a:r>
                     </a:p>
                   </a:txBody>
@@ -4298,7 +7490,7 @@
                         <a:buNone/>
                       </a:pPr>
                       <a:r>
-                        <a:rPr lang="de-CH"/>
+                        <a:rPr lang="de-CH" sz="1800"/>
                         <a:t>3</a:t>
                       </a:r>
                     </a:p>
@@ -4314,7 +7506,7 @@
                         <a:buNone/>
                       </a:pPr>
                       <a:r>
-                        <a:rPr lang="de-CH"/>
+                        <a:rPr lang="de-CH" sz="1800"/>
                         <a:t>779, 268, 297</a:t>
                       </a:r>
                     </a:p>
@@ -4327,7 +7519,7 @@
                   </a:ext>
                 </a:extLst>
               </a:tr>
-              <a:tr h="0">
+              <a:tr h="416427">
                 <a:tc>
                   <a:txBody>
                     <a:bodyPr/>
@@ -4337,8 +7529,8 @@
                         <a:buNone/>
                       </a:pPr>
                       <a:r>
-                        <a:rPr lang="de-CH"/>
-                        <a:t>medium</a:t>
+                        <a:rPr lang="de-CH" sz="1800" dirty="0"/>
+                        <a:t>Medium 🟠</a:t>
                       </a:r>
                     </a:p>
                   </a:txBody>
@@ -4353,7 +7545,7 @@
                         <a:buNone/>
                       </a:pPr>
                       <a:r>
-                        <a:rPr lang="de-CH"/>
+                        <a:rPr lang="de-CH" sz="1800"/>
                         <a:t>6</a:t>
                       </a:r>
                     </a:p>
@@ -4369,7 +7561,7 @@
                         <a:buNone/>
                       </a:pPr>
                       <a:r>
-                        <a:rPr lang="de-CH"/>
+                        <a:rPr lang="de-CH" sz="1800"/>
                         <a:t>89, 506, 708, 569, 861, 605</a:t>
                       </a:r>
                     </a:p>
@@ -4382,7 +7574,7 @@
                   </a:ext>
                 </a:extLst>
               </a:tr>
-              <a:tr h="0">
+              <a:tr h="416427">
                 <a:tc>
                   <a:txBody>
                     <a:bodyPr/>
@@ -4392,8 +7584,8 @@
                         <a:buNone/>
                       </a:pPr>
                       <a:r>
-                        <a:rPr lang="de-CH"/>
-                        <a:t>hard</a:t>
+                        <a:rPr lang="de-CH" sz="1800" dirty="0"/>
+                        <a:t>Hard 🔴</a:t>
                       </a:r>
                     </a:p>
                   </a:txBody>
@@ -4408,7 +7600,7 @@
                         <a:buNone/>
                       </a:pPr>
                       <a:r>
-                        <a:rPr lang="de-CH"/>
+                        <a:rPr lang="de-CH" sz="1800"/>
                         <a:t>5</a:t>
                       </a:r>
                     </a:p>
@@ -4424,7 +7616,7 @@
                         <a:buNone/>
                       </a:pPr>
                       <a:r>
-                        <a:rPr lang="de-CH"/>
+                        <a:rPr lang="de-CH" sz="1800"/>
                         <a:t>94, 155, 259, 426, 534</a:t>
                       </a:r>
                     </a:p>
@@ -4437,7 +7629,7 @@
                   </a:ext>
                 </a:extLst>
               </a:tr>
-              <a:tr h="0">
+              <a:tr h="416427">
                 <a:tc>
                   <a:txBody>
                     <a:bodyPr/>
@@ -4447,8 +7639,8 @@
                         <a:buNone/>
                       </a:pPr>
                       <a:r>
-                        <a:rPr lang="de-CH"/>
-                        <a:t>extra</a:t>
+                        <a:rPr lang="de-CH" sz="1800" dirty="0"/>
+                        <a:t>Extra 🟣</a:t>
                       </a:r>
                     </a:p>
                   </a:txBody>
@@ -4463,7 +7655,7 @@
                         <a:buNone/>
                       </a:pPr>
                       <a:r>
-                        <a:rPr lang="de-CH"/>
+                        <a:rPr lang="de-CH" sz="1800"/>
                         <a:t>4</a:t>
                       </a:r>
                     </a:p>
@@ -4479,7 +7671,7 @@
                         <a:buNone/>
                       </a:pPr>
                       <a:r>
-                        <a:rPr lang="de-CH" dirty="0"/>
+                        <a:rPr lang="de-CH" sz="1800" dirty="0"/>
                         <a:t>120, 284, 551, 591</a:t>
                       </a:r>
                     </a:p>
@@ -4492,7 +7684,7 @@
                   </a:ext>
                 </a:extLst>
               </a:tr>
-              <a:tr h="0">
+              <a:tr h="416427">
                 <a:tc>
                   <a:txBody>
                     <a:bodyPr/>
@@ -4502,10 +7694,10 @@
                         <a:buNone/>
                       </a:pPr>
                       <a:r>
-                        <a:rPr lang="de-CH" b="1"/>
+                        <a:rPr lang="de-CH" sz="1800" b="1" dirty="0"/>
                         <a:t>Total</a:t>
                       </a:r>
-                      <a:endParaRPr lang="de-CH"/>
+                      <a:endParaRPr lang="de-CH" sz="1800" dirty="0"/>
                     </a:p>
                   </a:txBody>
                   <a:tcPr anchor="ctr"/>
@@ -4519,10 +7711,10 @@
                         <a:buNone/>
                       </a:pPr>
                       <a:r>
-                        <a:rPr lang="de-CH" b="1" dirty="0"/>
+                        <a:rPr lang="de-CH" sz="1800" b="1" dirty="0"/>
                         <a:t>18</a:t>
                       </a:r>
-                      <a:endParaRPr lang="de-CH" dirty="0"/>
+                      <a:endParaRPr lang="de-CH" sz="1800" dirty="0"/>
                     </a:p>
                   </a:txBody>
                   <a:tcPr anchor="ctr"/>
@@ -4536,24 +7728,8 @@
                         <a:buNone/>
                       </a:pPr>
                       <a:r>
-                        <a:rPr lang="de-CH" dirty="0"/>
-                        <a:t>9 easy/</a:t>
-                      </a:r>
-                      <a:r>
-                        <a:rPr lang="de-CH" dirty="0" err="1"/>
-                        <a:t>med</a:t>
-                      </a:r>
-                      <a:r>
-                        <a:rPr lang="de-CH" dirty="0"/>
-                        <a:t> + 9 </a:t>
-                      </a:r>
-                      <a:r>
-                        <a:rPr lang="de-CH" dirty="0" err="1"/>
-                        <a:t>hard</a:t>
-                      </a:r>
-                      <a:r>
-                        <a:rPr lang="de-CH" dirty="0"/>
-                        <a:t>/extra = 50/50</a:t>
+                        <a:rPr lang="de-CH" sz="1800" b="1" dirty="0"/>
+                        <a:t>9 🟢🟠  | 9 🔴🟣  =&gt; 50/50</a:t>
                       </a:r>
                     </a:p>
                   </a:txBody>
@@ -4583,8 +7759,8 @@
         </p:nvSpPr>
         <p:spPr>
           <a:xfrm>
-            <a:off x="820396" y="4366901"/>
-            <a:ext cx="5212645" cy="1477328"/>
+            <a:off x="838200" y="4396596"/>
+            <a:ext cx="5212645" cy="1200329"/>
           </a:xfrm>
           <a:prstGeom prst="rect">
             <a:avLst/>
@@ -4750,9 +7926,6 @@
               <a:t>depth</a:t>
             </a:r>
             <a:endParaRPr lang="de-CH" dirty="0"/>
-          </a:p>
-          <a:p>
-            <a:endParaRPr lang="de-DE" dirty="0"/>
           </a:p>
         </p:txBody>
       </p:sp>
@@ -4786,241 +7959,12 @@
           <a:chExt cx="0" cy="0"/>
         </a:xfrm>
       </p:grpSpPr>
-      <p:sp>
-        <p:nvSpPr>
-          <p:cNvPr id="2" name="Titel 1">
+      <p:pic>
+        <p:nvPicPr>
+          <p:cNvPr id="10" name="Graphic 9">
             <a:extLst>
               <a:ext uri="{FF2B5EF4-FFF2-40B4-BE49-F238E27FC236}">
-                <a16:creationId xmlns:a16="http://schemas.microsoft.com/office/drawing/2014/main" id="{3D2D1651-74E0-9B0C-D371-B369361480E2}"/>
-              </a:ext>
-            </a:extLst>
-          </p:cNvPr>
-          <p:cNvSpPr>
-            <a:spLocks noGrp="1"/>
-          </p:cNvSpPr>
-          <p:nvPr>
-            <p:ph type="title"/>
-          </p:nvPr>
-        </p:nvSpPr>
-        <p:spPr/>
-        <p:txBody>
-          <a:bodyPr/>
-          <a:lstStyle/>
-          <a:p>
-            <a:r>
-              <a:rPr lang="de-DE" dirty="0"/>
-              <a:t> System Architecture / Setup </a:t>
-            </a:r>
-          </a:p>
-        </p:txBody>
-      </p:sp>
-      <p:sp>
-        <p:nvSpPr>
-          <p:cNvPr id="3" name="Inhaltsplatzhalter 2">
-            <a:extLst>
-              <a:ext uri="{FF2B5EF4-FFF2-40B4-BE49-F238E27FC236}">
-                <a16:creationId xmlns:a16="http://schemas.microsoft.com/office/drawing/2014/main" id="{538F12A3-D4B0-192E-EFDC-D76052B96CA2}"/>
-              </a:ext>
-            </a:extLst>
-          </p:cNvPr>
-          <p:cNvSpPr>
-            <a:spLocks noGrp="1"/>
-          </p:cNvSpPr>
-          <p:nvPr>
-            <p:ph idx="1"/>
-          </p:nvPr>
-        </p:nvSpPr>
-        <p:spPr>
-          <a:xfrm>
-            <a:off x="838200" y="1825625"/>
-            <a:ext cx="5943600" cy="4351338"/>
-          </a:xfrm>
-        </p:spPr>
-        <p:txBody>
-          <a:bodyPr>
-            <a:normAutofit fontScale="62500" lnSpcReduction="20000"/>
-          </a:bodyPr>
-          <a:lstStyle/>
-          <a:p>
-            <a:pPr marL="0" indent="0">
-              <a:buNone/>
-            </a:pPr>
-            <a:r>
-              <a:rPr lang="de-CH" sz="2600" b="1" dirty="0"/>
-              <a:t>LLM:</a:t>
-            </a:r>
-            <a:endParaRPr lang="de-CH" sz="2600" dirty="0"/>
-          </a:p>
-          <a:p>
-            <a:r>
-              <a:rPr lang="de-CH" sz="2600" dirty="0"/>
-              <a:t>Provider: </a:t>
-            </a:r>
-            <a:r>
-              <a:rPr lang="de-CH" sz="2600" dirty="0" err="1"/>
-              <a:t>Ollama</a:t>
-            </a:r>
-            <a:r>
-              <a:rPr lang="de-CH" sz="2600" dirty="0"/>
-              <a:t> (</a:t>
-            </a:r>
-            <a:r>
-              <a:rPr lang="de-CH" sz="2600" dirty="0" err="1"/>
-              <a:t>local</a:t>
-            </a:r>
-            <a:r>
-              <a:rPr lang="de-CH" sz="2600" dirty="0"/>
-              <a:t>) mit llama3.2:1b oder OpenAI gpt-4o-mini</a:t>
-            </a:r>
-          </a:p>
-          <a:p>
-            <a:r>
-              <a:rPr lang="de-CH" sz="2600" dirty="0"/>
-              <a:t>Konfigurierbar via .</a:t>
-            </a:r>
-            <a:r>
-              <a:rPr lang="de-CH" sz="2600" dirty="0" err="1"/>
-              <a:t>env</a:t>
-            </a:r>
-            <a:r>
-              <a:rPr lang="de-CH" sz="2600" dirty="0"/>
-              <a:t> (LLM_PROVIDER, OLLAMA_MODEL, OPENAI_MODEL)</a:t>
-            </a:r>
-          </a:p>
-          <a:p>
-            <a:endParaRPr lang="de-CH" sz="2600" dirty="0"/>
-          </a:p>
-          <a:p>
-            <a:pPr marL="0" indent="0">
-              <a:buNone/>
-            </a:pPr>
-            <a:r>
-              <a:rPr lang="de-CH" sz="2600" b="1" dirty="0"/>
-              <a:t>Database</a:t>
-            </a:r>
-            <a:endParaRPr lang="de-CH" sz="2600" dirty="0"/>
-          </a:p>
-          <a:p>
-            <a:r>
-              <a:rPr lang="de-CH" sz="2600" dirty="0"/>
-              <a:t>PostgreSQL, Schema exp_v3, gehostet auf ZHAW-Server</a:t>
-            </a:r>
-          </a:p>
-          <a:p>
-            <a:r>
-              <a:rPr lang="de-CH" sz="2600" dirty="0"/>
-              <a:t>Verbindung via </a:t>
-            </a:r>
-            <a:r>
-              <a:rPr lang="de-CH" sz="2600" dirty="0" err="1"/>
-              <a:t>LangChain</a:t>
-            </a:r>
-            <a:r>
-              <a:rPr lang="de-CH" sz="2600" dirty="0"/>
-              <a:t> </a:t>
-            </a:r>
-            <a:r>
-              <a:rPr lang="de-CH" sz="2600" dirty="0" err="1"/>
-              <a:t>SQLDatabase</a:t>
-            </a:r>
-            <a:endParaRPr lang="de-CH" sz="2600" dirty="0"/>
-          </a:p>
-          <a:p>
-            <a:pPr marL="0" indent="0">
-              <a:buNone/>
-            </a:pPr>
-            <a:endParaRPr lang="de-CH" sz="2600" b="1" dirty="0"/>
-          </a:p>
-          <a:p>
-            <a:pPr marL="0" indent="0">
-              <a:buNone/>
-            </a:pPr>
-            <a:r>
-              <a:rPr lang="de-CH" sz="2600" b="1" dirty="0"/>
-              <a:t>Evaluation </a:t>
-            </a:r>
-            <a:r>
-              <a:rPr lang="de-CH" sz="2600" b="1" dirty="0" err="1"/>
-              <a:t>Metric</a:t>
-            </a:r>
-            <a:endParaRPr lang="de-CH" sz="2600" dirty="0"/>
-          </a:p>
-          <a:p>
-            <a:r>
-              <a:rPr lang="de-CH" sz="2600" dirty="0" err="1"/>
-              <a:t>Execution</a:t>
-            </a:r>
-            <a:r>
-              <a:rPr lang="de-CH" sz="2600" dirty="0"/>
-              <a:t> </a:t>
-            </a:r>
-            <a:r>
-              <a:rPr lang="de-CH" sz="2600" dirty="0" err="1"/>
-              <a:t>Accuracy</a:t>
-            </a:r>
-            <a:r>
-              <a:rPr lang="de-CH" sz="2600" dirty="0"/>
-              <a:t>: </a:t>
-            </a:r>
-            <a:r>
-              <a:rPr lang="de-CH" sz="2600" dirty="0" err="1"/>
-              <a:t>Predicted</a:t>
-            </a:r>
-            <a:r>
-              <a:rPr lang="de-CH" sz="2600" dirty="0"/>
-              <a:t> </a:t>
-            </a:r>
-            <a:r>
-              <a:rPr lang="de-CH" sz="2600" dirty="0" err="1"/>
-              <a:t>result</a:t>
-            </a:r>
-            <a:r>
-              <a:rPr lang="de-CH" sz="2600" dirty="0"/>
-              <a:t> == Gold </a:t>
-            </a:r>
-            <a:r>
-              <a:rPr lang="de-CH" sz="2600" dirty="0" err="1"/>
-              <a:t>result</a:t>
-            </a:r>
-            <a:r>
-              <a:rPr lang="de-CH" sz="2600" dirty="0"/>
-              <a:t> (</a:t>
-            </a:r>
-            <a:r>
-              <a:rPr lang="de-CH" sz="2600" dirty="0" err="1"/>
-              <a:t>exact</a:t>
-            </a:r>
-            <a:r>
-              <a:rPr lang="de-CH" sz="2600" dirty="0"/>
-              <a:t> match)</a:t>
-            </a:r>
-          </a:p>
-          <a:p>
-            <a:r>
-              <a:rPr lang="de-CH" sz="2600" dirty="0"/>
-              <a:t>Test Set: 18 Fragen (Easy 3 / Medium 6 / Hard 5 / Extra 4)</a:t>
-            </a:r>
-          </a:p>
-          <a:p>
-            <a:pPr marL="0" indent="0">
-              <a:buNone/>
-            </a:pPr>
-            <a:br>
-              <a:rPr lang="de-CH" sz="2600" dirty="0"/>
-            </a:br>
-            <a:endParaRPr lang="de-CH" sz="2600" dirty="0"/>
-          </a:p>
-          <a:p>
-            <a:endParaRPr lang="de-DE" dirty="0"/>
-          </a:p>
-        </p:txBody>
-      </p:sp>
-      <p:pic>
-        <p:nvPicPr>
-          <p:cNvPr id="9" name="Grafik 8">
-            <a:extLst>
-              <a:ext uri="{FF2B5EF4-FFF2-40B4-BE49-F238E27FC236}">
-                <a16:creationId xmlns:a16="http://schemas.microsoft.com/office/drawing/2014/main" id="{23A03BDE-D80C-E062-846F-FAB338547BC5}"/>
+                <a16:creationId xmlns:a16="http://schemas.microsoft.com/office/drawing/2014/main" id="{6A03E301-4070-86A9-0C6C-6E336A5E60A8}"/>
               </a:ext>
             </a:extLst>
           </p:cNvPr>
@@ -5043,14 +7987,332 @@
         </p:blipFill>
         <p:spPr>
           <a:xfrm>
-            <a:off x="6248400" y="1446327"/>
-            <a:ext cx="6133230" cy="5411673"/>
+            <a:off x="6317213" y="365126"/>
+            <a:ext cx="5865308" cy="6322741"/>
           </a:xfrm>
           <a:prstGeom prst="rect">
             <a:avLst/>
           </a:prstGeom>
         </p:spPr>
       </p:pic>
+      <p:sp>
+        <p:nvSpPr>
+          <p:cNvPr id="3" name="Inhaltsplatzhalter 2">
+            <a:extLst>
+              <a:ext uri="{FF2B5EF4-FFF2-40B4-BE49-F238E27FC236}">
+                <a16:creationId xmlns:a16="http://schemas.microsoft.com/office/drawing/2014/main" id="{538F12A3-D4B0-192E-EFDC-D76052B96CA2}"/>
+              </a:ext>
+            </a:extLst>
+          </p:cNvPr>
+          <p:cNvSpPr>
+            <a:spLocks noGrp="1"/>
+          </p:cNvSpPr>
+          <p:nvPr>
+            <p:ph idx="1"/>
+          </p:nvPr>
+        </p:nvSpPr>
+        <p:spPr>
+          <a:xfrm>
+            <a:off x="838199" y="1214310"/>
+            <a:ext cx="6307735" cy="4351338"/>
+          </a:xfrm>
+        </p:spPr>
+        <p:txBody>
+          <a:bodyPr>
+            <a:noAutofit/>
+          </a:bodyPr>
+          <a:lstStyle/>
+          <a:p>
+            <a:pPr marL="0" indent="0">
+              <a:buNone/>
+            </a:pPr>
+            <a:r>
+              <a:rPr lang="de-CH" sz="1800" b="1" dirty="0"/>
+              <a:t>LLM</a:t>
+            </a:r>
+            <a:endParaRPr lang="de-CH" sz="1800" dirty="0"/>
+          </a:p>
+          <a:p>
+            <a:r>
+              <a:rPr lang="de-CH" sz="1800" dirty="0" err="1"/>
+              <a:t>Local</a:t>
+            </a:r>
+            <a:r>
+              <a:rPr lang="de-CH" sz="1800" dirty="0"/>
+              <a:t> </a:t>
+            </a:r>
+            <a:r>
+              <a:rPr lang="de-CH" sz="1800" dirty="0" err="1"/>
+              <a:t>Ollama</a:t>
+            </a:r>
+            <a:r>
+              <a:rPr lang="de-CH" sz="1800" dirty="0"/>
+              <a:t> </a:t>
+            </a:r>
+            <a:r>
+              <a:rPr lang="de-CH" sz="1800" dirty="0" err="1"/>
+              <a:t>with</a:t>
+            </a:r>
+            <a:r>
+              <a:rPr lang="de-CH" sz="1800" dirty="0"/>
+              <a:t> </a:t>
+            </a:r>
+            <a:r>
+              <a:rPr lang="de-CH" sz="1800" i="1" dirty="0">
+                <a:solidFill>
+                  <a:srgbClr val="00B0F0"/>
+                </a:solidFill>
+              </a:rPr>
+              <a:t>llama3.2:1b</a:t>
+            </a:r>
+            <a:r>
+              <a:rPr lang="de-CH" sz="1800" dirty="0"/>
+              <a:t> </a:t>
+            </a:r>
+            <a:r>
+              <a:rPr lang="de-CH" sz="1800" dirty="0" err="1"/>
+              <a:t>or</a:t>
+            </a:r>
+            <a:r>
+              <a:rPr lang="de-CH" sz="1800" dirty="0"/>
+              <a:t> </a:t>
+            </a:r>
+            <a:r>
+              <a:rPr lang="de-CH" sz="1800" i="1" dirty="0">
+                <a:solidFill>
+                  <a:srgbClr val="00B0F0"/>
+                </a:solidFill>
+              </a:rPr>
+              <a:t>OpenAI gpt-4o-mini</a:t>
+            </a:r>
+          </a:p>
+          <a:p>
+            <a:r>
+              <a:rPr lang="de-CH" sz="1800" dirty="0" err="1"/>
+              <a:t>Configurable</a:t>
+            </a:r>
+            <a:r>
+              <a:rPr lang="de-CH" sz="1800" dirty="0"/>
+              <a:t> via .</a:t>
+            </a:r>
+            <a:r>
+              <a:rPr lang="de-CH" sz="1800" dirty="0" err="1"/>
+              <a:t>env</a:t>
+            </a:r>
+            <a:r>
+              <a:rPr lang="de-CH" sz="1800" dirty="0"/>
+              <a:t>  </a:t>
+            </a:r>
+          </a:p>
+          <a:p>
+            <a:pPr marL="0" indent="0">
+              <a:buNone/>
+            </a:pPr>
+            <a:r>
+              <a:rPr lang="de-CH" sz="1800" dirty="0"/>
+              <a:t>     (LLM_PROVIDER, OLLAMA_MODEL, OPENAI_MODEL)</a:t>
+            </a:r>
+          </a:p>
+          <a:p>
+            <a:endParaRPr lang="de-CH" sz="1800" dirty="0"/>
+          </a:p>
+          <a:p>
+            <a:pPr marL="0" indent="0">
+              <a:buNone/>
+            </a:pPr>
+            <a:r>
+              <a:rPr lang="de-CH" sz="1800" b="1" dirty="0"/>
+              <a:t>Database</a:t>
+            </a:r>
+            <a:endParaRPr lang="de-CH" sz="1800" dirty="0"/>
+          </a:p>
+          <a:p>
+            <a:r>
+              <a:rPr lang="de-CH" sz="1800" dirty="0"/>
+              <a:t>PostgreSQL, Schema exp_v3, </a:t>
+            </a:r>
+            <a:r>
+              <a:rPr lang="de-CH" sz="1800" dirty="0" err="1"/>
+              <a:t>hosted</a:t>
+            </a:r>
+            <a:r>
+              <a:rPr lang="de-CH" sz="1800" dirty="0"/>
+              <a:t> on ZHAW-Server</a:t>
+            </a:r>
+          </a:p>
+          <a:p>
+            <a:r>
+              <a:rPr lang="de-CH" sz="1800" dirty="0"/>
+              <a:t>Connection via </a:t>
+            </a:r>
+            <a:r>
+              <a:rPr lang="de-CH" sz="1800" dirty="0" err="1"/>
+              <a:t>LangChain</a:t>
+            </a:r>
+            <a:r>
+              <a:rPr lang="de-CH" sz="1800" dirty="0"/>
+              <a:t> </a:t>
+            </a:r>
+            <a:r>
+              <a:rPr lang="de-CH" sz="1800" dirty="0" err="1"/>
+              <a:t>SQLDatabase</a:t>
+            </a:r>
+            <a:endParaRPr lang="de-CH" sz="1800" dirty="0"/>
+          </a:p>
+          <a:p>
+            <a:pPr marL="0" indent="0">
+              <a:buNone/>
+            </a:pPr>
+            <a:endParaRPr lang="de-CH" sz="1800" b="1" dirty="0"/>
+          </a:p>
+          <a:p>
+            <a:pPr marL="0" indent="0">
+              <a:buNone/>
+            </a:pPr>
+            <a:r>
+              <a:rPr lang="de-CH" sz="1800" b="1" dirty="0"/>
+              <a:t>Evaluation </a:t>
+            </a:r>
+            <a:r>
+              <a:rPr lang="de-CH" sz="1800" b="1" dirty="0" err="1"/>
+              <a:t>Metric</a:t>
+            </a:r>
+            <a:endParaRPr lang="de-CH" sz="1800" dirty="0"/>
+          </a:p>
+          <a:p>
+            <a:r>
+              <a:rPr lang="de-CH" sz="1800" dirty="0" err="1"/>
+              <a:t>Execution</a:t>
+            </a:r>
+            <a:r>
+              <a:rPr lang="de-CH" sz="1800" dirty="0"/>
+              <a:t> </a:t>
+            </a:r>
+            <a:r>
+              <a:rPr lang="de-CH" sz="1800" dirty="0" err="1"/>
+              <a:t>Accuracy</a:t>
+            </a:r>
+            <a:r>
+              <a:rPr lang="de-CH" sz="1800" dirty="0"/>
+              <a:t>: </a:t>
+            </a:r>
+            <a:r>
+              <a:rPr lang="de-CH" sz="1800" dirty="0" err="1"/>
+              <a:t>Predicted</a:t>
+            </a:r>
+            <a:r>
+              <a:rPr lang="de-CH" sz="1800" dirty="0"/>
+              <a:t> </a:t>
+            </a:r>
+            <a:r>
+              <a:rPr lang="de-CH" sz="1800" dirty="0" err="1"/>
+              <a:t>result</a:t>
+            </a:r>
+            <a:r>
+              <a:rPr lang="de-CH" sz="1800" dirty="0"/>
+              <a:t> == Gold </a:t>
+            </a:r>
+            <a:r>
+              <a:rPr lang="de-CH" sz="1800" dirty="0" err="1"/>
+              <a:t>result</a:t>
+            </a:r>
+            <a:r>
+              <a:rPr lang="de-CH" sz="1800" dirty="0"/>
+              <a:t> </a:t>
+            </a:r>
+          </a:p>
+          <a:p>
+            <a:pPr marL="0" indent="0">
+              <a:buNone/>
+            </a:pPr>
+            <a:r>
+              <a:rPr lang="de-CH" sz="1800" dirty="0"/>
+              <a:t>     (</a:t>
+            </a:r>
+            <a:r>
+              <a:rPr lang="de-CH" sz="1800" dirty="0" err="1"/>
+              <a:t>exact</a:t>
+            </a:r>
+            <a:r>
+              <a:rPr lang="de-CH" sz="1800" dirty="0"/>
+              <a:t> match)</a:t>
+            </a:r>
+          </a:p>
+          <a:p>
+            <a:r>
+              <a:rPr lang="de-CH" sz="1800" dirty="0"/>
+              <a:t>Test Set: 18 Questions (Easy 3 / Medium 6 / Hard 5 / Extra 4)</a:t>
+            </a:r>
+          </a:p>
+          <a:p>
+            <a:pPr marL="0" indent="0">
+              <a:buNone/>
+            </a:pPr>
+            <a:br>
+              <a:rPr lang="de-CH" sz="1800" dirty="0"/>
+            </a:br>
+            <a:endParaRPr lang="de-CH" sz="1800" dirty="0"/>
+          </a:p>
+          <a:p>
+            <a:endParaRPr lang="de-DE" sz="1800" dirty="0"/>
+          </a:p>
+        </p:txBody>
+      </p:sp>
+      <p:sp>
+        <p:nvSpPr>
+          <p:cNvPr id="4" name="Titel 1">
+            <a:extLst>
+              <a:ext uri="{FF2B5EF4-FFF2-40B4-BE49-F238E27FC236}">
+                <a16:creationId xmlns:a16="http://schemas.microsoft.com/office/drawing/2014/main" id="{536EB747-3FE4-42F9-17A2-1AB137822923}"/>
+              </a:ext>
+            </a:extLst>
+          </p:cNvPr>
+          <p:cNvSpPr txBox="1">
+            <a:spLocks/>
+          </p:cNvSpPr>
+          <p:nvPr/>
+        </p:nvSpPr>
+        <p:spPr>
+          <a:xfrm>
+            <a:off x="838200" y="365126"/>
+            <a:ext cx="10515600" cy="843910"/>
+          </a:xfrm>
+          <a:prstGeom prst="rect">
+            <a:avLst/>
+          </a:prstGeom>
+        </p:spPr>
+        <p:txBody>
+          <a:bodyPr vert="horz" lIns="91440" tIns="45720" rIns="91440" bIns="45720" rtlCol="0" anchor="ctr">
+            <a:normAutofit/>
+          </a:bodyPr>
+          <a:lstStyle>
+            <a:lvl1pPr algn="l" defTabSz="914400" rtl="0" eaLnBrk="1" latinLnBrk="0" hangingPunct="1">
+              <a:lnSpc>
+                <a:spcPct val="90000"/>
+              </a:lnSpc>
+              <a:spcBef>
+                <a:spcPct val="0"/>
+              </a:spcBef>
+              <a:buNone/>
+              <a:defRPr sz="4400" kern="1200">
+                <a:solidFill>
+                  <a:schemeClr val="tx1"/>
+                </a:solidFill>
+                <a:latin typeface="+mj-lt"/>
+                <a:ea typeface="+mj-ea"/>
+                <a:cs typeface="+mj-cs"/>
+              </a:defRPr>
+            </a:lvl1pPr>
+          </a:lstStyle>
+          <a:p>
+            <a:r>
+              <a:rPr lang="de-DE" sz="4000"/>
+              <a:t>System Architecture / Setup </a:t>
+            </a:r>
+            <a:endParaRPr lang="de-DE" sz="4000" dirty="0"/>
+          </a:p>
+        </p:txBody>
+      </p:sp>
     </p:spTree>
     <p:extLst>
       <p:ext uri="{BB962C8B-B14F-4D97-AF65-F5344CB8AC3E}">
@@ -5083,40 +8345,69 @@
       </p:grpSpPr>
       <p:sp>
         <p:nvSpPr>
-          <p:cNvPr id="2" name="Titel 1">
+          <p:cNvPr id="3" name="Titel 1">
             <a:extLst>
               <a:ext uri="{FF2B5EF4-FFF2-40B4-BE49-F238E27FC236}">
-                <a16:creationId xmlns:a16="http://schemas.microsoft.com/office/drawing/2014/main" id="{7DAF28D5-FA89-E037-4CF4-5DE820187C1B}"/>
+                <a16:creationId xmlns:a16="http://schemas.microsoft.com/office/drawing/2014/main" id="{8DFFC567-5210-8362-4880-A3C20F552C27}"/>
               </a:ext>
             </a:extLst>
           </p:cNvPr>
-          <p:cNvSpPr>
-            <a:spLocks noGrp="1"/>
+          <p:cNvSpPr txBox="1">
+            <a:spLocks/>
           </p:cNvSpPr>
-          <p:nvPr>
-            <p:ph type="title"/>
-          </p:nvPr>
+          <p:nvPr/>
         </p:nvSpPr>
         <p:spPr>
           <a:xfrm>
             <a:off x="838200" y="365126"/>
-            <a:ext cx="10515600" cy="856924"/>
+            <a:ext cx="10515600" cy="843910"/>
           </a:xfrm>
+          <a:prstGeom prst="rect">
+            <a:avLst/>
+          </a:prstGeom>
         </p:spPr>
         <p:txBody>
-          <a:bodyPr/>
-          <a:lstStyle/>
-          <a:p>
-            <a:r>
-              <a:rPr lang="de-DE" dirty="0"/>
-              <a:t> Query </a:t>
-            </a:r>
-            <a:r>
-              <a:rPr lang="de-DE" dirty="0" err="1"/>
+          <a:bodyPr vert="horz" lIns="91440" tIns="45720" rIns="91440" bIns="45720" rtlCol="0" anchor="ctr">
+            <a:normAutofit/>
+          </a:bodyPr>
+          <a:lstStyle>
+            <a:lvl1pPr algn="l" defTabSz="914400" rtl="0" eaLnBrk="1" latinLnBrk="0" hangingPunct="1">
+              <a:lnSpc>
+                <a:spcPct val="90000"/>
+              </a:lnSpc>
+              <a:spcBef>
+                <a:spcPct val="0"/>
+              </a:spcBef>
+              <a:buNone/>
+              <a:defRPr sz="4400" kern="1200">
+                <a:solidFill>
+                  <a:schemeClr val="tx1"/>
+                </a:solidFill>
+                <a:latin typeface="+mj-lt"/>
+                <a:ea typeface="+mj-ea"/>
+                <a:cs typeface="+mj-cs"/>
+              </a:defRPr>
+            </a:lvl1pPr>
+          </a:lstStyle>
+          <a:p>
+            <a:r>
+              <a:rPr lang="de-DE" sz="4000" dirty="0"/>
+              <a:t>Query </a:t>
+            </a:r>
+            <a:r>
+              <a:rPr lang="de-DE" sz="4000" dirty="0" err="1"/>
               <a:t>Examples</a:t>
             </a:r>
             <a:r>
-              <a:rPr lang="de-DE" dirty="0"/>
+              <a:rPr lang="de-DE" sz="4000" dirty="0"/>
+              <a:t> - 1/3 </a:t>
+            </a:r>
+            <a:r>
+              <a:rPr lang="de-DE" sz="4000" dirty="0" err="1"/>
+              <a:t>correct</a:t>
+            </a:r>
+            <a:r>
+              <a:rPr lang="de-DE" sz="4000" dirty="0"/>
               <a:t> </a:t>
             </a:r>
           </a:p>
@@ -5124,19 +8415,17 @@
       </p:sp>
       <p:pic>
         <p:nvPicPr>
-          <p:cNvPr id="9" name="Inhaltsplatzhalter 8">
+          <p:cNvPr id="10" name="Graphic 9">
             <a:extLst>
               <a:ext uri="{FF2B5EF4-FFF2-40B4-BE49-F238E27FC236}">
-                <a16:creationId xmlns:a16="http://schemas.microsoft.com/office/drawing/2014/main" id="{3A69168E-09A6-3D56-CE85-43FE76E1D822}"/>
+                <a16:creationId xmlns:a16="http://schemas.microsoft.com/office/drawing/2014/main" id="{6EFCC4C4-40C6-6EBD-9E38-D64CDAE77987}"/>
               </a:ext>
             </a:extLst>
           </p:cNvPr>
           <p:cNvPicPr>
-            <a:picLocks noGrp="1" noChangeAspect="1"/>
+            <a:picLocks noChangeAspect="1"/>
           </p:cNvPicPr>
-          <p:nvPr>
-            <p:ph idx="1"/>
-          </p:nvPr>
+          <p:nvPr/>
         </p:nvPicPr>
         <p:blipFill>
           <a:blip>
@@ -5146,14 +8435,15 @@
               </a:ext>
             </a:extLst>
           </a:blip>
+          <a:srcRect l="1228" t="12637" r="2344" b="9083"/>
           <a:stretch>
             <a:fillRect/>
           </a:stretch>
         </p:blipFill>
         <p:spPr>
           <a:xfrm>
-            <a:off x="3019663" y="1248209"/>
-            <a:ext cx="6152674" cy="5609791"/>
+            <a:off x="2708030" y="1209036"/>
+            <a:ext cx="7561385" cy="5505011"/>
           </a:xfrm>
           <a:prstGeom prst="rect">
             <a:avLst/>
@@ -5214,21 +8504,95 @@
               </a:ext>
             </a:extLst>
           </a:blip>
-          <a:srcRect b="33950"/>
+          <a:srcRect t="4981" b="33950"/>
           <a:stretch>
             <a:fillRect/>
           </a:stretch>
         </p:blipFill>
         <p:spPr>
           <a:xfrm>
-            <a:off x="555475" y="362440"/>
-            <a:ext cx="10381229" cy="4732561"/>
+            <a:off x="880572" y="1524191"/>
+            <a:ext cx="10897772" cy="4593395"/>
           </a:xfrm>
           <a:prstGeom prst="rect">
             <a:avLst/>
           </a:prstGeom>
         </p:spPr>
       </p:pic>
+      <p:sp>
+        <p:nvSpPr>
+          <p:cNvPr id="3" name="Titel 1">
+            <a:extLst>
+              <a:ext uri="{FF2B5EF4-FFF2-40B4-BE49-F238E27FC236}">
+                <a16:creationId xmlns:a16="http://schemas.microsoft.com/office/drawing/2014/main" id="{00A15A76-03CC-A643-3E2F-0BE78D8ED2F3}"/>
+              </a:ext>
+            </a:extLst>
+          </p:cNvPr>
+          <p:cNvSpPr txBox="1">
+            <a:spLocks/>
+          </p:cNvSpPr>
+          <p:nvPr/>
+        </p:nvSpPr>
+        <p:spPr>
+          <a:xfrm>
+            <a:off x="838200" y="365126"/>
+            <a:ext cx="10515600" cy="843910"/>
+          </a:xfrm>
+          <a:prstGeom prst="rect">
+            <a:avLst/>
+          </a:prstGeom>
+        </p:spPr>
+        <p:txBody>
+          <a:bodyPr vert="horz" lIns="91440" tIns="45720" rIns="91440" bIns="45720" rtlCol="0" anchor="ctr">
+            <a:normAutofit/>
+          </a:bodyPr>
+          <a:lstStyle>
+            <a:lvl1pPr algn="l" defTabSz="914400" rtl="0" eaLnBrk="1" latinLnBrk="0" hangingPunct="1">
+              <a:lnSpc>
+                <a:spcPct val="90000"/>
+              </a:lnSpc>
+              <a:spcBef>
+                <a:spcPct val="0"/>
+              </a:spcBef>
+              <a:buNone/>
+              <a:defRPr sz="4400" kern="1200">
+                <a:solidFill>
+                  <a:schemeClr val="tx1"/>
+                </a:solidFill>
+                <a:latin typeface="+mj-lt"/>
+                <a:ea typeface="+mj-ea"/>
+                <a:cs typeface="+mj-cs"/>
+              </a:defRPr>
+            </a:lvl1pPr>
+          </a:lstStyle>
+          <a:p>
+            <a:r>
+              <a:rPr lang="de-DE" sz="4000" dirty="0" err="1"/>
+              <a:t>Execution</a:t>
+            </a:r>
+            <a:r>
+              <a:rPr lang="de-DE" sz="4000" dirty="0"/>
+              <a:t> </a:t>
+            </a:r>
+            <a:r>
+              <a:rPr lang="de-DE" sz="4000" dirty="0" err="1"/>
+              <a:t>Accuracy</a:t>
+            </a:r>
+            <a:r>
+              <a:rPr lang="de-DE" sz="4000" dirty="0"/>
+              <a:t> </a:t>
+            </a:r>
+            <a:r>
+              <a:rPr lang="de-DE" sz="4000" dirty="0" err="1"/>
+              <a:t>Results</a:t>
+            </a:r>
+            <a:r>
+              <a:rPr lang="de-DE" sz="4000" dirty="0"/>
+              <a:t> </a:t>
+            </a:r>
+          </a:p>
+        </p:txBody>
+      </p:sp>
     </p:spTree>
     <p:extLst>
       <p:ext uri="{BB962C8B-B14F-4D97-AF65-F5344CB8AC3E}">
@@ -5261,50 +8625,6 @@
       </p:grpSpPr>
       <p:sp>
         <p:nvSpPr>
-          <p:cNvPr id="2" name="Titel 1">
-            <a:extLst>
-              <a:ext uri="{FF2B5EF4-FFF2-40B4-BE49-F238E27FC236}">
-                <a16:creationId xmlns:a16="http://schemas.microsoft.com/office/drawing/2014/main" id="{EFDDCF48-2DDB-2872-CC98-A72A2E6EEA94}"/>
-              </a:ext>
-            </a:extLst>
-          </p:cNvPr>
-          <p:cNvSpPr>
-            <a:spLocks noGrp="1"/>
-          </p:cNvSpPr>
-          <p:nvPr>
-            <p:ph type="title"/>
-          </p:nvPr>
-        </p:nvSpPr>
-        <p:spPr/>
-        <p:txBody>
-          <a:bodyPr/>
-          <a:lstStyle/>
-          <a:p>
-            <a:r>
-              <a:rPr lang="de-DE" dirty="0"/>
-              <a:t> Analysis </a:t>
-            </a:r>
-            <a:r>
-              <a:rPr lang="de-DE" dirty="0" err="1"/>
-              <a:t>of</a:t>
-            </a:r>
-            <a:r>
-              <a:rPr lang="de-DE" dirty="0"/>
-              <a:t> Errors / Model </a:t>
-            </a:r>
-            <a:r>
-              <a:rPr lang="de-DE" dirty="0" err="1"/>
-              <a:t>Limitations</a:t>
-            </a:r>
-            <a:r>
-              <a:rPr lang="de-DE" dirty="0"/>
-              <a:t> </a:t>
-            </a:r>
-          </a:p>
-        </p:txBody>
-      </p:sp>
-      <p:sp>
-        <p:nvSpPr>
           <p:cNvPr id="3" name="Inhaltsplatzhalter 2">
             <a:extLst>
               <a:ext uri="{FF2B5EF4-FFF2-40B4-BE49-F238E27FC236}">
@@ -5319,293 +8639,391 @@
             <p:ph idx="1"/>
           </p:nvPr>
         </p:nvSpPr>
-        <p:spPr/>
+        <p:spPr>
+          <a:xfrm>
+            <a:off x="838200" y="1825625"/>
+            <a:ext cx="10515600" cy="2869943"/>
+          </a:xfrm>
+        </p:spPr>
         <p:txBody>
-          <a:bodyPr/>
+          <a:bodyPr>
+            <a:normAutofit/>
+          </a:bodyPr>
           <a:lstStyle/>
           <a:p>
             <a:r>
-              <a:rPr lang="de-CH" dirty="0"/>
+              <a:rPr lang="de-CH" sz="1800" dirty="0"/>
               <a:t>The 1B </a:t>
             </a:r>
             <a:r>
-              <a:rPr lang="de-CH" dirty="0" err="1"/>
+              <a:rPr lang="de-CH" sz="1800" dirty="0" err="1"/>
               <a:t>model</a:t>
             </a:r>
             <a:r>
-              <a:rPr lang="de-CH" dirty="0"/>
+              <a:rPr lang="de-CH" sz="1800" dirty="0"/>
               <a:t> </a:t>
             </a:r>
             <a:r>
-              <a:rPr lang="de-CH" dirty="0" err="1"/>
+              <a:rPr lang="de-CH" sz="1800" dirty="0" err="1"/>
               <a:t>fails</a:t>
             </a:r>
             <a:r>
-              <a:rPr lang="de-CH" dirty="0"/>
+              <a:rPr lang="de-CH" sz="1800" dirty="0"/>
               <a:t> </a:t>
             </a:r>
             <a:r>
-              <a:rPr lang="de-CH" dirty="0" err="1"/>
+              <a:rPr lang="de-CH" sz="1800" dirty="0" err="1"/>
               <a:t>almost</a:t>
             </a:r>
             <a:r>
-              <a:rPr lang="de-CH" dirty="0"/>
+              <a:rPr lang="de-CH" sz="1800" dirty="0"/>
               <a:t> </a:t>
             </a:r>
             <a:r>
-              <a:rPr lang="de-CH" dirty="0" err="1"/>
+              <a:rPr lang="de-CH" sz="1800" dirty="0" err="1"/>
               <a:t>entirely</a:t>
             </a:r>
             <a:r>
-              <a:rPr lang="de-CH" dirty="0"/>
+              <a:rPr lang="de-CH" sz="1800" dirty="0"/>
               <a:t> at </a:t>
             </a:r>
             <a:r>
-              <a:rPr lang="de-CH" dirty="0" err="1"/>
+              <a:rPr lang="de-CH" sz="1800" dirty="0" err="1"/>
               <a:t>the</a:t>
             </a:r>
             <a:r>
-              <a:rPr lang="de-CH" dirty="0"/>
+              <a:rPr lang="de-CH" sz="1800" dirty="0"/>
               <a:t> </a:t>
             </a:r>
             <a:r>
-              <a:rPr lang="de-CH" dirty="0" err="1"/>
+              <a:rPr lang="de-CH" sz="1800" dirty="0" err="1"/>
               <a:t>schema</a:t>
             </a:r>
             <a:r>
-              <a:rPr lang="de-CH" dirty="0"/>
+              <a:rPr lang="de-CH" sz="1800" dirty="0"/>
               <a:t> </a:t>
             </a:r>
             <a:r>
-              <a:rPr lang="de-CH" dirty="0" err="1"/>
-              <a:t>levelWrong</a:t>
-            </a:r>
-            <a:r>
-              <a:rPr lang="de-CH" dirty="0"/>
+              <a:rPr lang="de-CH" sz="1800" dirty="0" err="1"/>
+              <a:t>level</a:t>
+            </a:r>
+            <a:r>
+              <a:rPr lang="de-CH" sz="1800" dirty="0"/>
+              <a:t>, </a:t>
+            </a:r>
+            <a:r>
+              <a:rPr lang="de-CH" sz="1800" dirty="0" err="1"/>
+              <a:t>wrong</a:t>
+            </a:r>
+            <a:r>
+              <a:rPr lang="de-CH" sz="1800" dirty="0"/>
               <a:t> </a:t>
             </a:r>
             <a:r>
-              <a:rPr lang="de-CH" dirty="0" err="1"/>
+              <a:rPr lang="de-CH" sz="1800" dirty="0" err="1"/>
               <a:t>joins</a:t>
             </a:r>
             <a:r>
-              <a:rPr lang="de-CH" dirty="0"/>
+              <a:rPr lang="de-CH" sz="1800" dirty="0"/>
               <a:t> and </a:t>
             </a:r>
             <a:r>
-              <a:rPr lang="de-CH" dirty="0" err="1"/>
+              <a:rPr lang="de-CH" sz="1800" dirty="0" err="1"/>
               <a:t>hallucinated</a:t>
             </a:r>
             <a:r>
-              <a:rPr lang="de-CH" dirty="0"/>
+              <a:rPr lang="de-CH" sz="1800" dirty="0"/>
               <a:t> </a:t>
             </a:r>
             <a:r>
-              <a:rPr lang="de-CH" dirty="0" err="1"/>
+              <a:rPr lang="de-CH" sz="1800" dirty="0" err="1"/>
               <a:t>columns</a:t>
             </a:r>
             <a:r>
-              <a:rPr lang="de-CH" dirty="0"/>
+              <a:rPr lang="de-CH" sz="1800" dirty="0"/>
               <a:t> </a:t>
             </a:r>
             <a:r>
-              <a:rPr lang="de-CH" dirty="0" err="1"/>
+              <a:rPr lang="de-CH" sz="1800" dirty="0" err="1"/>
               <a:t>account</a:t>
             </a:r>
             <a:r>
-              <a:rPr lang="de-CH" dirty="0"/>
+              <a:rPr lang="de-CH" sz="1800" dirty="0"/>
               <a:t> </a:t>
             </a:r>
             <a:r>
-              <a:rPr lang="de-CH" dirty="0" err="1"/>
+              <a:rPr lang="de-CH" sz="1800" dirty="0" err="1"/>
               <a:t>for</a:t>
             </a:r>
             <a:r>
-              <a:rPr lang="de-CH" dirty="0"/>
+              <a:rPr lang="de-CH" sz="1800" dirty="0"/>
               <a:t> 11 </a:t>
             </a:r>
             <a:r>
-              <a:rPr lang="de-CH" dirty="0" err="1"/>
+              <a:rPr lang="de-CH" sz="1800" dirty="0" err="1"/>
               <a:t>of</a:t>
             </a:r>
             <a:r>
-              <a:rPr lang="de-CH" dirty="0"/>
+              <a:rPr lang="de-CH" sz="1800" dirty="0"/>
               <a:t> </a:t>
             </a:r>
             <a:r>
-              <a:rPr lang="de-CH" dirty="0" err="1"/>
+              <a:rPr lang="de-CH" sz="1800" dirty="0" err="1"/>
               <a:t>the</a:t>
             </a:r>
             <a:r>
-              <a:rPr lang="de-CH" dirty="0"/>
+              <a:rPr lang="de-CH" sz="1800" dirty="0"/>
               <a:t> 14 </a:t>
             </a:r>
             <a:r>
-              <a:rPr lang="de-CH" dirty="0" err="1"/>
+              <a:rPr lang="de-CH" sz="1800" dirty="0" err="1"/>
               <a:t>failures</a:t>
             </a:r>
-            <a:endParaRPr lang="de-CH" dirty="0"/>
+            <a:endParaRPr lang="de-CH" sz="1800" dirty="0"/>
           </a:p>
           <a:p>
             <a:pPr lvl="1"/>
             <a:r>
-              <a:rPr lang="de-CH" dirty="0" err="1"/>
+              <a:rPr lang="de-CH" sz="1800" dirty="0" err="1"/>
               <a:t>Accuracy</a:t>
             </a:r>
             <a:r>
-              <a:rPr lang="de-CH" dirty="0"/>
+              <a:rPr lang="de-CH" sz="1800" dirty="0"/>
               <a:t> </a:t>
             </a:r>
             <a:r>
-              <a:rPr lang="de-CH" dirty="0" err="1"/>
+              <a:rPr lang="de-CH" sz="1800" dirty="0" err="1"/>
               <a:t>drops</a:t>
             </a:r>
             <a:r>
-              <a:rPr lang="de-CH" dirty="0"/>
+              <a:rPr lang="de-CH" sz="1800" dirty="0"/>
               <a:t> </a:t>
             </a:r>
             <a:r>
-              <a:rPr lang="de-CH" dirty="0" err="1"/>
+              <a:rPr lang="de-CH" sz="1800" dirty="0" err="1"/>
               <a:t>sharply</a:t>
             </a:r>
             <a:r>
-              <a:rPr lang="de-CH" dirty="0"/>
+              <a:rPr lang="de-CH" sz="1800" dirty="0"/>
               <a:t> </a:t>
             </a:r>
             <a:r>
-              <a:rPr lang="de-CH" dirty="0" err="1"/>
+              <a:rPr lang="de-CH" sz="1800" dirty="0" err="1"/>
               <a:t>with</a:t>
             </a:r>
             <a:r>
-              <a:rPr lang="de-CH" dirty="0"/>
+              <a:rPr lang="de-CH" sz="1800" dirty="0"/>
               <a:t> </a:t>
             </a:r>
             <a:r>
-              <a:rPr lang="de-CH" dirty="0" err="1"/>
+              <a:rPr lang="de-CH" sz="1800" dirty="0" err="1"/>
               <a:t>increasing</a:t>
             </a:r>
             <a:r>
-              <a:rPr lang="de-CH" dirty="0"/>
+              <a:rPr lang="de-CH" sz="1800" dirty="0"/>
               <a:t> </a:t>
             </a:r>
             <a:r>
-              <a:rPr lang="de-CH" dirty="0" err="1"/>
+              <a:rPr lang="de-CH" sz="1800" dirty="0" err="1"/>
               <a:t>difficultyEasy</a:t>
             </a:r>
             <a:r>
-              <a:rPr lang="de-CH" dirty="0"/>
+              <a:rPr lang="de-CH" sz="1800" dirty="0"/>
               <a:t>: 67%</a:t>
             </a:r>
           </a:p>
           <a:p>
             <a:pPr lvl="1"/>
             <a:r>
-              <a:rPr lang="de-CH" dirty="0"/>
+              <a:rPr lang="de-CH" sz="1800" dirty="0"/>
               <a:t>Extra: 0%</a:t>
             </a:r>
           </a:p>
           <a:p>
-            <a:r>
-              <a:rPr lang="de-CH" dirty="0"/>
+            <a:pPr marL="457200" lvl="1" indent="0">
+              <a:buNone/>
+            </a:pPr>
+            <a:endParaRPr lang="de-CH" sz="1800" dirty="0"/>
+          </a:p>
+          <a:p>
+            <a:r>
+              <a:rPr lang="de-CH" sz="1800" dirty="0"/>
               <a:t>2 </a:t>
             </a:r>
             <a:r>
-              <a:rPr lang="de-CH" dirty="0" err="1"/>
+              <a:rPr lang="de-CH" sz="1800" dirty="0" err="1"/>
               <a:t>of</a:t>
             </a:r>
             <a:r>
-              <a:rPr lang="de-CH" dirty="0"/>
+              <a:rPr lang="de-CH" sz="1800" dirty="0"/>
               <a:t> </a:t>
             </a:r>
             <a:r>
-              <a:rPr lang="de-CH" dirty="0" err="1"/>
+              <a:rPr lang="de-CH" sz="1800" dirty="0" err="1"/>
               <a:t>the</a:t>
             </a:r>
             <a:r>
-              <a:rPr lang="de-CH" dirty="0"/>
+              <a:rPr lang="de-CH" sz="1800" dirty="0"/>
               <a:t> 4 “</a:t>
             </a:r>
             <a:r>
-              <a:rPr lang="de-CH" dirty="0" err="1"/>
+              <a:rPr lang="de-CH" sz="1800" dirty="0" err="1"/>
               <a:t>correct</a:t>
             </a:r>
             <a:r>
-              <a:rPr lang="de-CH" dirty="0"/>
+              <a:rPr lang="de-CH" sz="1800" dirty="0"/>
               <a:t>” </a:t>
             </a:r>
             <a:r>
-              <a:rPr lang="de-CH" dirty="0" err="1"/>
+              <a:rPr lang="de-CH" sz="1800" dirty="0" err="1"/>
               <a:t>answers</a:t>
             </a:r>
             <a:r>
-              <a:rPr lang="de-CH" dirty="0"/>
+              <a:rPr lang="de-CH" sz="1800" dirty="0"/>
               <a:t> </a:t>
             </a:r>
             <a:r>
-              <a:rPr lang="de-CH" dirty="0" err="1"/>
+              <a:rPr lang="de-CH" sz="1800" dirty="0" err="1"/>
               <a:t>were</a:t>
             </a:r>
             <a:r>
-              <a:rPr lang="de-CH" dirty="0"/>
+              <a:rPr lang="de-CH" sz="1800" dirty="0"/>
               <a:t> </a:t>
             </a:r>
             <a:r>
-              <a:rPr lang="de-CH" dirty="0" err="1"/>
+              <a:rPr lang="de-CH" sz="1800" dirty="0" err="1"/>
               <a:t>only</a:t>
             </a:r>
             <a:r>
-              <a:rPr lang="de-CH" dirty="0"/>
+              <a:rPr lang="de-CH" sz="1800" dirty="0"/>
               <a:t> lucky </a:t>
             </a:r>
             <a:r>
-              <a:rPr lang="de-CH" dirty="0" err="1"/>
-              <a:t>guessesEffective</a:t>
-            </a:r>
-            <a:r>
-              <a:rPr lang="de-CH" dirty="0"/>
+              <a:rPr lang="de-CH" sz="1800" dirty="0" err="1"/>
+              <a:t>guesses</a:t>
+            </a:r>
+            <a:endParaRPr lang="de-CH" sz="1800" dirty="0"/>
+          </a:p>
+          <a:p>
+            <a:r>
+              <a:rPr lang="de-CH" sz="1800" dirty="0" err="1"/>
+              <a:t>Effective</a:t>
+            </a:r>
+            <a:r>
+              <a:rPr lang="de-CH" sz="1800" dirty="0"/>
               <a:t> real </a:t>
             </a:r>
             <a:r>
-              <a:rPr lang="de-CH" dirty="0" err="1"/>
+              <a:rPr lang="de-CH" sz="1800" dirty="0" err="1"/>
               <a:t>accuracy</a:t>
             </a:r>
             <a:r>
-              <a:rPr lang="de-CH" dirty="0"/>
+              <a:rPr lang="de-CH" sz="1800" dirty="0"/>
               <a:t> </a:t>
             </a:r>
             <a:r>
-              <a:rPr lang="de-CH" dirty="0" err="1"/>
+              <a:rPr lang="de-CH" sz="1800" dirty="0" err="1"/>
               <a:t>is</a:t>
             </a:r>
             <a:r>
-              <a:rPr lang="de-CH" dirty="0"/>
+              <a:rPr lang="de-CH" sz="1800" dirty="0"/>
               <a:t> </a:t>
             </a:r>
             <a:r>
-              <a:rPr lang="de-CH" dirty="0" err="1"/>
+              <a:rPr lang="de-CH" sz="1800" dirty="0" err="1"/>
               <a:t>therefore</a:t>
             </a:r>
             <a:r>
-              <a:rPr lang="de-CH" dirty="0"/>
+              <a:rPr lang="de-CH" sz="1800" dirty="0"/>
               <a:t> </a:t>
             </a:r>
             <a:r>
-              <a:rPr lang="de-CH" dirty="0" err="1"/>
+              <a:rPr lang="de-CH" sz="1800" dirty="0" err="1"/>
               <a:t>closer</a:t>
             </a:r>
             <a:r>
-              <a:rPr lang="de-CH" dirty="0"/>
+              <a:rPr lang="de-CH" sz="1800" dirty="0"/>
               <a:t> </a:t>
             </a:r>
             <a:r>
-              <a:rPr lang="de-CH" dirty="0" err="1"/>
+              <a:rPr lang="de-CH" sz="1800" dirty="0" err="1"/>
               <a:t>to</a:t>
             </a:r>
             <a:r>
-              <a:rPr lang="de-CH" dirty="0"/>
+              <a:rPr lang="de-CH" sz="1800" dirty="0"/>
               <a:t> ~11%</a:t>
             </a:r>
-            <a:endParaRPr lang="de-DE" dirty="0"/>
+            <a:endParaRPr lang="de-DE" sz="1800" dirty="0"/>
+          </a:p>
+        </p:txBody>
+      </p:sp>
+      <p:sp>
+        <p:nvSpPr>
+          <p:cNvPr id="7" name="Titel 1">
+            <a:extLst>
+              <a:ext uri="{FF2B5EF4-FFF2-40B4-BE49-F238E27FC236}">
+                <a16:creationId xmlns:a16="http://schemas.microsoft.com/office/drawing/2014/main" id="{49FD61F9-971B-17DF-98CB-B996CC2753DE}"/>
+              </a:ext>
+            </a:extLst>
+          </p:cNvPr>
+          <p:cNvSpPr txBox="1">
+            <a:spLocks/>
+          </p:cNvSpPr>
+          <p:nvPr/>
+        </p:nvSpPr>
+        <p:spPr>
+          <a:xfrm>
+            <a:off x="838200" y="365126"/>
+            <a:ext cx="10515600" cy="843910"/>
+          </a:xfrm>
+          <a:prstGeom prst="rect">
+            <a:avLst/>
+          </a:prstGeom>
+        </p:spPr>
+        <p:txBody>
+          <a:bodyPr vert="horz" lIns="91440" tIns="45720" rIns="91440" bIns="45720" rtlCol="0" anchor="ctr">
+            <a:normAutofit/>
+          </a:bodyPr>
+          <a:lstStyle>
+            <a:lvl1pPr algn="l" defTabSz="914400" rtl="0" eaLnBrk="1" latinLnBrk="0" hangingPunct="1">
+              <a:lnSpc>
+                <a:spcPct val="90000"/>
+              </a:lnSpc>
+              <a:spcBef>
+                <a:spcPct val="0"/>
+              </a:spcBef>
+              <a:buNone/>
+              <a:defRPr sz="4400" kern="1200">
+                <a:solidFill>
+                  <a:schemeClr val="tx1"/>
+                </a:solidFill>
+                <a:latin typeface="+mj-lt"/>
+                <a:ea typeface="+mj-ea"/>
+                <a:cs typeface="+mj-cs"/>
+              </a:defRPr>
+            </a:lvl1pPr>
+          </a:lstStyle>
+          <a:p>
+            <a:r>
+              <a:rPr lang="de-DE" sz="4000" dirty="0"/>
+              <a:t> Analysis </a:t>
+            </a:r>
+            <a:r>
+              <a:rPr lang="de-DE" sz="4000" dirty="0" err="1"/>
+              <a:t>of</a:t>
+            </a:r>
+            <a:r>
+              <a:rPr lang="de-DE" sz="4000" dirty="0"/>
+              <a:t> Errors / Model </a:t>
+            </a:r>
+            <a:r>
+              <a:rPr lang="de-DE" sz="4000" dirty="0" err="1"/>
+              <a:t>Limitations</a:t>
+            </a:r>
+            <a:r>
+              <a:rPr lang="de-DE" sz="4000" dirty="0"/>
+              <a:t> </a:t>
+            </a:r>
           </a:p>
         </p:txBody>
       </p:sp>
@@ -5663,20 +9081,269 @@
               </a:ext>
             </a:extLst>
           </a:blip>
+          <a:srcRect t="14920" b="28557"/>
           <a:stretch>
             <a:fillRect/>
           </a:stretch>
         </p:blipFill>
         <p:spPr>
           <a:xfrm>
-            <a:off x="417809" y="261520"/>
-            <a:ext cx="7041769" cy="6213326"/>
+            <a:off x="1277815" y="1327816"/>
+            <a:ext cx="6554235" cy="3268803"/>
           </a:xfrm>
           <a:prstGeom prst="rect">
             <a:avLst/>
           </a:prstGeom>
         </p:spPr>
       </p:pic>
+      <p:sp>
+        <p:nvSpPr>
+          <p:cNvPr id="3" name="Titel 1">
+            <a:extLst>
+              <a:ext uri="{FF2B5EF4-FFF2-40B4-BE49-F238E27FC236}">
+                <a16:creationId xmlns:a16="http://schemas.microsoft.com/office/drawing/2014/main" id="{4CC9FDCF-71D8-6A0F-4204-03476619D79E}"/>
+              </a:ext>
+            </a:extLst>
+          </p:cNvPr>
+          <p:cNvSpPr txBox="1">
+            <a:spLocks/>
+          </p:cNvSpPr>
+          <p:nvPr/>
+        </p:nvSpPr>
+        <p:spPr>
+          <a:xfrm>
+            <a:off x="838200" y="365126"/>
+            <a:ext cx="10515600" cy="843910"/>
+          </a:xfrm>
+          <a:prstGeom prst="rect">
+            <a:avLst/>
+          </a:prstGeom>
+        </p:spPr>
+        <p:txBody>
+          <a:bodyPr vert="horz" lIns="91440" tIns="45720" rIns="91440" bIns="45720" rtlCol="0" anchor="ctr">
+            <a:normAutofit/>
+          </a:bodyPr>
+          <a:lstStyle>
+            <a:lvl1pPr algn="l" defTabSz="914400" rtl="0" eaLnBrk="1" latinLnBrk="0" hangingPunct="1">
+              <a:lnSpc>
+                <a:spcPct val="90000"/>
+              </a:lnSpc>
+              <a:spcBef>
+                <a:spcPct val="0"/>
+              </a:spcBef>
+              <a:buNone/>
+              <a:defRPr sz="4400" kern="1200">
+                <a:solidFill>
+                  <a:schemeClr val="tx1"/>
+                </a:solidFill>
+                <a:latin typeface="+mj-lt"/>
+                <a:ea typeface="+mj-ea"/>
+                <a:cs typeface="+mj-cs"/>
+              </a:defRPr>
+            </a:lvl1pPr>
+          </a:lstStyle>
+          <a:p>
+            <a:r>
+              <a:rPr lang="de-DE" sz="4000" dirty="0"/>
+              <a:t>Text-</a:t>
+            </a:r>
+            <a:r>
+              <a:rPr lang="de-DE" sz="4000" dirty="0" err="1"/>
+              <a:t>to</a:t>
+            </a:r>
+            <a:r>
+              <a:rPr lang="de-DE" sz="4000" dirty="0"/>
+              <a:t>-SQL Experiments </a:t>
+            </a:r>
+          </a:p>
+        </p:txBody>
+      </p:sp>
+      <p:pic>
+        <p:nvPicPr>
+          <p:cNvPr id="4" name="Inhaltsplatzhalter 4">
+            <a:extLst>
+              <a:ext uri="{FF2B5EF4-FFF2-40B4-BE49-F238E27FC236}">
+                <a16:creationId xmlns:a16="http://schemas.microsoft.com/office/drawing/2014/main" id="{0D908C01-1D11-ABBF-7F33-921C02160379}"/>
+              </a:ext>
+            </a:extLst>
+          </p:cNvPr>
+          <p:cNvPicPr>
+            <a:picLocks noChangeAspect="1"/>
+          </p:cNvPicPr>
+          <p:nvPr/>
+        </p:nvPicPr>
+        <p:blipFill>
+          <a:blip>
+            <a:extLst>
+              <a:ext uri="{96DAC541-7B7A-43D3-8B79-37D633B846F1}">
+                <asvg:svgBlip xmlns:asvg="http://schemas.microsoft.com/office/drawing/2016/SVG/main" r:embed="rId3"/>
+              </a:ext>
+            </a:extLst>
+          </a:blip>
+          <a:srcRect t="74102"/>
+          <a:stretch>
+            <a:fillRect/>
+          </a:stretch>
+        </p:blipFill>
+        <p:spPr>
+          <a:xfrm>
+            <a:off x="3746574" y="4715401"/>
+            <a:ext cx="8170952" cy="1867126"/>
+          </a:xfrm>
+          <a:prstGeom prst="rect">
+            <a:avLst/>
+          </a:prstGeom>
+        </p:spPr>
+      </p:pic>
+      <p:sp>
+        <p:nvSpPr>
+          <p:cNvPr id="6" name="TextBox 5">
+            <a:extLst>
+              <a:ext uri="{FF2B5EF4-FFF2-40B4-BE49-F238E27FC236}">
+                <a16:creationId xmlns:a16="http://schemas.microsoft.com/office/drawing/2014/main" id="{DB2F4A99-E249-3279-D6BE-D02234BC1A77}"/>
+              </a:ext>
+            </a:extLst>
+          </p:cNvPr>
+          <p:cNvSpPr txBox="1"/>
+          <p:nvPr/>
+        </p:nvSpPr>
+        <p:spPr>
+          <a:xfrm>
+            <a:off x="3634154" y="4715400"/>
+            <a:ext cx="8405446" cy="1990199"/>
+          </a:xfrm>
+          <a:prstGeom prst="rect">
+            <a:avLst/>
+          </a:prstGeom>
+          <a:noFill/>
+          <a:ln>
+            <a:solidFill>
+              <a:srgbClr val="FF0000"/>
+            </a:solidFill>
+          </a:ln>
+        </p:spPr>
+        <p:txBody>
+          <a:bodyPr wrap="square" rtlCol="0">
+            <a:spAutoFit/>
+          </a:bodyPr>
+          <a:lstStyle/>
+          <a:p>
+            <a:endParaRPr lang="en-CH" dirty="0"/>
+          </a:p>
+        </p:txBody>
+      </p:sp>
+      <p:sp>
+        <p:nvSpPr>
+          <p:cNvPr id="8" name="TextBox 7">
+            <a:extLst>
+              <a:ext uri="{FF2B5EF4-FFF2-40B4-BE49-F238E27FC236}">
+                <a16:creationId xmlns:a16="http://schemas.microsoft.com/office/drawing/2014/main" id="{96CC61B0-EF56-45D5-2DBA-6B313520AE97}"/>
+              </a:ext>
+            </a:extLst>
+          </p:cNvPr>
+          <p:cNvSpPr txBox="1"/>
+          <p:nvPr/>
+        </p:nvSpPr>
+        <p:spPr>
+          <a:xfrm rot="16200000">
+            <a:off x="-94147" y="2550132"/>
+            <a:ext cx="2234027" cy="369332"/>
+          </a:xfrm>
+          <a:prstGeom prst="rect">
+            <a:avLst/>
+          </a:prstGeom>
+          <a:noFill/>
+        </p:spPr>
+        <p:txBody>
+          <a:bodyPr wrap="square" rtlCol="0">
+            <a:spAutoFit/>
+          </a:bodyPr>
+          <a:lstStyle/>
+          <a:p>
+            <a:r>
+              <a:rPr lang="de-DE" i="1" dirty="0" err="1">
+                <a:solidFill>
+                  <a:schemeClr val="tx1">
+                    <a:lumMod val="85000"/>
+                    <a:lumOff val="15000"/>
+                  </a:schemeClr>
+                </a:solidFill>
+              </a:rPr>
+              <a:t>Execution</a:t>
+            </a:r>
+            <a:r>
+              <a:rPr lang="de-DE" i="1" dirty="0">
+                <a:solidFill>
+                  <a:schemeClr val="tx1">
+                    <a:lumMod val="85000"/>
+                    <a:lumOff val="15000"/>
+                  </a:schemeClr>
+                </a:solidFill>
+              </a:rPr>
+              <a:t> </a:t>
+            </a:r>
+            <a:r>
+              <a:rPr lang="de-DE" i="1" dirty="0" err="1">
+                <a:solidFill>
+                  <a:schemeClr val="tx1">
+                    <a:lumMod val="85000"/>
+                    <a:lumOff val="15000"/>
+                  </a:schemeClr>
+                </a:solidFill>
+              </a:rPr>
+              <a:t>Accuracy</a:t>
+            </a:r>
+            <a:endParaRPr lang="en-CH" i="1" dirty="0">
+              <a:solidFill>
+                <a:schemeClr val="tx1">
+                  <a:lumMod val="85000"/>
+                  <a:lumOff val="15000"/>
+                </a:schemeClr>
+              </a:solidFill>
+            </a:endParaRPr>
+          </a:p>
+        </p:txBody>
+      </p:sp>
+      <p:sp>
+        <p:nvSpPr>
+          <p:cNvPr id="9" name="TextBox 8">
+            <a:extLst>
+              <a:ext uri="{FF2B5EF4-FFF2-40B4-BE49-F238E27FC236}">
+                <a16:creationId xmlns:a16="http://schemas.microsoft.com/office/drawing/2014/main" id="{F8DA8926-E4BE-2100-50E3-ABDCEE838189}"/>
+              </a:ext>
+            </a:extLst>
+          </p:cNvPr>
+          <p:cNvSpPr txBox="1"/>
+          <p:nvPr/>
+        </p:nvSpPr>
+        <p:spPr>
+          <a:xfrm>
+            <a:off x="838200" y="1204744"/>
+            <a:ext cx="6699738" cy="3387584"/>
+          </a:xfrm>
+          <a:prstGeom prst="rect">
+            <a:avLst/>
+          </a:prstGeom>
+          <a:noFill/>
+          <a:ln>
+            <a:solidFill>
+              <a:schemeClr val="tx1">
+                <a:lumMod val="85000"/>
+                <a:lumOff val="15000"/>
+              </a:schemeClr>
+            </a:solidFill>
+          </a:ln>
+        </p:spPr>
+        <p:txBody>
+          <a:bodyPr wrap="square" rtlCol="0">
+            <a:spAutoFit/>
+          </a:bodyPr>
+          <a:lstStyle/>
+          <a:p>
+            <a:endParaRPr lang="en-CH" dirty="0"/>
+          </a:p>
+        </p:txBody>
+      </p:sp>
     </p:spTree>
     <p:extLst>
       <p:ext uri="{BB962C8B-B14F-4D97-AF65-F5344CB8AC3E}">
@@ -5707,72 +9374,6 @@
           <a:chExt cx="0" cy="0"/>
         </a:xfrm>
       </p:grpSpPr>
-      <p:sp>
-        <p:nvSpPr>
-          <p:cNvPr id="2" name="Titel 1">
-            <a:extLst>
-              <a:ext uri="{FF2B5EF4-FFF2-40B4-BE49-F238E27FC236}">
-                <a16:creationId xmlns:a16="http://schemas.microsoft.com/office/drawing/2014/main" id="{13D88D8D-742D-C8A4-7308-30A65371334F}"/>
-              </a:ext>
-            </a:extLst>
-          </p:cNvPr>
-          <p:cNvSpPr>
-            <a:spLocks noGrp="1"/>
-          </p:cNvSpPr>
-          <p:nvPr>
-            <p:ph type="title"/>
-          </p:nvPr>
-        </p:nvSpPr>
-        <p:spPr>
-          <a:xfrm>
-            <a:off x="838200" y="81206"/>
-            <a:ext cx="10515600" cy="1325563"/>
-          </a:xfrm>
-        </p:spPr>
-        <p:txBody>
-          <a:bodyPr/>
-          <a:lstStyle/>
-          <a:p>
-            <a:r>
-              <a:rPr lang="de-CH" dirty="0" err="1"/>
-              <a:t>Testing</a:t>
-            </a:r>
-            <a:r>
-              <a:rPr lang="de-CH" dirty="0"/>
-              <a:t> </a:t>
-            </a:r>
-            <a:r>
-              <a:rPr lang="de-CH" dirty="0" err="1"/>
-              <a:t>overfitting</a:t>
-            </a:r>
-            <a:r>
-              <a:rPr lang="de-CH" dirty="0"/>
-              <a:t> on </a:t>
-            </a:r>
-            <a:r>
-              <a:rPr lang="de-CH" dirty="0" err="1"/>
-              <a:t>new</a:t>
-            </a:r>
-            <a:r>
-              <a:rPr lang="de-CH" dirty="0"/>
-              <a:t> </a:t>
-            </a:r>
-            <a:r>
-              <a:rPr lang="de-CH" dirty="0" err="1"/>
-              <a:t>test</a:t>
-            </a:r>
-            <a:r>
-              <a:rPr lang="de-CH" dirty="0"/>
-              <a:t> </a:t>
-            </a:r>
-            <a:r>
-              <a:rPr lang="de-CH" dirty="0" err="1"/>
-              <a:t>set</a:t>
-            </a:r>
-            <a:endParaRPr lang="de-DE" dirty="0"/>
-          </a:p>
-        </p:txBody>
-      </p:sp>
       <p:pic>
         <p:nvPicPr>
           <p:cNvPr id="5" name="Inhaltsplatzhalter 4">
@@ -5798,14 +9399,101 @@
         </p:blipFill>
         <p:spPr>
           <a:xfrm>
-            <a:off x="685800" y="1225061"/>
-            <a:ext cx="10251685" cy="4407877"/>
+            <a:off x="636373" y="1431775"/>
+            <a:ext cx="11319078" cy="4866820"/>
           </a:xfrm>
           <a:prstGeom prst="rect">
             <a:avLst/>
           </a:prstGeom>
         </p:spPr>
       </p:pic>
+      <p:sp>
+        <p:nvSpPr>
+          <p:cNvPr id="3" name="Titel 1">
+            <a:extLst>
+              <a:ext uri="{FF2B5EF4-FFF2-40B4-BE49-F238E27FC236}">
+                <a16:creationId xmlns:a16="http://schemas.microsoft.com/office/drawing/2014/main" id="{427E9092-3E2F-4C1C-61BA-028E0CAB5C7A}"/>
+              </a:ext>
+            </a:extLst>
+          </p:cNvPr>
+          <p:cNvSpPr txBox="1">
+            <a:spLocks/>
+          </p:cNvSpPr>
+          <p:nvPr/>
+        </p:nvSpPr>
+        <p:spPr>
+          <a:xfrm>
+            <a:off x="838200" y="365126"/>
+            <a:ext cx="10515600" cy="843910"/>
+          </a:xfrm>
+          <a:prstGeom prst="rect">
+            <a:avLst/>
+          </a:prstGeom>
+        </p:spPr>
+        <p:txBody>
+          <a:bodyPr vert="horz" lIns="91440" tIns="45720" rIns="91440" bIns="45720" rtlCol="0" anchor="ctr">
+            <a:normAutofit/>
+          </a:bodyPr>
+          <a:lstStyle>
+            <a:lvl1pPr algn="l" defTabSz="914400" rtl="0" eaLnBrk="1" latinLnBrk="0" hangingPunct="1">
+              <a:lnSpc>
+                <a:spcPct val="90000"/>
+              </a:lnSpc>
+              <a:spcBef>
+                <a:spcPct val="0"/>
+              </a:spcBef>
+              <a:buNone/>
+              <a:defRPr sz="4400" kern="1200">
+                <a:solidFill>
+                  <a:schemeClr val="tx1"/>
+                </a:solidFill>
+                <a:latin typeface="+mj-lt"/>
+                <a:ea typeface="+mj-ea"/>
+                <a:cs typeface="+mj-cs"/>
+              </a:defRPr>
+            </a:lvl1pPr>
+          </a:lstStyle>
+          <a:p>
+            <a:r>
+              <a:rPr lang="de-CH" sz="4000" dirty="0" err="1"/>
+              <a:t>Testing</a:t>
+            </a:r>
+            <a:r>
+              <a:rPr lang="de-CH" sz="4000" dirty="0"/>
+              <a:t> </a:t>
+            </a:r>
+            <a:r>
+              <a:rPr lang="de-CH" sz="4000" dirty="0" err="1"/>
+              <a:t>overfitting</a:t>
+            </a:r>
+            <a:r>
+              <a:rPr lang="de-CH" sz="4000" dirty="0"/>
+              <a:t> on </a:t>
+            </a:r>
+            <a:r>
+              <a:rPr lang="de-CH" sz="4000" dirty="0" err="1"/>
+              <a:t>new</a:t>
+            </a:r>
+            <a:r>
+              <a:rPr lang="de-CH" sz="4000" dirty="0"/>
+              <a:t> </a:t>
+            </a:r>
+            <a:r>
+              <a:rPr lang="de-CH" sz="4000" dirty="0" err="1"/>
+              <a:t>test</a:t>
+            </a:r>
+            <a:r>
+              <a:rPr lang="de-CH" sz="4000" dirty="0"/>
+              <a:t> </a:t>
+            </a:r>
+            <a:r>
+              <a:rPr lang="de-CH" sz="4000" dirty="0" err="1"/>
+              <a:t>set</a:t>
+            </a:r>
+            <a:endParaRPr lang="de-DE" sz="4000" dirty="0"/>
+          </a:p>
+        </p:txBody>
+      </p:sp>
     </p:spTree>
     <p:extLst>
       <p:ext uri="{BB962C8B-B14F-4D97-AF65-F5344CB8AC3E}">
@@ -5836,688 +9524,91 @@
           <a:chExt cx="0" cy="0"/>
         </a:xfrm>
       </p:grpSpPr>
-      <p:sp>
-        <p:nvSpPr>
-          <p:cNvPr id="2" name="Titel 1">
+      <p:graphicFrame>
+        <p:nvGraphicFramePr>
+          <p:cNvPr id="8" name="Inhaltsplatzhalter 2">
             <a:extLst>
               <a:ext uri="{FF2B5EF4-FFF2-40B4-BE49-F238E27FC236}">
-                <a16:creationId xmlns:a16="http://schemas.microsoft.com/office/drawing/2014/main" id="{D8191700-7A1A-EE6D-EAAF-9424295F016E}"/>
+                <a16:creationId xmlns:a16="http://schemas.microsoft.com/office/drawing/2014/main" id="{3C23C2AE-725F-7B55-471D-EEA04DB0F3A2}"/>
               </a:ext>
             </a:extLst>
           </p:cNvPr>
-          <p:cNvSpPr>
-            <a:spLocks noGrp="1"/>
-          </p:cNvSpPr>
+          <p:cNvGraphicFramePr>
+            <a:graphicFrameLocks noGrp="1"/>
+          </p:cNvGraphicFramePr>
           <p:nvPr>
-            <p:ph type="title"/>
+            <p:ph idx="1"/>
+            <p:extLst>
+              <p:ext uri="{D42A27DB-BD31-4B8C-83A1-F6EECF244321}">
+                <p14:modId xmlns:p14="http://schemas.microsoft.com/office/powerpoint/2010/main" val="1180245339"/>
+              </p:ext>
+            </p:extLst>
           </p:nvPr>
-        </p:nvSpPr>
-        <p:spPr/>
-        <p:txBody>
-          <a:bodyPr/>
-          <a:lstStyle/>
-          <a:p>
-            <a:r>
-              <a:rPr lang="de-DE" dirty="0" err="1"/>
-              <a:t>Conclusion</a:t>
-            </a:r>
-            <a:r>
-              <a:rPr lang="de-DE" dirty="0"/>
-              <a:t> and </a:t>
-            </a:r>
-            <a:r>
-              <a:rPr lang="de-DE"/>
-              <a:t>Future Work</a:t>
-            </a:r>
-            <a:endParaRPr lang="de-DE" dirty="0"/>
-          </a:p>
-        </p:txBody>
-      </p:sp>
+        </p:nvGraphicFramePr>
+        <p:xfrm>
+          <a:off x="838200" y="1253331"/>
+          <a:ext cx="10111155" cy="4351338"/>
+        </p:xfrm>
+        <a:graphic>
+          <a:graphicData uri="http://schemas.openxmlformats.org/drawingml/2006/diagram">
+            <dgm:relIds xmlns:dgm="http://schemas.openxmlformats.org/drawingml/2006/diagram" xmlns:r="http://schemas.openxmlformats.org/officeDocument/2006/relationships" r:dm="rId2" r:lo="rId3" r:qs="rId4" r:cs="rId5"/>
+          </a:graphicData>
+        </a:graphic>
+      </p:graphicFrame>
       <p:sp>
         <p:nvSpPr>
-          <p:cNvPr id="3" name="Inhaltsplatzhalter 2">
+          <p:cNvPr id="6" name="Titel 1">
             <a:extLst>
               <a:ext uri="{FF2B5EF4-FFF2-40B4-BE49-F238E27FC236}">
-                <a16:creationId xmlns:a16="http://schemas.microsoft.com/office/drawing/2014/main" id="{90A94E92-9C9B-1DA6-0E75-4BBF6EC3AB1A}"/>
+                <a16:creationId xmlns:a16="http://schemas.microsoft.com/office/drawing/2014/main" id="{D1557C82-2D46-B202-01B1-1D50F349B39F}"/>
               </a:ext>
             </a:extLst>
           </p:cNvPr>
-          <p:cNvSpPr>
-            <a:spLocks noGrp="1"/>
+          <p:cNvSpPr txBox="1">
+            <a:spLocks/>
           </p:cNvSpPr>
-          <p:nvPr>
-            <p:ph idx="1"/>
-          </p:nvPr>
+          <p:nvPr/>
         </p:nvSpPr>
-        <p:spPr/>
+        <p:spPr>
+          <a:xfrm>
+            <a:off x="838200" y="365126"/>
+            <a:ext cx="10515600" cy="843910"/>
+          </a:xfrm>
+          <a:prstGeom prst="rect">
+            <a:avLst/>
+          </a:prstGeom>
+        </p:spPr>
         <p:txBody>
-          <a:bodyPr/>
-          <a:lstStyle/>
-          <a:p>
-            <a:r>
-              <a:rPr lang="de-DE" dirty="0" err="1"/>
-              <a:t>We</a:t>
-            </a:r>
-            <a:r>
-              <a:rPr lang="de-DE" dirty="0"/>
-              <a:t> </a:t>
-            </a:r>
-            <a:r>
-              <a:rPr lang="de-DE" dirty="0" err="1"/>
-              <a:t>managed</a:t>
-            </a:r>
-            <a:r>
-              <a:rPr lang="de-DE" dirty="0"/>
-              <a:t> </a:t>
-            </a:r>
-            <a:r>
-              <a:rPr lang="de-DE" dirty="0" err="1"/>
-              <a:t>to</a:t>
-            </a:r>
-            <a:r>
-              <a:rPr lang="de-DE" dirty="0"/>
-              <a:t> </a:t>
-            </a:r>
-            <a:r>
-              <a:rPr lang="de-DE" dirty="0" err="1"/>
-              <a:t>adjust</a:t>
-            </a:r>
-            <a:r>
-              <a:rPr lang="de-DE" dirty="0"/>
-              <a:t> </a:t>
-            </a:r>
-            <a:r>
-              <a:rPr lang="de-DE" dirty="0" err="1"/>
-              <a:t>our</a:t>
-            </a:r>
-            <a:r>
-              <a:rPr lang="de-DE" dirty="0"/>
-              <a:t> </a:t>
-            </a:r>
-            <a:r>
-              <a:rPr lang="de-DE" dirty="0" err="1"/>
-              <a:t>model</a:t>
-            </a:r>
-            <a:r>
-              <a:rPr lang="de-DE" dirty="0"/>
-              <a:t> </a:t>
-            </a:r>
-            <a:r>
-              <a:rPr lang="de-DE" dirty="0" err="1"/>
-              <a:t>to</a:t>
-            </a:r>
-            <a:r>
-              <a:rPr lang="de-DE" dirty="0"/>
-              <a:t> </a:t>
-            </a:r>
-            <a:r>
-              <a:rPr lang="de-DE" dirty="0" err="1"/>
-              <a:t>reach</a:t>
-            </a:r>
-            <a:r>
-              <a:rPr lang="de-DE" dirty="0"/>
-              <a:t> a </a:t>
-            </a:r>
-            <a:r>
-              <a:rPr lang="de-DE" dirty="0" err="1"/>
-              <a:t>successrate</a:t>
-            </a:r>
-            <a:r>
-              <a:rPr lang="de-DE" dirty="0"/>
-              <a:t> </a:t>
-            </a:r>
-            <a:r>
-              <a:rPr lang="de-DE" dirty="0" err="1"/>
-              <a:t>of</a:t>
-            </a:r>
-            <a:r>
-              <a:rPr lang="de-DE" dirty="0"/>
-              <a:t> 94% (17/18) </a:t>
-            </a:r>
-            <a:r>
-              <a:rPr lang="de-DE" dirty="0" err="1"/>
-              <a:t>with</a:t>
-            </a:r>
-            <a:r>
-              <a:rPr lang="de-DE" dirty="0"/>
-              <a:t> a </a:t>
-            </a:r>
-            <a:r>
-              <a:rPr lang="de-DE" dirty="0" err="1"/>
-              <a:t>start</a:t>
-            </a:r>
-            <a:r>
-              <a:rPr lang="de-DE" dirty="0"/>
-              <a:t> </a:t>
-            </a:r>
-            <a:r>
-              <a:rPr lang="de-DE" dirty="0" err="1"/>
-              <a:t>of</a:t>
-            </a:r>
-            <a:r>
-              <a:rPr lang="de-DE" dirty="0"/>
-              <a:t> 22% (4/18). The </a:t>
-            </a:r>
-            <a:r>
-              <a:rPr lang="de-DE" dirty="0" err="1"/>
-              <a:t>strongest</a:t>
-            </a:r>
-            <a:r>
-              <a:rPr lang="de-DE" dirty="0"/>
-              <a:t> </a:t>
-            </a:r>
-            <a:r>
-              <a:rPr lang="de-DE" dirty="0" err="1"/>
-              <a:t>impact</a:t>
-            </a:r>
-            <a:r>
-              <a:rPr lang="de-DE" dirty="0"/>
-              <a:t> was </a:t>
-            </a:r>
-            <a:r>
-              <a:rPr lang="de-DE" dirty="0" err="1"/>
-              <a:t>from</a:t>
-            </a:r>
-            <a:r>
-              <a:rPr lang="de-DE" dirty="0"/>
-              <a:t> </a:t>
-            </a:r>
-            <a:r>
-              <a:rPr lang="de-DE" dirty="0" err="1"/>
-              <a:t>describing</a:t>
-            </a:r>
-            <a:r>
-              <a:rPr lang="de-DE" dirty="0"/>
-              <a:t> </a:t>
-            </a:r>
-            <a:r>
-              <a:rPr lang="de-DE" dirty="0" err="1"/>
-              <a:t>the</a:t>
-            </a:r>
-            <a:r>
-              <a:rPr lang="de-DE" dirty="0"/>
-              <a:t> </a:t>
-            </a:r>
-            <a:r>
-              <a:rPr lang="de-DE" dirty="0" err="1"/>
-              <a:t>tables</a:t>
-            </a:r>
-            <a:r>
-              <a:rPr lang="de-DE" dirty="0"/>
-              <a:t> </a:t>
-            </a:r>
-            <a:r>
-              <a:rPr lang="de-DE" dirty="0" err="1"/>
-              <a:t>to</a:t>
-            </a:r>
-            <a:r>
-              <a:rPr lang="de-DE" dirty="0"/>
-              <a:t> </a:t>
-            </a:r>
-            <a:r>
-              <a:rPr lang="de-DE" dirty="0" err="1"/>
-              <a:t>the</a:t>
-            </a:r>
-            <a:r>
-              <a:rPr lang="de-DE" dirty="0"/>
-              <a:t> </a:t>
-            </a:r>
-            <a:r>
-              <a:rPr lang="de-DE" dirty="0" err="1"/>
-              <a:t>model</a:t>
-            </a:r>
-            <a:r>
-              <a:rPr lang="de-DE" dirty="0"/>
-              <a:t> and </a:t>
-            </a:r>
-            <a:r>
-              <a:rPr lang="de-DE" dirty="0" err="1"/>
-              <a:t>adjusting</a:t>
-            </a:r>
-            <a:r>
-              <a:rPr lang="de-DE" dirty="0"/>
-              <a:t> </a:t>
-            </a:r>
-            <a:r>
-              <a:rPr lang="de-DE" dirty="0" err="1"/>
-              <a:t>the</a:t>
-            </a:r>
-            <a:r>
-              <a:rPr lang="de-DE" dirty="0"/>
-              <a:t> </a:t>
-            </a:r>
-            <a:r>
-              <a:rPr lang="de-DE" dirty="0" err="1"/>
-              <a:t>model</a:t>
-            </a:r>
-            <a:r>
-              <a:rPr lang="de-DE" dirty="0"/>
-              <a:t> </a:t>
-            </a:r>
-            <a:r>
-              <a:rPr lang="de-DE" dirty="0" err="1"/>
-              <a:t>from</a:t>
-            </a:r>
-            <a:r>
-              <a:rPr lang="de-DE" dirty="0"/>
-              <a:t> </a:t>
-            </a:r>
-            <a:r>
-              <a:rPr lang="de-DE" dirty="0" err="1"/>
-              <a:t>llama</a:t>
-            </a:r>
-            <a:r>
-              <a:rPr lang="de-DE" dirty="0"/>
-              <a:t> </a:t>
-            </a:r>
-            <a:r>
-              <a:rPr lang="de-DE" dirty="0" err="1"/>
-              <a:t>to</a:t>
-            </a:r>
-            <a:r>
-              <a:rPr lang="de-DE" dirty="0"/>
-              <a:t> </a:t>
-            </a:r>
-            <a:r>
-              <a:rPr lang="de-DE" dirty="0" err="1"/>
-              <a:t>qwen</a:t>
-            </a:r>
-            <a:r>
-              <a:rPr lang="de-DE" dirty="0"/>
-              <a:t>. </a:t>
-            </a:r>
-            <a:r>
-              <a:rPr lang="de-DE" dirty="0" err="1"/>
-              <a:t>We</a:t>
-            </a:r>
-            <a:r>
-              <a:rPr lang="de-DE" dirty="0"/>
-              <a:t> </a:t>
-            </a:r>
-            <a:r>
-              <a:rPr lang="de-DE" dirty="0" err="1"/>
-              <a:t>wanted</a:t>
-            </a:r>
-            <a:r>
-              <a:rPr lang="de-DE" dirty="0"/>
-              <a:t> </a:t>
-            </a:r>
-            <a:r>
-              <a:rPr lang="de-DE" dirty="0" err="1"/>
-              <a:t>to</a:t>
-            </a:r>
-            <a:r>
-              <a:rPr lang="de-DE" dirty="0"/>
-              <a:t> </a:t>
-            </a:r>
-            <a:r>
-              <a:rPr lang="de-DE" dirty="0" err="1"/>
-              <a:t>prove</a:t>
-            </a:r>
-            <a:r>
-              <a:rPr lang="de-DE" dirty="0"/>
-              <a:t> </a:t>
-            </a:r>
-            <a:r>
-              <a:rPr lang="de-DE" dirty="0" err="1"/>
-              <a:t>that</a:t>
-            </a:r>
-            <a:r>
-              <a:rPr lang="de-DE" dirty="0"/>
-              <a:t> </a:t>
-            </a:r>
-            <a:r>
-              <a:rPr lang="de-DE" dirty="0" err="1"/>
-              <a:t>our</a:t>
-            </a:r>
-            <a:r>
-              <a:rPr lang="de-DE" dirty="0"/>
-              <a:t> </a:t>
-            </a:r>
-            <a:r>
-              <a:rPr lang="de-DE" dirty="0" err="1"/>
-              <a:t>model</a:t>
-            </a:r>
-            <a:r>
-              <a:rPr lang="de-DE" dirty="0"/>
-              <a:t> </a:t>
-            </a:r>
-            <a:r>
-              <a:rPr lang="de-DE" dirty="0" err="1"/>
-              <a:t>is</a:t>
-            </a:r>
-            <a:r>
-              <a:rPr lang="de-DE" dirty="0"/>
-              <a:t> not </a:t>
-            </a:r>
-            <a:r>
-              <a:rPr lang="de-DE" dirty="0" err="1"/>
-              <a:t>completly</a:t>
-            </a:r>
-            <a:r>
-              <a:rPr lang="de-DE" dirty="0"/>
-              <a:t> </a:t>
-            </a:r>
-            <a:r>
-              <a:rPr lang="de-DE" dirty="0" err="1"/>
-              <a:t>overfitting</a:t>
-            </a:r>
-            <a:r>
-              <a:rPr lang="de-DE" dirty="0"/>
-              <a:t> </a:t>
-            </a:r>
-            <a:r>
-              <a:rPr lang="de-DE" dirty="0" err="1"/>
-              <a:t>to</a:t>
-            </a:r>
-            <a:r>
-              <a:rPr lang="de-DE" dirty="0"/>
-              <a:t> </a:t>
-            </a:r>
-            <a:r>
-              <a:rPr lang="de-DE" dirty="0" err="1"/>
-              <a:t>the</a:t>
-            </a:r>
-            <a:r>
-              <a:rPr lang="de-DE" dirty="0"/>
-              <a:t> </a:t>
-            </a:r>
-            <a:r>
-              <a:rPr lang="de-DE" dirty="0" err="1"/>
-              <a:t>questions</a:t>
-            </a:r>
-            <a:r>
-              <a:rPr lang="de-DE" dirty="0"/>
-              <a:t> </a:t>
-            </a:r>
-            <a:r>
-              <a:rPr lang="de-DE" dirty="0" err="1"/>
-              <a:t>we</a:t>
-            </a:r>
-            <a:r>
-              <a:rPr lang="de-DE" dirty="0"/>
-              <a:t> </a:t>
-            </a:r>
-            <a:r>
-              <a:rPr lang="de-DE" dirty="0" err="1"/>
-              <a:t>optimezed</a:t>
-            </a:r>
-            <a:r>
-              <a:rPr lang="de-DE" dirty="0"/>
-              <a:t> </a:t>
-            </a:r>
-            <a:r>
-              <a:rPr lang="de-DE" dirty="0" err="1"/>
-              <a:t>it</a:t>
-            </a:r>
-            <a:r>
-              <a:rPr lang="de-DE" dirty="0"/>
-              <a:t> on and </a:t>
-            </a:r>
-            <a:r>
-              <a:rPr lang="de-DE" dirty="0" err="1"/>
-              <a:t>it</a:t>
-            </a:r>
-            <a:r>
-              <a:rPr lang="de-DE" dirty="0"/>
-              <a:t> </a:t>
-            </a:r>
-            <a:r>
-              <a:rPr lang="de-DE" dirty="0" err="1"/>
-              <a:t>reached</a:t>
-            </a:r>
-            <a:r>
-              <a:rPr lang="de-DE" dirty="0"/>
-              <a:t> 50% (9/18) </a:t>
-            </a:r>
-            <a:r>
-              <a:rPr lang="de-DE" dirty="0" err="1"/>
-              <a:t>which</a:t>
-            </a:r>
-            <a:r>
-              <a:rPr lang="de-DE" dirty="0"/>
-              <a:t> </a:t>
-            </a:r>
-            <a:r>
-              <a:rPr lang="de-DE" dirty="0" err="1"/>
-              <a:t>means</a:t>
-            </a:r>
-            <a:r>
-              <a:rPr lang="de-DE" dirty="0"/>
-              <a:t> </a:t>
-            </a:r>
-            <a:r>
-              <a:rPr lang="de-DE" dirty="0" err="1"/>
-              <a:t>it</a:t>
-            </a:r>
-            <a:r>
-              <a:rPr lang="de-DE" dirty="0"/>
-              <a:t> </a:t>
-            </a:r>
-            <a:r>
-              <a:rPr lang="de-DE" dirty="0" err="1"/>
-              <a:t>is</a:t>
-            </a:r>
-            <a:r>
-              <a:rPr lang="de-DE" dirty="0"/>
-              <a:t> not </a:t>
-            </a:r>
-            <a:r>
-              <a:rPr lang="de-DE" dirty="0" err="1"/>
-              <a:t>generalizing</a:t>
-            </a:r>
-            <a:r>
-              <a:rPr lang="de-DE" dirty="0"/>
-              <a:t> </a:t>
-            </a:r>
-            <a:r>
-              <a:rPr lang="de-DE" dirty="0" err="1"/>
-              <a:t>that</a:t>
-            </a:r>
-            <a:r>
-              <a:rPr lang="de-DE" dirty="0"/>
-              <a:t> </a:t>
-            </a:r>
-            <a:r>
-              <a:rPr lang="de-DE" dirty="0" err="1"/>
-              <a:t>well</a:t>
-            </a:r>
-            <a:r>
-              <a:rPr lang="de-DE" dirty="0"/>
-              <a:t>.</a:t>
-            </a:r>
-          </a:p>
-          <a:p>
-            <a:endParaRPr lang="de-DE" dirty="0"/>
-          </a:p>
-          <a:p>
-            <a:r>
-              <a:rPr lang="de-DE" dirty="0"/>
-              <a:t>In </a:t>
-            </a:r>
-            <a:r>
-              <a:rPr lang="de-DE" dirty="0" err="1"/>
-              <a:t>the</a:t>
-            </a:r>
-            <a:r>
-              <a:rPr lang="de-DE" dirty="0"/>
-              <a:t> </a:t>
-            </a:r>
-            <a:r>
-              <a:rPr lang="de-DE" dirty="0" err="1"/>
-              <a:t>future</a:t>
-            </a:r>
-            <a:r>
-              <a:rPr lang="de-DE" dirty="0"/>
-              <a:t> </a:t>
-            </a:r>
-            <a:r>
-              <a:rPr lang="de-DE" dirty="0" err="1"/>
-              <a:t>we</a:t>
-            </a:r>
-            <a:r>
-              <a:rPr lang="de-DE" dirty="0"/>
-              <a:t> </a:t>
-            </a:r>
-            <a:r>
-              <a:rPr lang="de-DE" dirty="0" err="1"/>
-              <a:t>would</a:t>
-            </a:r>
-            <a:r>
-              <a:rPr lang="de-DE" dirty="0"/>
-              <a:t> like </a:t>
-            </a:r>
-            <a:r>
-              <a:rPr lang="de-DE" dirty="0" err="1"/>
-              <a:t>to</a:t>
-            </a:r>
-            <a:r>
-              <a:rPr lang="de-DE" dirty="0"/>
-              <a:t> </a:t>
-            </a:r>
-            <a:r>
-              <a:rPr lang="de-DE" dirty="0" err="1"/>
-              <a:t>optimize</a:t>
-            </a:r>
-            <a:r>
-              <a:rPr lang="de-DE" dirty="0"/>
-              <a:t> on </a:t>
-            </a:r>
-            <a:r>
-              <a:rPr lang="de-DE" dirty="0" err="1"/>
-              <a:t>parameters</a:t>
-            </a:r>
-            <a:r>
-              <a:rPr lang="de-DE" dirty="0"/>
-              <a:t> </a:t>
-            </a:r>
-            <a:r>
-              <a:rPr lang="de-DE" dirty="0" err="1"/>
-              <a:t>that</a:t>
-            </a:r>
-            <a:r>
-              <a:rPr lang="de-DE" dirty="0"/>
-              <a:t> </a:t>
-            </a:r>
-            <a:r>
-              <a:rPr lang="de-DE" dirty="0" err="1"/>
-              <a:t>are</a:t>
-            </a:r>
-            <a:r>
-              <a:rPr lang="de-DE" dirty="0"/>
-              <a:t> </a:t>
-            </a:r>
-            <a:r>
-              <a:rPr lang="de-DE" dirty="0" err="1"/>
-              <a:t>generalizing</a:t>
-            </a:r>
-            <a:r>
-              <a:rPr lang="de-DE" dirty="0"/>
-              <a:t>, </a:t>
-            </a:r>
-            <a:r>
-              <a:rPr lang="de-DE" dirty="0" err="1"/>
-              <a:t>meaning</a:t>
-            </a:r>
-            <a:r>
-              <a:rPr lang="de-DE" dirty="0"/>
-              <a:t> </a:t>
-            </a:r>
-            <a:r>
-              <a:rPr lang="de-DE" dirty="0" err="1"/>
-              <a:t>to</a:t>
-            </a:r>
-            <a:r>
-              <a:rPr lang="de-DE" dirty="0"/>
-              <a:t> </a:t>
-            </a:r>
-            <a:r>
-              <a:rPr lang="de-DE" dirty="0" err="1"/>
-              <a:t>evaluate</a:t>
-            </a:r>
-            <a:r>
-              <a:rPr lang="de-DE" dirty="0"/>
-              <a:t> different </a:t>
-            </a:r>
-            <a:r>
-              <a:rPr lang="de-DE" dirty="0" err="1"/>
-              <a:t>test</a:t>
-            </a:r>
-            <a:r>
-              <a:rPr lang="de-DE" dirty="0"/>
-              <a:t> </a:t>
-            </a:r>
-            <a:r>
-              <a:rPr lang="de-DE" dirty="0" err="1"/>
-              <a:t>sets</a:t>
-            </a:r>
-            <a:r>
-              <a:rPr lang="de-DE" dirty="0"/>
-              <a:t> at </a:t>
-            </a:r>
-            <a:r>
-              <a:rPr lang="de-DE" dirty="0" err="1"/>
-              <a:t>the</a:t>
-            </a:r>
-            <a:r>
-              <a:rPr lang="de-DE" dirty="0"/>
-              <a:t> same time </a:t>
-            </a:r>
-            <a:r>
-              <a:rPr lang="de-DE" dirty="0" err="1"/>
-              <a:t>to</a:t>
-            </a:r>
-            <a:r>
-              <a:rPr lang="de-DE" dirty="0"/>
-              <a:t> check </a:t>
-            </a:r>
-            <a:r>
-              <a:rPr lang="de-DE" dirty="0" err="1"/>
-              <a:t>if</a:t>
-            </a:r>
-            <a:r>
-              <a:rPr lang="de-DE" dirty="0"/>
-              <a:t> </a:t>
-            </a:r>
-            <a:r>
-              <a:rPr lang="de-DE" dirty="0" err="1"/>
-              <a:t>we</a:t>
-            </a:r>
-            <a:r>
-              <a:rPr lang="de-DE" dirty="0"/>
-              <a:t> </a:t>
-            </a:r>
-            <a:r>
-              <a:rPr lang="de-DE" dirty="0" err="1"/>
-              <a:t>reached</a:t>
-            </a:r>
-            <a:r>
-              <a:rPr lang="de-DE" dirty="0"/>
-              <a:t> </a:t>
-            </a:r>
-            <a:r>
-              <a:rPr lang="de-DE" dirty="0" err="1"/>
-              <a:t>better</a:t>
-            </a:r>
-            <a:r>
-              <a:rPr lang="de-DE" dirty="0"/>
-              <a:t> </a:t>
-            </a:r>
-            <a:r>
-              <a:rPr lang="de-DE" dirty="0" err="1"/>
-              <a:t>scores</a:t>
-            </a:r>
-            <a:r>
-              <a:rPr lang="de-DE" dirty="0"/>
-              <a:t> in </a:t>
-            </a:r>
-            <a:r>
-              <a:rPr lang="de-DE" dirty="0" err="1"/>
-              <a:t>general</a:t>
-            </a:r>
-            <a:r>
-              <a:rPr lang="de-DE" dirty="0"/>
-              <a:t>.</a:t>
+          <a:bodyPr vert="horz" lIns="91440" tIns="45720" rIns="91440" bIns="45720" rtlCol="0" anchor="ctr">
+            <a:normAutofit/>
+          </a:bodyPr>
+          <a:lstStyle>
+            <a:lvl1pPr algn="l" defTabSz="914400" rtl="0" eaLnBrk="1" latinLnBrk="0" hangingPunct="1">
+              <a:lnSpc>
+                <a:spcPct val="90000"/>
+              </a:lnSpc>
+              <a:spcBef>
+                <a:spcPct val="0"/>
+              </a:spcBef>
+              <a:buNone/>
+              <a:defRPr sz="4400" kern="1200">
+                <a:solidFill>
+                  <a:schemeClr val="tx1"/>
+                </a:solidFill>
+                <a:latin typeface="+mj-lt"/>
+                <a:ea typeface="+mj-ea"/>
+                <a:cs typeface="+mj-cs"/>
+              </a:defRPr>
+            </a:lvl1pPr>
+          </a:lstStyle>
+          <a:p>
+            <a:r>
+              <a:rPr lang="de-DE" sz="4000" dirty="0" err="1"/>
+              <a:t>Conclusion</a:t>
+            </a:r>
+            <a:r>
+              <a:rPr lang="de-DE" sz="4000" dirty="0"/>
+              <a:t> and Future Work</a:t>
             </a:r>
           </a:p>
         </p:txBody>

--- a/docs/DHW2_Wagner_Kryeziu_Johnson.pptx
+++ b/docs/DHW2_Wagner_Kryeziu_Johnson.pptx
@@ -15,8 +15,8 @@
     <p:sldId id="260" r:id="rId6"/>
     <p:sldId id="261" r:id="rId7"/>
     <p:sldId id="262" r:id="rId8"/>
-    <p:sldId id="264" r:id="rId9"/>
-    <p:sldId id="263" r:id="rId10"/>
+    <p:sldId id="263" r:id="rId9"/>
+    <p:sldId id="264" r:id="rId10"/>
   </p:sldIdLst>
   <p:sldSz cx="12192000" cy="6858000"/>
   <p:notesSz cx="6858000" cy="9144000"/>
@@ -874,7 +874,7 @@
 <dgm:dataModel xmlns:dgm="http://schemas.openxmlformats.org/drawingml/2006/diagram" xmlns:a="http://schemas.openxmlformats.org/drawingml/2006/main">
   <dgm:ptLst>
     <dgm:pt modelId="{B3533454-88E3-435E-A7F4-AA362E8A3B12}" type="doc">
-      <dgm:prSet loTypeId="urn:microsoft.com/office/officeart/2005/8/layout/vList2" loCatId="list" qsTypeId="urn:microsoft.com/office/officeart/2005/8/quickstyle/simple1" qsCatId="simple" csTypeId="urn:microsoft.com/office/officeart/2005/8/colors/accent1_2" csCatId="accent1"/>
+      <dgm:prSet loTypeId="urn:microsoft.com/office/officeart/2018/2/layout/IconVerticalSolidList" loCatId="icon" qsTypeId="urn:microsoft.com/office/officeart/2005/8/quickstyle/simple1" qsCatId="simple" csTypeId="urn:microsoft.com/office/officeart/2005/8/colors/accent1_2" csCatId="accent1" phldr="1"/>
       <dgm:spPr/>
       <dgm:t>
         <a:bodyPr/>
@@ -891,11 +891,116 @@
         <a:bodyPr/>
         <a:lstStyle/>
         <a:p>
+          <a:pPr>
+            <a:lnSpc>
+              <a:spcPct val="100000"/>
+            </a:lnSpc>
+          </a:pPr>
           <a:r>
-            <a:rPr lang="de-DE"/>
-            <a:t>We managed to adjust our model to reach a successrate of 94% (17/18) with a start of 22% (4/18)</a:t>
+            <a:rPr lang="de-DE" dirty="0" err="1"/>
+            <a:t>We</a:t>
           </a:r>
-          <a:endParaRPr lang="en-US"/>
+          <a:r>
+            <a:rPr lang="de-DE" dirty="0"/>
+            <a:t> </a:t>
+          </a:r>
+          <a:r>
+            <a:rPr lang="de-DE" dirty="0" err="1"/>
+            <a:t>managed</a:t>
+          </a:r>
+          <a:r>
+            <a:rPr lang="de-DE" dirty="0"/>
+            <a:t> </a:t>
+          </a:r>
+          <a:r>
+            <a:rPr lang="de-DE" dirty="0" err="1"/>
+            <a:t>to</a:t>
+          </a:r>
+          <a:r>
+            <a:rPr lang="de-DE" dirty="0"/>
+            <a:t> </a:t>
+          </a:r>
+          <a:r>
+            <a:rPr lang="de-DE" dirty="0" err="1"/>
+            <a:t>adjust</a:t>
+          </a:r>
+          <a:r>
+            <a:rPr lang="de-DE" dirty="0"/>
+            <a:t> </a:t>
+          </a:r>
+          <a:r>
+            <a:rPr lang="de-DE" dirty="0" err="1"/>
+            <a:t>our</a:t>
+          </a:r>
+          <a:r>
+            <a:rPr lang="de-DE" dirty="0"/>
+            <a:t> </a:t>
+          </a:r>
+          <a:r>
+            <a:rPr lang="de-DE" dirty="0" err="1"/>
+            <a:t>model</a:t>
+          </a:r>
+          <a:r>
+            <a:rPr lang="de-DE" dirty="0"/>
+            <a:t> </a:t>
+          </a:r>
+          <a:r>
+            <a:rPr lang="de-DE" dirty="0" err="1"/>
+            <a:t>to</a:t>
+          </a:r>
+          <a:r>
+            <a:rPr lang="de-DE" dirty="0"/>
+            <a:t> </a:t>
+          </a:r>
+          <a:r>
+            <a:rPr lang="de-DE" dirty="0" err="1"/>
+            <a:t>reach</a:t>
+          </a:r>
+          <a:r>
+            <a:rPr lang="de-DE" dirty="0"/>
+            <a:t> a </a:t>
+          </a:r>
+          <a:r>
+            <a:rPr lang="de-DE" dirty="0" err="1"/>
+            <a:t>success</a:t>
+          </a:r>
+          <a:r>
+            <a:rPr lang="de-DE" dirty="0"/>
+            <a:t> rate </a:t>
+          </a:r>
+          <a:r>
+            <a:rPr lang="de-DE" dirty="0" err="1"/>
+            <a:t>of</a:t>
+          </a:r>
+          <a:r>
+            <a:rPr lang="de-DE" dirty="0"/>
+            <a:t> 94% </a:t>
+          </a:r>
+          <a:r>
+            <a:rPr lang="de-DE" dirty="0" err="1"/>
+            <a:t>with</a:t>
+          </a:r>
+          <a:r>
+            <a:rPr lang="de-DE" dirty="0"/>
+            <a:t> a </a:t>
+          </a:r>
+          <a:r>
+            <a:rPr lang="de-DE" dirty="0" err="1"/>
+            <a:t>start</a:t>
+          </a:r>
+          <a:r>
+            <a:rPr lang="de-DE" dirty="0"/>
+            <a:t> </a:t>
+          </a:r>
+          <a:r>
+            <a:rPr lang="de-DE" dirty="0" err="1"/>
+            <a:t>of</a:t>
+          </a:r>
+          <a:r>
+            <a:rPr lang="de-DE" dirty="0"/>
+            <a:t> 22%</a:t>
+          </a:r>
+          <a:endParaRPr lang="en-US" dirty="0"/>
         </a:p>
       </dgm:t>
     </dgm:pt>
@@ -917,6 +1022,11 @@
         <a:bodyPr/>
         <a:lstStyle/>
         <a:p>
+          <a:pPr>
+            <a:lnSpc>
+              <a:spcPct val="100000"/>
+            </a:lnSpc>
+          </a:pPr>
           <a:endParaRPr lang="en-US"/>
         </a:p>
       </dgm:t>
@@ -928,135 +1038,16 @@
         <a:bodyPr/>
         <a:lstStyle/>
         <a:p>
+          <a:pPr>
+            <a:lnSpc>
+              <a:spcPct val="100000"/>
+            </a:lnSpc>
+          </a:pPr>
           <a:r>
-            <a:rPr lang="de-DE" dirty="0"/>
-            <a:t>The </a:t>
+            <a:rPr lang="de-DE"/>
+            <a:t>The strongest impact was from describing the tables to the model and adjusting the model from llama to qwen</a:t>
           </a:r>
-          <a:r>
-            <a:rPr lang="de-DE" dirty="0" err="1"/>
-            <a:t>strongest</a:t>
-          </a:r>
-          <a:r>
-            <a:rPr lang="de-DE" dirty="0"/>
-            <a:t> </a:t>
-          </a:r>
-          <a:r>
-            <a:rPr lang="de-DE" dirty="0" err="1"/>
-            <a:t>impact</a:t>
-          </a:r>
-          <a:r>
-            <a:rPr lang="de-DE" dirty="0"/>
-            <a:t> was </a:t>
-          </a:r>
-          <a:r>
-            <a:rPr lang="de-DE" dirty="0" err="1"/>
-            <a:t>from</a:t>
-          </a:r>
-          <a:r>
-            <a:rPr lang="de-DE" dirty="0"/>
-            <a:t> </a:t>
-          </a:r>
-          <a:r>
-            <a:rPr lang="de-DE" dirty="0" err="1"/>
-            <a:t>describing</a:t>
-          </a:r>
-          <a:r>
-            <a:rPr lang="de-DE" dirty="0"/>
-            <a:t> </a:t>
-          </a:r>
-          <a:r>
-            <a:rPr lang="de-DE" dirty="0" err="1"/>
-            <a:t>the</a:t>
-          </a:r>
-          <a:r>
-            <a:rPr lang="de-DE" dirty="0"/>
-            <a:t> </a:t>
-          </a:r>
-          <a:r>
-            <a:rPr lang="de-DE" dirty="0" err="1"/>
-            <a:t>tables</a:t>
-          </a:r>
-          <a:r>
-            <a:rPr lang="de-DE" dirty="0"/>
-            <a:t> </a:t>
-          </a:r>
-          <a:r>
-            <a:rPr lang="de-DE" dirty="0" err="1"/>
-            <a:t>to</a:t>
-          </a:r>
-          <a:r>
-            <a:rPr lang="de-DE" dirty="0"/>
-            <a:t> </a:t>
-          </a:r>
-          <a:r>
-            <a:rPr lang="de-DE" dirty="0" err="1"/>
-            <a:t>the</a:t>
-          </a:r>
-          <a:r>
-            <a:rPr lang="de-DE" dirty="0"/>
-            <a:t> </a:t>
-          </a:r>
-          <a:r>
-            <a:rPr lang="de-DE" dirty="0" err="1"/>
-            <a:t>model</a:t>
-          </a:r>
-          <a:r>
-            <a:rPr lang="de-DE" dirty="0"/>
-            <a:t> and </a:t>
-          </a:r>
-          <a:r>
-            <a:rPr lang="de-DE" dirty="0" err="1"/>
-            <a:t>adjusting</a:t>
-          </a:r>
-          <a:r>
-            <a:rPr lang="de-DE" dirty="0"/>
-            <a:t> </a:t>
-          </a:r>
-          <a:r>
-            <a:rPr lang="de-DE" dirty="0" err="1"/>
-            <a:t>the</a:t>
-          </a:r>
-          <a:r>
-            <a:rPr lang="de-DE" dirty="0"/>
-            <a:t> </a:t>
-          </a:r>
-          <a:r>
-            <a:rPr lang="de-DE" dirty="0" err="1"/>
-            <a:t>model</a:t>
-          </a:r>
-          <a:r>
-            <a:rPr lang="de-DE" dirty="0"/>
-            <a:t> </a:t>
-          </a:r>
-          <a:r>
-            <a:rPr lang="de-DE" dirty="0" err="1"/>
-            <a:t>from</a:t>
-          </a:r>
-          <a:r>
-            <a:rPr lang="de-DE" dirty="0"/>
-            <a:t> </a:t>
-          </a:r>
-          <a:r>
-            <a:rPr lang="de-DE" dirty="0" err="1"/>
-            <a:t>llama</a:t>
-          </a:r>
-          <a:r>
-            <a:rPr lang="de-DE" dirty="0"/>
-            <a:t> </a:t>
-          </a:r>
-          <a:r>
-            <a:rPr lang="de-DE" dirty="0" err="1"/>
-            <a:t>to</a:t>
-          </a:r>
-          <a:r>
-            <a:rPr lang="de-DE" dirty="0"/>
-            <a:t> </a:t>
-          </a:r>
-          <a:r>
-            <a:rPr lang="de-DE" dirty="0" err="1"/>
-            <a:t>qwen</a:t>
-          </a:r>
-          <a:endParaRPr lang="en-US" dirty="0"/>
+          <a:endParaRPr lang="en-US"/>
         </a:p>
       </dgm:t>
     </dgm:pt>
@@ -1078,345 +1069,352 @@
         <a:bodyPr/>
         <a:lstStyle/>
         <a:p>
+          <a:pPr>
+            <a:lnSpc>
+              <a:spcPct val="100000"/>
+            </a:lnSpc>
+          </a:pPr>
           <a:endParaRPr lang="en-US"/>
         </a:p>
       </dgm:t>
     </dgm:pt>
-    <dgm:pt modelId="{E8524C30-42AC-4ACE-A5A4-3E07D037F938}">
+    <dgm:pt modelId="{84B78D25-6A36-7747-9617-53FDD3EB7626}">
+      <dgm:prSet phldrT="[Text]"/>
+      <dgm:spPr/>
+      <dgm:t>
+        <a:bodyPr/>
+        <a:lstStyle/>
+        <a:p>
+          <a:pPr>
+            <a:lnSpc>
+              <a:spcPct val="100000"/>
+            </a:lnSpc>
+          </a:pPr>
+          <a:r>
+            <a:rPr lang="en-GB"/>
+            <a:t>Simple LangGraph-based multi-step reasoning is only working with additional enhancements </a:t>
+          </a:r>
+        </a:p>
+      </dgm:t>
+    </dgm:pt>
+    <dgm:pt modelId="{B1935FAF-0650-2549-B51A-37899F5966D9}" type="parTrans" cxnId="{BE511398-033E-4A40-BD40-DD69C26CDFC5}">
       <dgm:prSet/>
       <dgm:spPr/>
       <dgm:t>
         <a:bodyPr/>
         <a:lstStyle/>
         <a:p>
-          <a:r>
-            <a:rPr lang="de-DE"/>
-            <a:t>We wanted to prove that our model is not completly overfitting to the questions we optimezed it on and it reached 50% (9/18) which means it is not generalizing that well</a:t>
-          </a:r>
-          <a:endParaRPr lang="en-US"/>
+          <a:endParaRPr lang="en-GB"/>
         </a:p>
       </dgm:t>
     </dgm:pt>
-    <dgm:pt modelId="{D3000381-2D0C-48B1-9961-28AD6253FF94}" type="parTrans" cxnId="{EF39DBBA-7996-422A-8478-53206672FE9A}">
+    <dgm:pt modelId="{6DA6CE6C-AFF1-394A-BFE1-C4B8C3825FD2}" type="sibTrans" cxnId="{BE511398-033E-4A40-BD40-DD69C26CDFC5}">
       <dgm:prSet/>
       <dgm:spPr/>
       <dgm:t>
         <a:bodyPr/>
         <a:lstStyle/>
         <a:p>
-          <a:endParaRPr lang="en-US"/>
+          <a:pPr>
+            <a:lnSpc>
+              <a:spcPct val="100000"/>
+            </a:lnSpc>
+          </a:pPr>
+          <a:endParaRPr lang="en-GB"/>
         </a:p>
       </dgm:t>
     </dgm:pt>
-    <dgm:pt modelId="{DDE9B276-5342-46FA-A360-2220D186F5BD}" type="sibTrans" cxnId="{EF39DBBA-7996-422A-8478-53206672FE9A}">
+    <dgm:pt modelId="{F2C95E48-3E38-1D43-ABB3-EEB844CE35F7}">
+      <dgm:prSet phldrT="[Text]"/>
+      <dgm:spPr/>
+      <dgm:t>
+        <a:bodyPr/>
+        <a:lstStyle/>
+        <a:p>
+          <a:pPr>
+            <a:lnSpc>
+              <a:spcPct val="100000"/>
+            </a:lnSpc>
+          </a:pPr>
+          <a:r>
+            <a:rPr lang="en-GB" dirty="0"/>
+            <a:t>Today is a good day to get 20/20 points ;) </a:t>
+          </a:r>
+          <a:r>
+            <a:rPr lang="en-CH" b="0" i="0" dirty="0"/>
+            <a:t>thanks for reviewing</a:t>
+          </a:r>
+          <a:endParaRPr lang="en-GB" i="0" dirty="0"/>
+        </a:p>
+      </dgm:t>
+    </dgm:pt>
+    <dgm:pt modelId="{E6862275-B241-0742-B301-02DCAF91F694}" type="parTrans" cxnId="{72E16593-4F2B-664F-9537-0D6D024A4EDC}">
       <dgm:prSet/>
       <dgm:spPr/>
       <dgm:t>
         <a:bodyPr/>
         <a:lstStyle/>
         <a:p>
-          <a:endParaRPr lang="en-US"/>
+          <a:endParaRPr lang="en-GB"/>
         </a:p>
       </dgm:t>
     </dgm:pt>
-    <dgm:pt modelId="{AAABDF2D-5572-4DA0-B4B8-C017285213FD}">
+    <dgm:pt modelId="{3F46F360-6DC8-F149-A0E6-A277676107BB}" type="sibTrans" cxnId="{72E16593-4F2B-664F-9537-0D6D024A4EDC}">
       <dgm:prSet/>
       <dgm:spPr/>
       <dgm:t>
         <a:bodyPr/>
         <a:lstStyle/>
         <a:p>
-          <a:r>
-            <a:rPr lang="de-DE" dirty="0"/>
-            <a:t>In </a:t>
-          </a:r>
-          <a:r>
-            <a:rPr lang="de-DE" dirty="0" err="1"/>
-            <a:t>the</a:t>
-          </a:r>
-          <a:r>
-            <a:rPr lang="de-DE" dirty="0"/>
-            <a:t> </a:t>
-          </a:r>
-          <a:r>
-            <a:rPr lang="de-DE" dirty="0" err="1"/>
-            <a:t>future</a:t>
-          </a:r>
-          <a:r>
-            <a:rPr lang="de-DE" dirty="0"/>
-            <a:t> </a:t>
-          </a:r>
-          <a:r>
-            <a:rPr lang="de-DE" dirty="0" err="1"/>
-            <a:t>we</a:t>
-          </a:r>
-          <a:r>
-            <a:rPr lang="de-DE" dirty="0"/>
-            <a:t> </a:t>
-          </a:r>
-          <a:r>
-            <a:rPr lang="de-DE" dirty="0" err="1"/>
-            <a:t>would</a:t>
-          </a:r>
-          <a:r>
-            <a:rPr lang="de-DE" dirty="0"/>
-            <a:t> like </a:t>
-          </a:r>
-          <a:r>
-            <a:rPr lang="de-DE" dirty="0" err="1"/>
-            <a:t>to</a:t>
-          </a:r>
-          <a:r>
-            <a:rPr lang="de-DE" dirty="0"/>
-            <a:t> </a:t>
-          </a:r>
-          <a:r>
-            <a:rPr lang="de-DE" dirty="0" err="1"/>
-            <a:t>optimize</a:t>
-          </a:r>
-          <a:r>
-            <a:rPr lang="de-DE" dirty="0"/>
-            <a:t> on </a:t>
-          </a:r>
-          <a:r>
-            <a:rPr lang="de-DE" dirty="0" err="1"/>
-            <a:t>parameters</a:t>
-          </a:r>
-          <a:r>
-            <a:rPr lang="de-DE" dirty="0"/>
-            <a:t> </a:t>
-          </a:r>
-          <a:r>
-            <a:rPr lang="de-DE" dirty="0" err="1"/>
-            <a:t>that</a:t>
-          </a:r>
-          <a:r>
-            <a:rPr lang="de-DE" dirty="0"/>
-            <a:t> </a:t>
-          </a:r>
-          <a:r>
-            <a:rPr lang="de-DE" dirty="0" err="1"/>
-            <a:t>are</a:t>
-          </a:r>
-          <a:r>
-            <a:rPr lang="de-DE" dirty="0"/>
-            <a:t> </a:t>
-          </a:r>
-          <a:r>
-            <a:rPr lang="de-DE" dirty="0" err="1"/>
-            <a:t>generalizing</a:t>
-          </a:r>
-          <a:r>
-            <a:rPr lang="de-DE" dirty="0"/>
-            <a:t>, </a:t>
-          </a:r>
-          <a:r>
-            <a:rPr lang="de-DE" dirty="0" err="1"/>
-            <a:t>meaning</a:t>
-          </a:r>
-          <a:r>
-            <a:rPr lang="de-DE" dirty="0"/>
-            <a:t> </a:t>
-          </a:r>
-          <a:r>
-            <a:rPr lang="de-DE" dirty="0" err="1"/>
-            <a:t>to</a:t>
-          </a:r>
-          <a:r>
-            <a:rPr lang="de-DE" dirty="0"/>
-            <a:t> </a:t>
-          </a:r>
-          <a:r>
-            <a:rPr lang="de-DE" dirty="0" err="1"/>
-            <a:t>evaluate</a:t>
-          </a:r>
-          <a:r>
-            <a:rPr lang="de-DE" dirty="0"/>
-            <a:t> different </a:t>
-          </a:r>
-          <a:r>
-            <a:rPr lang="de-DE" dirty="0" err="1"/>
-            <a:t>test</a:t>
-          </a:r>
-          <a:r>
-            <a:rPr lang="de-DE" dirty="0"/>
-            <a:t> </a:t>
-          </a:r>
-          <a:r>
-            <a:rPr lang="de-DE" dirty="0" err="1"/>
-            <a:t>sets</a:t>
-          </a:r>
-          <a:r>
-            <a:rPr lang="de-DE" dirty="0"/>
-            <a:t> at </a:t>
-          </a:r>
-          <a:r>
-            <a:rPr lang="de-DE" dirty="0" err="1"/>
-            <a:t>the</a:t>
-          </a:r>
-          <a:r>
-            <a:rPr lang="de-DE" dirty="0"/>
-            <a:t> same time </a:t>
-          </a:r>
-          <a:r>
-            <a:rPr lang="de-DE" dirty="0" err="1"/>
-            <a:t>to</a:t>
-          </a:r>
-          <a:r>
-            <a:rPr lang="de-DE" dirty="0"/>
-            <a:t> check </a:t>
-          </a:r>
-          <a:r>
-            <a:rPr lang="de-DE" dirty="0" err="1"/>
-            <a:t>if</a:t>
-          </a:r>
-          <a:r>
-            <a:rPr lang="de-DE" dirty="0"/>
-            <a:t> </a:t>
-          </a:r>
-          <a:r>
-            <a:rPr lang="de-DE" dirty="0" err="1"/>
-            <a:t>we</a:t>
-          </a:r>
-          <a:r>
-            <a:rPr lang="de-DE" dirty="0"/>
-            <a:t> </a:t>
-          </a:r>
-          <a:r>
-            <a:rPr lang="de-DE" dirty="0" err="1"/>
-            <a:t>reached</a:t>
-          </a:r>
-          <a:r>
-            <a:rPr lang="de-DE" dirty="0"/>
-            <a:t> </a:t>
-          </a:r>
-          <a:r>
-            <a:rPr lang="de-DE" dirty="0" err="1"/>
-            <a:t>better</a:t>
-          </a:r>
-          <a:r>
-            <a:rPr lang="de-DE" dirty="0"/>
-            <a:t> </a:t>
-          </a:r>
-          <a:r>
-            <a:rPr lang="de-DE" dirty="0" err="1"/>
-            <a:t>scores</a:t>
-          </a:r>
-          <a:r>
-            <a:rPr lang="de-DE" dirty="0"/>
-            <a:t> in </a:t>
-          </a:r>
-          <a:r>
-            <a:rPr lang="de-DE" dirty="0" err="1"/>
-            <a:t>general</a:t>
-          </a:r>
-          <a:endParaRPr lang="en-US" dirty="0"/>
+          <a:endParaRPr lang="en-GB"/>
         </a:p>
       </dgm:t>
     </dgm:pt>
-    <dgm:pt modelId="{AADC3671-29B6-444B-9F05-AFCD29CD090C}" type="parTrans" cxnId="{6D32D669-244B-47F5-A76C-8D42C253C41A}">
-      <dgm:prSet/>
-      <dgm:spPr/>
-      <dgm:t>
-        <a:bodyPr/>
-        <a:lstStyle/>
-        <a:p>
-          <a:endParaRPr lang="en-US"/>
-        </a:p>
-      </dgm:t>
-    </dgm:pt>
-    <dgm:pt modelId="{DBF888C9-4357-403F-9E86-548AE3D826BE}" type="sibTrans" cxnId="{6D32D669-244B-47F5-A76C-8D42C253C41A}">
-      <dgm:prSet/>
-      <dgm:spPr/>
-      <dgm:t>
-        <a:bodyPr/>
-        <a:lstStyle/>
-        <a:p>
-          <a:endParaRPr lang="en-US"/>
-        </a:p>
-      </dgm:t>
-    </dgm:pt>
-    <dgm:pt modelId="{4E454690-5819-A044-A22E-8711A5F4DD57}" type="pres">
-      <dgm:prSet presAssocID="{B3533454-88E3-435E-A7F4-AA362E8A3B12}" presName="linear" presStyleCnt="0">
+    <dgm:pt modelId="{F080DA07-85B1-4AA6-8613-C1C9FB0A1A70}" type="pres">
+      <dgm:prSet presAssocID="{B3533454-88E3-435E-A7F4-AA362E8A3B12}" presName="root" presStyleCnt="0">
         <dgm:presLayoutVars>
-          <dgm:animLvl val="lvl"/>
+          <dgm:dir/>
           <dgm:resizeHandles val="exact"/>
         </dgm:presLayoutVars>
       </dgm:prSet>
       <dgm:spPr/>
     </dgm:pt>
-    <dgm:pt modelId="{5C423DD3-D902-2A4A-B9D4-52B7C2C78095}" type="pres">
-      <dgm:prSet presAssocID="{EBC12662-E32F-468D-A6ED-E37E896CA00A}" presName="parentText" presStyleLbl="node1" presStyleIdx="0" presStyleCnt="4">
+    <dgm:pt modelId="{9C125EC9-CB85-416C-8755-C0A1A67468A3}" type="pres">
+      <dgm:prSet presAssocID="{EBC12662-E32F-468D-A6ED-E37E896CA00A}" presName="compNode" presStyleCnt="0"/>
+      <dgm:spPr/>
+    </dgm:pt>
+    <dgm:pt modelId="{8E61EBAC-A023-4FE2-8907-D27C65D92F56}" type="pres">
+      <dgm:prSet presAssocID="{EBC12662-E32F-468D-A6ED-E37E896CA00A}" presName="bgRect" presStyleLbl="bgShp" presStyleIdx="0" presStyleCnt="4"/>
+      <dgm:spPr/>
+    </dgm:pt>
+    <dgm:pt modelId="{8C4E25CF-94A6-45FF-B082-EF10CB65DDBF}" type="pres">
+      <dgm:prSet presAssocID="{EBC12662-E32F-468D-A6ED-E37E896CA00A}" presName="iconRect" presStyleLbl="node1" presStyleIdx="0" presStyleCnt="4"/>
+      <dgm:spPr>
+        <a:blipFill>
+          <a:blip xmlns:r="http://schemas.openxmlformats.org/officeDocument/2006/relationships">
+            <a:extLst>
+              <a:ext uri="{28A0092B-C50C-407E-A947-70E740481C1C}">
+                <a14:useLocalDpi xmlns:a14="http://schemas.microsoft.com/office/drawing/2010/main" val="0"/>
+              </a:ext>
+              <a:ext uri="{96DAC541-7B7A-43D3-8B79-37D633B846F1}">
+                <asvg:svgBlip xmlns:asvg="http://schemas.microsoft.com/office/drawing/2016/SVG/main" r:embed="rId1"/>
+              </a:ext>
+            </a:extLst>
+          </a:blip>
+          <a:stretch>
+            <a:fillRect/>
+          </a:stretch>
+        </a:blipFill>
+      </dgm:spPr>
+      <dgm:extLst>
+        <a:ext uri="{E40237B7-FDA0-4F09-8148-C483321AD2D9}">
+          <dgm14:cNvPr xmlns:dgm14="http://schemas.microsoft.com/office/drawing/2010/diagram" id="0" name="" descr="Arrow Circle"/>
+        </a:ext>
+      </dgm:extLst>
+    </dgm:pt>
+    <dgm:pt modelId="{DFB060AD-B89B-4028-BA8F-41AA81D4DD43}" type="pres">
+      <dgm:prSet presAssocID="{EBC12662-E32F-468D-A6ED-E37E896CA00A}" presName="spaceRect" presStyleCnt="0"/>
+      <dgm:spPr/>
+    </dgm:pt>
+    <dgm:pt modelId="{84A2AF5B-42FD-422C-99C9-189EB2E76468}" type="pres">
+      <dgm:prSet presAssocID="{EBC12662-E32F-468D-A6ED-E37E896CA00A}" presName="parTx" presStyleLbl="revTx" presStyleIdx="0" presStyleCnt="4">
         <dgm:presLayoutVars>
           <dgm:chMax val="0"/>
-          <dgm:bulletEnabled val="1"/>
+          <dgm:chPref val="0"/>
         </dgm:presLayoutVars>
       </dgm:prSet>
       <dgm:spPr/>
     </dgm:pt>
-    <dgm:pt modelId="{D7146106-827F-4D44-BEC1-37A10CC63CC1}" type="pres">
-      <dgm:prSet presAssocID="{5D588B93-55BC-489A-B3EB-71D3A76E91D4}" presName="spacer" presStyleCnt="0"/>
+    <dgm:pt modelId="{962E6326-782F-4435-A9A4-889AB971D772}" type="pres">
+      <dgm:prSet presAssocID="{5D588B93-55BC-489A-B3EB-71D3A76E91D4}" presName="sibTrans" presStyleCnt="0"/>
       <dgm:spPr/>
     </dgm:pt>
-    <dgm:pt modelId="{4E3E7EB8-E9A8-9142-BBFC-BD66F567CC7E}" type="pres">
-      <dgm:prSet presAssocID="{1C736EFF-F7B1-4480-9FE7-4833AD69F6B2}" presName="parentText" presStyleLbl="node1" presStyleIdx="1" presStyleCnt="4">
+    <dgm:pt modelId="{195D4864-FE0A-4E78-841A-A4AD81C6F2B5}" type="pres">
+      <dgm:prSet presAssocID="{84B78D25-6A36-7747-9617-53FDD3EB7626}" presName="compNode" presStyleCnt="0"/>
+      <dgm:spPr/>
+    </dgm:pt>
+    <dgm:pt modelId="{A12AF93E-2BD1-473F-82CC-4C2A5ABD3970}" type="pres">
+      <dgm:prSet presAssocID="{84B78D25-6A36-7747-9617-53FDD3EB7626}" presName="bgRect" presStyleLbl="bgShp" presStyleIdx="1" presStyleCnt="4"/>
+      <dgm:spPr/>
+    </dgm:pt>
+    <dgm:pt modelId="{9258D4B2-3FC1-4709-91EE-F4C5550B779C}" type="pres">
+      <dgm:prSet presAssocID="{84B78D25-6A36-7747-9617-53FDD3EB7626}" presName="iconRect" presStyleLbl="node1" presStyleIdx="1" presStyleCnt="4"/>
+      <dgm:spPr>
+        <a:blipFill>
+          <a:blip xmlns:r="http://schemas.openxmlformats.org/officeDocument/2006/relationships">
+            <a:extLst>
+              <a:ext uri="{28A0092B-C50C-407E-A947-70E740481C1C}">
+                <a14:useLocalDpi xmlns:a14="http://schemas.microsoft.com/office/drawing/2010/main" val="0"/>
+              </a:ext>
+              <a:ext uri="{96DAC541-7B7A-43D3-8B79-37D633B846F1}">
+                <asvg:svgBlip xmlns:asvg="http://schemas.microsoft.com/office/drawing/2016/SVG/main" r:embed="rId2"/>
+              </a:ext>
+            </a:extLst>
+          </a:blip>
+          <a:stretch>
+            <a:fillRect/>
+          </a:stretch>
+        </a:blipFill>
+      </dgm:spPr>
+      <dgm:extLst>
+        <a:ext uri="{E40237B7-FDA0-4F09-8148-C483321AD2D9}">
+          <dgm14:cNvPr xmlns:dgm14="http://schemas.microsoft.com/office/drawing/2010/diagram" id="0" name="" descr="Quotes"/>
+        </a:ext>
+      </dgm:extLst>
+    </dgm:pt>
+    <dgm:pt modelId="{B030F02E-BE3B-4781-B39B-746D189E7E0E}" type="pres">
+      <dgm:prSet presAssocID="{84B78D25-6A36-7747-9617-53FDD3EB7626}" presName="spaceRect" presStyleCnt="0"/>
+      <dgm:spPr/>
+    </dgm:pt>
+    <dgm:pt modelId="{70659759-01CC-4EAE-AF47-A1036164A55C}" type="pres">
+      <dgm:prSet presAssocID="{84B78D25-6A36-7747-9617-53FDD3EB7626}" presName="parTx" presStyleLbl="revTx" presStyleIdx="1" presStyleCnt="4">
         <dgm:presLayoutVars>
           <dgm:chMax val="0"/>
-          <dgm:bulletEnabled val="1"/>
+          <dgm:chPref val="0"/>
         </dgm:presLayoutVars>
       </dgm:prSet>
       <dgm:spPr/>
     </dgm:pt>
-    <dgm:pt modelId="{34CC068D-029D-F64B-A746-54FD125B2535}" type="pres">
-      <dgm:prSet presAssocID="{A98F62DB-E2B9-4682-B568-11FDA23D9D10}" presName="spacer" presStyleCnt="0"/>
+    <dgm:pt modelId="{A183BCAC-5D62-4F84-A963-C4B7A92A7C53}" type="pres">
+      <dgm:prSet presAssocID="{6DA6CE6C-AFF1-394A-BFE1-C4B8C3825FD2}" presName="sibTrans" presStyleCnt="0"/>
       <dgm:spPr/>
     </dgm:pt>
-    <dgm:pt modelId="{FCF26537-BF41-714D-98E3-A66393AE860D}" type="pres">
-      <dgm:prSet presAssocID="{E8524C30-42AC-4ACE-A5A4-3E07D037F938}" presName="parentText" presStyleLbl="node1" presStyleIdx="2" presStyleCnt="4">
+    <dgm:pt modelId="{7A75108C-B199-4F56-8C23-AF4CDD169E3D}" type="pres">
+      <dgm:prSet presAssocID="{1C736EFF-F7B1-4480-9FE7-4833AD69F6B2}" presName="compNode" presStyleCnt="0"/>
+      <dgm:spPr/>
+    </dgm:pt>
+    <dgm:pt modelId="{890BABE8-5E1A-40CC-B9BA-8211FE311F12}" type="pres">
+      <dgm:prSet presAssocID="{1C736EFF-F7B1-4480-9FE7-4833AD69F6B2}" presName="bgRect" presStyleLbl="bgShp" presStyleIdx="2" presStyleCnt="4"/>
+      <dgm:spPr/>
+    </dgm:pt>
+    <dgm:pt modelId="{2FEC9AA2-FF73-4DF2-82F4-534261C5B0C1}" type="pres">
+      <dgm:prSet presAssocID="{1C736EFF-F7B1-4480-9FE7-4833AD69F6B2}" presName="iconRect" presStyleLbl="node1" presStyleIdx="2" presStyleCnt="4"/>
+      <dgm:spPr>
+        <a:blipFill>
+          <a:blip xmlns:r="http://schemas.openxmlformats.org/officeDocument/2006/relationships">
+            <a:extLst>
+              <a:ext uri="{28A0092B-C50C-407E-A947-70E740481C1C}">
+                <a14:useLocalDpi xmlns:a14="http://schemas.microsoft.com/office/drawing/2010/main" val="0"/>
+              </a:ext>
+              <a:ext uri="{96DAC541-7B7A-43D3-8B79-37D633B846F1}">
+                <asvg:svgBlip xmlns:asvg="http://schemas.microsoft.com/office/drawing/2016/SVG/main" r:embed="rId3"/>
+              </a:ext>
+            </a:extLst>
+          </a:blip>
+          <a:stretch>
+            <a:fillRect/>
+          </a:stretch>
+        </a:blipFill>
+      </dgm:spPr>
+      <dgm:extLst>
+        <a:ext uri="{E40237B7-FDA0-4F09-8148-C483321AD2D9}">
+          <dgm14:cNvPr xmlns:dgm14="http://schemas.microsoft.com/office/drawing/2010/diagram" id="0" name="" descr="Maze"/>
+        </a:ext>
+      </dgm:extLst>
+    </dgm:pt>
+    <dgm:pt modelId="{F5D8724A-8678-4760-B6E5-D24B3DFBF6DE}" type="pres">
+      <dgm:prSet presAssocID="{1C736EFF-F7B1-4480-9FE7-4833AD69F6B2}" presName="spaceRect" presStyleCnt="0"/>
+      <dgm:spPr/>
+    </dgm:pt>
+    <dgm:pt modelId="{1D9AF384-5746-4325-B1F7-A5E3E4DC50A4}" type="pres">
+      <dgm:prSet presAssocID="{1C736EFF-F7B1-4480-9FE7-4833AD69F6B2}" presName="parTx" presStyleLbl="revTx" presStyleIdx="2" presStyleCnt="4">
         <dgm:presLayoutVars>
           <dgm:chMax val="0"/>
-          <dgm:bulletEnabled val="1"/>
+          <dgm:chPref val="0"/>
         </dgm:presLayoutVars>
       </dgm:prSet>
       <dgm:spPr/>
     </dgm:pt>
-    <dgm:pt modelId="{632C1B21-02D7-1F40-A3D8-7F58108EF9AD}" type="pres">
-      <dgm:prSet presAssocID="{DDE9B276-5342-46FA-A360-2220D186F5BD}" presName="spacer" presStyleCnt="0"/>
+    <dgm:pt modelId="{53A95986-3DBF-40B3-9843-DE247DB6B114}" type="pres">
+      <dgm:prSet presAssocID="{A98F62DB-E2B9-4682-B568-11FDA23D9D10}" presName="sibTrans" presStyleCnt="0"/>
       <dgm:spPr/>
     </dgm:pt>
-    <dgm:pt modelId="{65658E7B-E377-6C45-A5C9-23E64219D2CB}" type="pres">
-      <dgm:prSet presAssocID="{AAABDF2D-5572-4DA0-B4B8-C017285213FD}" presName="parentText" presStyleLbl="node1" presStyleIdx="3" presStyleCnt="4">
+    <dgm:pt modelId="{02E59C62-F39E-4156-96B3-2D7E3DB89CA6}" type="pres">
+      <dgm:prSet presAssocID="{F2C95E48-3E38-1D43-ABB3-EEB844CE35F7}" presName="compNode" presStyleCnt="0"/>
+      <dgm:spPr/>
+    </dgm:pt>
+    <dgm:pt modelId="{7335EE2C-8F1B-4801-B1E3-A333593618CD}" type="pres">
+      <dgm:prSet presAssocID="{F2C95E48-3E38-1D43-ABB3-EEB844CE35F7}" presName="bgRect" presStyleLbl="bgShp" presStyleIdx="3" presStyleCnt="4"/>
+      <dgm:spPr/>
+    </dgm:pt>
+    <dgm:pt modelId="{056701A2-BB72-4974-A299-5F9BC32F587D}" type="pres">
+      <dgm:prSet presAssocID="{F2C95E48-3E38-1D43-ABB3-EEB844CE35F7}" presName="iconRect" presStyleLbl="node1" presStyleIdx="3" presStyleCnt="4"/>
+      <dgm:spPr>
+        <a:blipFill>
+          <a:blip xmlns:r="http://schemas.openxmlformats.org/officeDocument/2006/relationships">
+            <a:extLst>
+              <a:ext uri="{28A0092B-C50C-407E-A947-70E740481C1C}">
+                <a14:useLocalDpi xmlns:a14="http://schemas.microsoft.com/office/drawing/2010/main" val="0"/>
+              </a:ext>
+              <a:ext uri="{96DAC541-7B7A-43D3-8B79-37D633B846F1}">
+                <asvg:svgBlip xmlns:asvg="http://schemas.microsoft.com/office/drawing/2016/SVG/main" r:embed="rId4"/>
+              </a:ext>
+            </a:extLst>
+          </a:blip>
+          <a:stretch>
+            <a:fillRect/>
+          </a:stretch>
+        </a:blipFill>
+      </dgm:spPr>
+      <dgm:extLst>
+        <a:ext uri="{E40237B7-FDA0-4F09-8148-C483321AD2D9}">
+          <dgm14:cNvPr xmlns:dgm14="http://schemas.microsoft.com/office/drawing/2010/diagram" id="0" name="" descr="Whale"/>
+        </a:ext>
+      </dgm:extLst>
+    </dgm:pt>
+    <dgm:pt modelId="{8147F145-5BA0-497E-831E-A26997A2509E}" type="pres">
+      <dgm:prSet presAssocID="{F2C95E48-3E38-1D43-ABB3-EEB844CE35F7}" presName="spaceRect" presStyleCnt="0"/>
+      <dgm:spPr/>
+    </dgm:pt>
+    <dgm:pt modelId="{BA61068E-633F-4443-B175-A2D98E476D33}" type="pres">
+      <dgm:prSet presAssocID="{F2C95E48-3E38-1D43-ABB3-EEB844CE35F7}" presName="parTx" presStyleLbl="revTx" presStyleIdx="3" presStyleCnt="4">
         <dgm:presLayoutVars>
           <dgm:chMax val="0"/>
-          <dgm:bulletEnabled val="1"/>
+          <dgm:chPref val="0"/>
         </dgm:presLayoutVars>
       </dgm:prSet>
       <dgm:spPr/>
     </dgm:pt>
   </dgm:ptLst>
   <dgm:cxnLst>
-    <dgm:cxn modelId="{4069F50D-0428-F343-8D5D-4A97060AF173}" type="presOf" srcId="{EBC12662-E32F-468D-A6ED-E37E896CA00A}" destId="{5C423DD3-D902-2A4A-B9D4-52B7C2C78095}" srcOrd="0" destOrd="0" presId="urn:microsoft.com/office/officeart/2005/8/layout/vList2"/>
-    <dgm:cxn modelId="{F24FD35C-DCB2-814C-BC37-7072812C5973}" type="presOf" srcId="{E8524C30-42AC-4ACE-A5A4-3E07D037F938}" destId="{FCF26537-BF41-714D-98E3-A66393AE860D}" srcOrd="0" destOrd="0" presId="urn:microsoft.com/office/officeart/2005/8/layout/vList2"/>
-    <dgm:cxn modelId="{76BC0968-3B6E-EA40-8F07-A6E48D3EA32F}" type="presOf" srcId="{B3533454-88E3-435E-A7F4-AA362E8A3B12}" destId="{4E454690-5819-A044-A22E-8711A5F4DD57}" srcOrd="0" destOrd="0" presId="urn:microsoft.com/office/officeart/2005/8/layout/vList2"/>
-    <dgm:cxn modelId="{6D32D669-244B-47F5-A76C-8D42C253C41A}" srcId="{B3533454-88E3-435E-A7F4-AA362E8A3B12}" destId="{AAABDF2D-5572-4DA0-B4B8-C017285213FD}" srcOrd="3" destOrd="0" parTransId="{AADC3671-29B6-444B-9F05-AFCD29CD090C}" sibTransId="{DBF888C9-4357-403F-9E86-548AE3D826BE}"/>
-    <dgm:cxn modelId="{831E2471-B667-DD45-89C8-49D851BC1674}" type="presOf" srcId="{1C736EFF-F7B1-4480-9FE7-4833AD69F6B2}" destId="{4E3E7EB8-E9A8-9142-BBFC-BD66F567CC7E}" srcOrd="0" destOrd="0" presId="urn:microsoft.com/office/officeart/2005/8/layout/vList2"/>
-    <dgm:cxn modelId="{EF39DBBA-7996-422A-8478-53206672FE9A}" srcId="{B3533454-88E3-435E-A7F4-AA362E8A3B12}" destId="{E8524C30-42AC-4ACE-A5A4-3E07D037F938}" srcOrd="2" destOrd="0" parTransId="{D3000381-2D0C-48B1-9961-28AD6253FF94}" sibTransId="{DDE9B276-5342-46FA-A360-2220D186F5BD}"/>
+    <dgm:cxn modelId="{BD3CAE1D-E938-3849-8B50-7641D71EFF62}" type="presOf" srcId="{F2C95E48-3E38-1D43-ABB3-EEB844CE35F7}" destId="{BA61068E-633F-4443-B175-A2D98E476D33}" srcOrd="0" destOrd="0" presId="urn:microsoft.com/office/officeart/2018/2/layout/IconVerticalSolidList"/>
+    <dgm:cxn modelId="{ED7D8942-F9FE-1241-BA8B-4D12EB250913}" type="presOf" srcId="{EBC12662-E32F-468D-A6ED-E37E896CA00A}" destId="{84A2AF5B-42FD-422C-99C9-189EB2E76468}" srcOrd="0" destOrd="0" presId="urn:microsoft.com/office/officeart/2018/2/layout/IconVerticalSolidList"/>
+    <dgm:cxn modelId="{5E0CFE48-CEA6-944B-8CA2-58A0D45BCE50}" type="presOf" srcId="{84B78D25-6A36-7747-9617-53FDD3EB7626}" destId="{70659759-01CC-4EAE-AF47-A1036164A55C}" srcOrd="0" destOrd="0" presId="urn:microsoft.com/office/officeart/2018/2/layout/IconVerticalSolidList"/>
+    <dgm:cxn modelId="{63E04453-26EF-8A4D-87BB-68B2D783D975}" type="presOf" srcId="{B3533454-88E3-435E-A7F4-AA362E8A3B12}" destId="{F080DA07-85B1-4AA6-8613-C1C9FB0A1A70}" srcOrd="0" destOrd="0" presId="urn:microsoft.com/office/officeart/2018/2/layout/IconVerticalSolidList"/>
+    <dgm:cxn modelId="{4643D468-AA70-C446-8574-5D43E119E452}" type="presOf" srcId="{1C736EFF-F7B1-4480-9FE7-4833AD69F6B2}" destId="{1D9AF384-5746-4325-B1F7-A5E3E4DC50A4}" srcOrd="0" destOrd="0" presId="urn:microsoft.com/office/officeart/2018/2/layout/IconVerticalSolidList"/>
+    <dgm:cxn modelId="{72E16593-4F2B-664F-9537-0D6D024A4EDC}" srcId="{B3533454-88E3-435E-A7F4-AA362E8A3B12}" destId="{F2C95E48-3E38-1D43-ABB3-EEB844CE35F7}" srcOrd="3" destOrd="0" parTransId="{E6862275-B241-0742-B301-02DCAF91F694}" sibTransId="{3F46F360-6DC8-F149-A0E6-A277676107BB}"/>
+    <dgm:cxn modelId="{BE511398-033E-4A40-BD40-DD69C26CDFC5}" srcId="{B3533454-88E3-435E-A7F4-AA362E8A3B12}" destId="{84B78D25-6A36-7747-9617-53FDD3EB7626}" srcOrd="1" destOrd="0" parTransId="{B1935FAF-0650-2549-B51A-37899F5966D9}" sibTransId="{6DA6CE6C-AFF1-394A-BFE1-C4B8C3825FD2}"/>
     <dgm:cxn modelId="{C806BDCB-6985-4AC9-8636-EC5483EB895D}" srcId="{B3533454-88E3-435E-A7F4-AA362E8A3B12}" destId="{EBC12662-E32F-468D-A6ED-E37E896CA00A}" srcOrd="0" destOrd="0" parTransId="{6441A912-B8AE-4D62-B119-76A22690D285}" sibTransId="{5D588B93-55BC-489A-B3EB-71D3A76E91D4}"/>
-    <dgm:cxn modelId="{2B8B44E6-75BA-4E12-828C-8D767B9805FE}" srcId="{B3533454-88E3-435E-A7F4-AA362E8A3B12}" destId="{1C736EFF-F7B1-4480-9FE7-4833AD69F6B2}" srcOrd="1" destOrd="0" parTransId="{0A67B242-8BBD-4AB6-B67E-32281DCDB89B}" sibTransId="{A98F62DB-E2B9-4682-B568-11FDA23D9D10}"/>
-    <dgm:cxn modelId="{9CFF01FE-9FC6-104B-AC16-43CB55CFCB8A}" type="presOf" srcId="{AAABDF2D-5572-4DA0-B4B8-C017285213FD}" destId="{65658E7B-E377-6C45-A5C9-23E64219D2CB}" srcOrd="0" destOrd="0" presId="urn:microsoft.com/office/officeart/2005/8/layout/vList2"/>
-    <dgm:cxn modelId="{38F77335-09E6-224F-A9CE-9E06D3C127A8}" type="presParOf" srcId="{4E454690-5819-A044-A22E-8711A5F4DD57}" destId="{5C423DD3-D902-2A4A-B9D4-52B7C2C78095}" srcOrd="0" destOrd="0" presId="urn:microsoft.com/office/officeart/2005/8/layout/vList2"/>
-    <dgm:cxn modelId="{1D4B05F3-1D59-6F40-8DA2-3BA1260FFCDB}" type="presParOf" srcId="{4E454690-5819-A044-A22E-8711A5F4DD57}" destId="{D7146106-827F-4D44-BEC1-37A10CC63CC1}" srcOrd="1" destOrd="0" presId="urn:microsoft.com/office/officeart/2005/8/layout/vList2"/>
-    <dgm:cxn modelId="{ED31BE9E-8D7C-324D-9C82-992CD0483C11}" type="presParOf" srcId="{4E454690-5819-A044-A22E-8711A5F4DD57}" destId="{4E3E7EB8-E9A8-9142-BBFC-BD66F567CC7E}" srcOrd="2" destOrd="0" presId="urn:microsoft.com/office/officeart/2005/8/layout/vList2"/>
-    <dgm:cxn modelId="{D7D1DDE0-E0A5-EB4F-BAE0-28E5B9F59A90}" type="presParOf" srcId="{4E454690-5819-A044-A22E-8711A5F4DD57}" destId="{34CC068D-029D-F64B-A746-54FD125B2535}" srcOrd="3" destOrd="0" presId="urn:microsoft.com/office/officeart/2005/8/layout/vList2"/>
-    <dgm:cxn modelId="{4BB2193B-AA95-5947-907E-974C42934762}" type="presParOf" srcId="{4E454690-5819-A044-A22E-8711A5F4DD57}" destId="{FCF26537-BF41-714D-98E3-A66393AE860D}" srcOrd="4" destOrd="0" presId="urn:microsoft.com/office/officeart/2005/8/layout/vList2"/>
-    <dgm:cxn modelId="{9EF828BF-70B8-D149-9EDF-FE7AFF2C56A7}" type="presParOf" srcId="{4E454690-5819-A044-A22E-8711A5F4DD57}" destId="{632C1B21-02D7-1F40-A3D8-7F58108EF9AD}" srcOrd="5" destOrd="0" presId="urn:microsoft.com/office/officeart/2005/8/layout/vList2"/>
-    <dgm:cxn modelId="{80933E73-8C51-D14A-AF99-12FAE774D327}" type="presParOf" srcId="{4E454690-5819-A044-A22E-8711A5F4DD57}" destId="{65658E7B-E377-6C45-A5C9-23E64219D2CB}" srcOrd="6" destOrd="0" presId="urn:microsoft.com/office/officeart/2005/8/layout/vList2"/>
+    <dgm:cxn modelId="{2B8B44E6-75BA-4E12-828C-8D767B9805FE}" srcId="{B3533454-88E3-435E-A7F4-AA362E8A3B12}" destId="{1C736EFF-F7B1-4480-9FE7-4833AD69F6B2}" srcOrd="2" destOrd="0" parTransId="{0A67B242-8BBD-4AB6-B67E-32281DCDB89B}" sibTransId="{A98F62DB-E2B9-4682-B568-11FDA23D9D10}"/>
+    <dgm:cxn modelId="{2456335C-1F37-1F49-8D5F-B2D0051E4C9B}" type="presParOf" srcId="{F080DA07-85B1-4AA6-8613-C1C9FB0A1A70}" destId="{9C125EC9-CB85-416C-8755-C0A1A67468A3}" srcOrd="0" destOrd="0" presId="urn:microsoft.com/office/officeart/2018/2/layout/IconVerticalSolidList"/>
+    <dgm:cxn modelId="{85AA313B-F3BE-B74C-A561-314822DE601F}" type="presParOf" srcId="{9C125EC9-CB85-416C-8755-C0A1A67468A3}" destId="{8E61EBAC-A023-4FE2-8907-D27C65D92F56}" srcOrd="0" destOrd="0" presId="urn:microsoft.com/office/officeart/2018/2/layout/IconVerticalSolidList"/>
+    <dgm:cxn modelId="{5BE60ADB-F446-CA41-A2F8-E89317DB090A}" type="presParOf" srcId="{9C125EC9-CB85-416C-8755-C0A1A67468A3}" destId="{8C4E25CF-94A6-45FF-B082-EF10CB65DDBF}" srcOrd="1" destOrd="0" presId="urn:microsoft.com/office/officeart/2018/2/layout/IconVerticalSolidList"/>
+    <dgm:cxn modelId="{83AD51DF-FDFC-CE43-BA45-4411AF7878C0}" type="presParOf" srcId="{9C125EC9-CB85-416C-8755-C0A1A67468A3}" destId="{DFB060AD-B89B-4028-BA8F-41AA81D4DD43}" srcOrd="2" destOrd="0" presId="urn:microsoft.com/office/officeart/2018/2/layout/IconVerticalSolidList"/>
+    <dgm:cxn modelId="{3BA8E6C9-1A84-3048-9C22-08C59518D9D6}" type="presParOf" srcId="{9C125EC9-CB85-416C-8755-C0A1A67468A3}" destId="{84A2AF5B-42FD-422C-99C9-189EB2E76468}" srcOrd="3" destOrd="0" presId="urn:microsoft.com/office/officeart/2018/2/layout/IconVerticalSolidList"/>
+    <dgm:cxn modelId="{54023F9E-30E3-3440-A918-3597257E4AE8}" type="presParOf" srcId="{F080DA07-85B1-4AA6-8613-C1C9FB0A1A70}" destId="{962E6326-782F-4435-A9A4-889AB971D772}" srcOrd="1" destOrd="0" presId="urn:microsoft.com/office/officeart/2018/2/layout/IconVerticalSolidList"/>
+    <dgm:cxn modelId="{13B6B9F9-DDBB-D443-AC90-7B3E8CE40579}" type="presParOf" srcId="{F080DA07-85B1-4AA6-8613-C1C9FB0A1A70}" destId="{195D4864-FE0A-4E78-841A-A4AD81C6F2B5}" srcOrd="2" destOrd="0" presId="urn:microsoft.com/office/officeart/2018/2/layout/IconVerticalSolidList"/>
+    <dgm:cxn modelId="{D34FAC69-9C21-3A49-B8D9-12AD0CBD8E24}" type="presParOf" srcId="{195D4864-FE0A-4E78-841A-A4AD81C6F2B5}" destId="{A12AF93E-2BD1-473F-82CC-4C2A5ABD3970}" srcOrd="0" destOrd="0" presId="urn:microsoft.com/office/officeart/2018/2/layout/IconVerticalSolidList"/>
+    <dgm:cxn modelId="{EA4B17D5-15DB-BC47-AE6C-0AF9A5179A89}" type="presParOf" srcId="{195D4864-FE0A-4E78-841A-A4AD81C6F2B5}" destId="{9258D4B2-3FC1-4709-91EE-F4C5550B779C}" srcOrd="1" destOrd="0" presId="urn:microsoft.com/office/officeart/2018/2/layout/IconVerticalSolidList"/>
+    <dgm:cxn modelId="{91A8CFF5-186A-704C-8914-6FE941CAE852}" type="presParOf" srcId="{195D4864-FE0A-4E78-841A-A4AD81C6F2B5}" destId="{B030F02E-BE3B-4781-B39B-746D189E7E0E}" srcOrd="2" destOrd="0" presId="urn:microsoft.com/office/officeart/2018/2/layout/IconVerticalSolidList"/>
+    <dgm:cxn modelId="{6D451DE6-8D79-EB41-9BA9-43CE37099181}" type="presParOf" srcId="{195D4864-FE0A-4E78-841A-A4AD81C6F2B5}" destId="{70659759-01CC-4EAE-AF47-A1036164A55C}" srcOrd="3" destOrd="0" presId="urn:microsoft.com/office/officeart/2018/2/layout/IconVerticalSolidList"/>
+    <dgm:cxn modelId="{8FE5592F-3A51-3B46-BA8B-60C378C9703A}" type="presParOf" srcId="{F080DA07-85B1-4AA6-8613-C1C9FB0A1A70}" destId="{A183BCAC-5D62-4F84-A963-C4B7A92A7C53}" srcOrd="3" destOrd="0" presId="urn:microsoft.com/office/officeart/2018/2/layout/IconVerticalSolidList"/>
+    <dgm:cxn modelId="{E336889E-1ED6-504E-90D4-12A4A1277980}" type="presParOf" srcId="{F080DA07-85B1-4AA6-8613-C1C9FB0A1A70}" destId="{7A75108C-B199-4F56-8C23-AF4CDD169E3D}" srcOrd="4" destOrd="0" presId="urn:microsoft.com/office/officeart/2018/2/layout/IconVerticalSolidList"/>
+    <dgm:cxn modelId="{64856576-F13D-864A-8440-76FD95F97DFC}" type="presParOf" srcId="{7A75108C-B199-4F56-8C23-AF4CDD169E3D}" destId="{890BABE8-5E1A-40CC-B9BA-8211FE311F12}" srcOrd="0" destOrd="0" presId="urn:microsoft.com/office/officeart/2018/2/layout/IconVerticalSolidList"/>
+    <dgm:cxn modelId="{70DA14C4-7588-C04D-A563-71C91BF44521}" type="presParOf" srcId="{7A75108C-B199-4F56-8C23-AF4CDD169E3D}" destId="{2FEC9AA2-FF73-4DF2-82F4-534261C5B0C1}" srcOrd="1" destOrd="0" presId="urn:microsoft.com/office/officeart/2018/2/layout/IconVerticalSolidList"/>
+    <dgm:cxn modelId="{71F1B8AB-C858-BF46-A197-66D6CE5C939F}" type="presParOf" srcId="{7A75108C-B199-4F56-8C23-AF4CDD169E3D}" destId="{F5D8724A-8678-4760-B6E5-D24B3DFBF6DE}" srcOrd="2" destOrd="0" presId="urn:microsoft.com/office/officeart/2018/2/layout/IconVerticalSolidList"/>
+    <dgm:cxn modelId="{0AACF6CE-CB58-3044-8442-93CBDFECD2D8}" type="presParOf" srcId="{7A75108C-B199-4F56-8C23-AF4CDD169E3D}" destId="{1D9AF384-5746-4325-B1F7-A5E3E4DC50A4}" srcOrd="3" destOrd="0" presId="urn:microsoft.com/office/officeart/2018/2/layout/IconVerticalSolidList"/>
+    <dgm:cxn modelId="{3840E7FD-D1D4-1543-B657-501909F5DB0B}" type="presParOf" srcId="{F080DA07-85B1-4AA6-8613-C1C9FB0A1A70}" destId="{53A95986-3DBF-40B3-9843-DE247DB6B114}" srcOrd="5" destOrd="0" presId="urn:microsoft.com/office/officeart/2018/2/layout/IconVerticalSolidList"/>
+    <dgm:cxn modelId="{97856097-42E5-DE4E-84DD-D30C121642FA}" type="presParOf" srcId="{F080DA07-85B1-4AA6-8613-C1C9FB0A1A70}" destId="{02E59C62-F39E-4156-96B3-2D7E3DB89CA6}" srcOrd="6" destOrd="0" presId="urn:microsoft.com/office/officeart/2018/2/layout/IconVerticalSolidList"/>
+    <dgm:cxn modelId="{CA3D59B9-E571-6443-9AB4-B483F142C99E}" type="presParOf" srcId="{02E59C62-F39E-4156-96B3-2D7E3DB89CA6}" destId="{7335EE2C-8F1B-4801-B1E3-A333593618CD}" srcOrd="0" destOrd="0" presId="urn:microsoft.com/office/officeart/2018/2/layout/IconVerticalSolidList"/>
+    <dgm:cxn modelId="{92D0D749-BEBE-9A4D-BAA6-D009567FD42E}" type="presParOf" srcId="{02E59C62-F39E-4156-96B3-2D7E3DB89CA6}" destId="{056701A2-BB72-4974-A299-5F9BC32F587D}" srcOrd="1" destOrd="0" presId="urn:microsoft.com/office/officeart/2018/2/layout/IconVerticalSolidList"/>
+    <dgm:cxn modelId="{7EC8D9FC-C278-324D-918F-921CD20B7758}" type="presParOf" srcId="{02E59C62-F39E-4156-96B3-2D7E3DB89CA6}" destId="{8147F145-5BA0-497E-831E-A26997A2509E}" srcOrd="2" destOrd="0" presId="urn:microsoft.com/office/officeart/2018/2/layout/IconVerticalSolidList"/>
+    <dgm:cxn modelId="{DDF74A9A-307C-0340-BCE8-134B4B48A495}" type="presParOf" srcId="{02E59C62-F39E-4156-96B3-2D7E3DB89CA6}" destId="{BA61068E-633F-4443-B175-A2D98E476D33}" srcOrd="3" destOrd="0" presId="urn:microsoft.com/office/officeart/2018/2/layout/IconVerticalSolidList"/>
   </dgm:cxnLst>
   <dgm:bg/>
   <dgm:whole/>
   <dgm:extLst>
     <a:ext uri="http://schemas.microsoft.com/office/drawing/2008/diagram">
-      <dsp:dataModelExt xmlns:dsp="http://schemas.microsoft.com/office/drawing/2008/diagram" relId="rId6" minVer="http://schemas.openxmlformats.org/drawingml/2006/diagram"/>
+      <dsp:dataModelExt xmlns:dsp="http://schemas.microsoft.com/office/drawing/2008/diagram" relId="rId7" minVer="http://schemas.openxmlformats.org/drawingml/2006/diagram"/>
     </a:ext>
   </dgm:extLst>
 </dgm:dataModel>
@@ -1430,27 +1428,76 @@
       <dsp:cNvGrpSpPr/>
     </dsp:nvGrpSpPr>
     <dsp:grpSpPr/>
-    <dsp:sp modelId="{5C423DD3-D902-2A4A-B9D4-52B7C2C78095}">
+    <dsp:sp modelId="{8E61EBAC-A023-4FE2-8907-D27C65D92F56}">
       <dsp:nvSpPr>
         <dsp:cNvPr id="0" name=""/>
         <dsp:cNvSpPr/>
       </dsp:nvSpPr>
       <dsp:spPr>
         <a:xfrm>
-          <a:off x="0" y="498069"/>
-          <a:ext cx="10111155" cy="795600"/>
+          <a:off x="0" y="1805"/>
+          <a:ext cx="10111155" cy="915310"/>
         </a:xfrm>
         <a:prstGeom prst="roundRect">
-          <a:avLst/>
+          <a:avLst>
+            <a:gd name="adj" fmla="val 10000"/>
+          </a:avLst>
         </a:prstGeom>
         <a:solidFill>
           <a:schemeClr val="accent1">
+            <a:tint val="40000"/>
             <a:hueOff val="0"/>
             <a:satOff val="0"/>
             <a:lumOff val="0"/>
             <a:alphaOff val="0"/>
           </a:schemeClr>
         </a:solidFill>
+        <a:ln>
+          <a:noFill/>
+        </a:ln>
+        <a:effectLst/>
+      </dsp:spPr>
+      <dsp:style>
+        <a:lnRef idx="0">
+          <a:scrgbClr r="0" g="0" b="0"/>
+        </a:lnRef>
+        <a:fillRef idx="1">
+          <a:scrgbClr r="0" g="0" b="0"/>
+        </a:fillRef>
+        <a:effectRef idx="0">
+          <a:scrgbClr r="0" g="0" b="0"/>
+        </a:effectRef>
+        <a:fontRef idx="minor"/>
+      </dsp:style>
+    </dsp:sp>
+    <dsp:sp modelId="{8C4E25CF-94A6-45FF-B082-EF10CB65DDBF}">
+      <dsp:nvSpPr>
+        <dsp:cNvPr id="0" name=""/>
+        <dsp:cNvSpPr/>
+      </dsp:nvSpPr>
+      <dsp:spPr>
+        <a:xfrm>
+          <a:off x="276881" y="207750"/>
+          <a:ext cx="503420" cy="503420"/>
+        </a:xfrm>
+        <a:prstGeom prst="rect">
+          <a:avLst/>
+        </a:prstGeom>
+        <a:blipFill>
+          <a:blip xmlns:r="http://schemas.openxmlformats.org/officeDocument/2006/relationships">
+            <a:extLst>
+              <a:ext uri="{28A0092B-C50C-407E-A947-70E740481C1C}">
+                <a14:useLocalDpi xmlns:a14="http://schemas.microsoft.com/office/drawing/2010/main" val="0"/>
+              </a:ext>
+              <a:ext uri="{96DAC541-7B7A-43D3-8B79-37D633B846F1}">
+                <asvg:svgBlip xmlns:asvg="http://schemas.microsoft.com/office/drawing/2016/SVG/main" r:embed="rId1"/>
+              </a:ext>
+            </a:extLst>
+          </a:blip>
+          <a:stretch>
+            <a:fillRect/>
+          </a:stretch>
+        </a:blipFill>
         <a:ln w="19050" cap="flat" cmpd="sng" algn="ctr">
           <a:solidFill>
             <a:schemeClr val="lt1">
@@ -1479,15 +1526,47 @@
           <a:schemeClr val="lt1"/>
         </a:fontRef>
       </dsp:style>
+    </dsp:sp>
+    <dsp:sp modelId="{84A2AF5B-42FD-422C-99C9-189EB2E76468}">
+      <dsp:nvSpPr>
+        <dsp:cNvPr id="0" name=""/>
+        <dsp:cNvSpPr/>
+      </dsp:nvSpPr>
+      <dsp:spPr>
+        <a:xfrm>
+          <a:off x="1057183" y="1805"/>
+          <a:ext cx="9053971" cy="915310"/>
+        </a:xfrm>
+        <a:prstGeom prst="rect">
+          <a:avLst/>
+        </a:prstGeom>
+        <a:noFill/>
+        <a:ln>
+          <a:noFill/>
+        </a:ln>
+        <a:effectLst/>
+      </dsp:spPr>
+      <dsp:style>
+        <a:lnRef idx="0">
+          <a:scrgbClr r="0" g="0" b="0"/>
+        </a:lnRef>
+        <a:fillRef idx="0">
+          <a:scrgbClr r="0" g="0" b="0"/>
+        </a:fillRef>
+        <a:effectRef idx="0">
+          <a:scrgbClr r="0" g="0" b="0"/>
+        </a:effectRef>
+        <a:fontRef idx="minor"/>
+      </dsp:style>
       <dsp:txBody>
-        <a:bodyPr spcFirstLastPara="0" vert="horz" wrap="square" lIns="76200" tIns="76200" rIns="76200" bIns="76200" numCol="1" spcCol="1270" anchor="ctr" anchorCtr="0">
+        <a:bodyPr spcFirstLastPara="0" vert="horz" wrap="square" lIns="96870" tIns="96870" rIns="96870" bIns="96870" numCol="1" spcCol="1270" anchor="ctr" anchorCtr="0">
           <a:noAutofit/>
         </a:bodyPr>
         <a:lstStyle/>
         <a:p>
-          <a:pPr marL="0" lvl="0" indent="0" algn="l" defTabSz="889000">
+          <a:pPr marL="0" lvl="0" indent="0" algn="l" defTabSz="977900">
             <a:lnSpc>
-              <a:spcPct val="90000"/>
+              <a:spcPct val="100000"/>
             </a:lnSpc>
             <a:spcBef>
               <a:spcPct val="0"/>
@@ -1498,38 +1577,187 @@
             <a:buNone/>
           </a:pPr>
           <a:r>
-            <a:rPr lang="de-DE" sz="2000" kern="1200"/>
-            <a:t>We managed to adjust our model to reach a successrate of 94% (17/18) with a start of 22% (4/18)</a:t>
+            <a:rPr lang="de-DE" sz="2200" kern="1200" dirty="0" err="1"/>
+            <a:t>We</a:t>
           </a:r>
-          <a:endParaRPr lang="en-US" sz="2000" kern="1200"/>
+          <a:r>
+            <a:rPr lang="de-DE" sz="2200" kern="1200" dirty="0"/>
+            <a:t> </a:t>
+          </a:r>
+          <a:r>
+            <a:rPr lang="de-DE" sz="2200" kern="1200" dirty="0" err="1"/>
+            <a:t>managed</a:t>
+          </a:r>
+          <a:r>
+            <a:rPr lang="de-DE" sz="2200" kern="1200" dirty="0"/>
+            <a:t> </a:t>
+          </a:r>
+          <a:r>
+            <a:rPr lang="de-DE" sz="2200" kern="1200" dirty="0" err="1"/>
+            <a:t>to</a:t>
+          </a:r>
+          <a:r>
+            <a:rPr lang="de-DE" sz="2200" kern="1200" dirty="0"/>
+            <a:t> </a:t>
+          </a:r>
+          <a:r>
+            <a:rPr lang="de-DE" sz="2200" kern="1200" dirty="0" err="1"/>
+            <a:t>adjust</a:t>
+          </a:r>
+          <a:r>
+            <a:rPr lang="de-DE" sz="2200" kern="1200" dirty="0"/>
+            <a:t> </a:t>
+          </a:r>
+          <a:r>
+            <a:rPr lang="de-DE" sz="2200" kern="1200" dirty="0" err="1"/>
+            <a:t>our</a:t>
+          </a:r>
+          <a:r>
+            <a:rPr lang="de-DE" sz="2200" kern="1200" dirty="0"/>
+            <a:t> </a:t>
+          </a:r>
+          <a:r>
+            <a:rPr lang="de-DE" sz="2200" kern="1200" dirty="0" err="1"/>
+            <a:t>model</a:t>
+          </a:r>
+          <a:r>
+            <a:rPr lang="de-DE" sz="2200" kern="1200" dirty="0"/>
+            <a:t> </a:t>
+          </a:r>
+          <a:r>
+            <a:rPr lang="de-DE" sz="2200" kern="1200" dirty="0" err="1"/>
+            <a:t>to</a:t>
+          </a:r>
+          <a:r>
+            <a:rPr lang="de-DE" sz="2200" kern="1200" dirty="0"/>
+            <a:t> </a:t>
+          </a:r>
+          <a:r>
+            <a:rPr lang="de-DE" sz="2200" kern="1200" dirty="0" err="1"/>
+            <a:t>reach</a:t>
+          </a:r>
+          <a:r>
+            <a:rPr lang="de-DE" sz="2200" kern="1200" dirty="0"/>
+            <a:t> a </a:t>
+          </a:r>
+          <a:r>
+            <a:rPr lang="de-DE" sz="2200" kern="1200" dirty="0" err="1"/>
+            <a:t>success</a:t>
+          </a:r>
+          <a:r>
+            <a:rPr lang="de-DE" sz="2200" kern="1200" dirty="0"/>
+            <a:t> rate </a:t>
+          </a:r>
+          <a:r>
+            <a:rPr lang="de-DE" sz="2200" kern="1200" dirty="0" err="1"/>
+            <a:t>of</a:t>
+          </a:r>
+          <a:r>
+            <a:rPr lang="de-DE" sz="2200" kern="1200" dirty="0"/>
+            <a:t> 94% </a:t>
+          </a:r>
+          <a:r>
+            <a:rPr lang="de-DE" sz="2200" kern="1200" dirty="0" err="1"/>
+            <a:t>with</a:t>
+          </a:r>
+          <a:r>
+            <a:rPr lang="de-DE" sz="2200" kern="1200" dirty="0"/>
+            <a:t> a </a:t>
+          </a:r>
+          <a:r>
+            <a:rPr lang="de-DE" sz="2200" kern="1200" dirty="0" err="1"/>
+            <a:t>start</a:t>
+          </a:r>
+          <a:r>
+            <a:rPr lang="de-DE" sz="2200" kern="1200" dirty="0"/>
+            <a:t> </a:t>
+          </a:r>
+          <a:r>
+            <a:rPr lang="de-DE" sz="2200" kern="1200" dirty="0" err="1"/>
+            <a:t>of</a:t>
+          </a:r>
+          <a:r>
+            <a:rPr lang="de-DE" sz="2200" kern="1200" dirty="0"/>
+            <a:t> 22%</a:t>
+          </a:r>
+          <a:endParaRPr lang="en-US" sz="2200" kern="1200" dirty="0"/>
         </a:p>
       </dsp:txBody>
       <dsp:txXfrm>
-        <a:off x="38838" y="536907"/>
-        <a:ext cx="10033479" cy="717924"/>
+        <a:off x="1057183" y="1805"/>
+        <a:ext cx="9053971" cy="915310"/>
       </dsp:txXfrm>
     </dsp:sp>
-    <dsp:sp modelId="{4E3E7EB8-E9A8-9142-BBFC-BD66F567CC7E}">
+    <dsp:sp modelId="{A12AF93E-2BD1-473F-82CC-4C2A5ABD3970}">
       <dsp:nvSpPr>
         <dsp:cNvPr id="0" name=""/>
         <dsp:cNvSpPr/>
       </dsp:nvSpPr>
       <dsp:spPr>
         <a:xfrm>
-          <a:off x="0" y="1351269"/>
-          <a:ext cx="10111155" cy="795600"/>
+          <a:off x="0" y="1145944"/>
+          <a:ext cx="10111155" cy="915310"/>
         </a:xfrm>
         <a:prstGeom prst="roundRect">
-          <a:avLst/>
+          <a:avLst>
+            <a:gd name="adj" fmla="val 10000"/>
+          </a:avLst>
         </a:prstGeom>
         <a:solidFill>
           <a:schemeClr val="accent1">
+            <a:tint val="40000"/>
             <a:hueOff val="0"/>
             <a:satOff val="0"/>
             <a:lumOff val="0"/>
             <a:alphaOff val="0"/>
           </a:schemeClr>
         </a:solidFill>
+        <a:ln>
+          <a:noFill/>
+        </a:ln>
+        <a:effectLst/>
+      </dsp:spPr>
+      <dsp:style>
+        <a:lnRef idx="0">
+          <a:scrgbClr r="0" g="0" b="0"/>
+        </a:lnRef>
+        <a:fillRef idx="1">
+          <a:scrgbClr r="0" g="0" b="0"/>
+        </a:fillRef>
+        <a:effectRef idx="0">
+          <a:scrgbClr r="0" g="0" b="0"/>
+        </a:effectRef>
+        <a:fontRef idx="minor"/>
+      </dsp:style>
+    </dsp:sp>
+    <dsp:sp modelId="{9258D4B2-3FC1-4709-91EE-F4C5550B779C}">
+      <dsp:nvSpPr>
+        <dsp:cNvPr id="0" name=""/>
+        <dsp:cNvSpPr/>
+      </dsp:nvSpPr>
+      <dsp:spPr>
+        <a:xfrm>
+          <a:off x="276881" y="1351889"/>
+          <a:ext cx="503420" cy="503420"/>
+        </a:xfrm>
+        <a:prstGeom prst="rect">
+          <a:avLst/>
+        </a:prstGeom>
+        <a:blipFill>
+          <a:blip xmlns:r="http://schemas.openxmlformats.org/officeDocument/2006/relationships">
+            <a:extLst>
+              <a:ext uri="{28A0092B-C50C-407E-A947-70E740481C1C}">
+                <a14:useLocalDpi xmlns:a14="http://schemas.microsoft.com/office/drawing/2010/main" val="0"/>
+              </a:ext>
+              <a:ext uri="{96DAC541-7B7A-43D3-8B79-37D633B846F1}">
+                <asvg:svgBlip xmlns:asvg="http://schemas.microsoft.com/office/drawing/2016/SVG/main" r:embed="rId2"/>
+              </a:ext>
+            </a:extLst>
+          </a:blip>
+          <a:stretch>
+            <a:fillRect/>
+          </a:stretch>
+        </a:blipFill>
         <a:ln w="19050" cap="flat" cmpd="sng" algn="ctr">
           <a:solidFill>
             <a:schemeClr val="lt1">
@@ -1558,15 +1786,47 @@
           <a:schemeClr val="lt1"/>
         </a:fontRef>
       </dsp:style>
+    </dsp:sp>
+    <dsp:sp modelId="{70659759-01CC-4EAE-AF47-A1036164A55C}">
+      <dsp:nvSpPr>
+        <dsp:cNvPr id="0" name=""/>
+        <dsp:cNvSpPr/>
+      </dsp:nvSpPr>
+      <dsp:spPr>
+        <a:xfrm>
+          <a:off x="1057183" y="1145944"/>
+          <a:ext cx="9053971" cy="915310"/>
+        </a:xfrm>
+        <a:prstGeom prst="rect">
+          <a:avLst/>
+        </a:prstGeom>
+        <a:noFill/>
+        <a:ln>
+          <a:noFill/>
+        </a:ln>
+        <a:effectLst/>
+      </dsp:spPr>
+      <dsp:style>
+        <a:lnRef idx="0">
+          <a:scrgbClr r="0" g="0" b="0"/>
+        </a:lnRef>
+        <a:fillRef idx="0">
+          <a:scrgbClr r="0" g="0" b="0"/>
+        </a:fillRef>
+        <a:effectRef idx="0">
+          <a:scrgbClr r="0" g="0" b="0"/>
+        </a:effectRef>
+        <a:fontRef idx="minor"/>
+      </dsp:style>
       <dsp:txBody>
-        <a:bodyPr spcFirstLastPara="0" vert="horz" wrap="square" lIns="76200" tIns="76200" rIns="76200" bIns="76200" numCol="1" spcCol="1270" anchor="ctr" anchorCtr="0">
+        <a:bodyPr spcFirstLastPara="0" vert="horz" wrap="square" lIns="96870" tIns="96870" rIns="96870" bIns="96870" numCol="1" spcCol="1270" anchor="ctr" anchorCtr="0">
           <a:noAutofit/>
         </a:bodyPr>
         <a:lstStyle/>
         <a:p>
-          <a:pPr marL="0" lvl="0" indent="0" algn="l" defTabSz="889000">
+          <a:pPr marL="0" lvl="0" indent="0" algn="l" defTabSz="977900">
             <a:lnSpc>
-              <a:spcPct val="90000"/>
+              <a:spcPct val="100000"/>
             </a:lnSpc>
             <a:spcBef>
               <a:spcPct val="0"/>
@@ -1577,162 +1837,86 @@
             <a:buNone/>
           </a:pPr>
           <a:r>
-            <a:rPr lang="de-DE" sz="2000" kern="1200" dirty="0"/>
-            <a:t>The </a:t>
+            <a:rPr lang="en-GB" sz="2200" kern="1200"/>
+            <a:t>Simple LangGraph-based multi-step reasoning is only working with additional enhancements </a:t>
           </a:r>
-          <a:r>
-            <a:rPr lang="de-DE" sz="2000" kern="1200" dirty="0" err="1"/>
-            <a:t>strongest</a:t>
-          </a:r>
-          <a:r>
-            <a:rPr lang="de-DE" sz="2000" kern="1200" dirty="0"/>
-            <a:t> </a:t>
-          </a:r>
-          <a:r>
-            <a:rPr lang="de-DE" sz="2000" kern="1200" dirty="0" err="1"/>
-            <a:t>impact</a:t>
-          </a:r>
-          <a:r>
-            <a:rPr lang="de-DE" sz="2000" kern="1200" dirty="0"/>
-            <a:t> was </a:t>
-          </a:r>
-          <a:r>
-            <a:rPr lang="de-DE" sz="2000" kern="1200" dirty="0" err="1"/>
-            <a:t>from</a:t>
-          </a:r>
-          <a:r>
-            <a:rPr lang="de-DE" sz="2000" kern="1200" dirty="0"/>
-            <a:t> </a:t>
-          </a:r>
-          <a:r>
-            <a:rPr lang="de-DE" sz="2000" kern="1200" dirty="0" err="1"/>
-            <a:t>describing</a:t>
-          </a:r>
-          <a:r>
-            <a:rPr lang="de-DE" sz="2000" kern="1200" dirty="0"/>
-            <a:t> </a:t>
-          </a:r>
-          <a:r>
-            <a:rPr lang="de-DE" sz="2000" kern="1200" dirty="0" err="1"/>
-            <a:t>the</a:t>
-          </a:r>
-          <a:r>
-            <a:rPr lang="de-DE" sz="2000" kern="1200" dirty="0"/>
-            <a:t> </a:t>
-          </a:r>
-          <a:r>
-            <a:rPr lang="de-DE" sz="2000" kern="1200" dirty="0" err="1"/>
-            <a:t>tables</a:t>
-          </a:r>
-          <a:r>
-            <a:rPr lang="de-DE" sz="2000" kern="1200" dirty="0"/>
-            <a:t> </a:t>
-          </a:r>
-          <a:r>
-            <a:rPr lang="de-DE" sz="2000" kern="1200" dirty="0" err="1"/>
-            <a:t>to</a:t>
-          </a:r>
-          <a:r>
-            <a:rPr lang="de-DE" sz="2000" kern="1200" dirty="0"/>
-            <a:t> </a:t>
-          </a:r>
-          <a:r>
-            <a:rPr lang="de-DE" sz="2000" kern="1200" dirty="0" err="1"/>
-            <a:t>the</a:t>
-          </a:r>
-          <a:r>
-            <a:rPr lang="de-DE" sz="2000" kern="1200" dirty="0"/>
-            <a:t> </a:t>
-          </a:r>
-          <a:r>
-            <a:rPr lang="de-DE" sz="2000" kern="1200" dirty="0" err="1"/>
-            <a:t>model</a:t>
-          </a:r>
-          <a:r>
-            <a:rPr lang="de-DE" sz="2000" kern="1200" dirty="0"/>
-            <a:t> and </a:t>
-          </a:r>
-          <a:r>
-            <a:rPr lang="de-DE" sz="2000" kern="1200" dirty="0" err="1"/>
-            <a:t>adjusting</a:t>
-          </a:r>
-          <a:r>
-            <a:rPr lang="de-DE" sz="2000" kern="1200" dirty="0"/>
-            <a:t> </a:t>
-          </a:r>
-          <a:r>
-            <a:rPr lang="de-DE" sz="2000" kern="1200" dirty="0" err="1"/>
-            <a:t>the</a:t>
-          </a:r>
-          <a:r>
-            <a:rPr lang="de-DE" sz="2000" kern="1200" dirty="0"/>
-            <a:t> </a:t>
-          </a:r>
-          <a:r>
-            <a:rPr lang="de-DE" sz="2000" kern="1200" dirty="0" err="1"/>
-            <a:t>model</a:t>
-          </a:r>
-          <a:r>
-            <a:rPr lang="de-DE" sz="2000" kern="1200" dirty="0"/>
-            <a:t> </a:t>
-          </a:r>
-          <a:r>
-            <a:rPr lang="de-DE" sz="2000" kern="1200" dirty="0" err="1"/>
-            <a:t>from</a:t>
-          </a:r>
-          <a:r>
-            <a:rPr lang="de-DE" sz="2000" kern="1200" dirty="0"/>
-            <a:t> </a:t>
-          </a:r>
-          <a:r>
-            <a:rPr lang="de-DE" sz="2000" kern="1200" dirty="0" err="1"/>
-            <a:t>llama</a:t>
-          </a:r>
-          <a:r>
-            <a:rPr lang="de-DE" sz="2000" kern="1200" dirty="0"/>
-            <a:t> </a:t>
-          </a:r>
-          <a:r>
-            <a:rPr lang="de-DE" sz="2000" kern="1200" dirty="0" err="1"/>
-            <a:t>to</a:t>
-          </a:r>
-          <a:r>
-            <a:rPr lang="de-DE" sz="2000" kern="1200" dirty="0"/>
-            <a:t> </a:t>
-          </a:r>
-          <a:r>
-            <a:rPr lang="de-DE" sz="2000" kern="1200" dirty="0" err="1"/>
-            <a:t>qwen</a:t>
-          </a:r>
-          <a:endParaRPr lang="en-US" sz="2000" kern="1200" dirty="0"/>
         </a:p>
       </dsp:txBody>
       <dsp:txXfrm>
-        <a:off x="38838" y="1390107"/>
-        <a:ext cx="10033479" cy="717924"/>
+        <a:off x="1057183" y="1145944"/>
+        <a:ext cx="9053971" cy="915310"/>
       </dsp:txXfrm>
     </dsp:sp>
-    <dsp:sp modelId="{FCF26537-BF41-714D-98E3-A66393AE860D}">
+    <dsp:sp modelId="{890BABE8-5E1A-40CC-B9BA-8211FE311F12}">
       <dsp:nvSpPr>
         <dsp:cNvPr id="0" name=""/>
         <dsp:cNvSpPr/>
       </dsp:nvSpPr>
       <dsp:spPr>
         <a:xfrm>
-          <a:off x="0" y="2204469"/>
-          <a:ext cx="10111155" cy="795600"/>
+          <a:off x="0" y="2290082"/>
+          <a:ext cx="10111155" cy="915310"/>
         </a:xfrm>
         <a:prstGeom prst="roundRect">
-          <a:avLst/>
+          <a:avLst>
+            <a:gd name="adj" fmla="val 10000"/>
+          </a:avLst>
         </a:prstGeom>
         <a:solidFill>
           <a:schemeClr val="accent1">
+            <a:tint val="40000"/>
             <a:hueOff val="0"/>
             <a:satOff val="0"/>
             <a:lumOff val="0"/>
             <a:alphaOff val="0"/>
           </a:schemeClr>
         </a:solidFill>
+        <a:ln>
+          <a:noFill/>
+        </a:ln>
+        <a:effectLst/>
+      </dsp:spPr>
+      <dsp:style>
+        <a:lnRef idx="0">
+          <a:scrgbClr r="0" g="0" b="0"/>
+        </a:lnRef>
+        <a:fillRef idx="1">
+          <a:scrgbClr r="0" g="0" b="0"/>
+        </a:fillRef>
+        <a:effectRef idx="0">
+          <a:scrgbClr r="0" g="0" b="0"/>
+        </a:effectRef>
+        <a:fontRef idx="minor"/>
+      </dsp:style>
+    </dsp:sp>
+    <dsp:sp modelId="{2FEC9AA2-FF73-4DF2-82F4-534261C5B0C1}">
+      <dsp:nvSpPr>
+        <dsp:cNvPr id="0" name=""/>
+        <dsp:cNvSpPr/>
+      </dsp:nvSpPr>
+      <dsp:spPr>
+        <a:xfrm>
+          <a:off x="276881" y="2496027"/>
+          <a:ext cx="503420" cy="503420"/>
+        </a:xfrm>
+        <a:prstGeom prst="rect">
+          <a:avLst/>
+        </a:prstGeom>
+        <a:blipFill>
+          <a:blip xmlns:r="http://schemas.openxmlformats.org/officeDocument/2006/relationships">
+            <a:extLst>
+              <a:ext uri="{28A0092B-C50C-407E-A947-70E740481C1C}">
+                <a14:useLocalDpi xmlns:a14="http://schemas.microsoft.com/office/drawing/2010/main" val="0"/>
+              </a:ext>
+              <a:ext uri="{96DAC541-7B7A-43D3-8B79-37D633B846F1}">
+                <asvg:svgBlip xmlns:asvg="http://schemas.microsoft.com/office/drawing/2016/SVG/main" r:embed="rId3"/>
+              </a:ext>
+            </a:extLst>
+          </a:blip>
+          <a:stretch>
+            <a:fillRect/>
+          </a:stretch>
+        </a:blipFill>
         <a:ln w="19050" cap="flat" cmpd="sng" algn="ctr">
           <a:solidFill>
             <a:schemeClr val="lt1">
@@ -1761,15 +1945,47 @@
           <a:schemeClr val="lt1"/>
         </a:fontRef>
       </dsp:style>
+    </dsp:sp>
+    <dsp:sp modelId="{1D9AF384-5746-4325-B1F7-A5E3E4DC50A4}">
+      <dsp:nvSpPr>
+        <dsp:cNvPr id="0" name=""/>
+        <dsp:cNvSpPr/>
+      </dsp:nvSpPr>
+      <dsp:spPr>
+        <a:xfrm>
+          <a:off x="1057183" y="2290082"/>
+          <a:ext cx="9053971" cy="915310"/>
+        </a:xfrm>
+        <a:prstGeom prst="rect">
+          <a:avLst/>
+        </a:prstGeom>
+        <a:noFill/>
+        <a:ln>
+          <a:noFill/>
+        </a:ln>
+        <a:effectLst/>
+      </dsp:spPr>
+      <dsp:style>
+        <a:lnRef idx="0">
+          <a:scrgbClr r="0" g="0" b="0"/>
+        </a:lnRef>
+        <a:fillRef idx="0">
+          <a:scrgbClr r="0" g="0" b="0"/>
+        </a:fillRef>
+        <a:effectRef idx="0">
+          <a:scrgbClr r="0" g="0" b="0"/>
+        </a:effectRef>
+        <a:fontRef idx="minor"/>
+      </dsp:style>
       <dsp:txBody>
-        <a:bodyPr spcFirstLastPara="0" vert="horz" wrap="square" lIns="76200" tIns="76200" rIns="76200" bIns="76200" numCol="1" spcCol="1270" anchor="ctr" anchorCtr="0">
+        <a:bodyPr spcFirstLastPara="0" vert="horz" wrap="square" lIns="96870" tIns="96870" rIns="96870" bIns="96870" numCol="1" spcCol="1270" anchor="ctr" anchorCtr="0">
           <a:noAutofit/>
         </a:bodyPr>
         <a:lstStyle/>
         <a:p>
-          <a:pPr marL="0" lvl="0" indent="0" algn="l" defTabSz="889000">
+          <a:pPr marL="0" lvl="0" indent="0" algn="l" defTabSz="977900">
             <a:lnSpc>
-              <a:spcPct val="90000"/>
+              <a:spcPct val="100000"/>
             </a:lnSpc>
             <a:spcBef>
               <a:spcPct val="0"/>
@@ -1780,38 +1996,87 @@
             <a:buNone/>
           </a:pPr>
           <a:r>
-            <a:rPr lang="de-DE" sz="2000" kern="1200"/>
-            <a:t>We wanted to prove that our model is not completly overfitting to the questions we optimezed it on and it reached 50% (9/18) which means it is not generalizing that well</a:t>
+            <a:rPr lang="de-DE" sz="2200" kern="1200"/>
+            <a:t>The strongest impact was from describing the tables to the model and adjusting the model from llama to qwen</a:t>
           </a:r>
-          <a:endParaRPr lang="en-US" sz="2000" kern="1200"/>
+          <a:endParaRPr lang="en-US" sz="2200" kern="1200"/>
         </a:p>
       </dsp:txBody>
       <dsp:txXfrm>
-        <a:off x="38838" y="2243307"/>
-        <a:ext cx="10033479" cy="717924"/>
+        <a:off x="1057183" y="2290082"/>
+        <a:ext cx="9053971" cy="915310"/>
       </dsp:txXfrm>
     </dsp:sp>
-    <dsp:sp modelId="{65658E7B-E377-6C45-A5C9-23E64219D2CB}">
+    <dsp:sp modelId="{7335EE2C-8F1B-4801-B1E3-A333593618CD}">
       <dsp:nvSpPr>
         <dsp:cNvPr id="0" name=""/>
         <dsp:cNvSpPr/>
       </dsp:nvSpPr>
       <dsp:spPr>
         <a:xfrm>
-          <a:off x="0" y="3057669"/>
-          <a:ext cx="10111155" cy="795600"/>
+          <a:off x="0" y="3434221"/>
+          <a:ext cx="10111155" cy="915310"/>
         </a:xfrm>
         <a:prstGeom prst="roundRect">
-          <a:avLst/>
+          <a:avLst>
+            <a:gd name="adj" fmla="val 10000"/>
+          </a:avLst>
         </a:prstGeom>
         <a:solidFill>
           <a:schemeClr val="accent1">
+            <a:tint val="40000"/>
             <a:hueOff val="0"/>
             <a:satOff val="0"/>
             <a:lumOff val="0"/>
             <a:alphaOff val="0"/>
           </a:schemeClr>
         </a:solidFill>
+        <a:ln>
+          <a:noFill/>
+        </a:ln>
+        <a:effectLst/>
+      </dsp:spPr>
+      <dsp:style>
+        <a:lnRef idx="0">
+          <a:scrgbClr r="0" g="0" b="0"/>
+        </a:lnRef>
+        <a:fillRef idx="1">
+          <a:scrgbClr r="0" g="0" b="0"/>
+        </a:fillRef>
+        <a:effectRef idx="0">
+          <a:scrgbClr r="0" g="0" b="0"/>
+        </a:effectRef>
+        <a:fontRef idx="minor"/>
+      </dsp:style>
+    </dsp:sp>
+    <dsp:sp modelId="{056701A2-BB72-4974-A299-5F9BC32F587D}">
+      <dsp:nvSpPr>
+        <dsp:cNvPr id="0" name=""/>
+        <dsp:cNvSpPr/>
+      </dsp:nvSpPr>
+      <dsp:spPr>
+        <a:xfrm>
+          <a:off x="276881" y="3640166"/>
+          <a:ext cx="503420" cy="503420"/>
+        </a:xfrm>
+        <a:prstGeom prst="rect">
+          <a:avLst/>
+        </a:prstGeom>
+        <a:blipFill>
+          <a:blip xmlns:r="http://schemas.openxmlformats.org/officeDocument/2006/relationships">
+            <a:extLst>
+              <a:ext uri="{28A0092B-C50C-407E-A947-70E740481C1C}">
+                <a14:useLocalDpi xmlns:a14="http://schemas.microsoft.com/office/drawing/2010/main" val="0"/>
+              </a:ext>
+              <a:ext uri="{96DAC541-7B7A-43D3-8B79-37D633B846F1}">
+                <asvg:svgBlip xmlns:asvg="http://schemas.microsoft.com/office/drawing/2016/SVG/main" r:embed="rId4"/>
+              </a:ext>
+            </a:extLst>
+          </a:blip>
+          <a:stretch>
+            <a:fillRect/>
+          </a:stretch>
+        </a:blipFill>
         <a:ln w="19050" cap="flat" cmpd="sng" algn="ctr">
           <a:solidFill>
             <a:schemeClr val="lt1">
@@ -1840,15 +2105,47 @@
           <a:schemeClr val="lt1"/>
         </a:fontRef>
       </dsp:style>
+    </dsp:sp>
+    <dsp:sp modelId="{BA61068E-633F-4443-B175-A2D98E476D33}">
+      <dsp:nvSpPr>
+        <dsp:cNvPr id="0" name=""/>
+        <dsp:cNvSpPr/>
+      </dsp:nvSpPr>
+      <dsp:spPr>
+        <a:xfrm>
+          <a:off x="1057183" y="3434221"/>
+          <a:ext cx="9053971" cy="915310"/>
+        </a:xfrm>
+        <a:prstGeom prst="rect">
+          <a:avLst/>
+        </a:prstGeom>
+        <a:noFill/>
+        <a:ln>
+          <a:noFill/>
+        </a:ln>
+        <a:effectLst/>
+      </dsp:spPr>
+      <dsp:style>
+        <a:lnRef idx="0">
+          <a:scrgbClr r="0" g="0" b="0"/>
+        </a:lnRef>
+        <a:fillRef idx="0">
+          <a:scrgbClr r="0" g="0" b="0"/>
+        </a:fillRef>
+        <a:effectRef idx="0">
+          <a:scrgbClr r="0" g="0" b="0"/>
+        </a:effectRef>
+        <a:fontRef idx="minor"/>
+      </dsp:style>
       <dsp:txBody>
-        <a:bodyPr spcFirstLastPara="0" vert="horz" wrap="square" lIns="76200" tIns="76200" rIns="76200" bIns="76200" numCol="1" spcCol="1270" anchor="ctr" anchorCtr="0">
+        <a:bodyPr spcFirstLastPara="0" vert="horz" wrap="square" lIns="96870" tIns="96870" rIns="96870" bIns="96870" numCol="1" spcCol="1270" anchor="ctr" anchorCtr="0">
           <a:noAutofit/>
         </a:bodyPr>
         <a:lstStyle/>
         <a:p>
-          <a:pPr marL="0" lvl="0" indent="0" algn="l" defTabSz="889000">
+          <a:pPr marL="0" lvl="0" indent="0" algn="l" defTabSz="977900">
             <a:lnSpc>
-              <a:spcPct val="90000"/>
+              <a:spcPct val="100000"/>
             </a:lnSpc>
             <a:spcBef>
               <a:spcPct val="0"/>
@@ -1859,195 +2156,19 @@
             <a:buNone/>
           </a:pPr>
           <a:r>
-            <a:rPr lang="de-DE" sz="2000" kern="1200" dirty="0"/>
-            <a:t>In </a:t>
+            <a:rPr lang="en-GB" sz="2200" kern="1200" dirty="0"/>
+            <a:t>Today is a good day to get 20/20 points ;) </a:t>
           </a:r>
           <a:r>
-            <a:rPr lang="de-DE" sz="2000" kern="1200" dirty="0" err="1"/>
-            <a:t>the</a:t>
+            <a:rPr lang="en-CH" sz="2200" b="0" i="0" kern="1200" dirty="0"/>
+            <a:t>thanks for reviewing</a:t>
           </a:r>
-          <a:r>
-            <a:rPr lang="de-DE" sz="2000" kern="1200" dirty="0"/>
-            <a:t> </a:t>
-          </a:r>
-          <a:r>
-            <a:rPr lang="de-DE" sz="2000" kern="1200" dirty="0" err="1"/>
-            <a:t>future</a:t>
-          </a:r>
-          <a:r>
-            <a:rPr lang="de-DE" sz="2000" kern="1200" dirty="0"/>
-            <a:t> </a:t>
-          </a:r>
-          <a:r>
-            <a:rPr lang="de-DE" sz="2000" kern="1200" dirty="0" err="1"/>
-            <a:t>we</a:t>
-          </a:r>
-          <a:r>
-            <a:rPr lang="de-DE" sz="2000" kern="1200" dirty="0"/>
-            <a:t> </a:t>
-          </a:r>
-          <a:r>
-            <a:rPr lang="de-DE" sz="2000" kern="1200" dirty="0" err="1"/>
-            <a:t>would</a:t>
-          </a:r>
-          <a:r>
-            <a:rPr lang="de-DE" sz="2000" kern="1200" dirty="0"/>
-            <a:t> like </a:t>
-          </a:r>
-          <a:r>
-            <a:rPr lang="de-DE" sz="2000" kern="1200" dirty="0" err="1"/>
-            <a:t>to</a:t>
-          </a:r>
-          <a:r>
-            <a:rPr lang="de-DE" sz="2000" kern="1200" dirty="0"/>
-            <a:t> </a:t>
-          </a:r>
-          <a:r>
-            <a:rPr lang="de-DE" sz="2000" kern="1200" dirty="0" err="1"/>
-            <a:t>optimize</a:t>
-          </a:r>
-          <a:r>
-            <a:rPr lang="de-DE" sz="2000" kern="1200" dirty="0"/>
-            <a:t> on </a:t>
-          </a:r>
-          <a:r>
-            <a:rPr lang="de-DE" sz="2000" kern="1200" dirty="0" err="1"/>
-            <a:t>parameters</a:t>
-          </a:r>
-          <a:r>
-            <a:rPr lang="de-DE" sz="2000" kern="1200" dirty="0"/>
-            <a:t> </a:t>
-          </a:r>
-          <a:r>
-            <a:rPr lang="de-DE" sz="2000" kern="1200" dirty="0" err="1"/>
-            <a:t>that</a:t>
-          </a:r>
-          <a:r>
-            <a:rPr lang="de-DE" sz="2000" kern="1200" dirty="0"/>
-            <a:t> </a:t>
-          </a:r>
-          <a:r>
-            <a:rPr lang="de-DE" sz="2000" kern="1200" dirty="0" err="1"/>
-            <a:t>are</a:t>
-          </a:r>
-          <a:r>
-            <a:rPr lang="de-DE" sz="2000" kern="1200" dirty="0"/>
-            <a:t> </a:t>
-          </a:r>
-          <a:r>
-            <a:rPr lang="de-DE" sz="2000" kern="1200" dirty="0" err="1"/>
-            <a:t>generalizing</a:t>
-          </a:r>
-          <a:r>
-            <a:rPr lang="de-DE" sz="2000" kern="1200" dirty="0"/>
-            <a:t>, </a:t>
-          </a:r>
-          <a:r>
-            <a:rPr lang="de-DE" sz="2000" kern="1200" dirty="0" err="1"/>
-            <a:t>meaning</a:t>
-          </a:r>
-          <a:r>
-            <a:rPr lang="de-DE" sz="2000" kern="1200" dirty="0"/>
-            <a:t> </a:t>
-          </a:r>
-          <a:r>
-            <a:rPr lang="de-DE" sz="2000" kern="1200" dirty="0" err="1"/>
-            <a:t>to</a:t>
-          </a:r>
-          <a:r>
-            <a:rPr lang="de-DE" sz="2000" kern="1200" dirty="0"/>
-            <a:t> </a:t>
-          </a:r>
-          <a:r>
-            <a:rPr lang="de-DE" sz="2000" kern="1200" dirty="0" err="1"/>
-            <a:t>evaluate</a:t>
-          </a:r>
-          <a:r>
-            <a:rPr lang="de-DE" sz="2000" kern="1200" dirty="0"/>
-            <a:t> different </a:t>
-          </a:r>
-          <a:r>
-            <a:rPr lang="de-DE" sz="2000" kern="1200" dirty="0" err="1"/>
-            <a:t>test</a:t>
-          </a:r>
-          <a:r>
-            <a:rPr lang="de-DE" sz="2000" kern="1200" dirty="0"/>
-            <a:t> </a:t>
-          </a:r>
-          <a:r>
-            <a:rPr lang="de-DE" sz="2000" kern="1200" dirty="0" err="1"/>
-            <a:t>sets</a:t>
-          </a:r>
-          <a:r>
-            <a:rPr lang="de-DE" sz="2000" kern="1200" dirty="0"/>
-            <a:t> at </a:t>
-          </a:r>
-          <a:r>
-            <a:rPr lang="de-DE" sz="2000" kern="1200" dirty="0" err="1"/>
-            <a:t>the</a:t>
-          </a:r>
-          <a:r>
-            <a:rPr lang="de-DE" sz="2000" kern="1200" dirty="0"/>
-            <a:t> same time </a:t>
-          </a:r>
-          <a:r>
-            <a:rPr lang="de-DE" sz="2000" kern="1200" dirty="0" err="1"/>
-            <a:t>to</a:t>
-          </a:r>
-          <a:r>
-            <a:rPr lang="de-DE" sz="2000" kern="1200" dirty="0"/>
-            <a:t> check </a:t>
-          </a:r>
-          <a:r>
-            <a:rPr lang="de-DE" sz="2000" kern="1200" dirty="0" err="1"/>
-            <a:t>if</a:t>
-          </a:r>
-          <a:r>
-            <a:rPr lang="de-DE" sz="2000" kern="1200" dirty="0"/>
-            <a:t> </a:t>
-          </a:r>
-          <a:r>
-            <a:rPr lang="de-DE" sz="2000" kern="1200" dirty="0" err="1"/>
-            <a:t>we</a:t>
-          </a:r>
-          <a:r>
-            <a:rPr lang="de-DE" sz="2000" kern="1200" dirty="0"/>
-            <a:t> </a:t>
-          </a:r>
-          <a:r>
-            <a:rPr lang="de-DE" sz="2000" kern="1200" dirty="0" err="1"/>
-            <a:t>reached</a:t>
-          </a:r>
-          <a:r>
-            <a:rPr lang="de-DE" sz="2000" kern="1200" dirty="0"/>
-            <a:t> </a:t>
-          </a:r>
-          <a:r>
-            <a:rPr lang="de-DE" sz="2000" kern="1200" dirty="0" err="1"/>
-            <a:t>better</a:t>
-          </a:r>
-          <a:r>
-            <a:rPr lang="de-DE" sz="2000" kern="1200" dirty="0"/>
-            <a:t> </a:t>
-          </a:r>
-          <a:r>
-            <a:rPr lang="de-DE" sz="2000" kern="1200" dirty="0" err="1"/>
-            <a:t>scores</a:t>
-          </a:r>
-          <a:r>
-            <a:rPr lang="de-DE" sz="2000" kern="1200" dirty="0"/>
-            <a:t> in </a:t>
-          </a:r>
-          <a:r>
-            <a:rPr lang="de-DE" sz="2000" kern="1200" dirty="0" err="1"/>
-            <a:t>general</a:t>
-          </a:r>
-          <a:endParaRPr lang="en-US" sz="2000" kern="1200" dirty="0"/>
+          <a:endParaRPr lang="en-GB" sz="2200" i="0" kern="1200" dirty="0"/>
         </a:p>
       </dsp:txBody>
       <dsp:txXfrm>
-        <a:off x="38838" y="3096507"/>
-        <a:ext cx="10033479" cy="717924"/>
+        <a:off x="1057183" y="3434221"/>
+        <a:ext cx="9053971" cy="915310"/>
       </dsp:txXfrm>
     </dsp:sp>
   </dsp:spTree>
@@ -2055,169 +2176,296 @@
 </file>
 
 <file path=ppt/diagrams/layout1.xml><?xml version="1.0" encoding="utf-8"?>
-<dgm:layoutDef xmlns:dgm="http://schemas.openxmlformats.org/drawingml/2006/diagram" xmlns:a="http://schemas.openxmlformats.org/drawingml/2006/main" uniqueId="urn:microsoft.com/office/officeart/2005/8/layout/vList2">
-  <dgm:title val=""/>
-  <dgm:desc val=""/>
+<dgm:layoutDef xmlns:dgm="http://schemas.openxmlformats.org/drawingml/2006/diagram" xmlns:a="http://schemas.openxmlformats.org/drawingml/2006/main" uniqueId="urn:microsoft.com/office/officeart/2018/2/layout/IconVerticalSolidList">
+  <dgm:title val="Icon Vertical Solid List"/>
+  <dgm:desc val="Use to show a series of visuals from top to bottom with Level 1 or Level 1 and Level 2 text grouped in a shape. Works best with icons or small pictures with lengthier descriptions."/>
   <dgm:catLst>
-    <dgm:cat type="list" pri="3000"/>
-    <dgm:cat type="convert" pri="1000"/>
+    <dgm:cat type="icon" pri="500"/>
   </dgm:catLst>
-  <dgm:sampData>
+  <dgm:sampData useDef="1">
     <dgm:dataModel>
-      <dgm:ptLst>
-        <dgm:pt modelId="0" type="doc"/>
-        <dgm:pt modelId="1">
-          <dgm:prSet phldr="1"/>
-        </dgm:pt>
-        <dgm:pt modelId="11">
-          <dgm:prSet phldr="1"/>
-        </dgm:pt>
-        <dgm:pt modelId="2">
-          <dgm:prSet phldr="1"/>
-        </dgm:pt>
-        <dgm:pt modelId="21">
-          <dgm:prSet phldr="1"/>
-        </dgm:pt>
-      </dgm:ptLst>
-      <dgm:cxnLst>
-        <dgm:cxn modelId="4" srcId="0" destId="1" srcOrd="0" destOrd="0"/>
-        <dgm:cxn modelId="5" srcId="0" destId="2" srcOrd="1" destOrd="0"/>
-        <dgm:cxn modelId="12" srcId="1" destId="11" srcOrd="0" destOrd="0"/>
-        <dgm:cxn modelId="23" srcId="2" destId="21" srcOrd="0" destOrd="0"/>
-      </dgm:cxnLst>
+      <dgm:ptLst/>
       <dgm:bg/>
       <dgm:whole/>
     </dgm:dataModel>
   </dgm:sampData>
-  <dgm:styleData>
+  <dgm:styleData useDef="1">
     <dgm:dataModel>
-      <dgm:ptLst>
-        <dgm:pt modelId="0" type="doc"/>
-        <dgm:pt modelId="1"/>
-        <dgm:pt modelId="2"/>
-      </dgm:ptLst>
-      <dgm:cxnLst>
-        <dgm:cxn modelId="3" srcId="0" destId="1" srcOrd="0" destOrd="0"/>
-        <dgm:cxn modelId="4" srcId="0" destId="2" srcOrd="1" destOrd="0"/>
-      </dgm:cxnLst>
+      <dgm:ptLst/>
       <dgm:bg/>
       <dgm:whole/>
     </dgm:dataModel>
   </dgm:styleData>
-  <dgm:clrData>
+  <dgm:clrData useDef="1">
     <dgm:dataModel>
-      <dgm:ptLst>
-        <dgm:pt modelId="0" type="doc"/>
-        <dgm:pt modelId="1"/>
-        <dgm:pt modelId="2"/>
-        <dgm:pt modelId="3"/>
-        <dgm:pt modelId="4"/>
-      </dgm:ptLst>
-      <dgm:cxnLst>
-        <dgm:cxn modelId="5" srcId="0" destId="1" srcOrd="0" destOrd="0"/>
-        <dgm:cxn modelId="6" srcId="0" destId="2" srcOrd="1" destOrd="0"/>
-        <dgm:cxn modelId="7" srcId="0" destId="3" srcOrd="2" destOrd="0"/>
-        <dgm:cxn modelId="8" srcId="0" destId="4" srcOrd="3" destOrd="0"/>
-      </dgm:cxnLst>
+      <dgm:ptLst/>
       <dgm:bg/>
       <dgm:whole/>
     </dgm:dataModel>
   </dgm:clrData>
-  <dgm:layoutNode name="linear">
+  <dgm:layoutNode name="root">
     <dgm:varLst>
-      <dgm:animLvl val="lvl"/>
+      <dgm:dir/>
       <dgm:resizeHandles val="exact"/>
     </dgm:varLst>
-    <dgm:alg type="lin">
-      <dgm:param type="linDir" val="fromT"/>
-      <dgm:param type="vertAlign" val="mid"/>
-    </dgm:alg>
+    <dgm:choose name="Name0">
+      <dgm:if name="Name1" axis="self" func="var" arg="dir" op="equ" val="norm">
+        <dgm:alg type="lin">
+          <dgm:param type="linDir" val="fromT"/>
+          <dgm:param type="nodeHorzAlign" val="l"/>
+        </dgm:alg>
+      </dgm:if>
+      <dgm:else name="Name2">
+        <dgm:alg type="lin">
+          <dgm:param type="linDir" val="fromT"/>
+          <dgm:param type="nodeHorzAlign" val="r"/>
+        </dgm:alg>
+      </dgm:else>
+    </dgm:choose>
     <dgm:shape xmlns:r="http://schemas.openxmlformats.org/officeDocument/2006/relationships" r:blip="">
       <dgm:adjLst/>
     </dgm:shape>
     <dgm:presOf/>
-    <dgm:constrLst>
-      <dgm:constr type="w" for="ch" forName="parentText" refType="w"/>
-      <dgm:constr type="h" for="ch" forName="parentText" refType="primFontSz" refFor="ch" refForName="parentText" fact="0.52"/>
-      <dgm:constr type="w" for="ch" forName="childText" refType="w"/>
-      <dgm:constr type="h" for="ch" forName="childText" refType="primFontSz" refFor="ch" refForName="parentText" fact="0.46"/>
-      <dgm:constr type="h" for="ch" forName="parentText" op="equ"/>
-      <dgm:constr type="primFontSz" for="ch" forName="parentText" op="equ" val="65"/>
-      <dgm:constr type="primFontSz" for="ch" forName="childText" refType="primFontSz" refFor="ch" refForName="parentText" op="equ"/>
-      <dgm:constr type="h" for="ch" forName="spacer" refType="primFontSz" refFor="ch" refForName="parentText" fact="0.08"/>
-    </dgm:constrLst>
+    <dgm:choose name="Name3">
+      <dgm:if name="Name4" axis="ch" ptType="node" func="cnt" op="lte" val="3">
+        <dgm:constrLst>
+          <dgm:constr type="h" for="ch" forName="compNode" refType="h" fact="0.3"/>
+          <dgm:constr type="w" for="ch" forName="compNode" refType="w"/>
+          <dgm:constr type="h" for="ch" forName="sibTrans" refType="h" refFor="ch" refForName="compNode" fact="0.25"/>
+          <dgm:constr type="primFontSz" for="des" forName="parTx" val="25"/>
+          <dgm:constr type="primFontSz" for="des" forName="desTx" refType="primFontSz" refFor="des" refForName="parTx" op="lte" fact="0.75"/>
+          <dgm:constr type="h" for="des" forName="compNode" op="equ"/>
+          <dgm:constr type="h" for="des" forName="bgRect" op="equ"/>
+          <dgm:constr type="h" for="des" forName="iconRect" op="equ"/>
+          <dgm:constr type="w" for="des" forName="iconRect" op="equ"/>
+          <dgm:constr type="h" for="des" forName="spaceRect" op="equ"/>
+          <dgm:constr type="h" for="des" forName="parTx" op="equ"/>
+          <dgm:constr type="h" for="des" forName="desTx" op="equ"/>
+        </dgm:constrLst>
+      </dgm:if>
+      <dgm:if name="Name5" axis="ch" ptType="node" func="cnt" op="lte" val="4">
+        <dgm:constrLst>
+          <dgm:constr type="h" for="ch" forName="compNode" refType="h" fact="0.3"/>
+          <dgm:constr type="w" for="ch" forName="compNode" refType="w"/>
+          <dgm:constr type="h" for="ch" forName="sibTrans" refType="h" refFor="ch" refForName="compNode" fact="0.25"/>
+          <dgm:constr type="primFontSz" for="des" forName="parTx" val="22"/>
+          <dgm:constr type="primFontSz" for="des" forName="desTx" refType="primFontSz" refFor="des" refForName="parTx" op="lte" fact="0.75"/>
+          <dgm:constr type="h" for="des" forName="compNode" op="equ"/>
+          <dgm:constr type="h" for="des" forName="bgRect" op="equ"/>
+          <dgm:constr type="h" for="des" forName="iconRect" op="equ"/>
+          <dgm:constr type="w" for="des" forName="iconRect" op="equ"/>
+          <dgm:constr type="h" for="des" forName="spaceRect" op="equ"/>
+          <dgm:constr type="h" for="des" forName="parTx" op="equ"/>
+          <dgm:constr type="h" for="des" forName="desTx" op="equ"/>
+        </dgm:constrLst>
+      </dgm:if>
+      <dgm:if name="Name6" axis="ch" ptType="node" func="cnt" op="lte" val="6">
+        <dgm:constrLst>
+          <dgm:constr type="h" for="ch" forName="compNode" refType="h" fact="0.3"/>
+          <dgm:constr type="w" for="ch" forName="compNode" refType="w"/>
+          <dgm:constr type="h" for="ch" forName="sibTrans" refType="h" refFor="ch" refForName="compNode" fact="0.25"/>
+          <dgm:constr type="primFontSz" for="des" forName="parTx" val="19"/>
+          <dgm:constr type="primFontSz" for="des" forName="desTx" refType="primFontSz" refFor="des" refForName="parTx" op="lte" fact="0.75"/>
+          <dgm:constr type="h" for="des" forName="compNode" op="equ"/>
+          <dgm:constr type="h" for="des" forName="bgRect" op="equ"/>
+          <dgm:constr type="h" for="des" forName="iconRect" op="equ"/>
+          <dgm:constr type="w" for="des" forName="iconRect" op="equ"/>
+          <dgm:constr type="h" for="des" forName="spaceRect" op="equ"/>
+          <dgm:constr type="h" for="des" forName="parTx" op="equ"/>
+          <dgm:constr type="h" for="des" forName="desTx" op="equ"/>
+        </dgm:constrLst>
+      </dgm:if>
+      <dgm:else name="Name7">
+        <dgm:constrLst>
+          <dgm:constr type="h" for="ch" forName="compNode" refType="h" fact="0.3"/>
+          <dgm:constr type="w" for="ch" forName="compNode" refType="w"/>
+          <dgm:constr type="h" for="ch" forName="sibTrans" refType="h" refFor="ch" refForName="compNode" fact="0.25"/>
+          <dgm:constr type="primFontSz" for="des" forName="parTx" val="16"/>
+          <dgm:constr type="primFontSz" for="des" forName="desTx" refType="primFontSz" refFor="des" refForName="parTx" op="lte" fact="0.75"/>
+          <dgm:constr type="h" for="des" forName="compNode" op="equ"/>
+          <dgm:constr type="h" for="des" forName="bgRect" op="equ"/>
+          <dgm:constr type="h" for="des" forName="iconRect" op="equ"/>
+          <dgm:constr type="w" for="des" forName="iconRect" op="equ"/>
+          <dgm:constr type="h" for="des" forName="spaceRect" op="equ"/>
+          <dgm:constr type="h" for="des" forName="parTx" op="equ"/>
+          <dgm:constr type="h" for="des" forName="desTx" op="equ"/>
+        </dgm:constrLst>
+      </dgm:else>
+    </dgm:choose>
     <dgm:ruleLst>
-      <dgm:rule type="primFontSz" for="ch" forName="parentText" val="5" fact="NaN" max="NaN"/>
+      <dgm:rule type="h" for="ch" forName="compNode" val="0" fact="NaN" max="NaN"/>
     </dgm:ruleLst>
-    <dgm:forEach name="Name0" axis="ch" ptType="node">
-      <dgm:layoutNode name="parentText" styleLbl="node1">
-        <dgm:varLst>
-          <dgm:chMax val="0"/>
-          <dgm:bulletEnabled val="1"/>
-        </dgm:varLst>
-        <dgm:alg type="tx">
-          <dgm:param type="parTxLTRAlign" val="l"/>
-          <dgm:param type="parTxRTLAlign" val="r"/>
-        </dgm:alg>
-        <dgm:shape xmlns:r="http://schemas.openxmlformats.org/officeDocument/2006/relationships" type="roundRect" r:blip="">
+    <dgm:forEach name="Name8" axis="ch" ptType="node">
+      <dgm:layoutNode name="compNode">
+        <dgm:alg type="composite"/>
+        <dgm:shape xmlns:r="http://schemas.openxmlformats.org/officeDocument/2006/relationships" r:blip="">
           <dgm:adjLst/>
         </dgm:shape>
         <dgm:presOf axis="self"/>
-        <dgm:constrLst>
-          <dgm:constr type="tMarg" refType="primFontSz" fact="0.3"/>
-          <dgm:constr type="bMarg" refType="primFontSz" fact="0.3"/>
-          <dgm:constr type="lMarg" refType="primFontSz" fact="0.3"/>
-          <dgm:constr type="rMarg" refType="primFontSz" fact="0.3"/>
-        </dgm:constrLst>
+        <dgm:choose name="Name9">
+          <dgm:if name="Name10" axis="ch" ptType="node" func="cnt" op="gte" val="1">
+            <dgm:constrLst>
+              <dgm:constr type="w" for="ch" forName="bgRect" refType="w"/>
+              <dgm:constr type="h" for="ch" forName="bgRect" refType="h"/>
+              <dgm:constr type="l" for="ch" forName="bgRect"/>
+              <dgm:constr type="t" for="ch" forName="bgRect"/>
+              <dgm:constr type="h" for="ch" forName="iconRect" refType="h" fact="0.55"/>
+              <dgm:constr type="w" for="ch" forName="iconRect" refType="h" refFor="ch" refForName="iconRect"/>
+              <dgm:constr type="l" for="ch" forName="iconRect" refType="h" refFor="ch" refForName="iconRect" fact="0.55"/>
+              <dgm:constr type="ctrY" for="ch" forName="iconRect" refType="ctrY" refFor="ch" refForName="bgRect"/>
+              <dgm:constr type="w" for="ch" forName="spaceRect" refType="l" refFor="ch" refForName="iconRect"/>
+              <dgm:constr type="h" for="ch" forName="spaceRect" refType="h"/>
+              <dgm:constr type="l" for="ch" forName="spaceRect" refType="r" refFor="ch" refForName="iconRect"/>
+              <dgm:constr type="t" for="ch" forName="spaceRect"/>
+              <dgm:constr type="w" for="ch" forName="parTx" refType="w" fact="0.45"/>
+              <dgm:constr type="h" for="ch" forName="parTx" refType="h"/>
+              <dgm:constr type="l" for="ch" forName="parTx" refType="r" refFor="ch" refForName="spaceRect"/>
+              <dgm:constr type="t" for="ch" forName="parTx"/>
+              <dgm:constr type="h" for="ch" forName="desTx" refType="h"/>
+              <dgm:constr type="l" for="ch" forName="desTx" refType="r" refFor="ch" refForName="parTx"/>
+              <dgm:constr type="t" for="ch" forName="desTx"/>
+            </dgm:constrLst>
+          </dgm:if>
+          <dgm:else name="Name11">
+            <dgm:constrLst>
+              <dgm:constr type="w" for="ch" forName="bgRect" refType="w"/>
+              <dgm:constr type="h" for="ch" forName="bgRect" refType="h"/>
+              <dgm:constr type="l" for="ch" forName="bgRect"/>
+              <dgm:constr type="t" for="ch" forName="bgRect"/>
+              <dgm:constr type="h" for="ch" forName="iconRect" refType="h" fact="0.55"/>
+              <dgm:constr type="w" for="ch" forName="iconRect" refType="h" refFor="ch" refForName="iconRect"/>
+              <dgm:constr type="l" for="ch" forName="iconRect" refType="h" refFor="ch" refForName="iconRect" fact="0.55"/>
+              <dgm:constr type="ctrY" for="ch" forName="iconRect" refType="ctrY" refFor="ch" refForName="bgRect"/>
+              <dgm:constr type="w" for="ch" forName="spaceRect" refType="l" refFor="ch" refForName="iconRect"/>
+              <dgm:constr type="h" for="ch" forName="spaceRect" refType="h"/>
+              <dgm:constr type="l" for="ch" forName="spaceRect" refType="r" refFor="ch" refForName="iconRect"/>
+              <dgm:constr type="t" for="ch" forName="spaceRect"/>
+              <dgm:constr type="h" for="ch" forName="parTx" refType="h"/>
+              <dgm:constr type="l" for="ch" forName="parTx" refType="r" refFor="ch" refForName="spaceRect"/>
+              <dgm:constr type="t" for="ch" forName="parTx"/>
+            </dgm:constrLst>
+          </dgm:else>
+        </dgm:choose>
         <dgm:ruleLst>
           <dgm:rule type="h" val="INF" fact="NaN" max="NaN"/>
         </dgm:ruleLst>
+        <dgm:layoutNode name="bgRect" styleLbl="bgShp">
+          <dgm:alg type="sp"/>
+          <dgm:shape xmlns:r="http://schemas.openxmlformats.org/officeDocument/2006/relationships" type="roundRect" r:blip="">
+            <dgm:adjLst>
+              <dgm:adj idx="1" val="0.1"/>
+            </dgm:adjLst>
+          </dgm:shape>
+          <dgm:presOf/>
+          <dgm:constrLst/>
+          <dgm:ruleLst/>
+        </dgm:layoutNode>
+        <dgm:layoutNode name="iconRect" styleLbl="node1">
+          <dgm:alg type="sp"/>
+          <dgm:shape xmlns:r="http://schemas.openxmlformats.org/officeDocument/2006/relationships" type="rect" r:blip="" blipPhldr="1">
+            <dgm:adjLst/>
+          </dgm:shape>
+          <dgm:presOf/>
+          <dgm:constrLst/>
+          <dgm:ruleLst/>
+        </dgm:layoutNode>
+        <dgm:layoutNode name="spaceRect">
+          <dgm:alg type="sp"/>
+          <dgm:shape xmlns:r="http://schemas.openxmlformats.org/officeDocument/2006/relationships" r:blip="">
+            <dgm:adjLst/>
+          </dgm:shape>
+          <dgm:presOf/>
+          <dgm:constrLst/>
+          <dgm:ruleLst/>
+        </dgm:layoutNode>
+        <dgm:layoutNode name="parTx" styleLbl="revTx">
+          <dgm:varLst>
+            <dgm:chMax val="0"/>
+            <dgm:chPref val="0"/>
+          </dgm:varLst>
+          <dgm:alg type="tx">
+            <dgm:param type="txAnchorVert" val="mid"/>
+            <dgm:param type="parTxLTRAlign" val="l"/>
+            <dgm:param type="shpTxLTRAlignCh" val="l"/>
+            <dgm:param type="parTxRTLAlign" val="r"/>
+            <dgm:param type="shpTxRTLAlignCh" val="r"/>
+          </dgm:alg>
+          <dgm:shape xmlns:r="http://schemas.openxmlformats.org/officeDocument/2006/relationships" type="rect" r:blip="">
+            <dgm:adjLst/>
+          </dgm:shape>
+          <dgm:presOf axis="self" ptType="node"/>
+          <dgm:constrLst>
+            <dgm:constr type="lMarg" refType="h" fact="0.3"/>
+            <dgm:constr type="rMarg" refType="h" fact="0.3"/>
+            <dgm:constr type="tMarg" refType="h" fact="0.3"/>
+            <dgm:constr type="bMarg" refType="h" fact="0.3"/>
+          </dgm:constrLst>
+          <dgm:ruleLst>
+            <dgm:rule type="primFontSz" val="14" fact="NaN" max="NaN"/>
+            <dgm:rule type="h" val="INF" fact="NaN" max="NaN"/>
+          </dgm:ruleLst>
+        </dgm:layoutNode>
+        <dgm:choose name="Name12">
+          <dgm:if name="Name13" axis="ch" ptType="node" func="cnt" op="gte" val="1">
+            <dgm:layoutNode name="desTx" styleLbl="revTx">
+              <dgm:varLst/>
+              <dgm:alg type="tx">
+                <dgm:param type="txAnchorVertCh" val="mid"/>
+                <dgm:param type="parTxLTRAlign" val="l"/>
+                <dgm:param type="shpTxLTRAlignCh" val="l"/>
+                <dgm:param type="parTxRTLAlign" val="r"/>
+                <dgm:param type="shpTxRTLAlignCh" val="r"/>
+                <dgm:param type="stBulletLvl" val="0"/>
+              </dgm:alg>
+              <dgm:shape xmlns:r="http://schemas.openxmlformats.org/officeDocument/2006/relationships" type="rect" r:blip="">
+                <dgm:adjLst/>
+              </dgm:shape>
+              <dgm:presOf axis="des" ptType="node"/>
+              <dgm:constrLst>
+                <dgm:constr type="primFontSz" val="18"/>
+                <dgm:constr type="secFontSz" refType="primFontSz"/>
+                <dgm:constr type="lMarg" refType="h" fact="0.3"/>
+                <dgm:constr type="rMarg" refType="h" fact="0.3"/>
+                <dgm:constr type="tMarg" refType="h" fact="0.3"/>
+                <dgm:constr type="bMarg" refType="h" fact="0.3"/>
+              </dgm:constrLst>
+              <dgm:ruleLst>
+                <dgm:rule type="primFontSz" val="11" fact="NaN" max="NaN"/>
+              </dgm:ruleLst>
+            </dgm:layoutNode>
+          </dgm:if>
+          <dgm:else name="Name14"/>
+        </dgm:choose>
       </dgm:layoutNode>
-      <dgm:choose name="Name1">
-        <dgm:if name="Name2" axis="ch" ptType="node" func="cnt" op="gte" val="1">
-          <dgm:layoutNode name="childText" styleLbl="revTx">
-            <dgm:varLst>
-              <dgm:bulletEnabled val="1"/>
-            </dgm:varLst>
-            <dgm:alg type="tx">
-              <dgm:param type="stBulletLvl" val="1"/>
-              <dgm:param type="lnSpAfChP" val="20"/>
-            </dgm:alg>
-            <dgm:shape xmlns:r="http://schemas.openxmlformats.org/officeDocument/2006/relationships" type="rect" r:blip="">
-              <dgm:adjLst/>
-            </dgm:shape>
-            <dgm:presOf axis="des" ptType="node"/>
-            <dgm:constrLst>
-              <dgm:constr type="tMarg" refType="primFontSz" fact="0.1"/>
-              <dgm:constr type="bMarg" refType="primFontSz" fact="0.1"/>
-              <dgm:constr type="lMarg" refType="w" fact="0.09"/>
-            </dgm:constrLst>
-            <dgm:ruleLst>
-              <dgm:rule type="h" val="INF" fact="NaN" max="NaN"/>
-            </dgm:ruleLst>
-          </dgm:layoutNode>
-        </dgm:if>
-        <dgm:else name="Name3">
-          <dgm:choose name="Name4">
-            <dgm:if name="Name5" axis="par ch" ptType="doc node" func="cnt" op="gte" val="2">
-              <dgm:forEach name="Name6" axis="followSib" ptType="sibTrans" cnt="1">
-                <dgm:layoutNode name="spacer">
-                  <dgm:alg type="sp"/>
-                  <dgm:shape xmlns:r="http://schemas.openxmlformats.org/officeDocument/2006/relationships" r:blip="">
-                    <dgm:adjLst/>
-                  </dgm:shape>
-                  <dgm:presOf/>
-                  <dgm:constrLst/>
-                  <dgm:ruleLst/>
-                </dgm:layoutNode>
-              </dgm:forEach>
-            </dgm:if>
-            <dgm:else name="Name7"/>
-          </dgm:choose>
-        </dgm:else>
-      </dgm:choose>
+      <dgm:forEach name="Name15" axis="followSib" ptType="sibTrans" cnt="1">
+        <dgm:layoutNode name="sibTrans">
+          <dgm:alg type="sp"/>
+          <dgm:shape xmlns:r="http://schemas.openxmlformats.org/officeDocument/2006/relationships" r:blip="">
+            <dgm:adjLst/>
+          </dgm:shape>
+          <dgm:presOf axis="self"/>
+          <dgm:constrLst/>
+          <dgm:ruleLst/>
+        </dgm:layoutNode>
+      </dgm:forEach>
     </dgm:forEach>
   </dgm:layoutNode>
+  <dgm:extLst>
+    <a:ext uri="{68A01E43-0DF5-4B5B-8FA6-DAF915123BFB}">
+      <dgm1612:lstStyle xmlns:dgm1612="http://schemas.microsoft.com/office/drawing/2016/12/diagram">
+        <a:lvl1pPr>
+          <a:lnSpc>
+            <a:spcPct val="100000"/>
+          </a:lnSpc>
+        </a:lvl1pPr>
+        <a:lvl2pPr>
+          <a:lnSpc>
+            <a:spcPct val="100000"/>
+          </a:lnSpc>
+        </a:lvl2pPr>
+      </dgm1612:lstStyle>
+    </a:ext>
+  </dgm:extLst>
 </dgm:layoutDef>
 </file>
 
@@ -3337,7 +3585,7 @@
           <a:p>
             <a:fld id="{A540988C-BBB2-3A42-8898-F774E2AA35B7}" type="datetimeFigureOut">
               <a:rPr lang="de-DE" smtClean="0"/>
-              <a:t>15.05.26</a:t>
+              <a:t>26.05.26</a:t>
             </a:fld>
             <a:endParaRPr lang="de-DE"/>
           </a:p>
@@ -3623,7 +3871,7 @@
       </p:grpSpPr>
       <p:sp>
         <p:nvSpPr>
-          <p:cNvPr id="2" name="Folienbildplatzhalter 1"/>
+          <p:cNvPr id="2" name="Slide Image Placeholder 1"/>
           <p:cNvSpPr>
             <a:spLocks noGrp="1" noRot="1" noChangeAspect="1"/>
           </p:cNvSpPr>
@@ -3635,7 +3883,7 @@
       </p:sp>
       <p:sp>
         <p:nvSpPr>
-          <p:cNvPr id="3" name="Notizenplatzhalter 2"/>
+          <p:cNvPr id="3" name="Notes Placeholder 2"/>
           <p:cNvSpPr>
             <a:spLocks noGrp="1"/>
           </p:cNvSpPr>
@@ -3648,13 +3896,13 @@
           <a:bodyPr/>
           <a:lstStyle/>
           <a:p>
-            <a:endParaRPr lang="de-DE" dirty="0"/>
+            <a:endParaRPr lang="en-CH"/>
           </a:p>
         </p:txBody>
       </p:sp>
       <p:sp>
         <p:nvSpPr>
-          <p:cNvPr id="4" name="Foliennummernplatzhalter 3"/>
+          <p:cNvPr id="4" name="Slide Number Placeholder 3"/>
           <p:cNvSpPr>
             <a:spLocks noGrp="1"/>
           </p:cNvSpPr>
@@ -3669,7 +3917,7 @@
           <a:p>
             <a:fld id="{D0AE7357-186D-1741-AC65-6D5045F5A14B}" type="slidenum">
               <a:rPr lang="de-DE" smtClean="0"/>
-              <a:t>3</a:t>
+              <a:t>1</a:t>
             </a:fld>
             <a:endParaRPr lang="de-DE"/>
           </a:p>
@@ -3678,7 +3926,7 @@
     </p:spTree>
     <p:extLst>
       <p:ext uri="{BB962C8B-B14F-4D97-AF65-F5344CB8AC3E}">
-        <p14:creationId xmlns:p14="http://schemas.microsoft.com/office/powerpoint/2010/main" val="542115409"/>
+        <p14:creationId xmlns:p14="http://schemas.microsoft.com/office/powerpoint/2010/main" val="2760200238"/>
       </p:ext>
     </p:extLst>
   </p:cSld>
@@ -3707,6 +3955,90 @@
       </p:grpSpPr>
       <p:sp>
         <p:nvSpPr>
+          <p:cNvPr id="2" name="Slide Image Placeholder 1"/>
+          <p:cNvSpPr>
+            <a:spLocks noGrp="1" noRot="1" noChangeAspect="1"/>
+          </p:cNvSpPr>
+          <p:nvPr>
+            <p:ph type="sldImg"/>
+          </p:nvPr>
+        </p:nvSpPr>
+        <p:spPr/>
+      </p:sp>
+      <p:sp>
+        <p:nvSpPr>
+          <p:cNvPr id="3" name="Notes Placeholder 2"/>
+          <p:cNvSpPr>
+            <a:spLocks noGrp="1"/>
+          </p:cNvSpPr>
+          <p:nvPr>
+            <p:ph type="body" idx="1"/>
+          </p:nvPr>
+        </p:nvSpPr>
+        <p:spPr/>
+        <p:txBody>
+          <a:bodyPr/>
+          <a:lstStyle/>
+          <a:p>
+            <a:endParaRPr lang="en-CH"/>
+          </a:p>
+        </p:txBody>
+      </p:sp>
+      <p:sp>
+        <p:nvSpPr>
+          <p:cNvPr id="4" name="Slide Number Placeholder 3"/>
+          <p:cNvSpPr>
+            <a:spLocks noGrp="1"/>
+          </p:cNvSpPr>
+          <p:nvPr>
+            <p:ph type="sldNum" sz="quarter" idx="5"/>
+          </p:nvPr>
+        </p:nvSpPr>
+        <p:spPr/>
+        <p:txBody>
+          <a:bodyPr/>
+          <a:lstStyle/>
+          <a:p>
+            <a:fld id="{D0AE7357-186D-1741-AC65-6D5045F5A14B}" type="slidenum">
+              <a:rPr lang="de-DE" smtClean="0"/>
+              <a:t>2</a:t>
+            </a:fld>
+            <a:endParaRPr lang="de-DE"/>
+          </a:p>
+        </p:txBody>
+      </p:sp>
+    </p:spTree>
+    <p:extLst>
+      <p:ext uri="{BB962C8B-B14F-4D97-AF65-F5344CB8AC3E}">
+        <p14:creationId xmlns:p14="http://schemas.microsoft.com/office/powerpoint/2010/main" val="3950849815"/>
+      </p:ext>
+    </p:extLst>
+  </p:cSld>
+  <p:clrMapOvr>
+    <a:masterClrMapping/>
+  </p:clrMapOvr>
+</p:notes>
+</file>
+
+<file path=ppt/notesSlides/notesSlide3.xml><?xml version="1.0" encoding="utf-8"?>
+<p:notes xmlns:a="http://schemas.openxmlformats.org/drawingml/2006/main" xmlns:r="http://schemas.openxmlformats.org/officeDocument/2006/relationships" xmlns:p="http://schemas.openxmlformats.org/presentationml/2006/main">
+  <p:cSld>
+    <p:spTree>
+      <p:nvGrpSpPr>
+        <p:cNvPr id="1" name=""/>
+        <p:cNvGrpSpPr/>
+        <p:nvPr/>
+      </p:nvGrpSpPr>
+      <p:grpSpPr>
+        <a:xfrm>
+          <a:off x="0" y="0"/>
+          <a:ext cx="0" cy="0"/>
+          <a:chOff x="0" y="0"/>
+          <a:chExt cx="0" cy="0"/>
+        </a:xfrm>
+      </p:grpSpPr>
+      <p:sp>
+        <p:nvSpPr>
           <p:cNvPr id="2" name="Folienbildplatzhalter 1"/>
           <p:cNvSpPr>
             <a:spLocks noGrp="1" noRot="1" noChangeAspect="1"/>
@@ -3732,30 +4064,7 @@
           <a:bodyPr/>
           <a:lstStyle/>
           <a:p>
-            <a:r>
-              <a:rPr lang="de-DE" dirty="0" err="1"/>
-              <a:t>with</a:t>
-            </a:r>
-            <a:r>
-              <a:rPr lang="de-DE" dirty="0"/>
-              <a:t> Input, </a:t>
-            </a:r>
-            <a:r>
-              <a:rPr lang="de-DE" dirty="0" err="1"/>
-              <a:t>Generated</a:t>
-            </a:r>
-            <a:r>
-              <a:rPr lang="de-DE" dirty="0"/>
-              <a:t> SQL, and </a:t>
-            </a:r>
-            <a:r>
-              <a:rPr lang="de-DE" dirty="0" err="1"/>
-              <a:t>Result</a:t>
-            </a:r>
-            <a:r>
-              <a:rPr lang="de-DE" dirty="0"/>
-              <a:t> </a:t>
-            </a:r>
+            <a:endParaRPr lang="de-DE" dirty="0"/>
           </a:p>
         </p:txBody>
       </p:sp>
@@ -3776,6 +4085,113 @@
           <a:p>
             <a:fld id="{D0AE7357-186D-1741-AC65-6D5045F5A14B}" type="slidenum">
               <a:rPr lang="de-DE" smtClean="0"/>
+              <a:t>3</a:t>
+            </a:fld>
+            <a:endParaRPr lang="de-DE"/>
+          </a:p>
+        </p:txBody>
+      </p:sp>
+    </p:spTree>
+    <p:extLst>
+      <p:ext uri="{BB962C8B-B14F-4D97-AF65-F5344CB8AC3E}">
+        <p14:creationId xmlns:p14="http://schemas.microsoft.com/office/powerpoint/2010/main" val="542115409"/>
+      </p:ext>
+    </p:extLst>
+  </p:cSld>
+  <p:clrMapOvr>
+    <a:masterClrMapping/>
+  </p:clrMapOvr>
+</p:notes>
+</file>
+
+<file path=ppt/notesSlides/notesSlide4.xml><?xml version="1.0" encoding="utf-8"?>
+<p:notes xmlns:a="http://schemas.openxmlformats.org/drawingml/2006/main" xmlns:r="http://schemas.openxmlformats.org/officeDocument/2006/relationships" xmlns:p="http://schemas.openxmlformats.org/presentationml/2006/main">
+  <p:cSld>
+    <p:spTree>
+      <p:nvGrpSpPr>
+        <p:cNvPr id="1" name=""/>
+        <p:cNvGrpSpPr/>
+        <p:nvPr/>
+      </p:nvGrpSpPr>
+      <p:grpSpPr>
+        <a:xfrm>
+          <a:off x="0" y="0"/>
+          <a:ext cx="0" cy="0"/>
+          <a:chOff x="0" y="0"/>
+          <a:chExt cx="0" cy="0"/>
+        </a:xfrm>
+      </p:grpSpPr>
+      <p:sp>
+        <p:nvSpPr>
+          <p:cNvPr id="2" name="Folienbildplatzhalter 1"/>
+          <p:cNvSpPr>
+            <a:spLocks noGrp="1" noRot="1" noChangeAspect="1"/>
+          </p:cNvSpPr>
+          <p:nvPr>
+            <p:ph type="sldImg"/>
+          </p:nvPr>
+        </p:nvSpPr>
+        <p:spPr/>
+      </p:sp>
+      <p:sp>
+        <p:nvSpPr>
+          <p:cNvPr id="3" name="Notizenplatzhalter 2"/>
+          <p:cNvSpPr>
+            <a:spLocks noGrp="1"/>
+          </p:cNvSpPr>
+          <p:nvPr>
+            <p:ph type="body" idx="1"/>
+          </p:nvPr>
+        </p:nvSpPr>
+        <p:spPr/>
+        <p:txBody>
+          <a:bodyPr/>
+          <a:lstStyle/>
+          <a:p>
+            <a:r>
+              <a:rPr lang="de-DE" dirty="0" err="1"/>
+              <a:t>with</a:t>
+            </a:r>
+            <a:r>
+              <a:rPr lang="de-DE" dirty="0"/>
+              <a:t> Input, </a:t>
+            </a:r>
+            <a:r>
+              <a:rPr lang="de-DE" dirty="0" err="1"/>
+              <a:t>Generated</a:t>
+            </a:r>
+            <a:r>
+              <a:rPr lang="de-DE" dirty="0"/>
+              <a:t> SQL, and </a:t>
+            </a:r>
+            <a:r>
+              <a:rPr lang="de-DE" dirty="0" err="1"/>
+              <a:t>Result</a:t>
+            </a:r>
+            <a:r>
+              <a:rPr lang="de-DE" dirty="0"/>
+              <a:t> </a:t>
+            </a:r>
+          </a:p>
+        </p:txBody>
+      </p:sp>
+      <p:sp>
+        <p:nvSpPr>
+          <p:cNvPr id="4" name="Foliennummernplatzhalter 3"/>
+          <p:cNvSpPr>
+            <a:spLocks noGrp="1"/>
+          </p:cNvSpPr>
+          <p:nvPr>
+            <p:ph type="sldNum" sz="quarter" idx="5"/>
+          </p:nvPr>
+        </p:nvSpPr>
+        <p:spPr/>
+        <p:txBody>
+          <a:bodyPr/>
+          <a:lstStyle/>
+          <a:p>
+            <a:fld id="{D0AE7357-186D-1741-AC65-6D5045F5A14B}" type="slidenum">
+              <a:rPr lang="de-DE" smtClean="0"/>
               <a:t>4</a:t>
             </a:fld>
             <a:endParaRPr lang="de-DE"/>
@@ -3786,6 +4202,426 @@
     <p:extLst>
       <p:ext uri="{BB962C8B-B14F-4D97-AF65-F5344CB8AC3E}">
         <p14:creationId xmlns:p14="http://schemas.microsoft.com/office/powerpoint/2010/main" val="463867710"/>
+      </p:ext>
+    </p:extLst>
+  </p:cSld>
+  <p:clrMapOvr>
+    <a:masterClrMapping/>
+  </p:clrMapOvr>
+</p:notes>
+</file>
+
+<file path=ppt/notesSlides/notesSlide5.xml><?xml version="1.0" encoding="utf-8"?>
+<p:notes xmlns:a="http://schemas.openxmlformats.org/drawingml/2006/main" xmlns:r="http://schemas.openxmlformats.org/officeDocument/2006/relationships" xmlns:p="http://schemas.openxmlformats.org/presentationml/2006/main">
+  <p:cSld>
+    <p:spTree>
+      <p:nvGrpSpPr>
+        <p:cNvPr id="1" name=""/>
+        <p:cNvGrpSpPr/>
+        <p:nvPr/>
+      </p:nvGrpSpPr>
+      <p:grpSpPr>
+        <a:xfrm>
+          <a:off x="0" y="0"/>
+          <a:ext cx="0" cy="0"/>
+          <a:chOff x="0" y="0"/>
+          <a:chExt cx="0" cy="0"/>
+        </a:xfrm>
+      </p:grpSpPr>
+      <p:sp>
+        <p:nvSpPr>
+          <p:cNvPr id="2" name="Slide Image Placeholder 1"/>
+          <p:cNvSpPr>
+            <a:spLocks noGrp="1" noRot="1" noChangeAspect="1"/>
+          </p:cNvSpPr>
+          <p:nvPr>
+            <p:ph type="sldImg"/>
+          </p:nvPr>
+        </p:nvSpPr>
+        <p:spPr/>
+      </p:sp>
+      <p:sp>
+        <p:nvSpPr>
+          <p:cNvPr id="3" name="Notes Placeholder 2"/>
+          <p:cNvSpPr>
+            <a:spLocks noGrp="1"/>
+          </p:cNvSpPr>
+          <p:nvPr>
+            <p:ph type="body" idx="1"/>
+          </p:nvPr>
+        </p:nvSpPr>
+        <p:spPr/>
+        <p:txBody>
+          <a:bodyPr/>
+          <a:lstStyle/>
+          <a:p>
+            <a:endParaRPr lang="en-CH"/>
+          </a:p>
+        </p:txBody>
+      </p:sp>
+      <p:sp>
+        <p:nvSpPr>
+          <p:cNvPr id="4" name="Slide Number Placeholder 3"/>
+          <p:cNvSpPr>
+            <a:spLocks noGrp="1"/>
+          </p:cNvSpPr>
+          <p:nvPr>
+            <p:ph type="sldNum" sz="quarter" idx="5"/>
+          </p:nvPr>
+        </p:nvSpPr>
+        <p:spPr/>
+        <p:txBody>
+          <a:bodyPr/>
+          <a:lstStyle/>
+          <a:p>
+            <a:fld id="{D0AE7357-186D-1741-AC65-6D5045F5A14B}" type="slidenum">
+              <a:rPr lang="de-DE" smtClean="0"/>
+              <a:t>5</a:t>
+            </a:fld>
+            <a:endParaRPr lang="de-DE"/>
+          </a:p>
+        </p:txBody>
+      </p:sp>
+    </p:spTree>
+    <p:extLst>
+      <p:ext uri="{BB962C8B-B14F-4D97-AF65-F5344CB8AC3E}">
+        <p14:creationId xmlns:p14="http://schemas.microsoft.com/office/powerpoint/2010/main" val="3663790365"/>
+      </p:ext>
+    </p:extLst>
+  </p:cSld>
+  <p:clrMapOvr>
+    <a:masterClrMapping/>
+  </p:clrMapOvr>
+</p:notes>
+</file>
+
+<file path=ppt/notesSlides/notesSlide6.xml><?xml version="1.0" encoding="utf-8"?>
+<p:notes xmlns:a="http://schemas.openxmlformats.org/drawingml/2006/main" xmlns:r="http://schemas.openxmlformats.org/officeDocument/2006/relationships" xmlns:p="http://schemas.openxmlformats.org/presentationml/2006/main">
+  <p:cSld>
+    <p:spTree>
+      <p:nvGrpSpPr>
+        <p:cNvPr id="1" name=""/>
+        <p:cNvGrpSpPr/>
+        <p:nvPr/>
+      </p:nvGrpSpPr>
+      <p:grpSpPr>
+        <a:xfrm>
+          <a:off x="0" y="0"/>
+          <a:ext cx="0" cy="0"/>
+          <a:chOff x="0" y="0"/>
+          <a:chExt cx="0" cy="0"/>
+        </a:xfrm>
+      </p:grpSpPr>
+      <p:sp>
+        <p:nvSpPr>
+          <p:cNvPr id="2" name="Slide Image Placeholder 1"/>
+          <p:cNvSpPr>
+            <a:spLocks noGrp="1" noRot="1" noChangeAspect="1"/>
+          </p:cNvSpPr>
+          <p:nvPr>
+            <p:ph type="sldImg"/>
+          </p:nvPr>
+        </p:nvSpPr>
+        <p:spPr/>
+      </p:sp>
+      <p:sp>
+        <p:nvSpPr>
+          <p:cNvPr id="3" name="Notes Placeholder 2"/>
+          <p:cNvSpPr>
+            <a:spLocks noGrp="1"/>
+          </p:cNvSpPr>
+          <p:nvPr>
+            <p:ph type="body" idx="1"/>
+          </p:nvPr>
+        </p:nvSpPr>
+        <p:spPr/>
+        <p:txBody>
+          <a:bodyPr/>
+          <a:lstStyle/>
+          <a:p>
+            <a:endParaRPr lang="en-CH"/>
+          </a:p>
+        </p:txBody>
+      </p:sp>
+      <p:sp>
+        <p:nvSpPr>
+          <p:cNvPr id="4" name="Slide Number Placeholder 3"/>
+          <p:cNvSpPr>
+            <a:spLocks noGrp="1"/>
+          </p:cNvSpPr>
+          <p:nvPr>
+            <p:ph type="sldNum" sz="quarter" idx="5"/>
+          </p:nvPr>
+        </p:nvSpPr>
+        <p:spPr/>
+        <p:txBody>
+          <a:bodyPr/>
+          <a:lstStyle/>
+          <a:p>
+            <a:fld id="{D0AE7357-186D-1741-AC65-6D5045F5A14B}" type="slidenum">
+              <a:rPr lang="de-DE" smtClean="0"/>
+              <a:t>6</a:t>
+            </a:fld>
+            <a:endParaRPr lang="de-DE"/>
+          </a:p>
+        </p:txBody>
+      </p:sp>
+    </p:spTree>
+    <p:extLst>
+      <p:ext uri="{BB962C8B-B14F-4D97-AF65-F5344CB8AC3E}">
+        <p14:creationId xmlns:p14="http://schemas.microsoft.com/office/powerpoint/2010/main" val="3303002503"/>
+      </p:ext>
+    </p:extLst>
+  </p:cSld>
+  <p:clrMapOvr>
+    <a:masterClrMapping/>
+  </p:clrMapOvr>
+</p:notes>
+</file>
+
+<file path=ppt/notesSlides/notesSlide7.xml><?xml version="1.0" encoding="utf-8"?>
+<p:notes xmlns:a="http://schemas.openxmlformats.org/drawingml/2006/main" xmlns:r="http://schemas.openxmlformats.org/officeDocument/2006/relationships" xmlns:p="http://schemas.openxmlformats.org/presentationml/2006/main">
+  <p:cSld>
+    <p:spTree>
+      <p:nvGrpSpPr>
+        <p:cNvPr id="1" name=""/>
+        <p:cNvGrpSpPr/>
+        <p:nvPr/>
+      </p:nvGrpSpPr>
+      <p:grpSpPr>
+        <a:xfrm>
+          <a:off x="0" y="0"/>
+          <a:ext cx="0" cy="0"/>
+          <a:chOff x="0" y="0"/>
+          <a:chExt cx="0" cy="0"/>
+        </a:xfrm>
+      </p:grpSpPr>
+      <p:sp>
+        <p:nvSpPr>
+          <p:cNvPr id="2" name="Slide Image Placeholder 1"/>
+          <p:cNvSpPr>
+            <a:spLocks noGrp="1" noRot="1" noChangeAspect="1"/>
+          </p:cNvSpPr>
+          <p:nvPr>
+            <p:ph type="sldImg"/>
+          </p:nvPr>
+        </p:nvSpPr>
+        <p:spPr/>
+      </p:sp>
+      <p:sp>
+        <p:nvSpPr>
+          <p:cNvPr id="3" name="Notes Placeholder 2"/>
+          <p:cNvSpPr>
+            <a:spLocks noGrp="1"/>
+          </p:cNvSpPr>
+          <p:nvPr>
+            <p:ph type="body" idx="1"/>
+          </p:nvPr>
+        </p:nvSpPr>
+        <p:spPr/>
+        <p:txBody>
+          <a:bodyPr/>
+          <a:lstStyle/>
+          <a:p>
+            <a:endParaRPr lang="en-CH"/>
+          </a:p>
+        </p:txBody>
+      </p:sp>
+      <p:sp>
+        <p:nvSpPr>
+          <p:cNvPr id="4" name="Slide Number Placeholder 3"/>
+          <p:cNvSpPr>
+            <a:spLocks noGrp="1"/>
+          </p:cNvSpPr>
+          <p:nvPr>
+            <p:ph type="sldNum" sz="quarter" idx="5"/>
+          </p:nvPr>
+        </p:nvSpPr>
+        <p:spPr/>
+        <p:txBody>
+          <a:bodyPr/>
+          <a:lstStyle/>
+          <a:p>
+            <a:fld id="{D0AE7357-186D-1741-AC65-6D5045F5A14B}" type="slidenum">
+              <a:rPr lang="de-DE" smtClean="0"/>
+              <a:t>7</a:t>
+            </a:fld>
+            <a:endParaRPr lang="de-DE"/>
+          </a:p>
+        </p:txBody>
+      </p:sp>
+    </p:spTree>
+    <p:extLst>
+      <p:ext uri="{BB962C8B-B14F-4D97-AF65-F5344CB8AC3E}">
+        <p14:creationId xmlns:p14="http://schemas.microsoft.com/office/powerpoint/2010/main" val="3182251552"/>
+      </p:ext>
+    </p:extLst>
+  </p:cSld>
+  <p:clrMapOvr>
+    <a:masterClrMapping/>
+  </p:clrMapOvr>
+</p:notes>
+</file>
+
+<file path=ppt/notesSlides/notesSlide8.xml><?xml version="1.0" encoding="utf-8"?>
+<p:notes xmlns:a="http://schemas.openxmlformats.org/drawingml/2006/main" xmlns:r="http://schemas.openxmlformats.org/officeDocument/2006/relationships" xmlns:p="http://schemas.openxmlformats.org/presentationml/2006/main">
+  <p:cSld>
+    <p:spTree>
+      <p:nvGrpSpPr>
+        <p:cNvPr id="1" name=""/>
+        <p:cNvGrpSpPr/>
+        <p:nvPr/>
+      </p:nvGrpSpPr>
+      <p:grpSpPr>
+        <a:xfrm>
+          <a:off x="0" y="0"/>
+          <a:ext cx="0" cy="0"/>
+          <a:chOff x="0" y="0"/>
+          <a:chExt cx="0" cy="0"/>
+        </a:xfrm>
+      </p:grpSpPr>
+      <p:sp>
+        <p:nvSpPr>
+          <p:cNvPr id="2" name="Slide Image Placeholder 1"/>
+          <p:cNvSpPr>
+            <a:spLocks noGrp="1" noRot="1" noChangeAspect="1"/>
+          </p:cNvSpPr>
+          <p:nvPr>
+            <p:ph type="sldImg"/>
+          </p:nvPr>
+        </p:nvSpPr>
+        <p:spPr/>
+      </p:sp>
+      <p:sp>
+        <p:nvSpPr>
+          <p:cNvPr id="3" name="Notes Placeholder 2"/>
+          <p:cNvSpPr>
+            <a:spLocks noGrp="1"/>
+          </p:cNvSpPr>
+          <p:nvPr>
+            <p:ph type="body" idx="1"/>
+          </p:nvPr>
+        </p:nvSpPr>
+        <p:spPr/>
+        <p:txBody>
+          <a:bodyPr/>
+          <a:lstStyle/>
+          <a:p>
+            <a:endParaRPr lang="en-CH"/>
+          </a:p>
+        </p:txBody>
+      </p:sp>
+      <p:sp>
+        <p:nvSpPr>
+          <p:cNvPr id="4" name="Slide Number Placeholder 3"/>
+          <p:cNvSpPr>
+            <a:spLocks noGrp="1"/>
+          </p:cNvSpPr>
+          <p:nvPr>
+            <p:ph type="sldNum" sz="quarter" idx="5"/>
+          </p:nvPr>
+        </p:nvSpPr>
+        <p:spPr/>
+        <p:txBody>
+          <a:bodyPr/>
+          <a:lstStyle/>
+          <a:p>
+            <a:fld id="{D0AE7357-186D-1741-AC65-6D5045F5A14B}" type="slidenum">
+              <a:rPr lang="de-DE" smtClean="0"/>
+              <a:t>8</a:t>
+            </a:fld>
+            <a:endParaRPr lang="de-DE"/>
+          </a:p>
+        </p:txBody>
+      </p:sp>
+    </p:spTree>
+    <p:extLst>
+      <p:ext uri="{BB962C8B-B14F-4D97-AF65-F5344CB8AC3E}">
+        <p14:creationId xmlns:p14="http://schemas.microsoft.com/office/powerpoint/2010/main" val="2573199733"/>
+      </p:ext>
+    </p:extLst>
+  </p:cSld>
+  <p:clrMapOvr>
+    <a:masterClrMapping/>
+  </p:clrMapOvr>
+</p:notes>
+</file>
+
+<file path=ppt/notesSlides/notesSlide9.xml><?xml version="1.0" encoding="utf-8"?>
+<p:notes xmlns:a="http://schemas.openxmlformats.org/drawingml/2006/main" xmlns:r="http://schemas.openxmlformats.org/officeDocument/2006/relationships" xmlns:p="http://schemas.openxmlformats.org/presentationml/2006/main">
+  <p:cSld>
+    <p:spTree>
+      <p:nvGrpSpPr>
+        <p:cNvPr id="1" name=""/>
+        <p:cNvGrpSpPr/>
+        <p:nvPr/>
+      </p:nvGrpSpPr>
+      <p:grpSpPr>
+        <a:xfrm>
+          <a:off x="0" y="0"/>
+          <a:ext cx="0" cy="0"/>
+          <a:chOff x="0" y="0"/>
+          <a:chExt cx="0" cy="0"/>
+        </a:xfrm>
+      </p:grpSpPr>
+      <p:sp>
+        <p:nvSpPr>
+          <p:cNvPr id="2" name="Slide Image Placeholder 1"/>
+          <p:cNvSpPr>
+            <a:spLocks noGrp="1" noRot="1" noChangeAspect="1"/>
+          </p:cNvSpPr>
+          <p:nvPr>
+            <p:ph type="sldImg"/>
+          </p:nvPr>
+        </p:nvSpPr>
+        <p:spPr/>
+      </p:sp>
+      <p:sp>
+        <p:nvSpPr>
+          <p:cNvPr id="3" name="Notes Placeholder 2"/>
+          <p:cNvSpPr>
+            <a:spLocks noGrp="1"/>
+          </p:cNvSpPr>
+          <p:nvPr>
+            <p:ph type="body" idx="1"/>
+          </p:nvPr>
+        </p:nvSpPr>
+        <p:spPr/>
+        <p:txBody>
+          <a:bodyPr/>
+          <a:lstStyle/>
+          <a:p>
+            <a:endParaRPr lang="en-CH"/>
+          </a:p>
+        </p:txBody>
+      </p:sp>
+      <p:sp>
+        <p:nvSpPr>
+          <p:cNvPr id="4" name="Slide Number Placeholder 3"/>
+          <p:cNvSpPr>
+            <a:spLocks noGrp="1"/>
+          </p:cNvSpPr>
+          <p:nvPr>
+            <p:ph type="sldNum" sz="quarter" idx="5"/>
+          </p:nvPr>
+        </p:nvSpPr>
+        <p:spPr/>
+        <p:txBody>
+          <a:bodyPr/>
+          <a:lstStyle/>
+          <a:p>
+            <a:fld id="{D0AE7357-186D-1741-AC65-6D5045F5A14B}" type="slidenum">
+              <a:rPr lang="de-DE" smtClean="0"/>
+              <a:t>9</a:t>
+            </a:fld>
+            <a:endParaRPr lang="de-DE"/>
+          </a:p>
+        </p:txBody>
+      </p:sp>
+    </p:spTree>
+    <p:extLst>
+      <p:ext uri="{BB962C8B-B14F-4D97-AF65-F5344CB8AC3E}">
+        <p14:creationId xmlns:p14="http://schemas.microsoft.com/office/powerpoint/2010/main" val="2247652330"/>
       </p:ext>
     </p:extLst>
   </p:cSld>
@@ -3942,7 +4778,7 @@
           <a:p>
             <a:fld id="{5BD1D3F2-986D-2246-ACEA-731AA1390683}" type="datetimeFigureOut">
               <a:rPr lang="de-DE" smtClean="0"/>
-              <a:t>15.05.26</a:t>
+              <a:t>26.05.26</a:t>
             </a:fld>
             <a:endParaRPr lang="de-DE"/>
           </a:p>
@@ -4140,7 +4976,7 @@
           <a:p>
             <a:fld id="{5BD1D3F2-986D-2246-ACEA-731AA1390683}" type="datetimeFigureOut">
               <a:rPr lang="de-DE" smtClean="0"/>
-              <a:t>15.05.26</a:t>
+              <a:t>26.05.26</a:t>
             </a:fld>
             <a:endParaRPr lang="de-DE"/>
           </a:p>
@@ -4348,7 +5184,7 @@
           <a:p>
             <a:fld id="{5BD1D3F2-986D-2246-ACEA-731AA1390683}" type="datetimeFigureOut">
               <a:rPr lang="de-DE" smtClean="0"/>
-              <a:t>15.05.26</a:t>
+              <a:t>26.05.26</a:t>
             </a:fld>
             <a:endParaRPr lang="de-DE"/>
           </a:p>
@@ -4546,7 +5382,7 @@
           <a:p>
             <a:fld id="{5BD1D3F2-986D-2246-ACEA-731AA1390683}" type="datetimeFigureOut">
               <a:rPr lang="de-DE" smtClean="0"/>
-              <a:t>15.05.26</a:t>
+              <a:t>26.05.26</a:t>
             </a:fld>
             <a:endParaRPr lang="de-DE"/>
           </a:p>
@@ -4821,7 +5657,7 @@
           <a:p>
             <a:fld id="{5BD1D3F2-986D-2246-ACEA-731AA1390683}" type="datetimeFigureOut">
               <a:rPr lang="de-DE" smtClean="0"/>
-              <a:t>15.05.26</a:t>
+              <a:t>26.05.26</a:t>
             </a:fld>
             <a:endParaRPr lang="de-DE"/>
           </a:p>
@@ -5086,7 +5922,7 @@
           <a:p>
             <a:fld id="{5BD1D3F2-986D-2246-ACEA-731AA1390683}" type="datetimeFigureOut">
               <a:rPr lang="de-DE" smtClean="0"/>
-              <a:t>15.05.26</a:t>
+              <a:t>26.05.26</a:t>
             </a:fld>
             <a:endParaRPr lang="de-DE"/>
           </a:p>
@@ -5498,7 +6334,7 @@
           <a:p>
             <a:fld id="{5BD1D3F2-986D-2246-ACEA-731AA1390683}" type="datetimeFigureOut">
               <a:rPr lang="de-DE" smtClean="0"/>
-              <a:t>15.05.26</a:t>
+              <a:t>26.05.26</a:t>
             </a:fld>
             <a:endParaRPr lang="de-DE"/>
           </a:p>
@@ -5639,7 +6475,7 @@
           <a:p>
             <a:fld id="{5BD1D3F2-986D-2246-ACEA-731AA1390683}" type="datetimeFigureOut">
               <a:rPr lang="de-DE" smtClean="0"/>
-              <a:t>15.05.26</a:t>
+              <a:t>26.05.26</a:t>
             </a:fld>
             <a:endParaRPr lang="de-DE"/>
           </a:p>
@@ -5752,7 +6588,7 @@
           <a:p>
             <a:fld id="{5BD1D3F2-986D-2246-ACEA-731AA1390683}" type="datetimeFigureOut">
               <a:rPr lang="de-DE" smtClean="0"/>
-              <a:t>15.05.26</a:t>
+              <a:t>26.05.26</a:t>
             </a:fld>
             <a:endParaRPr lang="de-DE"/>
           </a:p>
@@ -6063,7 +6899,7 @@
           <a:p>
             <a:fld id="{5BD1D3F2-986D-2246-ACEA-731AA1390683}" type="datetimeFigureOut">
               <a:rPr lang="de-DE" smtClean="0"/>
-              <a:t>15.05.26</a:t>
+              <a:t>26.05.26</a:t>
             </a:fld>
             <a:endParaRPr lang="de-DE"/>
           </a:p>
@@ -6351,7 +7187,7 @@
           <a:p>
             <a:fld id="{5BD1D3F2-986D-2246-ACEA-731AA1390683}" type="datetimeFigureOut">
               <a:rPr lang="de-DE" smtClean="0"/>
-              <a:t>15.05.26</a:t>
+              <a:t>26.05.26</a:t>
             </a:fld>
             <a:endParaRPr lang="de-DE"/>
           </a:p>
@@ -6592,7 +7428,7 @@
           <a:p>
             <a:fld id="{5BD1D3F2-986D-2246-ACEA-731AA1390683}" type="datetimeFigureOut">
               <a:rPr lang="de-DE" smtClean="0"/>
-              <a:t>15.05.26</a:t>
+              <a:t>26.05.26</a:t>
             </a:fld>
             <a:endParaRPr lang="de-DE"/>
           </a:p>
@@ -7095,7 +7931,7 @@
           <p:nvPr/>
         </p:nvPicPr>
         <p:blipFill>
-          <a:blip r:embed="rId2">
+          <a:blip r:embed="rId3">
             <a:alphaModFix amt="50000"/>
           </a:blip>
           <a:srcRect t="881"/>
@@ -7142,12 +7978,12 @@
           <a:lstStyle/>
           <a:p>
             <a:r>
-              <a:rPr lang="de-DE">
+              <a:rPr lang="de-DE" dirty="0">
                 <a:solidFill>
                   <a:srgbClr val="FFFFFF"/>
                 </a:solidFill>
               </a:rPr>
-              <a:t>DWH2 Final Projekt</a:t>
+              <a:t>DWH2 Final Project</a:t>
             </a:r>
           </a:p>
         </p:txBody>
@@ -7211,7 +8047,7 @@
           <a:p>
             <a:r>
               <a:rPr lang="de-DE" sz="1700" dirty="0">
-                <a:hlinkClick r:id="rId3">
+                <a:hlinkClick r:id="rId4">
                   <a:extLst>
                     <a:ext uri="{A12FA001-AC4F-418D-AE19-62706E023703}">
                       <ahyp:hlinkClr xmlns:ahyp="http://schemas.microsoft.com/office/drawing/2018/hyperlinkcolor" val="tx"/>
@@ -7244,7 +8080,7 @@
           <p:nvPr/>
         </p:nvPicPr>
         <p:blipFill>
-          <a:blip r:embed="rId4"/>
+          <a:blip r:embed="rId5"/>
           <a:stretch>
             <a:fillRect/>
           </a:stretch>
@@ -7274,7 +8110,7 @@
           <p:nvPr/>
         </p:nvPicPr>
         <p:blipFill>
-          <a:blip r:embed="rId4"/>
+          <a:blip r:embed="rId5"/>
           <a:stretch>
             <a:fillRect/>
           </a:stretch>
@@ -7370,13 +8206,13 @@
             <p:ph idx="1"/>
             <p:extLst>
               <p:ext uri="{D42A27DB-BD31-4B8C-83A1-F6EECF244321}">
-                <p14:modId xmlns:p14="http://schemas.microsoft.com/office/powerpoint/2010/main" val="1312905444"/>
+                <p14:modId xmlns:p14="http://schemas.microsoft.com/office/powerpoint/2010/main" val="3046380735"/>
               </p:ext>
             </p:extLst>
           </p:nvPr>
         </p:nvGraphicFramePr>
         <p:xfrm>
-          <a:off x="838200" y="1406175"/>
+          <a:off x="838200" y="2110060"/>
           <a:ext cx="10515600" cy="2498562"/>
         </p:xfrm>
         <a:graphic>
@@ -7490,7 +8326,7 @@
                         <a:buNone/>
                       </a:pPr>
                       <a:r>
-                        <a:rPr lang="de-CH" sz="1800"/>
+                        <a:rPr lang="de-CH" sz="1800" dirty="0"/>
                         <a:t>3</a:t>
                       </a:r>
                     </a:p>
@@ -7506,7 +8342,7 @@
                         <a:buNone/>
                       </a:pPr>
                       <a:r>
-                        <a:rPr lang="de-CH" sz="1800"/>
+                        <a:rPr lang="de-CH" sz="1800" dirty="0"/>
                         <a:t>779, 268, 297</a:t>
                       </a:r>
                     </a:p>
@@ -7545,7 +8381,7 @@
                         <a:buNone/>
                       </a:pPr>
                       <a:r>
-                        <a:rPr lang="de-CH" sz="1800"/>
+                        <a:rPr lang="de-CH" sz="1800" dirty="0"/>
                         <a:t>6</a:t>
                       </a:r>
                     </a:p>
@@ -7600,7 +8436,7 @@
                         <a:buNone/>
                       </a:pPr>
                       <a:r>
-                        <a:rPr lang="de-CH" sz="1800"/>
+                        <a:rPr lang="de-CH" sz="1800" dirty="0"/>
                         <a:t>5</a:t>
                       </a:r>
                     </a:p>
@@ -7640,7 +8476,7 @@
                       </a:pPr>
                       <a:r>
                         <a:rPr lang="de-CH" sz="1800" dirty="0"/>
-                        <a:t>Extra 🟣</a:t>
+                        <a:t>Extra-Hard 🟣</a:t>
                       </a:r>
                     </a:p>
                   </a:txBody>
@@ -7655,7 +8491,7 @@
                         <a:buNone/>
                       </a:pPr>
                       <a:r>
-                        <a:rPr lang="de-CH" sz="1800"/>
+                        <a:rPr lang="de-CH" sz="1800" dirty="0"/>
                         <a:t>4</a:t>
                       </a:r>
                     </a:p>
@@ -7759,8 +8595,8 @@
         </p:nvSpPr>
         <p:spPr>
           <a:xfrm>
-            <a:off x="838200" y="4396596"/>
-            <a:ext cx="5212645" cy="1200329"/>
+            <a:off x="838200" y="4792468"/>
+            <a:ext cx="5498685" cy="1200329"/>
           </a:xfrm>
           <a:prstGeom prst="rect">
             <a:avLst/>
@@ -7792,26 +8628,9 @@
               <a:buChar char="•"/>
             </a:pPr>
             <a:r>
-              <a:rPr lang="de-CH" dirty="0" err="1"/>
-              <a:t>Universally</a:t>
-            </a:r>
-            <a:r>
-              <a:rPr lang="de-CH" dirty="0"/>
-              <a:t> </a:t>
-            </a:r>
-            <a:r>
-              <a:rPr lang="de-CH" dirty="0" err="1"/>
-              <a:t>familiar</a:t>
-            </a:r>
-            <a:r>
-              <a:rPr lang="de-CH" dirty="0"/>
-              <a:t> </a:t>
-            </a:r>
-            <a:r>
-              <a:rPr lang="de-CH" dirty="0" err="1"/>
-              <a:t>domain</a:t>
-            </a:r>
-            <a:endParaRPr lang="de-CH" dirty="0"/>
+              <a:rPr lang="en-CH" dirty="0"/>
+              <a:t>Easy to spot-check predicted SQL against intuition</a:t>
+            </a:r>
           </a:p>
           <a:p>
             <a:pPr marL="285750" indent="-285750">
@@ -7926,6 +8745,84 @@
               <a:t>depth</a:t>
             </a:r>
             <a:endParaRPr lang="de-CH" dirty="0"/>
+          </a:p>
+        </p:txBody>
+      </p:sp>
+      <p:sp>
+        <p:nvSpPr>
+          <p:cNvPr id="6" name="TextBox 5">
+            <a:extLst>
+              <a:ext uri="{FF2B5EF4-FFF2-40B4-BE49-F238E27FC236}">
+                <a16:creationId xmlns:a16="http://schemas.microsoft.com/office/drawing/2014/main" id="{CAC9814F-77AC-A1FB-82CC-CF47112E0167}"/>
+              </a:ext>
+            </a:extLst>
+          </p:cNvPr>
+          <p:cNvSpPr txBox="1"/>
+          <p:nvPr/>
+        </p:nvSpPr>
+        <p:spPr>
+          <a:xfrm>
+            <a:off x="838200" y="1326049"/>
+            <a:ext cx="9505950" cy="923330"/>
+          </a:xfrm>
+          <a:prstGeom prst="rect">
+            <a:avLst/>
+          </a:prstGeom>
+          <a:noFill/>
+        </p:spPr>
+        <p:txBody>
+          <a:bodyPr wrap="square">
+            <a:spAutoFit/>
+          </a:bodyPr>
+          <a:lstStyle/>
+          <a:p>
+            <a:r>
+              <a:rPr lang="en-CH" b="0" i="1" dirty="0">
+                <a:solidFill>
+                  <a:srgbClr val="FF0000"/>
+                </a:solidFill>
+                <a:effectLst/>
+                <a:latin typeface="-apple-system"/>
+              </a:rPr>
+              <a:t>Questions drawn from </a:t>
+            </a:r>
+            <a:r>
+              <a:rPr lang="en-CH" b="0" i="1" dirty="0">
+                <a:solidFill>
+                  <a:srgbClr val="FF0000"/>
+                </a:solidFill>
+                <a:effectLst/>
+                <a:latin typeface="Courier New" panose="02070309020205020404" pitchFamily="49" charset="0"/>
+              </a:rPr>
+              <a:t>data/dev.json</a:t>
+            </a:r>
+            <a:r>
+              <a:rPr lang="en-CH" b="0" i="1" dirty="0">
+                <a:solidFill>
+                  <a:srgbClr val="FF0000"/>
+                </a:solidFill>
+                <a:effectLst/>
+                <a:latin typeface="-apple-system"/>
+              </a:rPr>
+              <a:t> (Spider/BIRD-style benchmark on the Football DB</a:t>
+            </a:r>
+          </a:p>
+          <a:p>
+            <a:r>
+              <a:rPr lang="de-CH" i="1" dirty="0">
+                <a:solidFill>
+                  <a:srgbClr val="FF0000"/>
+                </a:solidFill>
+              </a:rPr>
+              <a:t>Test Set: 18 Questions (Easy 3 / Medium 6 / Hard 5 / Extra 4)</a:t>
+            </a:r>
+          </a:p>
+          <a:p>
+            <a:endParaRPr lang="en-CH" dirty="0">
+              <a:solidFill>
+                <a:srgbClr val="FF0000"/>
+              </a:solidFill>
+            </a:endParaRPr>
           </a:p>
         </p:txBody>
       </p:sp>
@@ -8013,7 +8910,7 @@
         </p:nvSpPr>
         <p:spPr>
           <a:xfrm>
-            <a:off x="838199" y="1214310"/>
+            <a:off x="838200" y="1516234"/>
             <a:ext cx="6307735" cy="4351338"/>
           </a:xfrm>
         </p:spPr>
@@ -8070,7 +8967,7 @@
               <a:t> </a:t>
             </a:r>
             <a:r>
-              <a:rPr lang="de-CH" sz="1800" dirty="0" err="1"/>
+              <a:rPr lang="de-CH" sz="1800" b="1" dirty="0" err="1"/>
               <a:t>or</a:t>
             </a:r>
             <a:r>
@@ -8083,7 +8980,7 @@
                   <a:srgbClr val="00B0F0"/>
                 </a:solidFill>
               </a:rPr>
-              <a:t>OpenAI gpt-4o-mini</a:t>
+              <a:t>qwen2.5-coder:14b </a:t>
             </a:r>
           </a:p>
           <a:p>
@@ -8101,7 +8998,7 @@
             </a:r>
             <a:r>
               <a:rPr lang="de-CH" sz="1800" dirty="0"/>
-              <a:t>  </a:t>
+              <a:t>  (OLLAMA_MODEL)</a:t>
             </a:r>
           </a:p>
           <a:p>
@@ -8109,11 +9006,34 @@
               <a:buNone/>
             </a:pPr>
             <a:r>
+              <a:rPr lang="de-CH" sz="1800" b="1" dirty="0"/>
+              <a:t>Database</a:t>
+            </a:r>
+            <a:endParaRPr lang="de-CH" sz="1800" dirty="0"/>
+          </a:p>
+          <a:p>
+            <a:r>
               <a:rPr lang="de-CH" sz="1800" dirty="0"/>
-              <a:t>     (LLM_PROVIDER, OLLAMA_MODEL, OPENAI_MODEL)</a:t>
-            </a:r>
-          </a:p>
-          <a:p>
+              <a:t>PostgreSQL, Schema exp_v3, </a:t>
+            </a:r>
+            <a:r>
+              <a:rPr lang="de-CH" sz="1800" dirty="0" err="1"/>
+              <a:t>hosted</a:t>
+            </a:r>
+            <a:r>
+              <a:rPr lang="de-CH" sz="1800" dirty="0"/>
+              <a:t> on ZHAW-Server</a:t>
+            </a:r>
+          </a:p>
+          <a:p>
+            <a:r>
+              <a:rPr lang="de-CH" sz="1800" dirty="0"/>
+              <a:t>Connection via </a:t>
+            </a:r>
+            <a:r>
+              <a:rPr lang="de-CH" sz="1800" dirty="0" err="1"/>
+              <a:t>LangChain</a:t>
+            </a:r>
             <a:endParaRPr lang="de-CH" sz="1800" dirty="0"/>
           </a:p>
           <a:p>
@@ -8122,110 +9042,97 @@
             </a:pPr>
             <a:r>
               <a:rPr lang="de-CH" sz="1800" b="1" dirty="0"/>
-              <a:t>Database</a:t>
-            </a:r>
-            <a:endParaRPr lang="de-CH" sz="1800" dirty="0"/>
-          </a:p>
-          <a:p>
+              <a:t>Approach</a:t>
+            </a:r>
+          </a:p>
+          <a:p>
+            <a:r>
+              <a:rPr lang="de-CH" sz="1800" dirty="0" err="1"/>
+              <a:t>LangGraph-based</a:t>
+            </a:r>
             <a:r>
               <a:rPr lang="de-CH" sz="1800" dirty="0"/>
-              <a:t>PostgreSQL, Schema exp_v3, </a:t>
+              <a:t> multi-</a:t>
             </a:r>
             <a:r>
               <a:rPr lang="de-CH" sz="1800" dirty="0" err="1"/>
-              <a:t>hosted</a:t>
+              <a:t>step</a:t>
             </a:r>
             <a:r>
               <a:rPr lang="de-CH" sz="1800" dirty="0"/>
-              <a:t> on ZHAW-Server</a:t>
-            </a:r>
-          </a:p>
-          <a:p>
-            <a:r>
-              <a:rPr lang="de-CH" sz="1800" dirty="0"/>
-              <a:t>Connection via </a:t>
+              <a:t> </a:t>
             </a:r>
             <a:r>
               <a:rPr lang="de-CH" sz="1800" dirty="0" err="1"/>
-              <a:t>LangChain</a:t>
+              <a:t>reasoning</a:t>
             </a:r>
             <a:r>
               <a:rPr lang="de-CH" sz="1800" dirty="0"/>
               <a:t> </a:t>
             </a:r>
-            <a:r>
-              <a:rPr lang="de-CH" sz="1800" dirty="0" err="1"/>
-              <a:t>SQLDatabase</a:t>
-            </a:r>
-            <a:endParaRPr lang="de-CH" sz="1800" dirty="0"/>
+            <a:endParaRPr lang="de-CH" sz="1800" b="1" dirty="0"/>
           </a:p>
           <a:p>
             <a:pPr marL="0" indent="0">
               <a:buNone/>
             </a:pPr>
-            <a:endParaRPr lang="de-CH" sz="1800" b="1" dirty="0"/>
+            <a:r>
+              <a:rPr lang="de-CH" sz="1800" b="1" dirty="0"/>
+              <a:t>Evaluation </a:t>
+            </a:r>
+            <a:r>
+              <a:rPr lang="de-CH" sz="1800" b="1" dirty="0" err="1"/>
+              <a:t>Metric</a:t>
+            </a:r>
+            <a:endParaRPr lang="de-CH" sz="1800" dirty="0"/>
+          </a:p>
+          <a:p>
+            <a:r>
+              <a:rPr lang="de-CH" sz="1800" dirty="0" err="1"/>
+              <a:t>Execution</a:t>
+            </a:r>
+            <a:r>
+              <a:rPr lang="de-CH" sz="1800" dirty="0"/>
+              <a:t> </a:t>
+            </a:r>
+            <a:r>
+              <a:rPr lang="de-CH" sz="1800" dirty="0" err="1"/>
+              <a:t>Accuracy</a:t>
+            </a:r>
+            <a:r>
+              <a:rPr lang="de-CH" sz="1800" dirty="0"/>
+              <a:t>: </a:t>
+            </a:r>
+            <a:r>
+              <a:rPr lang="de-CH" sz="1800" dirty="0" err="1"/>
+              <a:t>Predicted</a:t>
+            </a:r>
+            <a:r>
+              <a:rPr lang="de-CH" sz="1800" dirty="0"/>
+              <a:t> </a:t>
+            </a:r>
+            <a:r>
+              <a:rPr lang="de-CH" sz="1800" dirty="0" err="1"/>
+              <a:t>result</a:t>
+            </a:r>
+            <a:r>
+              <a:rPr lang="de-CH" sz="1800" dirty="0"/>
+              <a:t> == Gold </a:t>
+            </a:r>
+            <a:r>
+              <a:rPr lang="de-CH" sz="1800" dirty="0" err="1"/>
+              <a:t>result</a:t>
+            </a:r>
+            <a:r>
+              <a:rPr lang="de-CH" sz="1800" dirty="0"/>
+              <a:t> </a:t>
+            </a:r>
           </a:p>
           <a:p>
             <a:pPr marL="0" indent="0">
               <a:buNone/>
             </a:pPr>
             <a:r>
-              <a:rPr lang="de-CH" sz="1800" b="1" dirty="0"/>
-              <a:t>Evaluation </a:t>
-            </a:r>
-            <a:r>
-              <a:rPr lang="de-CH" sz="1800" b="1" dirty="0" err="1"/>
-              <a:t>Metric</a:t>
-            </a:r>
-            <a:endParaRPr lang="de-CH" sz="1800" dirty="0"/>
-          </a:p>
-          <a:p>
-            <a:r>
-              <a:rPr lang="de-CH" sz="1800" dirty="0" err="1"/>
-              <a:t>Execution</a:t>
-            </a:r>
-            <a:r>
-              <a:rPr lang="de-CH" sz="1800" dirty="0"/>
-              <a:t> </a:t>
-            </a:r>
-            <a:r>
-              <a:rPr lang="de-CH" sz="1800" dirty="0" err="1"/>
-              <a:t>Accuracy</a:t>
-            </a:r>
-            <a:r>
-              <a:rPr lang="de-CH" sz="1800" dirty="0"/>
-              <a:t>: </a:t>
-            </a:r>
-            <a:r>
-              <a:rPr lang="de-CH" sz="1800" dirty="0" err="1"/>
-              <a:t>Predicted</a:t>
-            </a:r>
-            <a:r>
-              <a:rPr lang="de-CH" sz="1800" dirty="0"/>
-              <a:t> </a:t>
-            </a:r>
-            <a:r>
-              <a:rPr lang="de-CH" sz="1800" dirty="0" err="1"/>
-              <a:t>result</a:t>
-            </a:r>
-            <a:r>
-              <a:rPr lang="de-CH" sz="1800" dirty="0"/>
-              <a:t> == Gold </a:t>
-            </a:r>
-            <a:r>
-              <a:rPr lang="de-CH" sz="1800" dirty="0" err="1"/>
-              <a:t>result</a:t>
-            </a:r>
-            <a:r>
-              <a:rPr lang="de-CH" sz="1800" dirty="0"/>
-              <a:t> </a:t>
-            </a:r>
-          </a:p>
-          <a:p>
-            <a:pPr marL="0" indent="0">
-              <a:buNone/>
-            </a:pPr>
-            <a:r>
               <a:rPr lang="de-CH" sz="1800" dirty="0"/>
               <a:t>     (</a:t>
             </a:r>
@@ -8237,17 +9144,6 @@
               <a:rPr lang="de-CH" sz="1800" dirty="0"/>
               <a:t> match)</a:t>
             </a:r>
-          </a:p>
-          <a:p>
-            <a:r>
-              <a:rPr lang="de-CH" sz="1800" dirty="0"/>
-              <a:t>Test Set: 18 Questions (Easy 3 / Medium 6 / Hard 5 / Extra 4)</a:t>
-            </a:r>
-          </a:p>
-          <a:p>
-            <a:pPr marL="0" indent="0">
-              <a:buNone/>
-            </a:pPr>
             <a:br>
               <a:rPr lang="de-CH" sz="1800" dirty="0"/>
             </a:br>
@@ -8400,25 +9296,126 @@
             </a:r>
             <a:r>
               <a:rPr lang="de-DE" sz="4000" dirty="0"/>
-              <a:t> - 1/3 </a:t>
-            </a:r>
-            <a:r>
-              <a:rPr lang="de-DE" sz="4000" dirty="0" err="1"/>
-              <a:t>correct</a:t>
-            </a:r>
-            <a:r>
-              <a:rPr lang="de-DE" sz="4000" dirty="0"/>
-              <a:t> </a:t>
+              <a:t> - </a:t>
+            </a:r>
+            <a:r>
+              <a:rPr lang="en-CH" i="1" dirty="0"/>
+              <a:t>Three Sample Cases</a:t>
+            </a:r>
+            <a:endParaRPr lang="de-DE" sz="4000" dirty="0"/>
+          </a:p>
+        </p:txBody>
+      </p:sp>
+      <p:sp>
+        <p:nvSpPr>
+          <p:cNvPr id="5" name="TextBox 4">
+            <a:extLst>
+              <a:ext uri="{FF2B5EF4-FFF2-40B4-BE49-F238E27FC236}">
+                <a16:creationId xmlns:a16="http://schemas.microsoft.com/office/drawing/2014/main" id="{73FF727C-009A-1839-D957-57B7E8A40ABB}"/>
+              </a:ext>
+            </a:extLst>
+          </p:cNvPr>
+          <p:cNvSpPr txBox="1"/>
+          <p:nvPr/>
+        </p:nvSpPr>
+        <p:spPr>
+          <a:xfrm>
+            <a:off x="1019502" y="1589266"/>
+            <a:ext cx="10350065" cy="1200329"/>
+          </a:xfrm>
+          <a:prstGeom prst="rect">
+            <a:avLst/>
+          </a:prstGeom>
+          <a:noFill/>
+        </p:spPr>
+        <p:txBody>
+          <a:bodyPr wrap="square">
+            <a:spAutoFit/>
+          </a:bodyPr>
+          <a:lstStyle/>
+          <a:p>
+            <a:pPr algn="l">
+              <a:buNone/>
+            </a:pPr>
+            <a:r>
+              <a:rPr lang="en-CH" sz="1200" b="0" i="1" dirty="0">
+                <a:solidFill>
+                  <a:schemeClr val="accent1"/>
+                </a:solidFill>
+                <a:effectLst/>
+                <a:latin typeface="-apple-system"/>
+              </a:rPr>
+              <a:t>"Where was the world cup in 2018?"</a:t>
+            </a:r>
+          </a:p>
+          <a:p>
+            <a:pPr algn="l">
+              <a:buNone/>
+            </a:pPr>
+            <a:r>
+              <a:rPr lang="en-CH" sz="1200" b="0" i="0" dirty="0">
+                <a:effectLst/>
+                <a:latin typeface="-apple-system"/>
+              </a:rPr>
+              <a:t>Gold:  SELECT venue FROM world_cup WHERE year = 2018 </a:t>
+            </a:r>
+          </a:p>
+          <a:p>
+            <a:pPr algn="l">
+              <a:buNone/>
+            </a:pPr>
+            <a:r>
+              <a:rPr lang="en-CH" sz="1200" b="0" i="0" dirty="0">
+                <a:effectLst/>
+                <a:latin typeface="-apple-system"/>
+              </a:rPr>
+              <a:t>Pred: SELECT T1.venue FROM world_cup T1 INNER JOIN stadium T2 ON T1.venue = T2.city WHERE ...</a:t>
+            </a:r>
+          </a:p>
+          <a:p>
+            <a:pPr algn="l">
+              <a:buNone/>
+            </a:pPr>
+            <a:endParaRPr lang="en-CH" sz="1200" b="0" i="0" dirty="0">
+              <a:effectLst/>
+              <a:latin typeface="-apple-system"/>
+            </a:endParaRPr>
+          </a:p>
+          <a:p>
+            <a:pPr algn="l">
+              <a:buNone/>
+            </a:pPr>
+            <a:r>
+              <a:rPr lang="en-CH" sz="1200" b="0" i="0" dirty="0">
+                <a:effectLst/>
+                <a:latin typeface="-apple-system"/>
+              </a:rPr>
+              <a:t>Gold result:  [('Russia',)]            Pred result: empty</a:t>
+            </a:r>
+          </a:p>
+          <a:p>
+            <a:pPr algn="l">
+              <a:buNone/>
+            </a:pPr>
+            <a:r>
+              <a:rPr lang="en-CH" sz="1200" b="0" i="0" dirty="0">
+                <a:solidFill>
+                  <a:srgbClr val="FF0000"/>
+                </a:solidFill>
+                <a:effectLst/>
+                <a:latin typeface="-apple-system"/>
+              </a:rPr>
+              <a:t>Issue: Unnecessary join on stadium table</a:t>
             </a:r>
           </a:p>
         </p:txBody>
       </p:sp>
       <p:pic>
         <p:nvPicPr>
-          <p:cNvPr id="10" name="Graphic 9">
+          <p:cNvPr id="6" name="Graphic 5">
             <a:extLst>
               <a:ext uri="{FF2B5EF4-FFF2-40B4-BE49-F238E27FC236}">
-                <a16:creationId xmlns:a16="http://schemas.microsoft.com/office/drawing/2014/main" id="{6EFCC4C4-40C6-6EBD-9E38-D64CDAE77987}"/>
+                <a16:creationId xmlns:a16="http://schemas.microsoft.com/office/drawing/2014/main" id="{961D984C-6809-5095-0993-FC06F2B5E33E}"/>
               </a:ext>
             </a:extLst>
           </p:cNvPr>
@@ -8435,21 +9432,276 @@
               </a:ext>
             </a:extLst>
           </a:blip>
-          <a:srcRect l="1228" t="12637" r="2344" b="9083"/>
+          <a:srcRect l="3339" t="14804" r="67307" b="81315"/>
           <a:stretch>
             <a:fillRect/>
           </a:stretch>
         </p:blipFill>
         <p:spPr>
           <a:xfrm>
-            <a:off x="2708030" y="1209036"/>
-            <a:ext cx="7561385" cy="5505011"/>
+            <a:off x="1019502" y="1272271"/>
+            <a:ext cx="2301767" cy="272923"/>
           </a:xfrm>
           <a:prstGeom prst="rect">
             <a:avLst/>
           </a:prstGeom>
         </p:spPr>
       </p:pic>
+      <p:pic>
+        <p:nvPicPr>
+          <p:cNvPr id="7" name="Graphic 6">
+            <a:extLst>
+              <a:ext uri="{FF2B5EF4-FFF2-40B4-BE49-F238E27FC236}">
+                <a16:creationId xmlns:a16="http://schemas.microsoft.com/office/drawing/2014/main" id="{35C803E3-0538-B763-BD68-08B5E3FD305B}"/>
+              </a:ext>
+            </a:extLst>
+          </p:cNvPr>
+          <p:cNvPicPr>
+            <a:picLocks noChangeAspect="1"/>
+          </p:cNvPicPr>
+          <p:nvPr/>
+        </p:nvPicPr>
+        <p:blipFill>
+          <a:blip>
+            <a:extLst>
+              <a:ext uri="{96DAC541-7B7A-43D3-8B79-37D633B846F1}">
+                <asvg:svgBlip xmlns:asvg="http://schemas.microsoft.com/office/drawing/2016/SVG/main" r:embed="rId3"/>
+              </a:ext>
+            </a:extLst>
+          </a:blip>
+          <a:srcRect l="3606" t="39977" r="66504" b="55460"/>
+          <a:stretch>
+            <a:fillRect/>
+          </a:stretch>
+        </p:blipFill>
+        <p:spPr>
+          <a:xfrm>
+            <a:off x="1019502" y="3001840"/>
+            <a:ext cx="2343807" cy="320912"/>
+          </a:xfrm>
+          <a:prstGeom prst="rect">
+            <a:avLst/>
+          </a:prstGeom>
+        </p:spPr>
+      </p:pic>
+      <p:sp>
+        <p:nvSpPr>
+          <p:cNvPr id="9" name="TextBox 8">
+            <a:extLst>
+              <a:ext uri="{FF2B5EF4-FFF2-40B4-BE49-F238E27FC236}">
+                <a16:creationId xmlns:a16="http://schemas.microsoft.com/office/drawing/2014/main" id="{1F529C62-7985-76B6-B25C-D0C31F16F68A}"/>
+              </a:ext>
+            </a:extLst>
+          </p:cNvPr>
+          <p:cNvSpPr txBox="1"/>
+          <p:nvPr/>
+        </p:nvSpPr>
+        <p:spPr>
+          <a:xfrm>
+            <a:off x="1019502" y="3375876"/>
+            <a:ext cx="10515599" cy="1200329"/>
+          </a:xfrm>
+          <a:prstGeom prst="rect">
+            <a:avLst/>
+          </a:prstGeom>
+          <a:noFill/>
+        </p:spPr>
+        <p:txBody>
+          <a:bodyPr wrap="square">
+            <a:spAutoFit/>
+          </a:bodyPr>
+          <a:lstStyle/>
+          <a:p>
+            <a:pPr algn="l">
+              <a:buNone/>
+            </a:pPr>
+            <a:r>
+              <a:rPr lang="en-CH" sz="1200" i="1" dirty="0">
+                <a:solidFill>
+                  <a:schemeClr val="accent1"/>
+                </a:solidFill>
+                <a:latin typeface="-apple-system"/>
+              </a:rPr>
+              <a:t>"Show all national teams who have won more than 2 world cups"</a:t>
+            </a:r>
+          </a:p>
+          <a:p>
+            <a:r>
+              <a:rPr lang="en-CH" sz="1200" dirty="0">
+                <a:latin typeface="-apple-system"/>
+              </a:rPr>
+              <a:t>Gold: ... JOIN national_team T2 ... WHERE winner = 'true' GROUP BY teamname HAVING COUNT(year) &gt; 2 </a:t>
+            </a:r>
+          </a:p>
+          <a:p>
+            <a:r>
+              <a:rPr lang="en-CH" sz="1200" dirty="0">
+                <a:latin typeface="-apple-system"/>
+              </a:rPr>
+              <a:t>Pred: ... INNER JOIN world_cup_result T2 ... WHERE winner = 'TRUE' GROUP BY teamname HAVING ...</a:t>
+            </a:r>
+          </a:p>
+          <a:p>
+            <a:endParaRPr lang="en-CH" sz="1200" dirty="0">
+              <a:latin typeface="-apple-system"/>
+            </a:endParaRPr>
+          </a:p>
+          <a:p>
+            <a:r>
+              <a:rPr lang="en-CH" sz="1200" dirty="0">
+                <a:latin typeface="-apple-system"/>
+              </a:rPr>
+              <a:t>Both results: [Argentina, Italy, Brazil, Germany]</a:t>
+            </a:r>
+          </a:p>
+          <a:p>
+            <a:pPr algn="l">
+              <a:buNone/>
+            </a:pPr>
+            <a:r>
+              <a:rPr lang="en-CH" sz="1200" dirty="0">
+                <a:solidFill>
+                  <a:srgbClr val="1B9E75"/>
+                </a:solidFill>
+                <a:latin typeface="-apple-system"/>
+              </a:rPr>
+              <a:t>Note: Different formulation, identical result</a:t>
+            </a:r>
+          </a:p>
+        </p:txBody>
+      </p:sp>
+      <p:pic>
+        <p:nvPicPr>
+          <p:cNvPr id="11" name="Graphic 10">
+            <a:extLst>
+              <a:ext uri="{FF2B5EF4-FFF2-40B4-BE49-F238E27FC236}">
+                <a16:creationId xmlns:a16="http://schemas.microsoft.com/office/drawing/2014/main" id="{988F482E-1BEE-B85E-071B-D5207045F6DB}"/>
+              </a:ext>
+            </a:extLst>
+          </p:cNvPr>
+          <p:cNvPicPr>
+            <a:picLocks noChangeAspect="1"/>
+          </p:cNvPicPr>
+          <p:nvPr/>
+        </p:nvPicPr>
+        <p:blipFill>
+          <a:blip>
+            <a:extLst>
+              <a:ext uri="{96DAC541-7B7A-43D3-8B79-37D633B846F1}">
+                <asvg:svgBlip xmlns:asvg="http://schemas.microsoft.com/office/drawing/2016/SVG/main" r:embed="rId3"/>
+              </a:ext>
+            </a:extLst>
+          </a:blip>
+          <a:srcRect l="3339" t="65467" r="67307" b="31021"/>
+          <a:stretch>
+            <a:fillRect/>
+          </a:stretch>
+        </p:blipFill>
+        <p:spPr>
+          <a:xfrm>
+            <a:off x="1019502" y="4702853"/>
+            <a:ext cx="2301766" cy="246994"/>
+          </a:xfrm>
+          <a:prstGeom prst="rect">
+            <a:avLst/>
+          </a:prstGeom>
+        </p:spPr>
+      </p:pic>
+      <p:sp>
+        <p:nvSpPr>
+          <p:cNvPr id="13" name="TextBox 12">
+            <a:extLst>
+              <a:ext uri="{FF2B5EF4-FFF2-40B4-BE49-F238E27FC236}">
+                <a16:creationId xmlns:a16="http://schemas.microsoft.com/office/drawing/2014/main" id="{B3A633FA-BEB9-97D2-8196-A4476208B030}"/>
+              </a:ext>
+            </a:extLst>
+          </p:cNvPr>
+          <p:cNvSpPr txBox="1"/>
+          <p:nvPr/>
+        </p:nvSpPr>
+        <p:spPr>
+          <a:xfrm>
+            <a:off x="1019502" y="5076495"/>
+            <a:ext cx="12061209" cy="1200329"/>
+          </a:xfrm>
+          <a:prstGeom prst="rect">
+            <a:avLst/>
+          </a:prstGeom>
+          <a:noFill/>
+        </p:spPr>
+        <p:txBody>
+          <a:bodyPr wrap="square">
+            <a:spAutoFit/>
+          </a:bodyPr>
+          <a:lstStyle/>
+          <a:p>
+            <a:r>
+              <a:rPr lang="en-CH" sz="1200" i="1" dirty="0">
+                <a:solidFill>
+                  <a:schemeClr val="accent1"/>
+                </a:solidFill>
+                <a:latin typeface="-apple-system"/>
+              </a:rPr>
+              <a:t>"Which players played for Switzerland in 2014? Return the names of the players"</a:t>
+            </a:r>
+          </a:p>
+          <a:p>
+            <a:pPr>
+              <a:buNone/>
+            </a:pPr>
+            <a:r>
+              <a:rPr lang="en-CH" sz="1200" dirty="0">
+                <a:latin typeface="-apple-system"/>
+              </a:rPr>
+              <a:t>Gold: ... JOIN player_fact ... JOIN national_team ... WHERE teamname = 'Switzerland' AND year = 2014 </a:t>
+            </a:r>
+          </a:p>
+          <a:p>
+            <a:pPr>
+              <a:buNone/>
+            </a:pPr>
+            <a:r>
+              <a:rPr lang="en-CH" sz="1200" dirty="0">
+                <a:latin typeface="-apple-system"/>
+              </a:rPr>
+              <a:t>Pred: ... JOIN player_club_team T2 ... WHERE T2.club_id = 'Q2701659' AND T1.country = 'Switzerland' ...</a:t>
+            </a:r>
+          </a:p>
+          <a:p>
+            <a:pPr>
+              <a:buNone/>
+            </a:pPr>
+            <a:endParaRPr lang="en-CH" sz="1200" dirty="0">
+              <a:latin typeface="-apple-system"/>
+            </a:endParaRPr>
+          </a:p>
+          <a:p>
+            <a:pPr>
+              <a:buNone/>
+            </a:pPr>
+            <a:r>
+              <a:rPr lang="en-CH" sz="1200" dirty="0">
+                <a:latin typeface="-apple-system"/>
+              </a:rPr>
+              <a:t>Gold result: 23 players · Pred result: SQL error</a:t>
+            </a:r>
+          </a:p>
+          <a:p>
+            <a:pPr algn="l">
+              <a:buNone/>
+            </a:pPr>
+            <a:r>
+              <a:rPr lang="en-CH" sz="1200" dirty="0">
+                <a:solidFill>
+                  <a:srgbClr val="FF0000"/>
+                </a:solidFill>
+                <a:latin typeface="-apple-system"/>
+              </a:rPr>
+              <a:t>Issue: Hallucinated column player.country</a:t>
+            </a:r>
+          </a:p>
+        </p:txBody>
+      </p:sp>
     </p:spTree>
     <p:extLst>
       <p:ext uri="{BB962C8B-B14F-4D97-AF65-F5344CB8AC3E}">
@@ -8500,19 +9752,19 @@
           <a:blip>
             <a:extLst>
               <a:ext uri="{96DAC541-7B7A-43D3-8B79-37D633B846F1}">
-                <asvg:svgBlip xmlns:asvg="http://schemas.microsoft.com/office/drawing/2016/SVG/main" r:embed="rId2"/>
+                <asvg:svgBlip xmlns:asvg="http://schemas.microsoft.com/office/drawing/2016/SVG/main" r:embed="rId3"/>
               </a:ext>
             </a:extLst>
           </a:blip>
-          <a:srcRect t="4981" b="33950"/>
+          <a:srcRect t="35636" r="51654" b="39241"/>
           <a:stretch>
             <a:fillRect/>
           </a:stretch>
         </p:blipFill>
         <p:spPr>
           <a:xfrm>
-            <a:off x="880572" y="1524191"/>
-            <a:ext cx="10897772" cy="4593395"/>
+            <a:off x="3196392" y="3505941"/>
+            <a:ext cx="3944637" cy="1414801"/>
           </a:xfrm>
           <a:prstGeom prst="rect">
             <a:avLst/>
@@ -8593,6 +9845,173 @@
           </a:p>
         </p:txBody>
       </p:sp>
+      <p:sp>
+        <p:nvSpPr>
+          <p:cNvPr id="2" name="TextBox 1">
+            <a:extLst>
+              <a:ext uri="{FF2B5EF4-FFF2-40B4-BE49-F238E27FC236}">
+                <a16:creationId xmlns:a16="http://schemas.microsoft.com/office/drawing/2014/main" id="{A10C9F52-4AC4-52D8-393E-77770B642438}"/>
+              </a:ext>
+            </a:extLst>
+          </p:cNvPr>
+          <p:cNvSpPr txBox="1"/>
+          <p:nvPr/>
+        </p:nvSpPr>
+        <p:spPr>
+          <a:xfrm>
+            <a:off x="838200" y="1486035"/>
+            <a:ext cx="11093570" cy="369332"/>
+          </a:xfrm>
+          <a:prstGeom prst="rect">
+            <a:avLst/>
+          </a:prstGeom>
+          <a:noFill/>
+        </p:spPr>
+        <p:txBody>
+          <a:bodyPr wrap="square" rtlCol="0">
+            <a:spAutoFit/>
+          </a:bodyPr>
+          <a:lstStyle/>
+          <a:p>
+            <a:r>
+              <a:rPr lang="en-CH" i="1" dirty="0">
+                <a:solidFill>
+                  <a:srgbClr val="FF0000"/>
+                </a:solidFill>
+                <a:latin typeface="-apple-system"/>
+              </a:rPr>
+              <a:t>First baseline run. Weak overall, but a starting point we improve on later</a:t>
+            </a:r>
+          </a:p>
+        </p:txBody>
+      </p:sp>
+      <p:sp>
+        <p:nvSpPr>
+          <p:cNvPr id="9" name="TextBox 8">
+            <a:extLst>
+              <a:ext uri="{FF2B5EF4-FFF2-40B4-BE49-F238E27FC236}">
+                <a16:creationId xmlns:a16="http://schemas.microsoft.com/office/drawing/2014/main" id="{19C768A5-B033-D5F8-600C-A6FB04459D88}"/>
+              </a:ext>
+            </a:extLst>
+          </p:cNvPr>
+          <p:cNvSpPr txBox="1"/>
+          <p:nvPr/>
+        </p:nvSpPr>
+        <p:spPr>
+          <a:xfrm>
+            <a:off x="838200" y="5206156"/>
+            <a:ext cx="9401689" cy="646331"/>
+          </a:xfrm>
+          <a:prstGeom prst="rect">
+            <a:avLst/>
+          </a:prstGeom>
+          <a:noFill/>
+        </p:spPr>
+        <p:txBody>
+          <a:bodyPr wrap="square">
+            <a:spAutoFit/>
+          </a:bodyPr>
+          <a:lstStyle/>
+          <a:p>
+            <a:pPr marL="285750" indent="-285750">
+              <a:buFont typeface="Arial" panose="020B0604020202020204" pitchFamily="34" charset="0"/>
+              <a:buChar char="•"/>
+            </a:pPr>
+            <a:r>
+              <a:rPr lang="en-CH" b="0" dirty="0">
+                <a:effectLst/>
+                <a:latin typeface="-apple-system"/>
+              </a:rPr>
+              <a:t>The model handles trivial lookups but collapses on anything requiring joins or multi-step reasoning (0/4 on extra-hard</a:t>
+            </a:r>
+            <a:r>
+              <a:rPr lang="en-CH" dirty="0">
+                <a:latin typeface="-apple-system"/>
+              </a:rPr>
+              <a:t>)</a:t>
+            </a:r>
+            <a:endParaRPr lang="en-CH" dirty="0"/>
+          </a:p>
+        </p:txBody>
+      </p:sp>
+      <p:sp>
+        <p:nvSpPr>
+          <p:cNvPr id="10" name="TextBox 9">
+            <a:extLst>
+              <a:ext uri="{FF2B5EF4-FFF2-40B4-BE49-F238E27FC236}">
+                <a16:creationId xmlns:a16="http://schemas.microsoft.com/office/drawing/2014/main" id="{D517D808-522D-46AA-484A-21F3BE42FFDE}"/>
+              </a:ext>
+            </a:extLst>
+          </p:cNvPr>
+          <p:cNvSpPr txBox="1"/>
+          <p:nvPr/>
+        </p:nvSpPr>
+        <p:spPr>
+          <a:xfrm>
+            <a:off x="796579" y="1987885"/>
+            <a:ext cx="4947765" cy="369332"/>
+          </a:xfrm>
+          <a:prstGeom prst="rect">
+            <a:avLst/>
+          </a:prstGeom>
+          <a:noFill/>
+        </p:spPr>
+        <p:txBody>
+          <a:bodyPr wrap="none" rtlCol="0">
+            <a:spAutoFit/>
+          </a:bodyPr>
+          <a:lstStyle/>
+          <a:p>
+            <a:pPr marL="285750" indent="-285750">
+              <a:buFont typeface="Arial" panose="020B0604020202020204" pitchFamily="34" charset="0"/>
+              <a:buChar char="•"/>
+            </a:pPr>
+            <a:r>
+              <a:rPr lang="en-CH" dirty="0"/>
+              <a:t>Accuracy: 22.2 % with </a:t>
+            </a:r>
+            <a:r>
+              <a:rPr lang="en-CH" dirty="0">
+                <a:solidFill>
+                  <a:srgbClr val="00B0F0"/>
+                </a:solidFill>
+              </a:rPr>
+              <a:t>the llama3.2:1b model</a:t>
+            </a:r>
+          </a:p>
+        </p:txBody>
+      </p:sp>
+      <p:pic>
+        <p:nvPicPr>
+          <p:cNvPr id="11" name="Picture 10">
+            <a:extLst>
+              <a:ext uri="{FF2B5EF4-FFF2-40B4-BE49-F238E27FC236}">
+                <a16:creationId xmlns:a16="http://schemas.microsoft.com/office/drawing/2014/main" id="{2E015E34-5CB5-47F0-5531-877950117607}"/>
+              </a:ext>
+            </a:extLst>
+          </p:cNvPr>
+          <p:cNvPicPr>
+            <a:picLocks noChangeAspect="1"/>
+          </p:cNvPicPr>
+          <p:nvPr/>
+        </p:nvPicPr>
+        <p:blipFill rotWithShape="1">
+          <a:blip r:embed="rId4"/>
+          <a:srcRect l="11689" t="14444" r="10370" b="62540"/>
+          <a:stretch>
+            <a:fillRect/>
+          </a:stretch>
+        </p:blipFill>
+        <p:spPr>
+          <a:xfrm>
+            <a:off x="1945278" y="2339002"/>
+            <a:ext cx="7187532" cy="1011029"/>
+          </a:xfrm>
+          <a:prstGeom prst="rect">
+            <a:avLst/>
+          </a:prstGeom>
+        </p:spPr>
+      </p:pic>
     </p:spTree>
     <p:extLst>
       <p:ext uri="{BB962C8B-B14F-4D97-AF65-F5344CB8AC3E}">
@@ -8641,9 +10060,12 @@
         </p:nvSpPr>
         <p:spPr>
           <a:xfrm>
-            <a:off x="838200" y="1825625"/>
+            <a:off x="838200" y="1736475"/>
             <a:ext cx="10515600" cy="2869943"/>
           </a:xfrm>
+          <a:solidFill>
+            <a:schemeClr val="bg1"/>
+          </a:solidFill>
         </p:spPr>
         <p:txBody>
           <a:bodyPr>
@@ -8653,17 +10075,33 @@
           <a:p>
             <a:r>
               <a:rPr lang="de-CH" sz="1800" dirty="0"/>
-              <a:t>The 1B </a:t>
-            </a:r>
-            <a:r>
-              <a:rPr lang="de-CH" sz="1800" dirty="0" err="1"/>
-              <a:t>model</a:t>
+              <a:t>The </a:t>
+            </a:r>
+            <a:r>
+              <a:rPr lang="de-CH" sz="1800" i="1" dirty="0">
+                <a:solidFill>
+                  <a:srgbClr val="00B0F0"/>
+                </a:solidFill>
+              </a:rPr>
+              <a:t>llama3.2:1b</a:t>
             </a:r>
             <a:r>
               <a:rPr lang="de-CH" sz="1800" dirty="0"/>
               <a:t> </a:t>
             </a:r>
             <a:r>
+              <a:rPr lang="de-CH" sz="1800" i="1" dirty="0" err="1">
+                <a:solidFill>
+                  <a:srgbClr val="00B0F0"/>
+                </a:solidFill>
+              </a:rPr>
+              <a:t>model</a:t>
+            </a:r>
+            <a:r>
+              <a:rPr lang="de-CH" sz="1800" dirty="0"/>
+              <a:t> </a:t>
+            </a:r>
+            <a:r>
               <a:rPr lang="de-CH" sz="1800" dirty="0" err="1"/>
               <a:t>fails</a:t>
             </a:r>
@@ -8712,248 +10150,66 @@
               <a:t>, </a:t>
             </a:r>
             <a:r>
-              <a:rPr lang="de-CH" sz="1800" dirty="0" err="1"/>
+              <a:rPr lang="de-CH" sz="1800" dirty="0" err="1">
+                <a:solidFill>
+                  <a:srgbClr val="FF0000"/>
+                </a:solidFill>
+              </a:rPr>
               <a:t>wrong</a:t>
             </a:r>
             <a:r>
+              <a:rPr lang="de-CH" sz="1800" dirty="0">
+                <a:solidFill>
+                  <a:srgbClr val="FF0000"/>
+                </a:solidFill>
+              </a:rPr>
+              <a:t> </a:t>
+            </a:r>
+            <a:r>
+              <a:rPr lang="de-CH" sz="1800" dirty="0" err="1">
+                <a:solidFill>
+                  <a:srgbClr val="FF0000"/>
+                </a:solidFill>
+              </a:rPr>
+              <a:t>joins</a:t>
+            </a:r>
+            <a:r>
+              <a:rPr lang="de-CH" sz="1800" dirty="0">
+                <a:solidFill>
+                  <a:srgbClr val="FF0000"/>
+                </a:solidFill>
+              </a:rPr>
+              <a:t> </a:t>
+            </a:r>
+            <a:r>
               <a:rPr lang="de-CH" sz="1800" dirty="0"/>
+              <a:t>and </a:t>
+            </a:r>
+            <a:r>
+              <a:rPr lang="de-CH" sz="1800" dirty="0" err="1">
+                <a:solidFill>
+                  <a:srgbClr val="FF0000"/>
+                </a:solidFill>
+              </a:rPr>
+              <a:t>hallucinated</a:t>
+            </a:r>
+            <a:r>
+              <a:rPr lang="de-CH" sz="1800" dirty="0">
+                <a:solidFill>
+                  <a:srgbClr val="FF0000"/>
+                </a:solidFill>
+              </a:rPr>
               <a:t> </a:t>
             </a:r>
             <a:r>
-              <a:rPr lang="de-CH" sz="1800" dirty="0" err="1"/>
-              <a:t>joins</a:t>
-            </a:r>
-            <a:r>
-              <a:rPr lang="de-CH" sz="1800" dirty="0"/>
-              <a:t> and </a:t>
-            </a:r>
-            <a:r>
-              <a:rPr lang="de-CH" sz="1800" dirty="0" err="1"/>
-              <a:t>hallucinated</a:t>
-            </a:r>
-            <a:r>
-              <a:rPr lang="de-CH" sz="1800" dirty="0"/>
-              <a:t> </a:t>
-            </a:r>
-            <a:r>
-              <a:rPr lang="de-CH" sz="1800" dirty="0" err="1"/>
+              <a:rPr lang="de-CH" sz="1800" dirty="0" err="1">
+                <a:solidFill>
+                  <a:srgbClr val="FF0000"/>
+                </a:solidFill>
+              </a:rPr>
               <a:t>columns</a:t>
             </a:r>
-            <a:r>
-              <a:rPr lang="de-CH" sz="1800" dirty="0"/>
-              <a:t> </a:t>
-            </a:r>
-            <a:r>
-              <a:rPr lang="de-CH" sz="1800" dirty="0" err="1"/>
-              <a:t>account</a:t>
-            </a:r>
-            <a:r>
-              <a:rPr lang="de-CH" sz="1800" dirty="0"/>
-              <a:t> </a:t>
-            </a:r>
-            <a:r>
-              <a:rPr lang="de-CH" sz="1800" dirty="0" err="1"/>
-              <a:t>for</a:t>
-            </a:r>
-            <a:r>
-              <a:rPr lang="de-CH" sz="1800" dirty="0"/>
-              <a:t> 11 </a:t>
-            </a:r>
-            <a:r>
-              <a:rPr lang="de-CH" sz="1800" dirty="0" err="1"/>
-              <a:t>of</a:t>
-            </a:r>
-            <a:r>
-              <a:rPr lang="de-CH" sz="1800" dirty="0"/>
-              <a:t> </a:t>
-            </a:r>
-            <a:r>
-              <a:rPr lang="de-CH" sz="1800" dirty="0" err="1"/>
-              <a:t>the</a:t>
-            </a:r>
-            <a:r>
-              <a:rPr lang="de-CH" sz="1800" dirty="0"/>
-              <a:t> 14 </a:t>
-            </a:r>
-            <a:r>
-              <a:rPr lang="de-CH" sz="1800" dirty="0" err="1"/>
-              <a:t>failures</a:t>
-            </a:r>
             <a:endParaRPr lang="de-CH" sz="1800" dirty="0"/>
-          </a:p>
-          <a:p>
-            <a:pPr lvl="1"/>
-            <a:r>
-              <a:rPr lang="de-CH" sz="1800" dirty="0" err="1"/>
-              <a:t>Accuracy</a:t>
-            </a:r>
-            <a:r>
-              <a:rPr lang="de-CH" sz="1800" dirty="0"/>
-              <a:t> </a:t>
-            </a:r>
-            <a:r>
-              <a:rPr lang="de-CH" sz="1800" dirty="0" err="1"/>
-              <a:t>drops</a:t>
-            </a:r>
-            <a:r>
-              <a:rPr lang="de-CH" sz="1800" dirty="0"/>
-              <a:t> </a:t>
-            </a:r>
-            <a:r>
-              <a:rPr lang="de-CH" sz="1800" dirty="0" err="1"/>
-              <a:t>sharply</a:t>
-            </a:r>
-            <a:r>
-              <a:rPr lang="de-CH" sz="1800" dirty="0"/>
-              <a:t> </a:t>
-            </a:r>
-            <a:r>
-              <a:rPr lang="de-CH" sz="1800" dirty="0" err="1"/>
-              <a:t>with</a:t>
-            </a:r>
-            <a:r>
-              <a:rPr lang="de-CH" sz="1800" dirty="0"/>
-              <a:t> </a:t>
-            </a:r>
-            <a:r>
-              <a:rPr lang="de-CH" sz="1800" dirty="0" err="1"/>
-              <a:t>increasing</a:t>
-            </a:r>
-            <a:r>
-              <a:rPr lang="de-CH" sz="1800" dirty="0"/>
-              <a:t> </a:t>
-            </a:r>
-            <a:r>
-              <a:rPr lang="de-CH" sz="1800" dirty="0" err="1"/>
-              <a:t>difficultyEasy</a:t>
-            </a:r>
-            <a:r>
-              <a:rPr lang="de-CH" sz="1800" dirty="0"/>
-              <a:t>: 67%</a:t>
-            </a:r>
-          </a:p>
-          <a:p>
-            <a:pPr lvl="1"/>
-            <a:r>
-              <a:rPr lang="de-CH" sz="1800" dirty="0"/>
-              <a:t>Extra: 0%</a:t>
-            </a:r>
-          </a:p>
-          <a:p>
-            <a:pPr marL="457200" lvl="1" indent="0">
-              <a:buNone/>
-            </a:pPr>
-            <a:endParaRPr lang="de-CH" sz="1800" dirty="0"/>
-          </a:p>
-          <a:p>
-            <a:r>
-              <a:rPr lang="de-CH" sz="1800" dirty="0"/>
-              <a:t>2 </a:t>
-            </a:r>
-            <a:r>
-              <a:rPr lang="de-CH" sz="1800" dirty="0" err="1"/>
-              <a:t>of</a:t>
-            </a:r>
-            <a:r>
-              <a:rPr lang="de-CH" sz="1800" dirty="0"/>
-              <a:t> </a:t>
-            </a:r>
-            <a:r>
-              <a:rPr lang="de-CH" sz="1800" dirty="0" err="1"/>
-              <a:t>the</a:t>
-            </a:r>
-            <a:r>
-              <a:rPr lang="de-CH" sz="1800" dirty="0"/>
-              <a:t> 4 “</a:t>
-            </a:r>
-            <a:r>
-              <a:rPr lang="de-CH" sz="1800" dirty="0" err="1"/>
-              <a:t>correct</a:t>
-            </a:r>
-            <a:r>
-              <a:rPr lang="de-CH" sz="1800" dirty="0"/>
-              <a:t>” </a:t>
-            </a:r>
-            <a:r>
-              <a:rPr lang="de-CH" sz="1800" dirty="0" err="1"/>
-              <a:t>answers</a:t>
-            </a:r>
-            <a:r>
-              <a:rPr lang="de-CH" sz="1800" dirty="0"/>
-              <a:t> </a:t>
-            </a:r>
-            <a:r>
-              <a:rPr lang="de-CH" sz="1800" dirty="0" err="1"/>
-              <a:t>were</a:t>
-            </a:r>
-            <a:r>
-              <a:rPr lang="de-CH" sz="1800" dirty="0"/>
-              <a:t> </a:t>
-            </a:r>
-            <a:r>
-              <a:rPr lang="de-CH" sz="1800" dirty="0" err="1"/>
-              <a:t>only</a:t>
-            </a:r>
-            <a:r>
-              <a:rPr lang="de-CH" sz="1800" dirty="0"/>
-              <a:t> lucky </a:t>
-            </a:r>
-            <a:r>
-              <a:rPr lang="de-CH" sz="1800" dirty="0" err="1"/>
-              <a:t>guesses</a:t>
-            </a:r>
-            <a:endParaRPr lang="de-CH" sz="1800" dirty="0"/>
-          </a:p>
-          <a:p>
-            <a:r>
-              <a:rPr lang="de-CH" sz="1800" dirty="0" err="1"/>
-              <a:t>Effective</a:t>
-            </a:r>
-            <a:r>
-              <a:rPr lang="de-CH" sz="1800" dirty="0"/>
-              <a:t> real </a:t>
-            </a:r>
-            <a:r>
-              <a:rPr lang="de-CH" sz="1800" dirty="0" err="1"/>
-              <a:t>accuracy</a:t>
-            </a:r>
-            <a:r>
-              <a:rPr lang="de-CH" sz="1800" dirty="0"/>
-              <a:t> </a:t>
-            </a:r>
-            <a:r>
-              <a:rPr lang="de-CH" sz="1800" dirty="0" err="1"/>
-              <a:t>is</a:t>
-            </a:r>
-            <a:r>
-              <a:rPr lang="de-CH" sz="1800" dirty="0"/>
-              <a:t> </a:t>
-            </a:r>
-            <a:r>
-              <a:rPr lang="de-CH" sz="1800" dirty="0" err="1"/>
-              <a:t>therefore</a:t>
-            </a:r>
-            <a:r>
-              <a:rPr lang="de-CH" sz="1800" dirty="0"/>
-              <a:t> </a:t>
-            </a:r>
-            <a:r>
-              <a:rPr lang="de-CH" sz="1800" dirty="0" err="1"/>
-              <a:t>closer</a:t>
-            </a:r>
-            <a:r>
-              <a:rPr lang="de-CH" sz="1800" dirty="0"/>
-              <a:t> </a:t>
-            </a:r>
-            <a:r>
-              <a:rPr lang="de-CH" sz="1800" dirty="0" err="1"/>
-              <a:t>to</a:t>
-            </a:r>
-            <a:r>
-              <a:rPr lang="de-CH" sz="1800" dirty="0"/>
-              <a:t> ~11%</a:t>
-            </a:r>
-            <a:endParaRPr lang="de-DE" sz="1800" dirty="0"/>
           </a:p>
         </p:txBody>
       </p:sp>
@@ -9027,6 +10283,379 @@
           </a:p>
         </p:txBody>
       </p:sp>
+      <p:grpSp>
+        <p:nvGrpSpPr>
+          <p:cNvPr id="14" name="Group 13">
+            <a:extLst>
+              <a:ext uri="{FF2B5EF4-FFF2-40B4-BE49-F238E27FC236}">
+                <a16:creationId xmlns:a16="http://schemas.microsoft.com/office/drawing/2014/main" id="{EF38BCAF-40A7-EFC1-87FB-68CA637F3E5C}"/>
+              </a:ext>
+            </a:extLst>
+          </p:cNvPr>
+          <p:cNvGrpSpPr/>
+          <p:nvPr/>
+        </p:nvGrpSpPr>
+        <p:grpSpPr>
+          <a:xfrm>
+            <a:off x="984166" y="2244080"/>
+            <a:ext cx="10223668" cy="2523282"/>
+            <a:chOff x="938031" y="2788875"/>
+            <a:chExt cx="10223668" cy="2523282"/>
+          </a:xfrm>
+        </p:grpSpPr>
+        <p:pic>
+          <p:nvPicPr>
+            <p:cNvPr id="2" name="Inhaltsplatzhalter 4">
+              <a:extLst>
+                <a:ext uri="{FF2B5EF4-FFF2-40B4-BE49-F238E27FC236}">
+                  <a16:creationId xmlns:a16="http://schemas.microsoft.com/office/drawing/2014/main" id="{791D9141-E47B-2429-58B6-D2739F39D895}"/>
+                </a:ext>
+              </a:extLst>
+            </p:cNvPr>
+            <p:cNvPicPr>
+              <a:picLocks noChangeAspect="1"/>
+            </p:cNvPicPr>
+            <p:nvPr/>
+          </p:nvPicPr>
+          <p:blipFill>
+            <a:blip>
+              <a:extLst>
+                <a:ext uri="{96DAC541-7B7A-43D3-8B79-37D633B846F1}">
+                  <asvg:svgBlip xmlns:asvg="http://schemas.microsoft.com/office/drawing/2016/SVG/main" r:embed="rId3"/>
+                </a:ext>
+              </a:extLst>
+            </a:blip>
+            <a:srcRect l="51424" t="29053" r="3372" b="36626"/>
+            <a:stretch>
+              <a:fillRect/>
+            </a:stretch>
+          </p:blipFill>
+          <p:spPr>
+            <a:xfrm>
+              <a:off x="938031" y="2788875"/>
+              <a:ext cx="4815070" cy="2523282"/>
+            </a:xfrm>
+            <a:prstGeom prst="rect">
+              <a:avLst/>
+            </a:prstGeom>
+          </p:spPr>
+        </p:pic>
+        <p:sp>
+          <p:nvSpPr>
+            <p:cNvPr id="5" name="TextBox 4">
+              <a:extLst>
+                <a:ext uri="{FF2B5EF4-FFF2-40B4-BE49-F238E27FC236}">
+                  <a16:creationId xmlns:a16="http://schemas.microsoft.com/office/drawing/2014/main" id="{933E0D53-E3A7-EB22-0C4F-5B65CB3A4160}"/>
+                </a:ext>
+              </a:extLst>
+            </p:cNvPr>
+            <p:cNvSpPr txBox="1"/>
+            <p:nvPr/>
+          </p:nvSpPr>
+          <p:spPr>
+            <a:xfrm>
+              <a:off x="6631484" y="3470890"/>
+              <a:ext cx="4530215" cy="369332"/>
+            </a:xfrm>
+            <a:prstGeom prst="rect">
+              <a:avLst/>
+            </a:prstGeom>
+            <a:noFill/>
+          </p:spPr>
+          <p:txBody>
+            <a:bodyPr wrap="none" rtlCol="0">
+              <a:spAutoFit/>
+            </a:bodyPr>
+            <a:lstStyle/>
+            <a:p>
+              <a:r>
+                <a:rPr lang="en-CH" i="1" dirty="0">
+                  <a:solidFill>
+                    <a:srgbClr val="FF0000"/>
+                  </a:solidFill>
+                </a:rPr>
+                <a:t>This indicates that we need a TABLE_GUIDE </a:t>
+              </a:r>
+            </a:p>
+          </p:txBody>
+        </p:sp>
+        <p:sp>
+          <p:nvSpPr>
+            <p:cNvPr id="9" name="Right Brace 8">
+              <a:extLst>
+                <a:ext uri="{FF2B5EF4-FFF2-40B4-BE49-F238E27FC236}">
+                  <a16:creationId xmlns:a16="http://schemas.microsoft.com/office/drawing/2014/main" id="{A63793AE-58F4-4D9C-37A1-89F8719D2A58}"/>
+                </a:ext>
+              </a:extLst>
+            </p:cNvPr>
+            <p:cNvSpPr/>
+            <p:nvPr/>
+          </p:nvSpPr>
+          <p:spPr>
+            <a:xfrm>
+              <a:off x="5852932" y="3260596"/>
+              <a:ext cx="586451" cy="789920"/>
+            </a:xfrm>
+            <a:prstGeom prst="rightBrace">
+              <a:avLst/>
+            </a:prstGeom>
+            <a:solidFill>
+              <a:schemeClr val="bg1"/>
+            </a:solidFill>
+            <a:ln>
+              <a:solidFill>
+                <a:srgbClr val="FF0000"/>
+              </a:solidFill>
+            </a:ln>
+          </p:spPr>
+          <p:style>
+            <a:lnRef idx="2">
+              <a:schemeClr val="accent1"/>
+            </a:lnRef>
+            <a:fillRef idx="0">
+              <a:schemeClr val="accent1"/>
+            </a:fillRef>
+            <a:effectRef idx="1">
+              <a:schemeClr val="accent1"/>
+            </a:effectRef>
+            <a:fontRef idx="minor">
+              <a:schemeClr val="tx1"/>
+            </a:fontRef>
+          </p:style>
+          <p:txBody>
+            <a:bodyPr rtlCol="0" anchor="ctr"/>
+            <a:lstStyle/>
+            <a:p>
+              <a:pPr algn="ctr"/>
+              <a:endParaRPr lang="en-CH" dirty="0">
+                <a:solidFill>
+                  <a:srgbClr val="FF0000"/>
+                </a:solidFill>
+              </a:endParaRPr>
+            </a:p>
+          </p:txBody>
+        </p:sp>
+      </p:grpSp>
+      <p:sp>
+        <p:nvSpPr>
+          <p:cNvPr id="11" name="TextBox 10">
+            <a:extLst>
+              <a:ext uri="{FF2B5EF4-FFF2-40B4-BE49-F238E27FC236}">
+                <a16:creationId xmlns:a16="http://schemas.microsoft.com/office/drawing/2014/main" id="{312CB8A9-FCAE-56A3-9407-469C70F4E13E}"/>
+              </a:ext>
+            </a:extLst>
+          </p:cNvPr>
+          <p:cNvSpPr txBox="1"/>
+          <p:nvPr/>
+        </p:nvSpPr>
+        <p:spPr>
+          <a:xfrm>
+            <a:off x="838200" y="4744691"/>
+            <a:ext cx="10137840" cy="369332"/>
+          </a:xfrm>
+          <a:prstGeom prst="rect">
+            <a:avLst/>
+          </a:prstGeom>
+          <a:noFill/>
+        </p:spPr>
+        <p:txBody>
+          <a:bodyPr wrap="none" rtlCol="0">
+            <a:spAutoFit/>
+          </a:bodyPr>
+          <a:lstStyle/>
+          <a:p>
+            <a:pPr marL="285750" indent="-285750">
+              <a:buFont typeface="Arial" panose="020B0604020202020204" pitchFamily="34" charset="0"/>
+              <a:buChar char="•"/>
+            </a:pPr>
+            <a:r>
+              <a:rPr lang="en-CH" dirty="0"/>
+              <a:t>This tells us that </a:t>
+            </a:r>
+            <a:r>
+              <a:rPr lang="de-CH" i="1" dirty="0">
+                <a:solidFill>
+                  <a:srgbClr val="00B0F0"/>
+                </a:solidFill>
+              </a:rPr>
+              <a:t>llama3.2:1b</a:t>
+            </a:r>
+            <a:r>
+              <a:rPr lang="de-CH" dirty="0"/>
+              <a:t> </a:t>
+            </a:r>
+            <a:r>
+              <a:rPr lang="de-CH" i="1" dirty="0" err="1"/>
+              <a:t>is</a:t>
+            </a:r>
+            <a:r>
+              <a:rPr lang="de-CH" i="1" dirty="0"/>
+              <a:t> </a:t>
+            </a:r>
+            <a:r>
+              <a:rPr lang="de-CH" i="1" dirty="0" err="1"/>
+              <a:t>too</a:t>
+            </a:r>
+            <a:r>
+              <a:rPr lang="de-CH" i="1" dirty="0"/>
+              <a:t> </a:t>
+            </a:r>
+            <a:r>
+              <a:rPr lang="de-CH" i="1" dirty="0" err="1"/>
+              <a:t>weak</a:t>
+            </a:r>
+            <a:r>
+              <a:rPr lang="de-CH" i="1" dirty="0"/>
+              <a:t> and </a:t>
+            </a:r>
+            <a:r>
+              <a:rPr lang="de-CH" i="1" dirty="0" err="1"/>
+              <a:t>thus</a:t>
+            </a:r>
+            <a:r>
+              <a:rPr lang="de-CH" i="1" dirty="0"/>
+              <a:t> </a:t>
+            </a:r>
+            <a:r>
+              <a:rPr lang="de-CH" i="1" dirty="0" err="1"/>
+              <a:t>we</a:t>
+            </a:r>
+            <a:r>
+              <a:rPr lang="de-CH" i="1" dirty="0"/>
+              <a:t> </a:t>
+            </a:r>
+            <a:r>
+              <a:rPr lang="de-CH" i="1" dirty="0" err="1"/>
+              <a:t>need</a:t>
+            </a:r>
+            <a:r>
+              <a:rPr lang="de-CH" i="1" dirty="0"/>
+              <a:t> a </a:t>
+            </a:r>
+            <a:r>
+              <a:rPr lang="de-CH" i="1" dirty="0" err="1"/>
+              <a:t>better</a:t>
+            </a:r>
+            <a:r>
+              <a:rPr lang="de-CH" i="1" dirty="0"/>
+              <a:t> </a:t>
+            </a:r>
+            <a:r>
+              <a:rPr lang="de-CH" i="1" dirty="0" err="1"/>
+              <a:t>model</a:t>
+            </a:r>
+            <a:r>
+              <a:rPr lang="de-CH" i="1" dirty="0"/>
+              <a:t> </a:t>
+            </a:r>
+            <a:r>
+              <a:rPr lang="de-CH" i="1" dirty="0" err="1"/>
+              <a:t>that</a:t>
+            </a:r>
+            <a:r>
+              <a:rPr lang="de-CH" i="1" dirty="0"/>
+              <a:t> </a:t>
+            </a:r>
+            <a:r>
+              <a:rPr lang="de-CH" i="1" dirty="0" err="1"/>
+              <a:t>doesn’t</a:t>
+            </a:r>
+            <a:r>
+              <a:rPr lang="de-CH" i="1" dirty="0"/>
+              <a:t> </a:t>
+            </a:r>
+            <a:r>
+              <a:rPr lang="de-CH" i="1" dirty="0" err="1"/>
+              <a:t>hallucinate</a:t>
+            </a:r>
+            <a:endParaRPr lang="de-CH" i="1" dirty="0"/>
+          </a:p>
+        </p:txBody>
+      </p:sp>
+      <p:sp>
+        <p:nvSpPr>
+          <p:cNvPr id="13" name="TextBox 12">
+            <a:extLst>
+              <a:ext uri="{FF2B5EF4-FFF2-40B4-BE49-F238E27FC236}">
+                <a16:creationId xmlns:a16="http://schemas.microsoft.com/office/drawing/2014/main" id="{FF74F6D1-4C77-F5C6-3A64-8E549B4B4833}"/>
+              </a:ext>
+            </a:extLst>
+          </p:cNvPr>
+          <p:cNvSpPr txBox="1"/>
+          <p:nvPr/>
+        </p:nvSpPr>
+        <p:spPr>
+          <a:xfrm>
+            <a:off x="838200" y="5401078"/>
+            <a:ext cx="5295232" cy="369332"/>
+          </a:xfrm>
+          <a:prstGeom prst="rect">
+            <a:avLst/>
+          </a:prstGeom>
+          <a:noFill/>
+        </p:spPr>
+        <p:txBody>
+          <a:bodyPr wrap="none" rtlCol="0">
+            <a:spAutoFit/>
+          </a:bodyPr>
+          <a:lstStyle/>
+          <a:p>
+            <a:pPr marL="285750" indent="-285750">
+              <a:buFont typeface="Arial" panose="020B0604020202020204" pitchFamily="34" charset="0"/>
+              <a:buChar char="•"/>
+            </a:pPr>
+            <a:r>
+              <a:rPr lang="de-CH" dirty="0"/>
+              <a:t> In-</a:t>
+            </a:r>
+            <a:r>
+              <a:rPr lang="de-CH" dirty="0" err="1"/>
+              <a:t>context</a:t>
+            </a:r>
+            <a:r>
+              <a:rPr lang="de-CH" dirty="0"/>
+              <a:t> </a:t>
+            </a:r>
+            <a:r>
+              <a:rPr lang="de-CH" dirty="0" err="1"/>
+              <a:t>learning</a:t>
+            </a:r>
+            <a:r>
+              <a:rPr lang="de-CH" dirty="0"/>
+              <a:t> / </a:t>
+            </a:r>
+            <a:r>
+              <a:rPr lang="de-CH" dirty="0" err="1"/>
+              <a:t>few-shot</a:t>
+            </a:r>
+            <a:r>
+              <a:rPr lang="de-CH" dirty="0"/>
+              <a:t> </a:t>
+            </a:r>
+            <a:r>
+              <a:rPr lang="de-CH" dirty="0" err="1"/>
+              <a:t>examples</a:t>
+            </a:r>
+            <a:r>
+              <a:rPr lang="de-CH" dirty="0"/>
+              <a:t> </a:t>
+            </a:r>
+            <a:r>
+              <a:rPr lang="de-CH" b="1" dirty="0" err="1"/>
+              <a:t>did</a:t>
+            </a:r>
+            <a:r>
+              <a:rPr lang="de-CH" dirty="0"/>
+              <a:t> </a:t>
+            </a:r>
+            <a:r>
+              <a:rPr lang="de-CH" dirty="0" err="1"/>
+              <a:t>help</a:t>
+            </a:r>
+            <a:endParaRPr lang="en-CH" dirty="0"/>
+          </a:p>
+        </p:txBody>
+      </p:sp>
     </p:spTree>
     <p:extLst>
       <p:ext uri="{BB962C8B-B14F-4D97-AF65-F5344CB8AC3E}">
@@ -9057,6 +10686,46 @@
           <a:chExt cx="0" cy="0"/>
         </a:xfrm>
       </p:grpSpPr>
+      <p:sp>
+        <p:nvSpPr>
+          <p:cNvPr id="9" name="TextBox 8">
+            <a:extLst>
+              <a:ext uri="{FF2B5EF4-FFF2-40B4-BE49-F238E27FC236}">
+                <a16:creationId xmlns:a16="http://schemas.microsoft.com/office/drawing/2014/main" id="{F8DA8926-E4BE-2100-50E3-ABDCEE838189}"/>
+              </a:ext>
+            </a:extLst>
+          </p:cNvPr>
+          <p:cNvSpPr txBox="1"/>
+          <p:nvPr/>
+        </p:nvSpPr>
+        <p:spPr>
+          <a:xfrm>
+            <a:off x="838200" y="1249319"/>
+            <a:ext cx="7034013" cy="3015521"/>
+          </a:xfrm>
+          <a:prstGeom prst="rect">
+            <a:avLst/>
+          </a:prstGeom>
+          <a:noFill/>
+          <a:ln>
+            <a:solidFill>
+              <a:schemeClr val="tx1">
+                <a:lumMod val="85000"/>
+                <a:lumOff val="15000"/>
+              </a:schemeClr>
+            </a:solidFill>
+          </a:ln>
+        </p:spPr>
+        <p:txBody>
+          <a:bodyPr wrap="square" rtlCol="0">
+            <a:spAutoFit/>
+          </a:bodyPr>
+          <a:lstStyle/>
+          <a:p>
+            <a:endParaRPr lang="en-CH" dirty="0"/>
+          </a:p>
+        </p:txBody>
+      </p:sp>
       <p:pic>
         <p:nvPicPr>
           <p:cNvPr id="5" name="Inhaltsplatzhalter 4">
@@ -9077,19 +10746,19 @@
           <a:blip>
             <a:extLst>
               <a:ext uri="{96DAC541-7B7A-43D3-8B79-37D633B846F1}">
-                <asvg:svgBlip xmlns:asvg="http://schemas.microsoft.com/office/drawing/2016/SVG/main" r:embed="rId2"/>
+                <asvg:svgBlip xmlns:asvg="http://schemas.microsoft.com/office/drawing/2016/SVG/main" r:embed="rId3"/>
               </a:ext>
             </a:extLst>
           </a:blip>
-          <a:srcRect t="14920" b="28557"/>
+          <a:srcRect t="23769" b="28557"/>
           <a:stretch>
             <a:fillRect/>
           </a:stretch>
         </p:blipFill>
         <p:spPr>
           <a:xfrm>
-            <a:off x="1277815" y="1327816"/>
-            <a:ext cx="6554235" cy="3268803"/>
+            <a:off x="1570357" y="1378548"/>
+            <a:ext cx="6554235" cy="2757061"/>
           </a:xfrm>
           <a:prstGeom prst="rect">
             <a:avLst/>
@@ -9144,63 +10813,19 @@
           </a:lstStyle>
           <a:p>
             <a:r>
-              <a:rPr lang="de-DE" sz="4000" dirty="0"/>
-              <a:t>Text-</a:t>
-            </a:r>
-            <a:r>
-              <a:rPr lang="de-DE" sz="4000" dirty="0" err="1"/>
-              <a:t>to</a:t>
-            </a:r>
-            <a:r>
-              <a:rPr lang="de-DE" sz="4000" dirty="0"/>
-              <a:t>-SQL Experiments </a:t>
-            </a:r>
+              <a:rPr lang="en-CH" dirty="0"/>
+              <a:t>Optional Techniques Implemented</a:t>
+            </a:r>
+            <a:endParaRPr lang="de-DE" sz="4000" dirty="0"/>
           </a:p>
         </p:txBody>
       </p:sp>
-      <p:pic>
-        <p:nvPicPr>
-          <p:cNvPr id="4" name="Inhaltsplatzhalter 4">
+      <p:sp>
+        <p:nvSpPr>
+          <p:cNvPr id="8" name="TextBox 7">
             <a:extLst>
               <a:ext uri="{FF2B5EF4-FFF2-40B4-BE49-F238E27FC236}">
-                <a16:creationId xmlns:a16="http://schemas.microsoft.com/office/drawing/2014/main" id="{0D908C01-1D11-ABBF-7F33-921C02160379}"/>
-              </a:ext>
-            </a:extLst>
-          </p:cNvPr>
-          <p:cNvPicPr>
-            <a:picLocks noChangeAspect="1"/>
-          </p:cNvPicPr>
-          <p:nvPr/>
-        </p:nvPicPr>
-        <p:blipFill>
-          <a:blip>
-            <a:extLst>
-              <a:ext uri="{96DAC541-7B7A-43D3-8B79-37D633B846F1}">
-                <asvg:svgBlip xmlns:asvg="http://schemas.microsoft.com/office/drawing/2016/SVG/main" r:embed="rId3"/>
-              </a:ext>
-            </a:extLst>
-          </a:blip>
-          <a:srcRect t="74102"/>
-          <a:stretch>
-            <a:fillRect/>
-          </a:stretch>
-        </p:blipFill>
-        <p:spPr>
-          <a:xfrm>
-            <a:off x="3746574" y="4715401"/>
-            <a:ext cx="8170952" cy="1867126"/>
-          </a:xfrm>
-          <a:prstGeom prst="rect">
-            <a:avLst/>
-          </a:prstGeom>
-        </p:spPr>
-      </p:pic>
-      <p:sp>
-        <p:nvSpPr>
-          <p:cNvPr id="6" name="TextBox 5">
-            <a:extLst>
-              <a:ext uri="{FF2B5EF4-FFF2-40B4-BE49-F238E27FC236}">
-                <a16:creationId xmlns:a16="http://schemas.microsoft.com/office/drawing/2014/main" id="{DB2F4A99-E249-3279-D6BE-D02234BC1A77}"/>
+                <a16:creationId xmlns:a16="http://schemas.microsoft.com/office/drawing/2014/main" id="{96CC61B0-EF56-45D5-2DBA-6B313520AE97}"/>
               </a:ext>
             </a:extLst>
           </p:cNvPr>
@@ -9208,45 +10833,8 @@
           <p:nvPr/>
         </p:nvSpPr>
         <p:spPr>
-          <a:xfrm>
-            <a:off x="3634154" y="4715400"/>
-            <a:ext cx="8405446" cy="1990199"/>
-          </a:xfrm>
-          <a:prstGeom prst="rect">
-            <a:avLst/>
-          </a:prstGeom>
-          <a:noFill/>
-          <a:ln>
-            <a:solidFill>
-              <a:srgbClr val="FF0000"/>
-            </a:solidFill>
-          </a:ln>
-        </p:spPr>
-        <p:txBody>
-          <a:bodyPr wrap="square" rtlCol="0">
-            <a:spAutoFit/>
-          </a:bodyPr>
-          <a:lstStyle/>
-          <a:p>
-            <a:endParaRPr lang="en-CH" dirty="0"/>
-          </a:p>
-        </p:txBody>
-      </p:sp>
-      <p:sp>
-        <p:nvSpPr>
-          <p:cNvPr id="8" name="TextBox 7">
-            <a:extLst>
-              <a:ext uri="{FF2B5EF4-FFF2-40B4-BE49-F238E27FC236}">
-                <a16:creationId xmlns:a16="http://schemas.microsoft.com/office/drawing/2014/main" id="{96CC61B0-EF56-45D5-2DBA-6B313520AE97}"/>
-              </a:ext>
-            </a:extLst>
-          </p:cNvPr>
-          <p:cNvSpPr txBox="1"/>
-          <p:nvPr/>
-        </p:nvSpPr>
-        <p:spPr>
           <a:xfrm rot="16200000">
-            <a:off x="-94147" y="2550132"/>
+            <a:off x="49614" y="2572412"/>
             <a:ext cx="2234027" cy="369332"/>
           </a:xfrm>
           <a:prstGeom prst="rect">
@@ -9306,10 +10894,10 @@
       </p:sp>
       <p:sp>
         <p:nvSpPr>
-          <p:cNvPr id="9" name="TextBox 8">
+          <p:cNvPr id="2" name="TextBox 1">
             <a:extLst>
               <a:ext uri="{FF2B5EF4-FFF2-40B4-BE49-F238E27FC236}">
-                <a16:creationId xmlns:a16="http://schemas.microsoft.com/office/drawing/2014/main" id="{F8DA8926-E4BE-2100-50E3-ABDCEE838189}"/>
+                <a16:creationId xmlns:a16="http://schemas.microsoft.com/office/drawing/2014/main" id="{EE7EC6DD-CBC4-6638-D0DC-F139C23C57CD}"/>
               </a:ext>
             </a:extLst>
           </p:cNvPr>
@@ -9318,21 +10906,258 @@
         </p:nvSpPr>
         <p:spPr>
           <a:xfrm>
-            <a:off x="838200" y="1204744"/>
-            <a:ext cx="6699738" cy="3387584"/>
+            <a:off x="751652" y="4541550"/>
+            <a:ext cx="6722225" cy="369332"/>
           </a:xfrm>
           <a:prstGeom prst="rect">
             <a:avLst/>
           </a:prstGeom>
           <a:noFill/>
-          <a:ln>
-            <a:solidFill>
-              <a:schemeClr val="tx1">
-                <a:lumMod val="85000"/>
-                <a:lumOff val="15000"/>
-              </a:schemeClr>
-            </a:solidFill>
-          </a:ln>
+        </p:spPr>
+        <p:txBody>
+          <a:bodyPr wrap="none" rtlCol="0">
+            <a:spAutoFit/>
+          </a:bodyPr>
+          <a:lstStyle/>
+          <a:p>
+            <a:pPr marL="285750" indent="-285750">
+              <a:buFont typeface="Arial" panose="020B0604020202020204" pitchFamily="34" charset="0"/>
+              <a:buChar char="•"/>
+            </a:pPr>
+            <a:r>
+              <a:rPr lang="en-CH" dirty="0"/>
+              <a:t>The  biggest win was adding the TABLE_GUIDE to the llm model </a:t>
+            </a:r>
+          </a:p>
+        </p:txBody>
+      </p:sp>
+      <p:sp>
+        <p:nvSpPr>
+          <p:cNvPr id="10" name="TextBox 9">
+            <a:extLst>
+              <a:ext uri="{FF2B5EF4-FFF2-40B4-BE49-F238E27FC236}">
+                <a16:creationId xmlns:a16="http://schemas.microsoft.com/office/drawing/2014/main" id="{671E0B3D-6093-1B3A-38A1-D5EE1281899C}"/>
+              </a:ext>
+            </a:extLst>
+          </p:cNvPr>
+          <p:cNvSpPr txBox="1"/>
+          <p:nvPr/>
+        </p:nvSpPr>
+        <p:spPr>
+          <a:xfrm>
+            <a:off x="751652" y="4910593"/>
+            <a:ext cx="7859139" cy="369332"/>
+          </a:xfrm>
+          <a:prstGeom prst="rect">
+            <a:avLst/>
+          </a:prstGeom>
+          <a:solidFill>
+            <a:schemeClr val="bg1"/>
+          </a:solidFill>
+        </p:spPr>
+        <p:txBody>
+          <a:bodyPr wrap="none" rtlCol="0">
+            <a:spAutoFit/>
+          </a:bodyPr>
+          <a:lstStyle/>
+          <a:p>
+            <a:pPr marL="285750" indent="-285750">
+              <a:buFont typeface="Arial" panose="020B0604020202020204" pitchFamily="34" charset="0"/>
+              <a:buChar char="•"/>
+            </a:pPr>
+            <a:r>
+              <a:rPr lang="de-CH" dirty="0"/>
+              <a:t>In </a:t>
+            </a:r>
+            <a:r>
+              <a:rPr lang="de-CH" dirty="0" err="1"/>
+              <a:t>combination</a:t>
+            </a:r>
+            <a:r>
+              <a:rPr lang="de-CH" dirty="0"/>
+              <a:t> </a:t>
+            </a:r>
+            <a:r>
+              <a:rPr lang="de-CH" dirty="0" err="1"/>
+              <a:t>with</a:t>
+            </a:r>
+            <a:r>
+              <a:rPr lang="de-CH" dirty="0"/>
+              <a:t> a </a:t>
+            </a:r>
+            <a:r>
+              <a:rPr lang="de-CH" dirty="0" err="1"/>
+              <a:t>stronger</a:t>
+            </a:r>
+            <a:r>
+              <a:rPr lang="de-CH" dirty="0"/>
+              <a:t> </a:t>
+            </a:r>
+            <a:r>
+              <a:rPr lang="de-CH" dirty="0" err="1"/>
+              <a:t>model</a:t>
+            </a:r>
+            <a:r>
+              <a:rPr lang="de-CH" dirty="0"/>
+              <a:t>, </a:t>
+            </a:r>
+            <a:r>
+              <a:rPr lang="de-CH" dirty="0" err="1"/>
+              <a:t>this</a:t>
+            </a:r>
+            <a:r>
+              <a:rPr lang="de-CH" dirty="0"/>
+              <a:t> </a:t>
+            </a:r>
+            <a:r>
+              <a:rPr lang="de-CH" dirty="0" err="1"/>
+              <a:t>resulted</a:t>
+            </a:r>
+            <a:r>
+              <a:rPr lang="de-CH" dirty="0"/>
+              <a:t> in an </a:t>
+            </a:r>
+            <a:r>
+              <a:rPr lang="de-CH" dirty="0" err="1"/>
+              <a:t>accuracy</a:t>
+            </a:r>
+            <a:r>
+              <a:rPr lang="de-CH" dirty="0"/>
+              <a:t> </a:t>
+            </a:r>
+            <a:r>
+              <a:rPr lang="de-CH" dirty="0" err="1"/>
+              <a:t>of</a:t>
+            </a:r>
+            <a:r>
+              <a:rPr lang="de-CH" dirty="0"/>
+              <a:t> </a:t>
+            </a:r>
+            <a:r>
+              <a:rPr lang="de-CH" dirty="0">
+                <a:solidFill>
+                  <a:srgbClr val="1B9E75"/>
+                </a:solidFill>
+              </a:rPr>
+              <a:t>72.2%</a:t>
+            </a:r>
+            <a:endParaRPr lang="en-CH" dirty="0">
+              <a:solidFill>
+                <a:srgbClr val="1B9E75"/>
+              </a:solidFill>
+            </a:endParaRPr>
+          </a:p>
+        </p:txBody>
+      </p:sp>
+      <p:sp>
+        <p:nvSpPr>
+          <p:cNvPr id="11" name="TextBox 10">
+            <a:extLst>
+              <a:ext uri="{FF2B5EF4-FFF2-40B4-BE49-F238E27FC236}">
+                <a16:creationId xmlns:a16="http://schemas.microsoft.com/office/drawing/2014/main" id="{8D592E40-06B5-52F8-DB73-E26CC224566F}"/>
+              </a:ext>
+            </a:extLst>
+          </p:cNvPr>
+          <p:cNvSpPr txBox="1"/>
+          <p:nvPr/>
+        </p:nvSpPr>
+        <p:spPr>
+          <a:xfrm>
+            <a:off x="751652" y="5279636"/>
+            <a:ext cx="9047605" cy="369332"/>
+          </a:xfrm>
+          <a:prstGeom prst="rect">
+            <a:avLst/>
+          </a:prstGeom>
+          <a:noFill/>
+        </p:spPr>
+        <p:txBody>
+          <a:bodyPr wrap="none" rtlCol="0">
+            <a:spAutoFit/>
+          </a:bodyPr>
+          <a:lstStyle/>
+          <a:p>
+            <a:pPr marL="285750" indent="-285750">
+              <a:buFont typeface="Arial" panose="020B0604020202020204" pitchFamily="34" charset="0"/>
+              <a:buChar char="•"/>
+            </a:pPr>
+            <a:r>
+              <a:rPr lang="de-CH" dirty="0" err="1"/>
+              <a:t>Adding</a:t>
+            </a:r>
+            <a:r>
+              <a:rPr lang="de-CH" dirty="0"/>
+              <a:t> </a:t>
+            </a:r>
+            <a:r>
+              <a:rPr lang="de-CH" dirty="0" err="1"/>
+              <a:t>few-shot</a:t>
+            </a:r>
+            <a:r>
+              <a:rPr lang="de-CH" dirty="0"/>
+              <a:t> </a:t>
+            </a:r>
+            <a:r>
+              <a:rPr lang="de-CH" dirty="0" err="1"/>
+              <a:t>examples</a:t>
+            </a:r>
+            <a:r>
+              <a:rPr lang="de-CH" dirty="0"/>
+              <a:t> </a:t>
+            </a:r>
+            <a:r>
+              <a:rPr lang="de-CH" dirty="0" err="1"/>
+              <a:t>helped</a:t>
+            </a:r>
+            <a:r>
+              <a:rPr lang="de-CH" dirty="0"/>
+              <a:t> but </a:t>
+            </a:r>
+            <a:r>
+              <a:rPr lang="en-CH" dirty="0"/>
+              <a:t>introduced the risk of overfitting</a:t>
+            </a:r>
+            <a:r>
+              <a:rPr lang="de-CH" dirty="0"/>
+              <a:t> on </a:t>
+            </a:r>
+            <a:r>
+              <a:rPr lang="de-CH" dirty="0" err="1"/>
+              <a:t>training</a:t>
+            </a:r>
+            <a:r>
+              <a:rPr lang="de-CH" dirty="0"/>
+              <a:t> </a:t>
+            </a:r>
+            <a:r>
+              <a:rPr lang="de-CH" dirty="0" err="1"/>
+              <a:t>set</a:t>
+            </a:r>
+            <a:endParaRPr lang="en-CH" dirty="0"/>
+          </a:p>
+        </p:txBody>
+      </p:sp>
+      <p:sp>
+        <p:nvSpPr>
+          <p:cNvPr id="12" name="TextBox 11">
+            <a:extLst>
+              <a:ext uri="{FF2B5EF4-FFF2-40B4-BE49-F238E27FC236}">
+                <a16:creationId xmlns:a16="http://schemas.microsoft.com/office/drawing/2014/main" id="{AEFE5FAE-B418-6828-5F1A-F659C42E0C78}"/>
+              </a:ext>
+            </a:extLst>
+          </p:cNvPr>
+          <p:cNvSpPr txBox="1"/>
+          <p:nvPr/>
+        </p:nvSpPr>
+        <p:spPr>
+          <a:xfrm>
+            <a:off x="762896" y="5648390"/>
+            <a:ext cx="10355377" cy="646331"/>
+          </a:xfrm>
+          <a:prstGeom prst="rect">
+            <a:avLst/>
+          </a:prstGeom>
+          <a:noFill/>
         </p:spPr>
         <p:txBody>
           <a:bodyPr wrap="square" rtlCol="0">
@@ -9340,7 +11165,70 @@
           </a:bodyPr>
           <a:lstStyle/>
           <a:p>
-            <a:endParaRPr lang="en-CH" dirty="0"/>
+            <a:pPr marL="285750" indent="-285750">
+              <a:buFont typeface="Arial" panose="020B0604020202020204" pitchFamily="34" charset="0"/>
+              <a:buChar char="•"/>
+            </a:pPr>
+            <a:r>
+              <a:rPr lang="de-CH" dirty="0"/>
+              <a:t>At </a:t>
+            </a:r>
+            <a:r>
+              <a:rPr lang="de-CH" dirty="0" err="1"/>
+              <a:t>the</a:t>
+            </a:r>
+            <a:r>
+              <a:rPr lang="de-CH" dirty="0"/>
+              <a:t> end </a:t>
+            </a:r>
+            <a:r>
+              <a:rPr lang="de-CH" dirty="0" err="1"/>
+              <a:t>we</a:t>
+            </a:r>
+            <a:r>
+              <a:rPr lang="de-CH" dirty="0"/>
+              <a:t> </a:t>
+            </a:r>
+            <a:r>
+              <a:rPr lang="de-CH" dirty="0" err="1"/>
+              <a:t>achieved</a:t>
+            </a:r>
+            <a:r>
+              <a:rPr lang="de-CH" dirty="0"/>
+              <a:t> a </a:t>
+            </a:r>
+            <a:r>
+              <a:rPr lang="de-CH" dirty="0" err="1"/>
+              <a:t>success</a:t>
+            </a:r>
+            <a:r>
+              <a:rPr lang="de-CH" dirty="0"/>
+              <a:t> rate </a:t>
+            </a:r>
+            <a:r>
+              <a:rPr lang="de-CH" dirty="0" err="1"/>
+              <a:t>of</a:t>
+            </a:r>
+            <a:r>
+              <a:rPr lang="de-CH" dirty="0"/>
+              <a:t> </a:t>
+            </a:r>
+            <a:r>
+              <a:rPr lang="de-CH" dirty="0">
+                <a:solidFill>
+                  <a:srgbClr val="106E55"/>
+                </a:solidFill>
+              </a:rPr>
+              <a:t>94.4%</a:t>
+            </a:r>
+            <a:r>
+              <a:rPr lang="de-CH" dirty="0"/>
+              <a:t>, </a:t>
+            </a:r>
+            <a:r>
+              <a:rPr lang="en-CH" dirty="0"/>
+              <a:t>the single remaining error was just one extra column in the SELECT</a:t>
+            </a:r>
           </a:p>
         </p:txBody>
       </p:sp>
@@ -9374,45 +11262,43 @@
           <a:chExt cx="0" cy="0"/>
         </a:xfrm>
       </p:grpSpPr>
-      <p:pic>
-        <p:nvPicPr>
-          <p:cNvPr id="5" name="Inhaltsplatzhalter 4">
+      <p:graphicFrame>
+        <p:nvGraphicFramePr>
+          <p:cNvPr id="8" name="Inhaltsplatzhalter 2">
             <a:extLst>
               <a:ext uri="{FF2B5EF4-FFF2-40B4-BE49-F238E27FC236}">
-                <a16:creationId xmlns:a16="http://schemas.microsoft.com/office/drawing/2014/main" id="{FD7C27D7-D5D1-FDDB-6955-382DE9364D68}"/>
+                <a16:creationId xmlns:a16="http://schemas.microsoft.com/office/drawing/2014/main" id="{3C23C2AE-725F-7B55-471D-EEA04DB0F3A2}"/>
               </a:ext>
             </a:extLst>
           </p:cNvPr>
-          <p:cNvPicPr>
-            <a:picLocks noGrp="1" noChangeAspect="1"/>
-          </p:cNvPicPr>
+          <p:cNvGraphicFramePr>
+            <a:graphicFrameLocks noGrp="1"/>
+          </p:cNvGraphicFramePr>
           <p:nvPr>
             <p:ph idx="1"/>
+            <p:extLst>
+              <p:ext uri="{D42A27DB-BD31-4B8C-83A1-F6EECF244321}">
+                <p14:modId xmlns:p14="http://schemas.microsoft.com/office/powerpoint/2010/main" val="1940279054"/>
+              </p:ext>
+            </p:extLst>
           </p:nvPr>
-        </p:nvPicPr>
-        <p:blipFill>
-          <a:blip r:embed="rId2"/>
-          <a:srcRect t="7201" b="28304"/>
-          <a:stretch>
-            <a:fillRect/>
-          </a:stretch>
-        </p:blipFill>
-        <p:spPr>
-          <a:xfrm>
-            <a:off x="636373" y="1431775"/>
-            <a:ext cx="11319078" cy="4866820"/>
-          </a:xfrm>
-          <a:prstGeom prst="rect">
-            <a:avLst/>
-          </a:prstGeom>
-        </p:spPr>
-      </p:pic>
-      <p:sp>
-        <p:nvSpPr>
-          <p:cNvPr id="3" name="Titel 1">
+        </p:nvGraphicFramePr>
+        <p:xfrm>
+          <a:off x="838200" y="1570831"/>
+          <a:ext cx="10111155" cy="4351338"/>
+        </p:xfrm>
+        <a:graphic>
+          <a:graphicData uri="http://schemas.openxmlformats.org/drawingml/2006/diagram">
+            <dgm:relIds xmlns:dgm="http://schemas.openxmlformats.org/drawingml/2006/diagram" xmlns:r="http://schemas.openxmlformats.org/officeDocument/2006/relationships" r:dm="rId3" r:lo="rId4" r:qs="rId5" r:cs="rId6"/>
+          </a:graphicData>
+        </a:graphic>
+      </p:graphicFrame>
+      <p:sp>
+        <p:nvSpPr>
+          <p:cNvPr id="6" name="Titel 1">
             <a:extLst>
               <a:ext uri="{FF2B5EF4-FFF2-40B4-BE49-F238E27FC236}">
-                <a16:creationId xmlns:a16="http://schemas.microsoft.com/office/drawing/2014/main" id="{427E9092-3E2F-4C1C-61BA-028E0CAB5C7A}"/>
+                <a16:creationId xmlns:a16="http://schemas.microsoft.com/office/drawing/2014/main" id="{D1557C82-2D46-B202-01B1-1D50F349B39F}"/>
               </a:ext>
             </a:extLst>
           </p:cNvPr>
@@ -9455,40 +11341,8 @@
           </a:lstStyle>
           <a:p>
             <a:r>
-              <a:rPr lang="de-CH" sz="4000" dirty="0" err="1"/>
-              <a:t>Testing</a:t>
-            </a:r>
-            <a:r>
-              <a:rPr lang="de-CH" sz="4000" dirty="0"/>
-              <a:t> </a:t>
-            </a:r>
-            <a:r>
-              <a:rPr lang="de-CH" sz="4000" dirty="0" err="1"/>
-              <a:t>overfitting</a:t>
-            </a:r>
-            <a:r>
-              <a:rPr lang="de-CH" sz="4000" dirty="0"/>
-              <a:t> on </a:t>
-            </a:r>
-            <a:r>
-              <a:rPr lang="de-CH" sz="4000" dirty="0" err="1"/>
-              <a:t>new</a:t>
-            </a:r>
-            <a:r>
-              <a:rPr lang="de-CH" sz="4000" dirty="0"/>
-              <a:t> </a:t>
-            </a:r>
-            <a:r>
-              <a:rPr lang="de-CH" sz="4000" dirty="0" err="1"/>
-              <a:t>test</a:t>
-            </a:r>
-            <a:r>
-              <a:rPr lang="de-CH" sz="4000" dirty="0"/>
-              <a:t> </a:t>
-            </a:r>
-            <a:r>
-              <a:rPr lang="de-CH" sz="4000" dirty="0" err="1"/>
-              <a:t>set</a:t>
+              <a:rPr lang="de-DE" sz="4000"/>
+              <a:t>Conclusion</a:t>
             </a:r>
             <a:endParaRPr lang="de-DE" sz="4000" dirty="0"/>
           </a:p>
@@ -9497,7 +11351,7 @@
     </p:spTree>
     <p:extLst>
       <p:ext uri="{BB962C8B-B14F-4D97-AF65-F5344CB8AC3E}">
-        <p14:creationId xmlns:p14="http://schemas.microsoft.com/office/powerpoint/2010/main" val="1858057628"/>
+        <p14:creationId xmlns:p14="http://schemas.microsoft.com/office/powerpoint/2010/main" val="4086725841"/>
       </p:ext>
     </p:extLst>
   </p:cSld>
@@ -9524,43 +11378,45 @@
           <a:chExt cx="0" cy="0"/>
         </a:xfrm>
       </p:grpSpPr>
-      <p:graphicFrame>
-        <p:nvGraphicFramePr>
-          <p:cNvPr id="8" name="Inhaltsplatzhalter 2">
+      <p:pic>
+        <p:nvPicPr>
+          <p:cNvPr id="5" name="Inhaltsplatzhalter 4">
             <a:extLst>
               <a:ext uri="{FF2B5EF4-FFF2-40B4-BE49-F238E27FC236}">
-                <a16:creationId xmlns:a16="http://schemas.microsoft.com/office/drawing/2014/main" id="{3C23C2AE-725F-7B55-471D-EEA04DB0F3A2}"/>
+                <a16:creationId xmlns:a16="http://schemas.microsoft.com/office/drawing/2014/main" id="{FD7C27D7-D5D1-FDDB-6955-382DE9364D68}"/>
               </a:ext>
             </a:extLst>
           </p:cNvPr>
-          <p:cNvGraphicFramePr>
-            <a:graphicFrameLocks noGrp="1"/>
-          </p:cNvGraphicFramePr>
+          <p:cNvPicPr>
+            <a:picLocks noGrp="1" noChangeAspect="1"/>
+          </p:cNvPicPr>
           <p:nvPr>
             <p:ph idx="1"/>
-            <p:extLst>
-              <p:ext uri="{D42A27DB-BD31-4B8C-83A1-F6EECF244321}">
-                <p14:modId xmlns:p14="http://schemas.microsoft.com/office/powerpoint/2010/main" val="1180245339"/>
-              </p:ext>
-            </p:extLst>
           </p:nvPr>
-        </p:nvGraphicFramePr>
-        <p:xfrm>
-          <a:off x="838200" y="1253331"/>
-          <a:ext cx="10111155" cy="4351338"/>
-        </p:xfrm>
-        <a:graphic>
-          <a:graphicData uri="http://schemas.openxmlformats.org/drawingml/2006/diagram">
-            <dgm:relIds xmlns:dgm="http://schemas.openxmlformats.org/drawingml/2006/diagram" xmlns:r="http://schemas.openxmlformats.org/officeDocument/2006/relationships" r:dm="rId2" r:lo="rId3" r:qs="rId4" r:cs="rId5"/>
-          </a:graphicData>
-        </a:graphic>
-      </p:graphicFrame>
-      <p:sp>
-        <p:nvSpPr>
-          <p:cNvPr id="6" name="Titel 1">
+        </p:nvPicPr>
+        <p:blipFill>
+          <a:blip r:embed="rId3"/>
+          <a:srcRect t="7201" b="69226"/>
+          <a:stretch>
+            <a:fillRect/>
+          </a:stretch>
+        </p:blipFill>
+        <p:spPr>
+          <a:xfrm>
+            <a:off x="724455" y="1134803"/>
+            <a:ext cx="10629345" cy="1670389"/>
+          </a:xfrm>
+          <a:prstGeom prst="rect">
+            <a:avLst/>
+          </a:prstGeom>
+        </p:spPr>
+      </p:pic>
+      <p:sp>
+        <p:nvSpPr>
+          <p:cNvPr id="3" name="Titel 1">
             <a:extLst>
               <a:ext uri="{FF2B5EF4-FFF2-40B4-BE49-F238E27FC236}">
-                <a16:creationId xmlns:a16="http://schemas.microsoft.com/office/drawing/2014/main" id="{D1557C82-2D46-B202-01B1-1D50F349B39F}"/>
+                <a16:creationId xmlns:a16="http://schemas.microsoft.com/office/drawing/2014/main" id="{427E9092-3E2F-4C1C-61BA-028E0CAB5C7A}"/>
               </a:ext>
             </a:extLst>
           </p:cNvPr>
@@ -9603,20 +11459,281 @@
           </a:lstStyle>
           <a:p>
             <a:r>
-              <a:rPr lang="de-DE" sz="4000" dirty="0" err="1"/>
-              <a:t>Conclusion</a:t>
-            </a:r>
-            <a:r>
-              <a:rPr lang="de-DE" sz="4000" dirty="0"/>
-              <a:t> and Future Work</a:t>
-            </a:r>
+              <a:rPr lang="de-CH" sz="4000" dirty="0"/>
+              <a:t>Future Work - </a:t>
+            </a:r>
+            <a:r>
+              <a:rPr lang="de-CH" sz="4000" dirty="0" err="1"/>
+              <a:t>Generalization</a:t>
+            </a:r>
+            <a:r>
+              <a:rPr lang="de-CH" sz="4000" dirty="0"/>
+              <a:t> on  a New Data Set</a:t>
+            </a:r>
+            <a:endParaRPr lang="de-DE" sz="4000" dirty="0"/>
+          </a:p>
+        </p:txBody>
+      </p:sp>
+      <p:sp>
+        <p:nvSpPr>
+          <p:cNvPr id="2" name="TextBox 1">
+            <a:extLst>
+              <a:ext uri="{FF2B5EF4-FFF2-40B4-BE49-F238E27FC236}">
+                <a16:creationId xmlns:a16="http://schemas.microsoft.com/office/drawing/2014/main" id="{C0295BBB-2C68-4258-ADF0-ACC9FCB1CE4B}"/>
+              </a:ext>
+            </a:extLst>
+          </p:cNvPr>
+          <p:cNvSpPr txBox="1"/>
+          <p:nvPr/>
+        </p:nvSpPr>
+        <p:spPr>
+          <a:xfrm>
+            <a:off x="838197" y="2924944"/>
+            <a:ext cx="7234545" cy="646331"/>
+          </a:xfrm>
+          <a:prstGeom prst="rect">
+            <a:avLst/>
+          </a:prstGeom>
+          <a:noFill/>
+        </p:spPr>
+        <p:txBody>
+          <a:bodyPr wrap="none" rtlCol="0">
+            <a:spAutoFit/>
+          </a:bodyPr>
+          <a:lstStyle/>
+          <a:p>
+            <a:r>
+              <a:rPr lang="en-CH" i="1" dirty="0">
+                <a:solidFill>
+                  <a:srgbClr val="FF0000"/>
+                </a:solidFill>
+              </a:rPr>
+              <a:t>We created a new data set for testing if our model overfits or generalizes</a:t>
+            </a:r>
+          </a:p>
+          <a:p>
+            <a:endParaRPr lang="en-CH" i="1" dirty="0">
+              <a:solidFill>
+                <a:srgbClr val="FF0000"/>
+              </a:solidFill>
+            </a:endParaRPr>
+          </a:p>
+        </p:txBody>
+      </p:sp>
+      <p:pic>
+        <p:nvPicPr>
+          <p:cNvPr id="4" name="Inhaltsplatzhalter 4">
+            <a:extLst>
+              <a:ext uri="{FF2B5EF4-FFF2-40B4-BE49-F238E27FC236}">
+                <a16:creationId xmlns:a16="http://schemas.microsoft.com/office/drawing/2014/main" id="{FB781893-99C7-261E-FAF1-F2375D590B08}"/>
+              </a:ext>
+            </a:extLst>
+          </p:cNvPr>
+          <p:cNvPicPr>
+            <a:picLocks noChangeAspect="1"/>
+          </p:cNvPicPr>
+          <p:nvPr/>
+        </p:nvPicPr>
+        <p:blipFill>
+          <a:blip r:embed="rId3"/>
+          <a:srcRect l="51945" t="30124" r="6918" b="28304"/>
+          <a:stretch>
+            <a:fillRect/>
+          </a:stretch>
+        </p:blipFill>
+        <p:spPr>
+          <a:xfrm>
+            <a:off x="7861462" y="3639507"/>
+            <a:ext cx="3569537" cy="2404896"/>
+          </a:xfrm>
+          <a:prstGeom prst="rect">
+            <a:avLst/>
+          </a:prstGeom>
+        </p:spPr>
+      </p:pic>
+      <p:sp>
+        <p:nvSpPr>
+          <p:cNvPr id="10" name="TextBox 9">
+            <a:extLst>
+              <a:ext uri="{FF2B5EF4-FFF2-40B4-BE49-F238E27FC236}">
+                <a16:creationId xmlns:a16="http://schemas.microsoft.com/office/drawing/2014/main" id="{AB0F52B0-C39F-9A4E-EC71-C2556F53EE58}"/>
+              </a:ext>
+            </a:extLst>
+          </p:cNvPr>
+          <p:cNvSpPr txBox="1"/>
+          <p:nvPr/>
+        </p:nvSpPr>
+        <p:spPr>
+          <a:xfrm>
+            <a:off x="838200" y="3661819"/>
+            <a:ext cx="6666186" cy="369332"/>
+          </a:xfrm>
+          <a:prstGeom prst="rect">
+            <a:avLst/>
+          </a:prstGeom>
+          <a:noFill/>
+        </p:spPr>
+        <p:txBody>
+          <a:bodyPr wrap="square">
+            <a:spAutoFit/>
+          </a:bodyPr>
+          <a:lstStyle/>
+          <a:p>
+            <a:pPr marL="285750" indent="-285750" algn="l">
+              <a:buFont typeface="Arial" panose="020B0604020202020204" pitchFamily="34" charset="0"/>
+              <a:buChar char="•"/>
+            </a:pPr>
+            <a:r>
+              <a:rPr lang="en-CH" b="0" i="0" dirty="0">
+                <a:effectLst/>
+                <a:latin typeface="-apple-system"/>
+              </a:rPr>
+              <a:t>Results improved, as expected</a:t>
+            </a:r>
+            <a:r>
+              <a:rPr lang="en-CH" dirty="0">
+                <a:latin typeface="-apple-system"/>
+              </a:rPr>
+              <a:t> -&gt; from 22.2% to 50% accuracy</a:t>
+            </a:r>
+            <a:endParaRPr lang="en-CH" b="0" i="0" dirty="0">
+              <a:effectLst/>
+              <a:latin typeface="-apple-system"/>
+            </a:endParaRPr>
+          </a:p>
+        </p:txBody>
+      </p:sp>
+      <p:sp>
+        <p:nvSpPr>
+          <p:cNvPr id="11" name="TextBox 10">
+            <a:extLst>
+              <a:ext uri="{FF2B5EF4-FFF2-40B4-BE49-F238E27FC236}">
+                <a16:creationId xmlns:a16="http://schemas.microsoft.com/office/drawing/2014/main" id="{9386615F-A7A1-558C-E5FC-7C95103EB66F}"/>
+              </a:ext>
+            </a:extLst>
+          </p:cNvPr>
+          <p:cNvSpPr txBox="1"/>
+          <p:nvPr/>
+        </p:nvSpPr>
+        <p:spPr>
+          <a:xfrm>
+            <a:off x="838200" y="4226966"/>
+            <a:ext cx="7533904" cy="369332"/>
+          </a:xfrm>
+          <a:prstGeom prst="rect">
+            <a:avLst/>
+          </a:prstGeom>
+          <a:noFill/>
+        </p:spPr>
+        <p:txBody>
+          <a:bodyPr wrap="square">
+            <a:spAutoFit/>
+          </a:bodyPr>
+          <a:lstStyle/>
+          <a:p>
+            <a:pPr marL="285750" indent="-285750" algn="l">
+              <a:buFont typeface="Arial" panose="020B0604020202020204" pitchFamily="34" charset="0"/>
+              <a:buChar char="•"/>
+            </a:pPr>
+            <a:r>
+              <a:rPr lang="en-CH" b="0" i="0" dirty="0">
+                <a:effectLst/>
+                <a:latin typeface="-apple-system"/>
+              </a:rPr>
+              <a:t>But they did not reach the success rate of our original dataset (94.4%)</a:t>
+            </a:r>
+          </a:p>
+        </p:txBody>
+      </p:sp>
+      <p:sp>
+        <p:nvSpPr>
+          <p:cNvPr id="12" name="TextBox 11">
+            <a:extLst>
+              <a:ext uri="{FF2B5EF4-FFF2-40B4-BE49-F238E27FC236}">
+                <a16:creationId xmlns:a16="http://schemas.microsoft.com/office/drawing/2014/main" id="{6DBBDCD3-2836-53DC-540F-042A54B9A981}"/>
+              </a:ext>
+            </a:extLst>
+          </p:cNvPr>
+          <p:cNvSpPr txBox="1"/>
+          <p:nvPr/>
+        </p:nvSpPr>
+        <p:spPr>
+          <a:xfrm>
+            <a:off x="838197" y="5357260"/>
+            <a:ext cx="7023265" cy="646331"/>
+          </a:xfrm>
+          <a:prstGeom prst="rect">
+            <a:avLst/>
+          </a:prstGeom>
+          <a:noFill/>
+        </p:spPr>
+        <p:txBody>
+          <a:bodyPr wrap="square">
+            <a:spAutoFit/>
+          </a:bodyPr>
+          <a:lstStyle/>
+          <a:p>
+            <a:pPr marL="285750" indent="-285750" algn="l">
+              <a:buFont typeface="Arial" panose="020B0604020202020204" pitchFamily="34" charset="0"/>
+              <a:buChar char="•"/>
+            </a:pPr>
+            <a:r>
+              <a:rPr lang="en-CH" b="0" i="0" dirty="0">
+                <a:effectLst/>
+                <a:latin typeface="-apple-system"/>
+              </a:rPr>
+              <a:t>Conclusion: the system does not generalize perfectly,  it is partly overfitting to our dataset.</a:t>
+            </a:r>
+          </a:p>
+        </p:txBody>
+      </p:sp>
+      <p:sp>
+        <p:nvSpPr>
+          <p:cNvPr id="13" name="TextBox 12">
+            <a:extLst>
+              <a:ext uri="{FF2B5EF4-FFF2-40B4-BE49-F238E27FC236}">
+                <a16:creationId xmlns:a16="http://schemas.microsoft.com/office/drawing/2014/main" id="{7F3F93C0-CF41-B144-6056-88ABF9AE6435}"/>
+              </a:ext>
+            </a:extLst>
+          </p:cNvPr>
+          <p:cNvSpPr txBox="1"/>
+          <p:nvPr/>
+        </p:nvSpPr>
+        <p:spPr>
+          <a:xfrm>
+            <a:off x="838197" y="4792113"/>
+            <a:ext cx="7023265" cy="369332"/>
+          </a:xfrm>
+          <a:prstGeom prst="rect">
+            <a:avLst/>
+          </a:prstGeom>
+          <a:noFill/>
+        </p:spPr>
+        <p:txBody>
+          <a:bodyPr wrap="square">
+            <a:spAutoFit/>
+          </a:bodyPr>
+          <a:lstStyle/>
+          <a:p>
+            <a:pPr marL="285750" indent="-285750">
+              <a:buFont typeface="Arial" panose="020B0604020202020204" pitchFamily="34" charset="0"/>
+              <a:buChar char="•"/>
+            </a:pPr>
+            <a:r>
+              <a:rPr lang="en-CH" dirty="0"/>
+              <a:t>It solved &gt;70% of easy questions but none of the hardest ones</a:t>
+            </a:r>
+            <a:endParaRPr lang="en-CH" b="0" dirty="0">
+              <a:effectLst/>
+              <a:latin typeface="-apple-system"/>
+            </a:endParaRPr>
           </a:p>
         </p:txBody>
       </p:sp>
     </p:spTree>
     <p:extLst>
       <p:ext uri="{BB962C8B-B14F-4D97-AF65-F5344CB8AC3E}">
-        <p14:creationId xmlns:p14="http://schemas.microsoft.com/office/powerpoint/2010/main" val="4086725841"/>
+        <p14:creationId xmlns:p14="http://schemas.microsoft.com/office/powerpoint/2010/main" val="1858057628"/>
       </p:ext>
     </p:extLst>
   </p:cSld>

--- a/docs/DHW2_Wagner_Kryeziu_Johnson.pptx
+++ b/docs/DHW2_Wagner_Kryeziu_Johnson.pptx
@@ -8804,7 +8804,7 @@
                 <a:effectLst/>
                 <a:latin typeface="-apple-system"/>
               </a:rPr>
-              <a:t> (Spider/BIRD-style benchmark on the Football DB</a:t>
+              <a:t> (Spider/BIRD-style benchmark on the Football DB)</a:t>
             </a:r>
           </a:p>
           <a:p>
@@ -10907,7 +10907,7 @@
         <p:spPr>
           <a:xfrm>
             <a:off x="751652" y="4541550"/>
-            <a:ext cx="6722225" cy="369332"/>
+            <a:ext cx="6092245" cy="369332"/>
           </a:xfrm>
           <a:prstGeom prst="rect">
             <a:avLst/>
@@ -10926,7 +10926,7 @@
             </a:pPr>
             <a:r>
               <a:rPr lang="en-CH" dirty="0"/>
-              <a:t>The  biggest win was adding the TABLE_GUIDE to the llm model </a:t>
+              <a:t>The  biggest win was adding the TABLE_GUIDE to the LLM</a:t>
             </a:r>
           </a:p>
         </p:txBody>
@@ -11064,7 +11064,7 @@
         <p:spPr>
           <a:xfrm>
             <a:off x="751652" y="5279636"/>
-            <a:ext cx="9047605" cy="369332"/>
+            <a:ext cx="9166484" cy="369332"/>
           </a:xfrm>
           <a:prstGeom prst="rect">
             <a:avLst/>
@@ -11120,6 +11120,14 @@
             <a:r>
               <a:rPr lang="de-CH" dirty="0"/>
               <a:t> on </a:t>
+            </a:r>
+            <a:r>
+              <a:rPr lang="de-CH" dirty="0" err="1"/>
+              <a:t>the</a:t>
+            </a:r>
+            <a:r>
+              <a:rPr lang="de-CH" dirty="0"/>
+              <a:t> </a:t>
             </a:r>
             <a:r>
               <a:rPr lang="de-CH" dirty="0" err="1"/>
@@ -11468,7 +11476,7 @@
             </a:r>
             <a:r>
               <a:rPr lang="de-CH" sz="4000" dirty="0"/>
-              <a:t> on  a New Data Set</a:t>
+              <a:t> on a New Data Set</a:t>
             </a:r>
             <a:endParaRPr lang="de-DE" sz="4000" dirty="0"/>
           </a:p>
@@ -11682,7 +11690,7 @@
                 <a:effectLst/>
                 <a:latin typeface="-apple-system"/>
               </a:rPr>
-              <a:t>Conclusion: the system does not generalize perfectly,  it is partly overfitting to our dataset.</a:t>
+              <a:t>Conclusion: the system does not generalize perfectly,  it is partly overfitting to our dataset</a:t>
             </a:r>
           </a:p>
         </p:txBody>

--- a/docs/DHW2_Wagner_Kryeziu_Johnson.pptx
+++ b/docs/DHW2_Wagner_Kryeziu_Johnson.pptx
@@ -11551,7 +11551,7 @@
         </p:blipFill>
         <p:spPr>
           <a:xfrm>
-            <a:off x="7861462" y="3639507"/>
+            <a:off x="8372101" y="2924944"/>
             <a:ext cx="3569537" cy="2404896"/>
           </a:xfrm>
           <a:prstGeom prst="rect">
@@ -11573,7 +11573,7 @@
         </p:nvSpPr>
         <p:spPr>
           <a:xfrm>
-            <a:off x="838200" y="3661819"/>
+            <a:off x="838197" y="3396860"/>
             <a:ext cx="6666186" cy="369332"/>
           </a:xfrm>
           <a:prstGeom prst="rect">
@@ -11625,7 +11625,7 @@
         </p:nvSpPr>
         <p:spPr>
           <a:xfrm>
-            <a:off x="838200" y="4226966"/>
+            <a:off x="838197" y="3868776"/>
             <a:ext cx="7533904" cy="369332"/>
           </a:xfrm>
           <a:prstGeom prst="rect">
@@ -11667,7 +11667,7 @@
         </p:nvSpPr>
         <p:spPr>
           <a:xfrm>
-            <a:off x="838197" y="5357260"/>
+            <a:off x="838196" y="4833110"/>
             <a:ext cx="7023265" cy="646331"/>
           </a:xfrm>
           <a:prstGeom prst="rect">
@@ -11709,7 +11709,7 @@
         </p:nvSpPr>
         <p:spPr>
           <a:xfrm>
-            <a:off x="838197" y="4792113"/>
+            <a:off x="838197" y="4350943"/>
             <a:ext cx="7023265" cy="369332"/>
           </a:xfrm>
           <a:prstGeom prst="rect">
@@ -11734,6 +11734,52 @@
             <a:endParaRPr lang="en-CH" b="0" dirty="0">
               <a:effectLst/>
               <a:latin typeface="-apple-system"/>
+            </a:endParaRPr>
+          </a:p>
+        </p:txBody>
+      </p:sp>
+      <p:sp>
+        <p:nvSpPr>
+          <p:cNvPr id="15" name="TextBox 14">
+            <a:extLst>
+              <a:ext uri="{FF2B5EF4-FFF2-40B4-BE49-F238E27FC236}">
+                <a16:creationId xmlns:a16="http://schemas.microsoft.com/office/drawing/2014/main" id="{723DE97E-F788-40F1-7CE4-AE53F6F8C079}"/>
+              </a:ext>
+            </a:extLst>
+          </p:cNvPr>
+          <p:cNvSpPr txBox="1"/>
+          <p:nvPr/>
+        </p:nvSpPr>
+        <p:spPr>
+          <a:xfrm>
+            <a:off x="838196" y="5627341"/>
+            <a:ext cx="10804083" cy="646331"/>
+          </a:xfrm>
+          <a:prstGeom prst="rect">
+            <a:avLst/>
+          </a:prstGeom>
+          <a:noFill/>
+        </p:spPr>
+        <p:txBody>
+          <a:bodyPr wrap="square">
+            <a:spAutoFit/>
+          </a:bodyPr>
+          <a:lstStyle/>
+          <a:p>
+            <a:r>
+              <a:rPr lang="en-CH" b="0" i="1" dirty="0">
+                <a:solidFill>
+                  <a:srgbClr val="FF0000"/>
+                </a:solidFill>
+                <a:effectLst/>
+                <a:latin typeface="-apple-system"/>
+              </a:rPr>
+              <a:t>The held-out set has more aggregation queries (SUM/COUNT/GROUP BY), which were under-represented in our few-shot examples (explaining the 4× aggregation errors)</a:t>
+            </a:r>
+            <a:endParaRPr lang="en-CH" dirty="0">
+              <a:solidFill>
+                <a:srgbClr val="FF0000"/>
+              </a:solidFill>
             </a:endParaRPr>
           </a:p>
         </p:txBody>
